--- a/static/ppts/G6_Math_T2_Decimals_Percentages.pptx
+++ b/static/ppts/G6_Math_T2_Decimals_Percentages.pptx
@@ -9,9 +9,10 @@
     <p:sldId id="257" r:id="rId3"/>
     <p:sldId id="258" r:id="rId4"/>
     <p:sldId id="259" r:id="rId5"/>
+    <p:sldId id="260" r:id="rId6"/>
   </p:sldIdLst>
   <p:notesMasterIdLst>
-    <p:notesMasterId r:id="rId6"/>
+    <p:notesMasterId r:id="rId7"/>
   </p:notesMasterIdLst>
   <p:sldSz cx="9144000" cy="5143500"/>
   <p:notesSz cx="5143500" cy="9144000"/>
@@ -811,6 +812,94 @@
 </p:notes>
 </file>
 
+<file path=ppt/notesSlides/notesSlide5.xml><?xml version="1.0" encoding="utf-8"?>
+<p:notes xmlns:a="http://schemas.openxmlformats.org/drawingml/2006/main" xmlns:r="http://schemas.openxmlformats.org/officeDocument/2006/relationships" xmlns:p="http://schemas.openxmlformats.org/presentationml/2006/main">
+  <p:cSld>
+    <p:spTree>
+      <p:nvGrpSpPr>
+        <p:cNvPr id="1" name=""/>
+        <p:cNvGrpSpPr/>
+        <p:nvPr/>
+      </p:nvGrpSpPr>
+      <p:grpSpPr>
+        <a:xfrm>
+          <a:off x="0" y="0"/>
+          <a:ext cx="0" cy="0"/>
+          <a:chOff x="0" y="0"/>
+          <a:chExt cx="0" cy="0"/>
+        </a:xfrm>
+      </p:grpSpPr>
+      <p:sp>
+        <p:nvSpPr>
+          <p:cNvPr id="2" name="Slide Image Placeholder 1"/>
+          <p:cNvSpPr>
+            <a:spLocks noGrp="1" noRot="1" noChangeAspect="1"/>
+          </p:cNvSpPr>
+          <p:nvPr>
+            <p:ph type="sldImg"/>
+          </p:nvPr>
+        </p:nvSpPr>
+        <p:spPr/>
+      </p:sp>
+      <p:sp>
+        <p:nvSpPr>
+          <p:cNvPr id="3" name="Notes Placeholder 2"/>
+          <p:cNvSpPr>
+            <a:spLocks noGrp="1"/>
+          </p:cNvSpPr>
+          <p:nvPr>
+            <p:ph type="body" idx="1"/>
+          </p:nvPr>
+        </p:nvSpPr>
+        <p:spPr/>
+        <p:txBody>
+          <a:bodyPr/>
+          <a:lstStyle/>
+          <a:p>
+            <a:r>
+              <a:rPr lang="en-US" dirty="0"/>
+              <a:t/>
+            </a:r>
+            <a:endParaRPr lang="en-US" dirty="0"/>
+          </a:p>
+        </p:txBody>
+      </p:sp>
+      <p:sp>
+        <p:nvSpPr>
+          <p:cNvPr id="4" name="Slide Number Placeholder 3"/>
+          <p:cNvSpPr>
+            <a:spLocks noGrp="1"/>
+          </p:cNvSpPr>
+          <p:nvPr>
+            <p:ph type="sldNum" sz="quarter" idx="10"/>
+          </p:nvPr>
+        </p:nvSpPr>
+        <p:spPr/>
+        <p:txBody>
+          <a:bodyPr/>
+          <a:lstStyle/>
+          <a:p>
+            <a:fld id="{F7021451-1387-4CA6-816F-3879F97B5CBC}" type="slidenum">
+              <a:rPr lang="en-US"/>
+              <a:t>5</a:t>
+            </a:fld>
+            <a:endParaRPr lang="en-US"/>
+          </a:p>
+        </p:txBody>
+      </p:sp>
+    </p:spTree>
+    <p:extLst>
+      <p:ext uri="{BB962C8B-B14F-4D97-AF65-F5344CB8AC3E}">
+        <p14:creationId xmlns:p14="http://schemas.microsoft.com/office/powerpoint/2010/main" val="1024086991"/>
+      </p:ext>
+    </p:extLst>
+  </p:cSld>
+  <p:clrMapOvr>
+    <a:masterClrMapping/>
+  </p:clrMapOvr>
+</p:notes>
+</file>
+
 <file path=ppt/slideLayouts/slideLayout1.xml><?xml version="1.0" encoding="utf-8"?>
 <p:sldLayout xmlns:a="http://schemas.openxmlformats.org/drawingml/2006/main" xmlns:r="http://schemas.openxmlformats.org/officeDocument/2006/relationships" xmlns:p="http://schemas.openxmlformats.org/presentationml/2006/main" preserve="1">
   <p:cSld name="DEFAULT">
@@ -1170,7 +1259,7 @@
         </p:nvSpPr>
         <p:spPr>
           <a:xfrm>
-            <a:off x="731520" y="1280160"/>
+            <a:off x="731520" y="1097280"/>
             <a:ext cx="7772400" cy="1371600"/>
           </a:xfrm>
           <a:prstGeom prst="rect">
@@ -1187,7 +1276,7 @@
               <a:buNone/>
             </a:pPr>
             <a:r>
-              <a:rPr lang="en-US" sz="3600" b="1" dirty="0">
+              <a:rPr lang="en-US" sz="4000" b="1" dirty="0">
                 <a:solidFill>
                   <a:srgbClr val="FFFFFF"/>
                 </a:solidFill>
@@ -1197,7 +1286,7 @@
               </a:rPr>
               <a:t>Decimals &amp; Percentages</a:t>
             </a:r>
-            <a:endParaRPr lang="en-US" sz="3600" dirty="0"/>
+            <a:endParaRPr lang="en-US" sz="4000" dirty="0"/>
           </a:p>
         </p:txBody>
       </p:sp>
@@ -1209,7 +1298,7 @@
         </p:nvSpPr>
         <p:spPr>
           <a:xfrm>
-            <a:off x="731520" y="2743200"/>
+            <a:off x="731520" y="2560320"/>
             <a:ext cx="7772400" cy="548640"/>
           </a:xfrm>
           <a:prstGeom prst="rect">
@@ -1228,13 +1317,13 @@
             <a:r>
               <a:rPr lang="en-US" sz="1600" dirty="0">
                 <a:solidFill>
-                  <a:srgbClr val="9B9690"/>
+                  <a:srgbClr val="E9C46A"/>
                 </a:solidFill>
                 <a:latin typeface="Calibri" pitchFamily="34" charset="0"/>
                 <a:ea typeface="Calibri" pitchFamily="34" charset="-122"/>
                 <a:cs typeface="Calibri" pitchFamily="34" charset="-120"/>
               </a:rPr>
-              <a:t>G6 Maths · Fractions &amp; Decimals</a:t>
+              <a:t>Grade 6 Mathematics · Mr Zocchi</a:t>
             </a:r>
             <a:endParaRPr lang="en-US" sz="1600" dirty="0"/>
           </a:p>
@@ -1242,14 +1331,36 @@
       </p:sp>
       <p:sp>
         <p:nvSpPr>
-          <p:cNvPr id="5" name="Text 3"/>
-          <p:cNvSpPr/>
-          <p:nvPr/>
-        </p:nvSpPr>
-        <p:spPr>
-          <a:xfrm>
-            <a:off x="731520" y="4389120"/>
-            <a:ext cx="7772400" cy="457200"/>
+          <p:cNvPr id="5" name="Shape 3"/>
+          <p:cNvSpPr/>
+          <p:nvPr/>
+        </p:nvSpPr>
+        <p:spPr>
+          <a:xfrm>
+            <a:off x="731520" y="3474720"/>
+            <a:ext cx="2011680" cy="411480"/>
+          </a:xfrm>
+          <a:prstGeom prst="roundRect">
+            <a:avLst>
+              <a:gd name="adj" fmla="val 17778"/>
+            </a:avLst>
+          </a:prstGeom>
+          <a:solidFill>
+            <a:srgbClr val="2A9D8F"/>
+          </a:solidFill>
+          <a:ln/>
+        </p:spPr>
+      </p:sp>
+      <p:sp>
+        <p:nvSpPr>
+          <p:cNvPr id="6" name="Text 4"/>
+          <p:cNvSpPr/>
+          <p:nvPr/>
+        </p:nvSpPr>
+        <p:spPr>
+          <a:xfrm>
+            <a:off x="731520" y="3474720"/>
+            <a:ext cx="2011680" cy="411480"/>
           </a:xfrm>
           <a:prstGeom prst="rect">
             <a:avLst/>
@@ -1261,21 +1372,21 @@
           <a:bodyPr wrap="square" rtlCol="0" anchor="ctr"/>
           <a:lstStyle/>
           <a:p>
-            <a:pPr indent="0" marL="0">
+            <a:pPr algn="ctr" indent="0" marL="0">
               <a:buNone/>
             </a:pPr>
             <a:r>
-              <a:rPr lang="en-US" sz="1000" dirty="0">
-                <a:solidFill>
-                  <a:srgbClr val="6B6660"/>
+              <a:rPr lang="en-US" sz="1200" b="1" dirty="0">
+                <a:solidFill>
+                  <a:srgbClr val="FFFFFF"/>
                 </a:solidFill>
                 <a:latin typeface="Calibri" pitchFamily="34" charset="0"/>
                 <a:ea typeface="Calibri" pitchFamily="34" charset="-122"/>
                 <a:cs typeface="Calibri" pitchFamily="34" charset="-120"/>
               </a:rPr>
-              <a:t>Mr Zocchi · mrzocchi.com</a:t>
-            </a:r>
-            <a:endParaRPr lang="en-US" sz="1000" dirty="0"/>
+              <a:t>Term 2 · Fractions &amp; Decimals</a:t>
+            </a:r>
+            <a:endParaRPr lang="en-US" sz="1200" dirty="0"/>
           </a:p>
         </p:txBody>
       </p:sp>
@@ -1293,7 +1404,7 @@
     <p:bg>
       <p:bgPr>
         <a:solidFill>
-          <a:srgbClr val="FFFFFF"/>
+          <a:srgbClr val="FAF8F5"/>
         </a:solidFill>
       </p:bgPr>
     </p:bg>
@@ -1339,8 +1450,8 @@
         </p:nvSpPr>
         <p:spPr>
           <a:xfrm>
-            <a:off x="548640" y="274320"/>
-            <a:ext cx="8046720" cy="640080"/>
+            <a:off x="7772400" y="4709160"/>
+            <a:ext cx="1097280" cy="320040"/>
           </a:xfrm>
           <a:prstGeom prst="rect">
             <a:avLst/>
@@ -1349,14 +1460,105 @@
           <a:ln/>
         </p:spPr>
         <p:txBody>
-          <a:bodyPr wrap="square" lIns="0" tIns="0" rIns="0" bIns="0" rtlCol="0" anchor="ctr"/>
+          <a:bodyPr wrap="square" rtlCol="0" anchor="ctr"/>
+          <a:lstStyle/>
+          <a:p>
+            <a:pPr algn="r" indent="0" marL="0">
+              <a:buNone/>
+            </a:pPr>
+            <a:r>
+              <a:rPr lang="en-US" sz="900" dirty="0">
+                <a:solidFill>
+                  <a:srgbClr val="6B6660"/>
+                </a:solidFill>
+                <a:latin typeface="Calibri" pitchFamily="34" charset="0"/>
+                <a:ea typeface="Calibri" pitchFamily="34" charset="-122"/>
+                <a:cs typeface="Calibri" pitchFamily="34" charset="-120"/>
+              </a:rPr>
+              <a:t>2 / 5</a:t>
+            </a:r>
+            <a:endParaRPr lang="en-US" sz="900" dirty="0"/>
+          </a:p>
+        </p:txBody>
+      </p:sp>
+      <p:sp>
+        <p:nvSpPr>
+          <p:cNvPr id="4" name="Shape 2"/>
+          <p:cNvSpPr/>
+          <p:nvPr/>
+        </p:nvSpPr>
+        <p:spPr>
+          <a:xfrm>
+            <a:off x="1371600" y="914400"/>
+            <a:ext cx="6400800" cy="3200400"/>
+          </a:xfrm>
+          <a:prstGeom prst="rect">
+            <a:avLst/>
+          </a:prstGeom>
+          <a:solidFill>
+            <a:srgbClr val="FFFFFF"/>
+          </a:solidFill>
+          <a:ln w="12700">
+            <a:solidFill>
+              <a:srgbClr val="E5E2DC"/>
+            </a:solidFill>
+            <a:prstDash val="solid"/>
+          </a:ln>
+          <a:effectLst>
+            <a:outerShdw sx="100000" sy="100000" kx="0" ky="0" algn="bl" rotWithShape="0" blurRad="50800" dist="25400" dir="8100000">
+              <a:srgbClr val="000000">
+                <a:alpha val="10000"/>
+              </a:srgbClr>
+            </a:outerShdw>
+          </a:effectLst>
+        </p:spPr>
+      </p:sp>
+      <p:sp>
+        <p:nvSpPr>
+          <p:cNvPr id="5" name="Shape 3"/>
+          <p:cNvSpPr/>
+          <p:nvPr/>
+        </p:nvSpPr>
+        <p:spPr>
+          <a:xfrm>
+            <a:off x="1371600" y="914400"/>
+            <a:ext cx="91440" cy="3200400"/>
+          </a:xfrm>
+          <a:prstGeom prst="rect">
+            <a:avLst/>
+          </a:prstGeom>
+          <a:solidFill>
+            <a:srgbClr val="2A9D8F"/>
+          </a:solidFill>
+          <a:ln/>
+        </p:spPr>
+      </p:sp>
+      <p:sp>
+        <p:nvSpPr>
+          <p:cNvPr id="6" name="Text 4"/>
+          <p:cNvSpPr/>
+          <p:nvPr/>
+        </p:nvSpPr>
+        <p:spPr>
+          <a:xfrm>
+            <a:off x="1828800" y="1097280"/>
+            <a:ext cx="5669280" cy="640080"/>
+          </a:xfrm>
+          <a:prstGeom prst="rect">
+            <a:avLst/>
+          </a:prstGeom>
+          <a:noFill/>
+          <a:ln/>
+        </p:spPr>
+        <p:txBody>
+          <a:bodyPr wrap="square" rtlCol="0" anchor="ctr"/>
           <a:lstStyle/>
           <a:p>
             <a:pPr indent="0" marL="0">
               <a:buNone/>
             </a:pPr>
             <a:r>
-              <a:rPr lang="en-US" sz="2600" b="1" dirty="0">
+              <a:rPr lang="en-US" sz="2400" b="1" dirty="0">
                 <a:solidFill>
                   <a:srgbClr val="1B2A4A"/>
                 </a:solidFill>
@@ -1366,20 +1568,20 @@
               </a:rPr>
               <a:t>Fractions, Decimals &amp; Percentages</a:t>
             </a:r>
-            <a:endParaRPr lang="en-US" sz="2600" dirty="0"/>
-          </a:p>
-        </p:txBody>
-      </p:sp>
-      <p:sp>
-        <p:nvSpPr>
-          <p:cNvPr id="4" name="Text 2"/>
-          <p:cNvSpPr/>
-          <p:nvPr/>
-        </p:nvSpPr>
-        <p:spPr>
-          <a:xfrm>
-            <a:off x="548640" y="1097280"/>
-            <a:ext cx="8046720" cy="3474720"/>
+            <a:endParaRPr lang="en-US" sz="2400" dirty="0"/>
+          </a:p>
+        </p:txBody>
+      </p:sp>
+      <p:sp>
+        <p:nvSpPr>
+          <p:cNvPr id="7" name="Text 5"/>
+          <p:cNvSpPr/>
+          <p:nvPr/>
+        </p:nvSpPr>
+        <p:spPr>
+          <a:xfrm>
+            <a:off x="1828800" y="1828800"/>
+            <a:ext cx="5669280" cy="2011680"/>
           </a:xfrm>
           <a:prstGeom prst="rect">
             <a:avLst/>
@@ -1391,12 +1593,11 @@
           <a:bodyPr wrap="square" rtlCol="0" anchor="t"/>
           <a:lstStyle/>
           <a:p>
-            <a:pPr marL="342900" indent="-342900">
-              <a:spcAft>
-                <a:spcPts val="800"/>
-              </a:spcAft>
-              <a:buSzPct val="100000"/>
-              <a:buChar char="•"/>
+            <a:pPr indent="0" marL="0">
+              <a:lnSpc>
+                <a:spcPct val="130000"/>
+              </a:lnSpc>
+              <a:buNone/>
             </a:pPr>
             <a:r>
               <a:rPr lang="en-US" sz="1500" dirty="0">
@@ -1407,129 +1608,9 @@
                 <a:ea typeface="Calibri" pitchFamily="34" charset="-122"/>
                 <a:cs typeface="Calibri" pitchFamily="34" charset="-120"/>
               </a:rPr>
-              <a:t>These are three ways to write the SAME value</a:t>
+              <a:t>These are three different ways to write the SAME value. ½ = 0.5 = 50%. Being able to convert between them is essential. Percentages are fractions out of 100. Decimals use place value to show parts less than 1.</a:t>
             </a:r>
             <a:endParaRPr lang="en-US" sz="1500" dirty="0"/>
-          </a:p>
-          <a:p>
-            <a:pPr marL="342900" indent="-342900">
-              <a:spcAft>
-                <a:spcPts val="800"/>
-              </a:spcAft>
-              <a:buSzPct val="100000"/>
-              <a:buChar char="•"/>
-            </a:pPr>
-            <a:r>
-              <a:rPr lang="en-US" sz="1500" dirty="0">
-                <a:solidFill>
-                  <a:srgbClr val="3D3A36"/>
-                </a:solidFill>
-                <a:latin typeface="Calibri" pitchFamily="34" charset="0"/>
-                <a:ea typeface="Calibri" pitchFamily="34" charset="-122"/>
-                <a:cs typeface="Calibri" pitchFamily="34" charset="-120"/>
-              </a:rPr>
-              <a:t>1/2 = 0.5 = 50% | 1/4 = 0.25 = 25% | 3/4 = 0.75 = 75%</a:t>
-            </a:r>
-            <a:endParaRPr lang="en-US" sz="1500" dirty="0"/>
-          </a:p>
-          <a:p>
-            <a:pPr marL="342900" indent="-342900">
-              <a:spcAft>
-                <a:spcPts val="800"/>
-              </a:spcAft>
-              <a:buSzPct val="100000"/>
-              <a:buChar char="•"/>
-            </a:pPr>
-            <a:r>
-              <a:rPr lang="en-US" sz="1500" dirty="0">
-                <a:solidFill>
-                  <a:srgbClr val="3D3A36"/>
-                </a:solidFill>
-                <a:latin typeface="Calibri" pitchFamily="34" charset="0"/>
-                <a:ea typeface="Calibri" pitchFamily="34" charset="-122"/>
-                <a:cs typeface="Calibri" pitchFamily="34" charset="-120"/>
-              </a:rPr>
-              <a:t>Fraction → Decimal: divide numerator by denominator</a:t>
-            </a:r>
-            <a:endParaRPr lang="en-US" sz="1500" dirty="0"/>
-          </a:p>
-          <a:p>
-            <a:pPr marL="342900" indent="-342900">
-              <a:spcAft>
-                <a:spcPts val="800"/>
-              </a:spcAft>
-              <a:buSzPct val="100000"/>
-              <a:buChar char="•"/>
-            </a:pPr>
-            <a:r>
-              <a:rPr lang="en-US" sz="1500" dirty="0">
-                <a:solidFill>
-                  <a:srgbClr val="3D3A36"/>
-                </a:solidFill>
-                <a:latin typeface="Calibri" pitchFamily="34" charset="0"/>
-                <a:ea typeface="Calibri" pitchFamily="34" charset="-122"/>
-                <a:cs typeface="Calibri" pitchFamily="34" charset="-120"/>
-              </a:rPr>
-              <a:t>Decimal → Percentage: multiply by 100 (move decimal point 2 places right)</a:t>
-            </a:r>
-            <a:endParaRPr lang="en-US" sz="1500" dirty="0"/>
-          </a:p>
-          <a:p>
-            <a:pPr marL="342900" indent="-342900">
-              <a:spcAft>
-                <a:spcPts val="800"/>
-              </a:spcAft>
-              <a:buSzPct val="100000"/>
-              <a:buChar char="•"/>
-            </a:pPr>
-            <a:r>
-              <a:rPr lang="en-US" sz="1500" dirty="0">
-                <a:solidFill>
-                  <a:srgbClr val="3D3A36"/>
-                </a:solidFill>
-                <a:latin typeface="Calibri" pitchFamily="34" charset="0"/>
-                <a:ea typeface="Calibri" pitchFamily="34" charset="-122"/>
-                <a:cs typeface="Calibri" pitchFamily="34" charset="-120"/>
-              </a:rPr>
-              <a:t>Percentage → Fraction: put over 100 and simplify</a:t>
-            </a:r>
-            <a:endParaRPr lang="en-US" sz="1500" dirty="0"/>
-          </a:p>
-        </p:txBody>
-      </p:sp>
-      <p:sp>
-        <p:nvSpPr>
-          <p:cNvPr id="5" name="Text 3"/>
-          <p:cNvSpPr/>
-          <p:nvPr/>
-        </p:nvSpPr>
-        <p:spPr>
-          <a:xfrm>
-            <a:off x="548640" y="4800600"/>
-            <a:ext cx="3657600" cy="274320"/>
-          </a:xfrm>
-          <a:prstGeom prst="rect">
-            <a:avLst/>
-          </a:prstGeom>
-          <a:noFill/>
-          <a:ln/>
-        </p:spPr>
-        <p:txBody>
-          <a:bodyPr wrap="square" rtlCol="0" anchor="ctr"/>
-          <a:lstStyle/>
-          <a:p>
-            <a:pPr indent="0" marL="0">
-              <a:buNone/>
-            </a:pPr>
-            <a:r>
-              <a:rPr lang="en-US" sz="800" dirty="0">
-                <a:solidFill>
-                  <a:srgbClr val="9B9690"/>
-                </a:solidFill>
-              </a:rPr>
-              <a:t>mrzocchi.com</a:t>
-            </a:r>
-            <a:endParaRPr lang="en-US" sz="800" dirty="0"/>
           </a:p>
         </p:txBody>
       </p:sp>
@@ -1547,7 +1628,7 @@
     <p:bg>
       <p:bgPr>
         <a:solidFill>
-          <a:srgbClr val="FFFFFF"/>
+          <a:srgbClr val="FAF8F5"/>
         </a:solidFill>
       </p:bgPr>
     </p:bg>
@@ -1593,8 +1674,8 @@
         </p:nvSpPr>
         <p:spPr>
           <a:xfrm>
-            <a:off x="548640" y="274320"/>
-            <a:ext cx="8046720" cy="640080"/>
+            <a:off x="7772400" y="4709160"/>
+            <a:ext cx="1097280" cy="320040"/>
           </a:xfrm>
           <a:prstGeom prst="rect">
             <a:avLst/>
@@ -1603,7 +1684,46 @@
           <a:ln/>
         </p:spPr>
         <p:txBody>
-          <a:bodyPr wrap="square" lIns="0" tIns="0" rIns="0" bIns="0" rtlCol="0" anchor="ctr"/>
+          <a:bodyPr wrap="square" rtlCol="0" anchor="ctr"/>
+          <a:lstStyle/>
+          <a:p>
+            <a:pPr algn="r" indent="0" marL="0">
+              <a:buNone/>
+            </a:pPr>
+            <a:r>
+              <a:rPr lang="en-US" sz="900" dirty="0">
+                <a:solidFill>
+                  <a:srgbClr val="6B6660"/>
+                </a:solidFill>
+                <a:latin typeface="Calibri" pitchFamily="34" charset="0"/>
+                <a:ea typeface="Calibri" pitchFamily="34" charset="-122"/>
+                <a:cs typeface="Calibri" pitchFamily="34" charset="-120"/>
+              </a:rPr>
+              <a:t>3 / 5</a:t>
+            </a:r>
+            <a:endParaRPr lang="en-US" sz="900" dirty="0"/>
+          </a:p>
+        </p:txBody>
+      </p:sp>
+      <p:sp>
+        <p:nvSpPr>
+          <p:cNvPr id="4" name="Text 2"/>
+          <p:cNvSpPr/>
+          <p:nvPr/>
+        </p:nvSpPr>
+        <p:spPr>
+          <a:xfrm>
+            <a:off x="457200" y="274320"/>
+            <a:ext cx="8229600" cy="640080"/>
+          </a:xfrm>
+          <a:prstGeom prst="rect">
+            <a:avLst/>
+          </a:prstGeom>
+          <a:noFill/>
+          <a:ln/>
+        </p:spPr>
+        <p:txBody>
+          <a:bodyPr wrap="square" rtlCol="0" anchor="ctr"/>
           <a:lstStyle/>
           <a:p>
             <a:pPr indent="0" marL="0">
@@ -1626,14 +1746,66 @@
       </p:sp>
       <p:sp>
         <p:nvSpPr>
-          <p:cNvPr id="4" name="Text 2"/>
-          <p:cNvSpPr/>
-          <p:nvPr/>
-        </p:nvSpPr>
-        <p:spPr>
-          <a:xfrm>
-            <a:off x="548640" y="1097280"/>
-            <a:ext cx="8046720" cy="3474720"/>
+          <p:cNvPr id="5" name="Shape 3"/>
+          <p:cNvSpPr/>
+          <p:nvPr/>
+        </p:nvSpPr>
+        <p:spPr>
+          <a:xfrm>
+            <a:off x="457200" y="1188720"/>
+            <a:ext cx="2560320" cy="1828800"/>
+          </a:xfrm>
+          <a:prstGeom prst="rect">
+            <a:avLst/>
+          </a:prstGeom>
+          <a:solidFill>
+            <a:srgbClr val="FFFFFF"/>
+          </a:solidFill>
+          <a:ln w="12700">
+            <a:solidFill>
+              <a:srgbClr val="E5E2DC"/>
+            </a:solidFill>
+            <a:prstDash val="solid"/>
+          </a:ln>
+          <a:effectLst>
+            <a:outerShdw sx="100000" sy="100000" kx="0" ky="0" algn="bl" rotWithShape="0" blurRad="50800" dist="25400" dir="8100000">
+              <a:srgbClr val="000000">
+                <a:alpha val="10000"/>
+              </a:srgbClr>
+            </a:outerShdw>
+          </a:effectLst>
+        </p:spPr>
+      </p:sp>
+      <p:sp>
+        <p:nvSpPr>
+          <p:cNvPr id="6" name="Shape 4"/>
+          <p:cNvSpPr/>
+          <p:nvPr/>
+        </p:nvSpPr>
+        <p:spPr>
+          <a:xfrm>
+            <a:off x="457200" y="1188720"/>
+            <a:ext cx="2560320" cy="54864"/>
+          </a:xfrm>
+          <a:prstGeom prst="rect">
+            <a:avLst/>
+          </a:prstGeom>
+          <a:solidFill>
+            <a:srgbClr val="2A9D8F"/>
+          </a:solidFill>
+          <a:ln/>
+        </p:spPr>
+      </p:sp>
+      <p:sp>
+        <p:nvSpPr>
+          <p:cNvPr id="7" name="Text 5"/>
+          <p:cNvSpPr/>
+          <p:nvPr/>
+        </p:nvSpPr>
+        <p:spPr>
+          <a:xfrm>
+            <a:off x="594360" y="1325880"/>
+            <a:ext cx="2286000" cy="365760"/>
           </a:xfrm>
           <a:prstGeom prst="rect">
             <a:avLst/>
@@ -1642,39 +1814,53 @@
           <a:ln/>
         </p:spPr>
         <p:txBody>
-          <a:bodyPr wrap="square" rtlCol="0" anchor="t"/>
-          <a:lstStyle/>
-          <a:p>
-            <a:pPr marL="342900" indent="-342900">
-              <a:spcAft>
-                <a:spcPts val="800"/>
-              </a:spcAft>
-              <a:buSzPct val="100000"/>
-              <a:buChar char="•"/>
-            </a:pPr>
-            <a:r>
-              <a:rPr lang="en-US" sz="1500" dirty="0">
-                <a:solidFill>
-                  <a:srgbClr val="3D3A36"/>
+          <a:bodyPr wrap="square" rtlCol="0" anchor="ctr"/>
+          <a:lstStyle/>
+          <a:p>
+            <a:pPr indent="0" marL="0">
+              <a:buNone/>
+            </a:pPr>
+            <a:r>
+              <a:rPr lang="en-US" sz="1400" b="1" dirty="0">
+                <a:solidFill>
+                  <a:srgbClr val="1B2A4A"/>
                 </a:solidFill>
                 <a:latin typeface="Calibri" pitchFamily="34" charset="0"/>
                 <a:ea typeface="Calibri" pitchFamily="34" charset="-122"/>
                 <a:cs typeface="Calibri" pitchFamily="34" charset="-120"/>
               </a:rPr>
-              <a:t>Fraction to decimal: 3/8 = 3 ÷ 8 = 0.375</a:t>
-            </a:r>
-            <a:endParaRPr lang="en-US" sz="1500" dirty="0"/>
-          </a:p>
-          <a:p>
-            <a:pPr marL="342900" indent="-342900">
-              <a:spcAft>
-                <a:spcPts val="800"/>
-              </a:spcAft>
-              <a:buSzPct val="100000"/>
-              <a:buChar char="•"/>
-            </a:pPr>
-            <a:r>
-              <a:rPr lang="en-US" sz="1500" dirty="0">
+              <a:t>Fraction → Decimal</a:t>
+            </a:r>
+            <a:endParaRPr lang="en-US" sz="1400" dirty="0"/>
+          </a:p>
+        </p:txBody>
+      </p:sp>
+      <p:sp>
+        <p:nvSpPr>
+          <p:cNvPr id="8" name="Text 6"/>
+          <p:cNvSpPr/>
+          <p:nvPr/>
+        </p:nvSpPr>
+        <p:spPr>
+          <a:xfrm>
+            <a:off x="594360" y="1737360"/>
+            <a:ext cx="2286000" cy="1097280"/>
+          </a:xfrm>
+          <a:prstGeom prst="rect">
+            <a:avLst/>
+          </a:prstGeom>
+          <a:noFill/>
+          <a:ln/>
+        </p:spPr>
+        <p:txBody>
+          <a:bodyPr wrap="square" rtlCol="0" anchor="t"/>
+          <a:lstStyle/>
+          <a:p>
+            <a:pPr indent="0" marL="0">
+              <a:buNone/>
+            </a:pPr>
+            <a:r>
+              <a:rPr lang="en-US" sz="1100" dirty="0">
                 <a:solidFill>
                   <a:srgbClr val="3D3A36"/>
                 </a:solidFill>
@@ -1682,41 +1868,129 @@
                 <a:ea typeface="Calibri" pitchFamily="34" charset="-122"/>
                 <a:cs typeface="Calibri" pitchFamily="34" charset="-120"/>
               </a:rPr>
-              <a:t>Decimal to percentage: 0.375 × 100 = 37.5%</a:t>
-            </a:r>
-            <a:endParaRPr lang="en-US" sz="1500" dirty="0"/>
-          </a:p>
-          <a:p>
-            <a:pPr marL="342900" indent="-342900">
-              <a:spcAft>
-                <a:spcPts val="800"/>
-              </a:spcAft>
-              <a:buSzPct val="100000"/>
-              <a:buChar char="•"/>
-            </a:pPr>
-            <a:r>
-              <a:rPr lang="en-US" sz="1500" dirty="0">
-                <a:solidFill>
-                  <a:srgbClr val="3D3A36"/>
+              <a:t>Divide numerator by denominator. ³⁄₄ = 3 ÷ 4 = 0.75. ¹⁄₃ = 1 ÷ 3 = 0.333... (recurring).</a:t>
+            </a:r>
+            <a:endParaRPr lang="en-US" sz="1100" dirty="0"/>
+          </a:p>
+        </p:txBody>
+      </p:sp>
+      <p:sp>
+        <p:nvSpPr>
+          <p:cNvPr id="9" name="Shape 7"/>
+          <p:cNvSpPr/>
+          <p:nvPr/>
+        </p:nvSpPr>
+        <p:spPr>
+          <a:xfrm>
+            <a:off x="3291840" y="1188720"/>
+            <a:ext cx="2560320" cy="1828800"/>
+          </a:xfrm>
+          <a:prstGeom prst="rect">
+            <a:avLst/>
+          </a:prstGeom>
+          <a:solidFill>
+            <a:srgbClr val="FFFFFF"/>
+          </a:solidFill>
+          <a:ln w="12700">
+            <a:solidFill>
+              <a:srgbClr val="E5E2DC"/>
+            </a:solidFill>
+            <a:prstDash val="solid"/>
+          </a:ln>
+          <a:effectLst>
+            <a:outerShdw sx="100000" sy="100000" kx="0" ky="0" algn="bl" rotWithShape="0" blurRad="50800" dist="25400" dir="8100000">
+              <a:srgbClr val="000000">
+                <a:alpha val="10000"/>
+              </a:srgbClr>
+            </a:outerShdw>
+          </a:effectLst>
+        </p:spPr>
+      </p:sp>
+      <p:sp>
+        <p:nvSpPr>
+          <p:cNvPr id="10" name="Shape 8"/>
+          <p:cNvSpPr/>
+          <p:nvPr/>
+        </p:nvSpPr>
+        <p:spPr>
+          <a:xfrm>
+            <a:off x="3291840" y="1188720"/>
+            <a:ext cx="2560320" cy="54864"/>
+          </a:xfrm>
+          <a:prstGeom prst="rect">
+            <a:avLst/>
+          </a:prstGeom>
+          <a:solidFill>
+            <a:srgbClr val="2A9D8F"/>
+          </a:solidFill>
+          <a:ln/>
+        </p:spPr>
+      </p:sp>
+      <p:sp>
+        <p:nvSpPr>
+          <p:cNvPr id="11" name="Text 9"/>
+          <p:cNvSpPr/>
+          <p:nvPr/>
+        </p:nvSpPr>
+        <p:spPr>
+          <a:xfrm>
+            <a:off x="3429000" y="1325880"/>
+            <a:ext cx="2286000" cy="365760"/>
+          </a:xfrm>
+          <a:prstGeom prst="rect">
+            <a:avLst/>
+          </a:prstGeom>
+          <a:noFill/>
+          <a:ln/>
+        </p:spPr>
+        <p:txBody>
+          <a:bodyPr wrap="square" rtlCol="0" anchor="ctr"/>
+          <a:lstStyle/>
+          <a:p>
+            <a:pPr indent="0" marL="0">
+              <a:buNone/>
+            </a:pPr>
+            <a:r>
+              <a:rPr lang="en-US" sz="1400" b="1" dirty="0">
+                <a:solidFill>
+                  <a:srgbClr val="1B2A4A"/>
                 </a:solidFill>
                 <a:latin typeface="Calibri" pitchFamily="34" charset="0"/>
                 <a:ea typeface="Calibri" pitchFamily="34" charset="-122"/>
                 <a:cs typeface="Calibri" pitchFamily="34" charset="-120"/>
               </a:rPr>
-              <a:t>Percentage to fraction: 37.5% = 37.5/100 = 375/1000 = 3/8</a:t>
-            </a:r>
-            <a:endParaRPr lang="en-US" sz="1500" dirty="0"/>
-          </a:p>
-          <a:p>
-            <a:pPr marL="342900" indent="-342900">
-              <a:spcAft>
-                <a:spcPts val="800"/>
-              </a:spcAft>
-              <a:buSzPct val="100000"/>
-              <a:buChar char="•"/>
-            </a:pPr>
-            <a:r>
-              <a:rPr lang="en-US" sz="1500" dirty="0">
+              <a:t>Decimal → Percentage</a:t>
+            </a:r>
+            <a:endParaRPr lang="en-US" sz="1400" dirty="0"/>
+          </a:p>
+        </p:txBody>
+      </p:sp>
+      <p:sp>
+        <p:nvSpPr>
+          <p:cNvPr id="12" name="Text 10"/>
+          <p:cNvSpPr/>
+          <p:nvPr/>
+        </p:nvSpPr>
+        <p:spPr>
+          <a:xfrm>
+            <a:off x="3429000" y="1737360"/>
+            <a:ext cx="2286000" cy="1097280"/>
+          </a:xfrm>
+          <a:prstGeom prst="rect">
+            <a:avLst/>
+          </a:prstGeom>
+          <a:noFill/>
+          <a:ln/>
+        </p:spPr>
+        <p:txBody>
+          <a:bodyPr wrap="square" rtlCol="0" anchor="t"/>
+          <a:lstStyle/>
+          <a:p>
+            <a:pPr indent="0" marL="0">
+              <a:buNone/>
+            </a:pPr>
+            <a:r>
+              <a:rPr lang="en-US" sz="1100" dirty="0">
                 <a:solidFill>
                   <a:srgbClr val="3D3A36"/>
                 </a:solidFill>
@@ -1724,43 +1998,113 @@
                 <a:ea typeface="Calibri" pitchFamily="34" charset="-122"/>
                 <a:cs typeface="Calibri" pitchFamily="34" charset="-120"/>
               </a:rPr>
-              <a:t>Finding a percentage: 20% of 80 = 20/100 × 80 = 16</a:t>
-            </a:r>
-            <a:endParaRPr lang="en-US" sz="1500" dirty="0"/>
-          </a:p>
-          <a:p>
-            <a:pPr marL="342900" indent="-342900">
-              <a:spcAft>
-                <a:spcPts val="800"/>
-              </a:spcAft>
-              <a:buSzPct val="100000"/>
-              <a:buChar char="•"/>
-            </a:pPr>
-            <a:r>
-              <a:rPr lang="en-US" sz="1500" dirty="0">
-                <a:solidFill>
-                  <a:srgbClr val="3D3A36"/>
+              <a:t>Multiply by 100. 0.75 × 100 = 75%. 0.3 × 100 = 30%. Just move the decimal point two places right.</a:t>
+            </a:r>
+            <a:endParaRPr lang="en-US" sz="1100" dirty="0"/>
+          </a:p>
+        </p:txBody>
+      </p:sp>
+      <p:sp>
+        <p:nvSpPr>
+          <p:cNvPr id="13" name="Shape 11"/>
+          <p:cNvSpPr/>
+          <p:nvPr/>
+        </p:nvSpPr>
+        <p:spPr>
+          <a:xfrm>
+            <a:off x="6126480" y="1188720"/>
+            <a:ext cx="2560320" cy="1828800"/>
+          </a:xfrm>
+          <a:prstGeom prst="rect">
+            <a:avLst/>
+          </a:prstGeom>
+          <a:solidFill>
+            <a:srgbClr val="FFFFFF"/>
+          </a:solidFill>
+          <a:ln w="12700">
+            <a:solidFill>
+              <a:srgbClr val="E5E2DC"/>
+            </a:solidFill>
+            <a:prstDash val="solid"/>
+          </a:ln>
+          <a:effectLst>
+            <a:outerShdw sx="100000" sy="100000" kx="0" ky="0" algn="bl" rotWithShape="0" blurRad="50800" dist="25400" dir="8100000">
+              <a:srgbClr val="000000">
+                <a:alpha val="10000"/>
+              </a:srgbClr>
+            </a:outerShdw>
+          </a:effectLst>
+        </p:spPr>
+      </p:sp>
+      <p:sp>
+        <p:nvSpPr>
+          <p:cNvPr id="14" name="Shape 12"/>
+          <p:cNvSpPr/>
+          <p:nvPr/>
+        </p:nvSpPr>
+        <p:spPr>
+          <a:xfrm>
+            <a:off x="6126480" y="1188720"/>
+            <a:ext cx="2560320" cy="54864"/>
+          </a:xfrm>
+          <a:prstGeom prst="rect">
+            <a:avLst/>
+          </a:prstGeom>
+          <a:solidFill>
+            <a:srgbClr val="2A9D8F"/>
+          </a:solidFill>
+          <a:ln/>
+        </p:spPr>
+      </p:sp>
+      <p:sp>
+        <p:nvSpPr>
+          <p:cNvPr id="15" name="Text 13"/>
+          <p:cNvSpPr/>
+          <p:nvPr/>
+        </p:nvSpPr>
+        <p:spPr>
+          <a:xfrm>
+            <a:off x="6263640" y="1325880"/>
+            <a:ext cx="2286000" cy="365760"/>
+          </a:xfrm>
+          <a:prstGeom prst="rect">
+            <a:avLst/>
+          </a:prstGeom>
+          <a:noFill/>
+          <a:ln/>
+        </p:spPr>
+        <p:txBody>
+          <a:bodyPr wrap="square" rtlCol="0" anchor="ctr"/>
+          <a:lstStyle/>
+          <a:p>
+            <a:pPr indent="0" marL="0">
+              <a:buNone/>
+            </a:pPr>
+            <a:r>
+              <a:rPr lang="en-US" sz="1400" b="1" dirty="0">
+                <a:solidFill>
+                  <a:srgbClr val="1B2A4A"/>
                 </a:solidFill>
                 <a:latin typeface="Calibri" pitchFamily="34" charset="0"/>
                 <a:ea typeface="Calibri" pitchFamily="34" charset="-122"/>
                 <a:cs typeface="Calibri" pitchFamily="34" charset="-120"/>
               </a:rPr>
-              <a:t>Comparing: convert all to the same form (usually decimals)</a:t>
-            </a:r>
-            <a:endParaRPr lang="en-US" sz="1500" dirty="0"/>
-          </a:p>
-        </p:txBody>
-      </p:sp>
-      <p:sp>
-        <p:nvSpPr>
-          <p:cNvPr id="5" name="Text 3"/>
-          <p:cNvSpPr/>
-          <p:nvPr/>
-        </p:nvSpPr>
-        <p:spPr>
-          <a:xfrm>
-            <a:off x="548640" y="4800600"/>
-            <a:ext cx="3657600" cy="274320"/>
+              <a:t>Percentage → Fraction</a:t>
+            </a:r>
+            <a:endParaRPr lang="en-US" sz="1400" dirty="0"/>
+          </a:p>
+        </p:txBody>
+      </p:sp>
+      <p:sp>
+        <p:nvSpPr>
+          <p:cNvPr id="16" name="Text 14"/>
+          <p:cNvSpPr/>
+          <p:nvPr/>
+        </p:nvSpPr>
+        <p:spPr>
+          <a:xfrm>
+            <a:off x="6263640" y="1737360"/>
+            <a:ext cx="2286000" cy="1097280"/>
           </a:xfrm>
           <a:prstGeom prst="rect">
             <a:avLst/>
@@ -1769,21 +2113,24 @@
           <a:ln/>
         </p:spPr>
         <p:txBody>
-          <a:bodyPr wrap="square" rtlCol="0" anchor="ctr"/>
+          <a:bodyPr wrap="square" rtlCol="0" anchor="t"/>
           <a:lstStyle/>
           <a:p>
             <a:pPr indent="0" marL="0">
               <a:buNone/>
             </a:pPr>
             <a:r>
-              <a:rPr lang="en-US" sz="800" dirty="0">
-                <a:solidFill>
-                  <a:srgbClr val="9B9690"/>
-                </a:solidFill>
-              </a:rPr>
-              <a:t>mrzocchi.com</a:t>
-            </a:r>
-            <a:endParaRPr lang="en-US" sz="800" dirty="0"/>
+              <a:rPr lang="en-US" sz="1100" dirty="0">
+                <a:solidFill>
+                  <a:srgbClr val="3D3A36"/>
+                </a:solidFill>
+                <a:latin typeface="Calibri" pitchFamily="34" charset="0"/>
+                <a:ea typeface="Calibri" pitchFamily="34" charset="-122"/>
+                <a:cs typeface="Calibri" pitchFamily="34" charset="-120"/>
+              </a:rPr>
+              <a:t>Write over 100 and simplify. 75% = ⁷⁵⁄₁₀₀ = ³⁄₄. 40% = ⁴⁰⁄₁₀₀ = ²⁄₅.</a:t>
+            </a:r>
+            <a:endParaRPr lang="en-US" sz="1100" dirty="0"/>
           </a:p>
         </p:txBody>
       </p:sp>
@@ -1798,6 +2145,507 @@
 <file path=ppt/slides/slide4.xml><?xml version="1.0" encoding="utf-8"?>
 <p:sld xmlns:a="http://schemas.openxmlformats.org/drawingml/2006/main" xmlns:r="http://schemas.openxmlformats.org/officeDocument/2006/relationships" xmlns:p="http://schemas.openxmlformats.org/presentationml/2006/main">
   <p:cSld name="Slide 4">
+    <p:bg>
+      <p:bgPr>
+        <a:solidFill>
+          <a:srgbClr val="FAF8F5"/>
+        </a:solidFill>
+      </p:bgPr>
+    </p:bg>
+    <p:spTree>
+      <p:nvGrpSpPr>
+        <p:cNvPr id="1" name=""/>
+        <p:cNvGrpSpPr/>
+        <p:nvPr/>
+      </p:nvGrpSpPr>
+      <p:grpSpPr>
+        <a:xfrm>
+          <a:off x="0" y="0"/>
+          <a:ext cx="0" cy="0"/>
+          <a:chOff x="0" y="0"/>
+          <a:chExt cx="0" cy="0"/>
+        </a:xfrm>
+      </p:grpSpPr>
+      <p:sp>
+        <p:nvSpPr>
+          <p:cNvPr id="2" name="Shape 0"/>
+          <p:cNvSpPr/>
+          <p:nvPr/>
+        </p:nvSpPr>
+        <p:spPr>
+          <a:xfrm>
+            <a:off x="0" y="0"/>
+            <a:ext cx="9144000" cy="54864"/>
+          </a:xfrm>
+          <a:prstGeom prst="rect">
+            <a:avLst/>
+          </a:prstGeom>
+          <a:solidFill>
+            <a:srgbClr val="2A9D8F"/>
+          </a:solidFill>
+          <a:ln/>
+        </p:spPr>
+      </p:sp>
+      <p:sp>
+        <p:nvSpPr>
+          <p:cNvPr id="3" name="Text 1"/>
+          <p:cNvSpPr/>
+          <p:nvPr/>
+        </p:nvSpPr>
+        <p:spPr>
+          <a:xfrm>
+            <a:off x="7772400" y="4709160"/>
+            <a:ext cx="1097280" cy="320040"/>
+          </a:xfrm>
+          <a:prstGeom prst="rect">
+            <a:avLst/>
+          </a:prstGeom>
+          <a:noFill/>
+          <a:ln/>
+        </p:spPr>
+        <p:txBody>
+          <a:bodyPr wrap="square" rtlCol="0" anchor="ctr"/>
+          <a:lstStyle/>
+          <a:p>
+            <a:pPr algn="r" indent="0" marL="0">
+              <a:buNone/>
+            </a:pPr>
+            <a:r>
+              <a:rPr lang="en-US" sz="900" dirty="0">
+                <a:solidFill>
+                  <a:srgbClr val="6B6660"/>
+                </a:solidFill>
+                <a:latin typeface="Calibri" pitchFamily="34" charset="0"/>
+                <a:ea typeface="Calibri" pitchFamily="34" charset="-122"/>
+                <a:cs typeface="Calibri" pitchFamily="34" charset="-120"/>
+              </a:rPr>
+              <a:t>4 / 5</a:t>
+            </a:r>
+            <a:endParaRPr lang="en-US" sz="900" dirty="0"/>
+          </a:p>
+        </p:txBody>
+      </p:sp>
+      <p:sp>
+        <p:nvSpPr>
+          <p:cNvPr id="4" name="Text 2"/>
+          <p:cNvSpPr/>
+          <p:nvPr/>
+        </p:nvSpPr>
+        <p:spPr>
+          <a:xfrm>
+            <a:off x="457200" y="274320"/>
+            <a:ext cx="8229600" cy="640080"/>
+          </a:xfrm>
+          <a:prstGeom prst="rect">
+            <a:avLst/>
+          </a:prstGeom>
+          <a:noFill/>
+          <a:ln/>
+        </p:spPr>
+        <p:txBody>
+          <a:bodyPr wrap="square" rtlCol="0" anchor="ctr"/>
+          <a:lstStyle/>
+          <a:p>
+            <a:pPr indent="0" marL="0">
+              <a:buNone/>
+            </a:pPr>
+            <a:r>
+              <a:rPr lang="en-US" sz="2600" b="1" dirty="0">
+                <a:solidFill>
+                  <a:srgbClr val="1B2A4A"/>
+                </a:solidFill>
+                <a:latin typeface="Georgia" pitchFamily="34" charset="0"/>
+                <a:ea typeface="Georgia" pitchFamily="34" charset="-122"/>
+                <a:cs typeface="Georgia" pitchFamily="34" charset="-120"/>
+              </a:rPr>
+              <a:t>Percentage of an Amount</a:t>
+            </a:r>
+            <a:endParaRPr lang="en-US" sz="2600" dirty="0"/>
+          </a:p>
+        </p:txBody>
+      </p:sp>
+      <p:sp>
+        <p:nvSpPr>
+          <p:cNvPr id="5" name="Text 3"/>
+          <p:cNvSpPr/>
+          <p:nvPr/>
+        </p:nvSpPr>
+        <p:spPr>
+          <a:xfrm>
+            <a:off x="457200" y="1188720"/>
+            <a:ext cx="3840480" cy="3474720"/>
+          </a:xfrm>
+          <a:prstGeom prst="rect">
+            <a:avLst/>
+          </a:prstGeom>
+          <a:noFill/>
+          <a:ln/>
+        </p:spPr>
+        <p:txBody>
+          <a:bodyPr wrap="square" rtlCol="0" anchor="t"/>
+          <a:lstStyle/>
+          <a:p>
+            <a:pPr marL="342900" indent="-342900">
+              <a:spcAft>
+                <a:spcPts val="600"/>
+              </a:spcAft>
+              <a:buSzPct val="100000"/>
+              <a:buChar char="•"/>
+            </a:pPr>
+            <a:r>
+              <a:rPr lang="en-US" sz="1400" dirty="0">
+                <a:solidFill>
+                  <a:srgbClr val="3D3A36"/>
+                </a:solidFill>
+                <a:latin typeface="Calibri" pitchFamily="34" charset="0"/>
+                <a:ea typeface="Calibri" pitchFamily="34" charset="-122"/>
+                <a:cs typeface="Calibri" pitchFamily="34" charset="-120"/>
+              </a:rPr>
+              <a:t>Find 10% by dividing by 10</a:t>
+            </a:r>
+            <a:endParaRPr lang="en-US" sz="1400" dirty="0"/>
+          </a:p>
+          <a:p>
+            <a:pPr marL="342900" indent="-342900">
+              <a:spcAft>
+                <a:spcPts val="600"/>
+              </a:spcAft>
+              <a:buSzPct val="100000"/>
+              <a:buChar char="•"/>
+            </a:pPr>
+            <a:r>
+              <a:rPr lang="en-US" sz="1400" dirty="0">
+                <a:solidFill>
+                  <a:srgbClr val="3D3A36"/>
+                </a:solidFill>
+                <a:latin typeface="Calibri" pitchFamily="34" charset="0"/>
+                <a:ea typeface="Calibri" pitchFamily="34" charset="-122"/>
+                <a:cs typeface="Calibri" pitchFamily="34" charset="-120"/>
+              </a:rPr>
+              <a:t>Find 1% by dividing by 100</a:t>
+            </a:r>
+            <a:endParaRPr lang="en-US" sz="1400" dirty="0"/>
+          </a:p>
+          <a:p>
+            <a:pPr marL="342900" indent="-342900">
+              <a:spcAft>
+                <a:spcPts val="600"/>
+              </a:spcAft>
+              <a:buSzPct val="100000"/>
+              <a:buChar char="•"/>
+            </a:pPr>
+            <a:r>
+              <a:rPr lang="en-US" sz="1400" dirty="0">
+                <a:solidFill>
+                  <a:srgbClr val="3D3A36"/>
+                </a:solidFill>
+                <a:latin typeface="Calibri" pitchFamily="34" charset="0"/>
+                <a:ea typeface="Calibri" pitchFamily="34" charset="-122"/>
+                <a:cs typeface="Calibri" pitchFamily="34" charset="-120"/>
+              </a:rPr>
+              <a:t>Build up from there: 35% = 3×10% + ½×10%</a:t>
+            </a:r>
+            <a:endParaRPr lang="en-US" sz="1400" dirty="0"/>
+          </a:p>
+          <a:p>
+            <a:pPr marL="342900" indent="-342900">
+              <a:spcAft>
+                <a:spcPts val="600"/>
+              </a:spcAft>
+              <a:buSzPct val="100000"/>
+              <a:buChar char="•"/>
+            </a:pPr>
+            <a:r>
+              <a:rPr lang="en-US" sz="1400" dirty="0">
+                <a:solidFill>
+                  <a:srgbClr val="3D3A36"/>
+                </a:solidFill>
+                <a:latin typeface="Calibri" pitchFamily="34" charset="0"/>
+                <a:ea typeface="Calibri" pitchFamily="34" charset="-122"/>
+                <a:cs typeface="Calibri" pitchFamily="34" charset="-120"/>
+              </a:rPr>
+              <a:t>Example: 35% of 240</a:t>
+            </a:r>
+            <a:endParaRPr lang="en-US" sz="1400" dirty="0"/>
+          </a:p>
+          <a:p>
+            <a:pPr marL="342900" indent="-342900">
+              <a:spcAft>
+                <a:spcPts val="600"/>
+              </a:spcAft>
+              <a:buSzPct val="100000"/>
+              <a:buChar char="•"/>
+            </a:pPr>
+            <a:r>
+              <a:rPr lang="en-US" sz="1400" dirty="0">
+                <a:solidFill>
+                  <a:srgbClr val="3D3A36"/>
+                </a:solidFill>
+                <a:latin typeface="Calibri" pitchFamily="34" charset="0"/>
+                <a:ea typeface="Calibri" pitchFamily="34" charset="-122"/>
+                <a:cs typeface="Calibri" pitchFamily="34" charset="-120"/>
+              </a:rPr>
+              <a:t>10% = 24, 30% = 72, 5% = 12, 35% = 84</a:t>
+            </a:r>
+            <a:endParaRPr lang="en-US" sz="1400" dirty="0"/>
+          </a:p>
+          <a:p>
+            <a:pPr marL="342900" indent="-342900">
+              <a:spcAft>
+                <a:spcPts val="600"/>
+              </a:spcAft>
+              <a:buSzPct val="100000"/>
+              <a:buChar char="•"/>
+            </a:pPr>
+            <a:r>
+              <a:rPr lang="en-US" sz="1400" dirty="0">
+                <a:solidFill>
+                  <a:srgbClr val="3D3A36"/>
+                </a:solidFill>
+                <a:latin typeface="Calibri" pitchFamily="34" charset="0"/>
+                <a:ea typeface="Calibri" pitchFamily="34" charset="-122"/>
+                <a:cs typeface="Calibri" pitchFamily="34" charset="-120"/>
+              </a:rPr>
+              <a:t>Or use decimal: 0.35 × 240 = 84</a:t>
+            </a:r>
+            <a:endParaRPr lang="en-US" sz="1400" dirty="0"/>
+          </a:p>
+        </p:txBody>
+      </p:sp>
+      <p:sp>
+        <p:nvSpPr>
+          <p:cNvPr id="6" name="Shape 4"/>
+          <p:cNvSpPr/>
+          <p:nvPr/>
+        </p:nvSpPr>
+        <p:spPr>
+          <a:xfrm>
+            <a:off x="4846320" y="1188720"/>
+            <a:ext cx="3840480" cy="3474720"/>
+          </a:xfrm>
+          <a:prstGeom prst="rect">
+            <a:avLst/>
+          </a:prstGeom>
+          <a:solidFill>
+            <a:srgbClr val="FFFFFF"/>
+          </a:solidFill>
+          <a:ln w="12700">
+            <a:solidFill>
+              <a:srgbClr val="E5E2DC"/>
+            </a:solidFill>
+            <a:prstDash val="solid"/>
+          </a:ln>
+          <a:effectLst>
+            <a:outerShdw sx="100000" sy="100000" kx="0" ky="0" algn="bl" rotWithShape="0" blurRad="50800" dist="25400" dir="8100000">
+              <a:srgbClr val="000000">
+                <a:alpha val="10000"/>
+              </a:srgbClr>
+            </a:outerShdw>
+          </a:effectLst>
+        </p:spPr>
+      </p:sp>
+      <p:sp>
+        <p:nvSpPr>
+          <p:cNvPr id="7" name="Shape 5"/>
+          <p:cNvSpPr/>
+          <p:nvPr/>
+        </p:nvSpPr>
+        <p:spPr>
+          <a:xfrm>
+            <a:off x="4846320" y="1188720"/>
+            <a:ext cx="3840480" cy="54864"/>
+          </a:xfrm>
+          <a:prstGeom prst="rect">
+            <a:avLst/>
+          </a:prstGeom>
+          <a:solidFill>
+            <a:srgbClr val="2A9D8F"/>
+          </a:solidFill>
+          <a:ln/>
+        </p:spPr>
+      </p:sp>
+      <p:sp>
+        <p:nvSpPr>
+          <p:cNvPr id="8" name="Text 6"/>
+          <p:cNvSpPr/>
+          <p:nvPr/>
+        </p:nvSpPr>
+        <p:spPr>
+          <a:xfrm>
+            <a:off x="5120640" y="1371600"/>
+            <a:ext cx="3291840" cy="3108960"/>
+          </a:xfrm>
+          <a:prstGeom prst="rect">
+            <a:avLst/>
+          </a:prstGeom>
+          <a:noFill/>
+          <a:ln/>
+        </p:spPr>
+        <p:txBody>
+          <a:bodyPr wrap="square" rtlCol="0" anchor="t"/>
+          <a:lstStyle/>
+          <a:p>
+            <a:pPr indent="0" marL="0">
+              <a:spcAft>
+                <a:spcPts val="400"/>
+              </a:spcAft>
+              <a:buNone/>
+            </a:pPr>
+            <a:r>
+              <a:rPr lang="en-US" sz="1600" b="1" dirty="0">
+                <a:solidFill>
+                  <a:srgbClr val="1B2A4A"/>
+                </a:solidFill>
+                <a:latin typeface="Calibri" pitchFamily="34" charset="0"/>
+                <a:ea typeface="Calibri" pitchFamily="34" charset="-122"/>
+                <a:cs typeface="Calibri" pitchFamily="34" charset="-120"/>
+              </a:rPr>
+              <a:t>Key Equivalences</a:t>
+            </a:r>
+            <a:endParaRPr lang="en-US" sz="1600" dirty="0"/>
+          </a:p>
+          <a:p>
+            <a:pPr indent="0" marL="0">
+              <a:spcAft>
+                <a:spcPts val="400"/>
+              </a:spcAft>
+              <a:buNone/>
+            </a:pPr>
+            <a:endParaRPr lang="en-US" sz="1600" dirty="0"/>
+          </a:p>
+          <a:p>
+            <a:pPr indent="0" marL="0">
+              <a:spcAft>
+                <a:spcPts val="400"/>
+              </a:spcAft>
+              <a:buNone/>
+            </a:pPr>
+            <a:r>
+              <a:rPr lang="en-US" sz="1300" dirty="0">
+                <a:solidFill>
+                  <a:srgbClr val="3D3A36"/>
+                </a:solidFill>
+                <a:latin typeface="Calibri" pitchFamily="34" charset="0"/>
+                <a:ea typeface="Calibri" pitchFamily="34" charset="-122"/>
+                <a:cs typeface="Calibri" pitchFamily="34" charset="-120"/>
+              </a:rPr>
+              <a:t>½ = 0.5 = 50%</a:t>
+            </a:r>
+            <a:endParaRPr lang="en-US" sz="1600" dirty="0"/>
+          </a:p>
+          <a:p>
+            <a:pPr indent="0" marL="0">
+              <a:spcAft>
+                <a:spcPts val="400"/>
+              </a:spcAft>
+              <a:buNone/>
+            </a:pPr>
+            <a:r>
+              <a:rPr lang="en-US" sz="1300" dirty="0">
+                <a:solidFill>
+                  <a:srgbClr val="3D3A36"/>
+                </a:solidFill>
+                <a:latin typeface="Calibri" pitchFamily="34" charset="0"/>
+                <a:ea typeface="Calibri" pitchFamily="34" charset="-122"/>
+                <a:cs typeface="Calibri" pitchFamily="34" charset="-120"/>
+              </a:rPr>
+              <a:t>¼ = 0.25 = 25%</a:t>
+            </a:r>
+            <a:endParaRPr lang="en-US" sz="1600" dirty="0"/>
+          </a:p>
+          <a:p>
+            <a:pPr indent="0" marL="0">
+              <a:spcAft>
+                <a:spcPts val="400"/>
+              </a:spcAft>
+              <a:buNone/>
+            </a:pPr>
+            <a:r>
+              <a:rPr lang="en-US" sz="1300" dirty="0">
+                <a:solidFill>
+                  <a:srgbClr val="3D3A36"/>
+                </a:solidFill>
+                <a:latin typeface="Calibri" pitchFamily="34" charset="0"/>
+                <a:ea typeface="Calibri" pitchFamily="34" charset="-122"/>
+                <a:cs typeface="Calibri" pitchFamily="34" charset="-120"/>
+              </a:rPr>
+              <a:t>¾ = 0.75 = 75%</a:t>
+            </a:r>
+            <a:endParaRPr lang="en-US" sz="1600" dirty="0"/>
+          </a:p>
+          <a:p>
+            <a:pPr indent="0" marL="0">
+              <a:spcAft>
+                <a:spcPts val="400"/>
+              </a:spcAft>
+              <a:buNone/>
+            </a:pPr>
+            <a:r>
+              <a:rPr lang="en-US" sz="1300" dirty="0">
+                <a:solidFill>
+                  <a:srgbClr val="3D3A36"/>
+                </a:solidFill>
+                <a:latin typeface="Calibri" pitchFamily="34" charset="0"/>
+                <a:ea typeface="Calibri" pitchFamily="34" charset="-122"/>
+                <a:cs typeface="Calibri" pitchFamily="34" charset="-120"/>
+              </a:rPr>
+              <a:t>¹⁄₅ = 0.2 = 20%</a:t>
+            </a:r>
+            <a:endParaRPr lang="en-US" sz="1600" dirty="0"/>
+          </a:p>
+          <a:p>
+            <a:pPr indent="0" marL="0">
+              <a:spcAft>
+                <a:spcPts val="400"/>
+              </a:spcAft>
+              <a:buNone/>
+            </a:pPr>
+            <a:r>
+              <a:rPr lang="en-US" sz="1300" dirty="0">
+                <a:solidFill>
+                  <a:srgbClr val="3D3A36"/>
+                </a:solidFill>
+                <a:latin typeface="Calibri" pitchFamily="34" charset="0"/>
+                <a:ea typeface="Calibri" pitchFamily="34" charset="-122"/>
+                <a:cs typeface="Calibri" pitchFamily="34" charset="-120"/>
+              </a:rPr>
+              <a:t>¹⁄₃ ≈ 0.333 ≈ 33.3%</a:t>
+            </a:r>
+            <a:endParaRPr lang="en-US" sz="1600" dirty="0"/>
+          </a:p>
+          <a:p>
+            <a:pPr indent="0" marL="0">
+              <a:spcAft>
+                <a:spcPts val="400"/>
+              </a:spcAft>
+              <a:buNone/>
+            </a:pPr>
+            <a:r>
+              <a:rPr lang="en-US" sz="1300" dirty="0">
+                <a:solidFill>
+                  <a:srgbClr val="3D3A36"/>
+                </a:solidFill>
+                <a:latin typeface="Calibri" pitchFamily="34" charset="0"/>
+                <a:ea typeface="Calibri" pitchFamily="34" charset="-122"/>
+                <a:cs typeface="Calibri" pitchFamily="34" charset="-120"/>
+              </a:rPr>
+              <a:t>¹⁄₁₀ = 0.1 = 10%</a:t>
+            </a:r>
+            <a:endParaRPr lang="en-US" sz="1600" dirty="0"/>
+          </a:p>
+        </p:txBody>
+      </p:sp>
+    </p:spTree>
+  </p:cSld>
+  <p:clrMapOvr>
+    <a:masterClrMapping/>
+  </p:clrMapOvr>
+</p:sld>
+</file>
+
+<file path=ppt/slides/slide5.xml><?xml version="1.0" encoding="utf-8"?>
+<p:sld xmlns:a="http://schemas.openxmlformats.org/drawingml/2006/main" xmlns:r="http://schemas.openxmlformats.org/officeDocument/2006/relationships" xmlns:p="http://schemas.openxmlformats.org/presentationml/2006/main">
+  <p:cSld name="Slide 5">
     <p:bg>
       <p:bgPr>
         <a:solidFill>
@@ -1828,13 +2676,13 @@
         <p:spPr>
           <a:xfrm>
             <a:off x="0" y="0"/>
-            <a:ext cx="9144000" cy="54864"/>
-          </a:xfrm>
-          <a:prstGeom prst="rect">
-            <a:avLst/>
-          </a:prstGeom>
-          <a:solidFill>
-            <a:srgbClr val="2A9D8F"/>
+            <a:ext cx="109728" cy="5143500"/>
+          </a:xfrm>
+          <a:prstGeom prst="rect">
+            <a:avLst/>
+          </a:prstGeom>
+          <a:solidFill>
+            <a:srgbClr val="E9C46A"/>
           </a:solidFill>
           <a:ln/>
         </p:spPr>
@@ -1847,8 +2695,8 @@
         </p:nvSpPr>
         <p:spPr>
           <a:xfrm>
-            <a:off x="548640" y="457200"/>
-            <a:ext cx="8046720" cy="640080"/>
+            <a:off x="731520" y="457200"/>
+            <a:ext cx="7772400" cy="731520"/>
           </a:xfrm>
           <a:prstGeom prst="rect">
             <a:avLst/>
@@ -1864,7 +2712,7 @@
               <a:buNone/>
             </a:pPr>
             <a:r>
-              <a:rPr lang="en-US" sz="2800" b="1" dirty="0">
+              <a:rPr lang="en-US" sz="3200" b="1" dirty="0">
                 <a:solidFill>
                   <a:srgbClr val="FFFFFF"/>
                 </a:solidFill>
@@ -1874,7 +2722,7 @@
               </a:rPr>
               <a:t>Key Takeaways</a:t>
             </a:r>
-            <a:endParaRPr lang="en-US" sz="2800" dirty="0"/>
+            <a:endParaRPr lang="en-US" sz="3200" dirty="0"/>
           </a:p>
         </p:txBody>
       </p:sp>
@@ -1886,8 +2734,8 @@
         </p:nvSpPr>
         <p:spPr>
           <a:xfrm>
-            <a:off x="731520" y="1371600"/>
-            <a:ext cx="7680960" cy="3200400"/>
+            <a:off x="731520" y="1463040"/>
+            <a:ext cx="7772400" cy="3200400"/>
           </a:xfrm>
           <a:prstGeom prst="rect">
             <a:avLst/>
@@ -1907,7 +2755,7 @@
               <a:buChar char="•"/>
             </a:pPr>
             <a:r>
-              <a:rPr lang="en-US" sz="1600" dirty="0">
+              <a:rPr lang="en-US" sz="1500" dirty="0">
                 <a:solidFill>
                   <a:srgbClr val="CADCFC"/>
                 </a:solidFill>
@@ -1915,9 +2763,9 @@
                 <a:ea typeface="Calibri" pitchFamily="34" charset="-122"/>
                 <a:cs typeface="Calibri" pitchFamily="34" charset="-120"/>
               </a:rPr>
-              <a:t>FDP: three ways to show the same value</a:t>
-            </a:r>
-            <a:endParaRPr lang="en-US" sz="1600" dirty="0"/>
+              <a:t>Fraction, decimal, percentage = three forms of the same value</a:t>
+            </a:r>
+            <a:endParaRPr lang="en-US" sz="1500" dirty="0"/>
           </a:p>
           <a:p>
             <a:pPr marL="342900" indent="-342900">
@@ -1928,7 +2776,7 @@
               <a:buChar char="•"/>
             </a:pPr>
             <a:r>
-              <a:rPr lang="en-US" sz="1600" dirty="0">
+              <a:rPr lang="en-US" sz="1500" dirty="0">
                 <a:solidFill>
                   <a:srgbClr val="CADCFC"/>
                 </a:solidFill>
@@ -1936,9 +2784,9 @@
                 <a:ea typeface="Calibri" pitchFamily="34" charset="-122"/>
                 <a:cs typeface="Calibri" pitchFamily="34" charset="-120"/>
               </a:rPr>
-              <a:t>F→D: divide | D→%: ×100 | %→F: put over 100 and simplify</a:t>
-            </a:r>
-            <a:endParaRPr lang="en-US" sz="1600" dirty="0"/>
+              <a:t>Fraction → decimal: divide top by bottom</a:t>
+            </a:r>
+            <a:endParaRPr lang="en-US" sz="1500" dirty="0"/>
           </a:p>
           <a:p>
             <a:pPr marL="342900" indent="-342900">
@@ -1949,7 +2797,7 @@
               <a:buChar char="•"/>
             </a:pPr>
             <a:r>
-              <a:rPr lang="en-US" sz="1600" dirty="0">
+              <a:rPr lang="en-US" sz="1500" dirty="0">
                 <a:solidFill>
                   <a:srgbClr val="CADCFC"/>
                 </a:solidFill>
@@ -1957,9 +2805,9 @@
                 <a:ea typeface="Calibri" pitchFamily="34" charset="-122"/>
                 <a:cs typeface="Calibri" pitchFamily="34" charset="-120"/>
               </a:rPr>
-              <a:t>Learn the common equivalents: 1/2=50%, 1/4=25%, 1/5=20%, 1/10=10%</a:t>
-            </a:r>
-            <a:endParaRPr lang="en-US" sz="1600" dirty="0"/>
+              <a:t>Decimal → %: multiply by 100</a:t>
+            </a:r>
+            <a:endParaRPr lang="en-US" sz="1500" dirty="0"/>
           </a:p>
           <a:p>
             <a:pPr marL="342900" indent="-342900">
@@ -1970,7 +2818,7 @@
               <a:buChar char="•"/>
             </a:pPr>
             <a:r>
-              <a:rPr lang="en-US" sz="1600" dirty="0">
+              <a:rPr lang="en-US" sz="1500" dirty="0">
                 <a:solidFill>
                   <a:srgbClr val="CADCFC"/>
                 </a:solidFill>
@@ -1978,9 +2826,30 @@
                 <a:ea typeface="Calibri" pitchFamily="34" charset="-122"/>
                 <a:cs typeface="Calibri" pitchFamily="34" charset="-120"/>
               </a:rPr>
-              <a:t>To find a percentage of an amount: divide by 100, multiply by the percentage</a:t>
-            </a:r>
-            <a:endParaRPr lang="en-US" sz="1600" dirty="0"/>
+              <a:t>% → fraction: write over 100 and simplify</a:t>
+            </a:r>
+            <a:endParaRPr lang="en-US" sz="1500" dirty="0"/>
+          </a:p>
+          <a:p>
+            <a:pPr marL="342900" indent="-342900">
+              <a:spcAft>
+                <a:spcPts val="1000"/>
+              </a:spcAft>
+              <a:buSzPct val="100000"/>
+              <a:buChar char="•"/>
+            </a:pPr>
+            <a:r>
+              <a:rPr lang="en-US" sz="1500" dirty="0">
+                <a:solidFill>
+                  <a:srgbClr val="CADCFC"/>
+                </a:solidFill>
+                <a:latin typeface="Calibri" pitchFamily="34" charset="0"/>
+                <a:ea typeface="Calibri" pitchFamily="34" charset="-122"/>
+                <a:cs typeface="Calibri" pitchFamily="34" charset="-120"/>
+              </a:rPr>
+              <a:t>Key: ½=50%, ¼=25%, ¾=75%, ¹⁄₅=20%, ¹⁄₁₀=10%</a:t>
+            </a:r>
+            <a:endParaRPr lang="en-US" sz="1500" dirty="0"/>
           </a:p>
         </p:txBody>
       </p:sp>
@@ -1992,8 +2861,8 @@
         </p:nvSpPr>
         <p:spPr>
           <a:xfrm>
-            <a:off x="548640" y="4572000"/>
-            <a:ext cx="3657600" cy="274320"/>
+            <a:off x="731520" y="4572000"/>
+            <a:ext cx="7772400" cy="365760"/>
           </a:xfrm>
           <a:prstGeom prst="rect">
             <a:avLst/>
@@ -2009,14 +2878,17 @@
               <a:buNone/>
             </a:pPr>
             <a:r>
-              <a:rPr lang="en-US" sz="1000" dirty="0">
-                <a:solidFill>
-                  <a:srgbClr val="6B6660"/>
-                </a:solidFill>
+              <a:rPr lang="en-US" sz="1100" dirty="0">
+                <a:solidFill>
+                  <a:srgbClr val="E9C46A"/>
+                </a:solidFill>
+                <a:latin typeface="Calibri" pitchFamily="34" charset="0"/>
+                <a:ea typeface="Calibri" pitchFamily="34" charset="-122"/>
+                <a:cs typeface="Calibri" pitchFamily="34" charset="-120"/>
               </a:rPr>
               <a:t>mrzocchi.com</a:t>
             </a:r>
-            <a:endParaRPr lang="en-US" sz="1000" dirty="0"/>
+            <a:endParaRPr lang="en-US" sz="1100" dirty="0"/>
           </a:p>
         </p:txBody>
       </p:sp>

--- a/static/ppts/G6_Math_T2_Decimals_Percentages.pptx
+++ b/static/ppts/G6_Math_T2_Decimals_Percentages.pptx
@@ -10,9 +10,11 @@
     <p:sldId id="258" r:id="rId4"/>
     <p:sldId id="259" r:id="rId5"/>
     <p:sldId id="260" r:id="rId6"/>
+    <p:sldId id="261" r:id="rId7"/>
+    <p:sldId id="262" r:id="rId8"/>
   </p:sldIdLst>
   <p:notesMasterIdLst>
-    <p:notesMasterId r:id="rId7"/>
+    <p:notesMasterId r:id="rId9"/>
   </p:notesMasterIdLst>
   <p:sldSz cx="9144000" cy="5143500"/>
   <p:notesSz cx="5143500" cy="9144000"/>
@@ -900,6 +902,182 @@
 </p:notes>
 </file>
 
+<file path=ppt/notesSlides/notesSlide6.xml><?xml version="1.0" encoding="utf-8"?>
+<p:notes xmlns:a="http://schemas.openxmlformats.org/drawingml/2006/main" xmlns:r="http://schemas.openxmlformats.org/officeDocument/2006/relationships" xmlns:p="http://schemas.openxmlformats.org/presentationml/2006/main">
+  <p:cSld>
+    <p:spTree>
+      <p:nvGrpSpPr>
+        <p:cNvPr id="1" name=""/>
+        <p:cNvGrpSpPr/>
+        <p:nvPr/>
+      </p:nvGrpSpPr>
+      <p:grpSpPr>
+        <a:xfrm>
+          <a:off x="0" y="0"/>
+          <a:ext cx="0" cy="0"/>
+          <a:chOff x="0" y="0"/>
+          <a:chExt cx="0" cy="0"/>
+        </a:xfrm>
+      </p:grpSpPr>
+      <p:sp>
+        <p:nvSpPr>
+          <p:cNvPr id="2" name="Slide Image Placeholder 1"/>
+          <p:cNvSpPr>
+            <a:spLocks noGrp="1" noRot="1" noChangeAspect="1"/>
+          </p:cNvSpPr>
+          <p:nvPr>
+            <p:ph type="sldImg"/>
+          </p:nvPr>
+        </p:nvSpPr>
+        <p:spPr/>
+      </p:sp>
+      <p:sp>
+        <p:nvSpPr>
+          <p:cNvPr id="3" name="Notes Placeholder 2"/>
+          <p:cNvSpPr>
+            <a:spLocks noGrp="1"/>
+          </p:cNvSpPr>
+          <p:nvPr>
+            <p:ph type="body" idx="1"/>
+          </p:nvPr>
+        </p:nvSpPr>
+        <p:spPr/>
+        <p:txBody>
+          <a:bodyPr/>
+          <a:lstStyle/>
+          <a:p>
+            <a:r>
+              <a:rPr lang="en-US" dirty="0"/>
+              <a:t/>
+            </a:r>
+            <a:endParaRPr lang="en-US" dirty="0"/>
+          </a:p>
+        </p:txBody>
+      </p:sp>
+      <p:sp>
+        <p:nvSpPr>
+          <p:cNvPr id="4" name="Slide Number Placeholder 3"/>
+          <p:cNvSpPr>
+            <a:spLocks noGrp="1"/>
+          </p:cNvSpPr>
+          <p:nvPr>
+            <p:ph type="sldNum" sz="quarter" idx="10"/>
+          </p:nvPr>
+        </p:nvSpPr>
+        <p:spPr/>
+        <p:txBody>
+          <a:bodyPr/>
+          <a:lstStyle/>
+          <a:p>
+            <a:fld id="{F7021451-1387-4CA6-816F-3879F97B5CBC}" type="slidenum">
+              <a:rPr lang="en-US"/>
+              <a:t>6</a:t>
+            </a:fld>
+            <a:endParaRPr lang="en-US"/>
+          </a:p>
+        </p:txBody>
+      </p:sp>
+    </p:spTree>
+    <p:extLst>
+      <p:ext uri="{BB962C8B-B14F-4D97-AF65-F5344CB8AC3E}">
+        <p14:creationId xmlns:p14="http://schemas.microsoft.com/office/powerpoint/2010/main" val="1024086991"/>
+      </p:ext>
+    </p:extLst>
+  </p:cSld>
+  <p:clrMapOvr>
+    <a:masterClrMapping/>
+  </p:clrMapOvr>
+</p:notes>
+</file>
+
+<file path=ppt/notesSlides/notesSlide7.xml><?xml version="1.0" encoding="utf-8"?>
+<p:notes xmlns:a="http://schemas.openxmlformats.org/drawingml/2006/main" xmlns:r="http://schemas.openxmlformats.org/officeDocument/2006/relationships" xmlns:p="http://schemas.openxmlformats.org/presentationml/2006/main">
+  <p:cSld>
+    <p:spTree>
+      <p:nvGrpSpPr>
+        <p:cNvPr id="1" name=""/>
+        <p:cNvGrpSpPr/>
+        <p:nvPr/>
+      </p:nvGrpSpPr>
+      <p:grpSpPr>
+        <a:xfrm>
+          <a:off x="0" y="0"/>
+          <a:ext cx="0" cy="0"/>
+          <a:chOff x="0" y="0"/>
+          <a:chExt cx="0" cy="0"/>
+        </a:xfrm>
+      </p:grpSpPr>
+      <p:sp>
+        <p:nvSpPr>
+          <p:cNvPr id="2" name="Slide Image Placeholder 1"/>
+          <p:cNvSpPr>
+            <a:spLocks noGrp="1" noRot="1" noChangeAspect="1"/>
+          </p:cNvSpPr>
+          <p:nvPr>
+            <p:ph type="sldImg"/>
+          </p:nvPr>
+        </p:nvSpPr>
+        <p:spPr/>
+      </p:sp>
+      <p:sp>
+        <p:nvSpPr>
+          <p:cNvPr id="3" name="Notes Placeholder 2"/>
+          <p:cNvSpPr>
+            <a:spLocks noGrp="1"/>
+          </p:cNvSpPr>
+          <p:nvPr>
+            <p:ph type="body" idx="1"/>
+          </p:nvPr>
+        </p:nvSpPr>
+        <p:spPr/>
+        <p:txBody>
+          <a:bodyPr/>
+          <a:lstStyle/>
+          <a:p>
+            <a:r>
+              <a:rPr lang="en-US" dirty="0"/>
+              <a:t/>
+            </a:r>
+            <a:endParaRPr lang="en-US" dirty="0"/>
+          </a:p>
+        </p:txBody>
+      </p:sp>
+      <p:sp>
+        <p:nvSpPr>
+          <p:cNvPr id="4" name="Slide Number Placeholder 3"/>
+          <p:cNvSpPr>
+            <a:spLocks noGrp="1"/>
+          </p:cNvSpPr>
+          <p:nvPr>
+            <p:ph type="sldNum" sz="quarter" idx="10"/>
+          </p:nvPr>
+        </p:nvSpPr>
+        <p:spPr/>
+        <p:txBody>
+          <a:bodyPr/>
+          <a:lstStyle/>
+          <a:p>
+            <a:fld id="{F7021451-1387-4CA6-816F-3879F97B5CBC}" type="slidenum">
+              <a:rPr lang="en-US"/>
+              <a:t>7</a:t>
+            </a:fld>
+            <a:endParaRPr lang="en-US"/>
+          </a:p>
+        </p:txBody>
+      </p:sp>
+    </p:spTree>
+    <p:extLst>
+      <p:ext uri="{BB962C8B-B14F-4D97-AF65-F5344CB8AC3E}">
+        <p14:creationId xmlns:p14="http://schemas.microsoft.com/office/powerpoint/2010/main" val="1024086991"/>
+      </p:ext>
+    </p:extLst>
+  </p:cSld>
+  <p:clrMapOvr>
+    <a:masterClrMapping/>
+  </p:clrMapOvr>
+</p:notes>
+</file>
+
 <file path=ppt/slideLayouts/slideLayout1.xml><?xml version="1.0" encoding="utf-8"?>
 <p:sldLayout xmlns:a="http://schemas.openxmlformats.org/drawingml/2006/main" xmlns:r="http://schemas.openxmlformats.org/officeDocument/2006/relationships" xmlns:p="http://schemas.openxmlformats.org/presentationml/2006/main" preserve="1">
   <p:cSld name="DEFAULT">
@@ -1210,13 +1388,6 @@
 <file path=ppt/slides/slide1.xml><?xml version="1.0" encoding="utf-8"?>
 <p:sld xmlns:a="http://schemas.openxmlformats.org/drawingml/2006/main" xmlns:r="http://schemas.openxmlformats.org/officeDocument/2006/relationships" xmlns:p="http://schemas.openxmlformats.org/presentationml/2006/main">
   <p:cSld name="Slide 1">
-    <p:bg>
-      <p:bgPr>
-        <a:solidFill>
-          <a:srgbClr val="1B2A4A"/>
-        </a:solidFill>
-      </p:bgPr>
-    </p:bg>
     <p:spTree>
       <p:nvGrpSpPr>
         <p:cNvPr id="1" name=""/>
@@ -1240,7 +1411,27 @@
         <p:spPr>
           <a:xfrm>
             <a:off x="0" y="0"/>
-            <a:ext cx="109728" cy="5143500"/>
+            <a:ext cx="9144000" cy="5143500"/>
+          </a:xfrm>
+          <a:prstGeom prst="rect">
+            <a:avLst/>
+          </a:prstGeom>
+          <a:solidFill>
+            <a:srgbClr val="1B2A4A"/>
+          </a:solidFill>
+          <a:ln/>
+        </p:spPr>
+      </p:sp>
+      <p:sp>
+        <p:nvSpPr>
+          <p:cNvPr id="3" name="Shape 1"/>
+          <p:cNvSpPr/>
+          <p:nvPr/>
+        </p:nvSpPr>
+        <p:spPr>
+          <a:xfrm>
+            <a:off x="0" y="4777740"/>
+            <a:ext cx="9144000" cy="365760"/>
           </a:xfrm>
           <a:prstGeom prst="rect">
             <a:avLst/>
@@ -1253,14 +1444,36 @@
       </p:sp>
       <p:sp>
         <p:nvSpPr>
-          <p:cNvPr id="3" name="Text 1"/>
-          <p:cNvSpPr/>
-          <p:nvPr/>
-        </p:nvSpPr>
-        <p:spPr>
-          <a:xfrm>
-            <a:off x="731520" y="1097280"/>
-            <a:ext cx="7772400" cy="1371600"/>
+          <p:cNvPr id="4" name="Shape 2"/>
+          <p:cNvSpPr/>
+          <p:nvPr/>
+        </p:nvSpPr>
+        <p:spPr>
+          <a:xfrm>
+            <a:off x="6858000" y="-1371600"/>
+            <a:ext cx="4572000" cy="4572000"/>
+          </a:xfrm>
+          <a:prstGeom prst="ellipse">
+            <a:avLst/>
+          </a:prstGeom>
+          <a:solidFill>
+            <a:srgbClr val="2A9D8F">
+              <a:alpha val="12000"/>
+            </a:srgbClr>
+          </a:solidFill>
+          <a:ln/>
+        </p:spPr>
+      </p:sp>
+      <p:sp>
+        <p:nvSpPr>
+          <p:cNvPr id="5" name="Text 3"/>
+          <p:cNvSpPr/>
+          <p:nvPr/>
+        </p:nvSpPr>
+        <p:spPr>
+          <a:xfrm>
+            <a:off x="731520" y="914400"/>
+            <a:ext cx="7680960" cy="457200"/>
           </a:xfrm>
           <a:prstGeom prst="rect">
             <a:avLst/>
@@ -1276,7 +1489,46 @@
               <a:buNone/>
             </a:pPr>
             <a:r>
-              <a:rPr lang="en-US" sz="4000" b="1" dirty="0">
+              <a:rPr lang="en-US" sz="1300" b="1" spc="500" kern="0" dirty="0">
+                <a:solidFill>
+                  <a:srgbClr val="2A9D8F"/>
+                </a:solidFill>
+                <a:latin typeface="Calibri" pitchFamily="34" charset="0"/>
+                <a:ea typeface="Calibri" pitchFamily="34" charset="-122"/>
+                <a:cs typeface="Calibri" pitchFamily="34" charset="-120"/>
+              </a:rPr>
+              <a:t>GRADE 6 MATHEMATICS</a:t>
+            </a:r>
+            <a:endParaRPr lang="en-US" sz="1300" dirty="0"/>
+          </a:p>
+        </p:txBody>
+      </p:sp>
+      <p:sp>
+        <p:nvSpPr>
+          <p:cNvPr id="6" name="Text 4"/>
+          <p:cNvSpPr/>
+          <p:nvPr/>
+        </p:nvSpPr>
+        <p:spPr>
+          <a:xfrm>
+            <a:off x="731520" y="1463040"/>
+            <a:ext cx="6858000" cy="1645920"/>
+          </a:xfrm>
+          <a:prstGeom prst="rect">
+            <a:avLst/>
+          </a:prstGeom>
+          <a:noFill/>
+          <a:ln/>
+        </p:spPr>
+        <p:txBody>
+          <a:bodyPr wrap="square" rtlCol="0" anchor="t"/>
+          <a:lstStyle/>
+          <a:p>
+            <a:pPr indent="0" marL="0">
+              <a:buNone/>
+            </a:pPr>
+            <a:r>
+              <a:rPr lang="en-US" sz="3800" b="1" dirty="0">
                 <a:solidFill>
                   <a:srgbClr val="FFFFFF"/>
                 </a:solidFill>
@@ -1284,22 +1536,39 @@
                 <a:ea typeface="Georgia" pitchFamily="34" charset="-122"/>
                 <a:cs typeface="Georgia" pitchFamily="34" charset="-120"/>
               </a:rPr>
-              <a:t>Decimals &amp; Percentages</a:t>
-            </a:r>
-            <a:endParaRPr lang="en-US" sz="4000" dirty="0"/>
+              <a:t>Decimals &amp;</a:t>
+            </a:r>
+            <a:endParaRPr lang="en-US" sz="3800" dirty="0"/>
+          </a:p>
+          <a:p>
+            <a:pPr indent="0" marL="0">
+              <a:buNone/>
+            </a:pPr>
+            <a:r>
+              <a:rPr lang="en-US" sz="3800" b="1" dirty="0">
+                <a:solidFill>
+                  <a:srgbClr val="FFFFFF"/>
+                </a:solidFill>
+                <a:latin typeface="Georgia" pitchFamily="34" charset="0"/>
+                <a:ea typeface="Georgia" pitchFamily="34" charset="-122"/>
+                <a:cs typeface="Georgia" pitchFamily="34" charset="-120"/>
+              </a:rPr>
+              <a:t>Percentages</a:t>
+            </a:r>
+            <a:endParaRPr lang="en-US" sz="3800" dirty="0"/>
           </a:p>
         </p:txBody>
       </p:sp>
       <p:sp>
         <p:nvSpPr>
-          <p:cNvPr id="4" name="Text 2"/>
-          <p:cNvSpPr/>
-          <p:nvPr/>
-        </p:nvSpPr>
-        <p:spPr>
-          <a:xfrm>
-            <a:off x="731520" y="2560320"/>
-            <a:ext cx="7772400" cy="548640"/>
+          <p:cNvPr id="7" name="Text 5"/>
+          <p:cNvSpPr/>
+          <p:nvPr/>
+        </p:nvSpPr>
+        <p:spPr>
+          <a:xfrm>
+            <a:off x="731520" y="3200400"/>
+            <a:ext cx="6400800" cy="548640"/>
           </a:xfrm>
           <a:prstGeom prst="rect">
             <a:avLst/>
@@ -1315,15 +1584,15 @@
               <a:buNone/>
             </a:pPr>
             <a:r>
-              <a:rPr lang="en-US" sz="1600" dirty="0">
+              <a:rPr lang="en-US" sz="1600" i="1" dirty="0">
                 <a:solidFill>
-                  <a:srgbClr val="E9C46A"/>
+                  <a:srgbClr val="9B9690"/>
                 </a:solidFill>
                 <a:latin typeface="Calibri" pitchFamily="34" charset="0"/>
                 <a:ea typeface="Calibri" pitchFamily="34" charset="-122"/>
                 <a:cs typeface="Calibri" pitchFamily="34" charset="-120"/>
               </a:rPr>
-              <a:t>Grade 6 Mathematics · Mr Zocchi</a:t>
+              <a:t>Converting between fractions, decimals, and percentages</a:t>
             </a:r>
             <a:endParaRPr lang="en-US" sz="1600" dirty="0"/>
           </a:p>
@@ -1331,36 +1600,14 @@
       </p:sp>
       <p:sp>
         <p:nvSpPr>
-          <p:cNvPr id="5" name="Shape 3"/>
-          <p:cNvSpPr/>
-          <p:nvPr/>
-        </p:nvSpPr>
-        <p:spPr>
-          <a:xfrm>
-            <a:off x="731520" y="3474720"/>
-            <a:ext cx="2011680" cy="411480"/>
-          </a:xfrm>
-          <a:prstGeom prst="roundRect">
-            <a:avLst>
-              <a:gd name="adj" fmla="val 17778"/>
-            </a:avLst>
-          </a:prstGeom>
-          <a:solidFill>
-            <a:srgbClr val="2A9D8F"/>
-          </a:solidFill>
-          <a:ln/>
-        </p:spPr>
-      </p:sp>
-      <p:sp>
-        <p:nvSpPr>
-          <p:cNvPr id="6" name="Text 4"/>
-          <p:cNvSpPr/>
-          <p:nvPr/>
-        </p:nvSpPr>
-        <p:spPr>
-          <a:xfrm>
-            <a:off x="731520" y="3474720"/>
-            <a:ext cx="2011680" cy="411480"/>
+          <p:cNvPr id="8" name="Text 6"/>
+          <p:cNvSpPr/>
+          <p:nvPr/>
+        </p:nvSpPr>
+        <p:spPr>
+          <a:xfrm>
+            <a:off x="731520" y="4297680"/>
+            <a:ext cx="2743200" cy="365760"/>
           </a:xfrm>
           <a:prstGeom prst="rect">
             <a:avLst/>
@@ -1372,21 +1619,21 @@
           <a:bodyPr wrap="square" rtlCol="0" anchor="ctr"/>
           <a:lstStyle/>
           <a:p>
-            <a:pPr algn="ctr" indent="0" marL="0">
+            <a:pPr indent="0" marL="0">
               <a:buNone/>
             </a:pPr>
             <a:r>
-              <a:rPr lang="en-US" sz="1200" b="1" dirty="0">
+              <a:rPr lang="en-US" sz="1100" dirty="0">
                 <a:solidFill>
-                  <a:srgbClr val="FFFFFF"/>
+                  <a:srgbClr val="9B9690"/>
                 </a:solidFill>
                 <a:latin typeface="Calibri" pitchFamily="34" charset="0"/>
                 <a:ea typeface="Calibri" pitchFamily="34" charset="-122"/>
                 <a:cs typeface="Calibri" pitchFamily="34" charset="-120"/>
               </a:rPr>
-              <a:t>Term 2 · Fractions &amp; Decimals</a:t>
-            </a:r>
-            <a:endParaRPr lang="en-US" sz="1200" dirty="0"/>
+              <a:t>mrzocchi.com</a:t>
+            </a:r>
+            <a:endParaRPr lang="en-US" sz="1100" dirty="0"/>
           </a:p>
         </p:txBody>
       </p:sp>
@@ -1431,7 +1678,47 @@
         <p:spPr>
           <a:xfrm>
             <a:off x="0" y="0"/>
-            <a:ext cx="9144000" cy="54864"/>
+            <a:ext cx="9144000" cy="822960"/>
+          </a:xfrm>
+          <a:prstGeom prst="rect">
+            <a:avLst/>
+          </a:prstGeom>
+          <a:solidFill>
+            <a:srgbClr val="FFFFFF"/>
+          </a:solidFill>
+          <a:ln/>
+        </p:spPr>
+      </p:sp>
+      <p:sp>
+        <p:nvSpPr>
+          <p:cNvPr id="3" name="Shape 1"/>
+          <p:cNvSpPr/>
+          <p:nvPr/>
+        </p:nvSpPr>
+        <p:spPr>
+          <a:xfrm>
+            <a:off x="0" y="804672"/>
+            <a:ext cx="9144000" cy="27432"/>
+          </a:xfrm>
+          <a:prstGeom prst="rect">
+            <a:avLst/>
+          </a:prstGeom>
+          <a:solidFill>
+            <a:srgbClr val="E5E2DC"/>
+          </a:solidFill>
+          <a:ln/>
+        </p:spPr>
+      </p:sp>
+      <p:sp>
+        <p:nvSpPr>
+          <p:cNvPr id="4" name="Shape 2"/>
+          <p:cNvSpPr/>
+          <p:nvPr/>
+        </p:nvSpPr>
+        <p:spPr>
+          <a:xfrm>
+            <a:off x="548640" y="201168"/>
+            <a:ext cx="54864" cy="420624"/>
           </a:xfrm>
           <a:prstGeom prst="rect">
             <a:avLst/>
@@ -1444,14 +1731,14 @@
       </p:sp>
       <p:sp>
         <p:nvSpPr>
-          <p:cNvPr id="3" name="Text 1"/>
-          <p:cNvSpPr/>
-          <p:nvPr/>
-        </p:nvSpPr>
-        <p:spPr>
-          <a:xfrm>
-            <a:off x="7772400" y="4709160"/>
-            <a:ext cx="1097280" cy="320040"/>
+          <p:cNvPr id="5" name="Text 3"/>
+          <p:cNvSpPr/>
+          <p:nvPr/>
+        </p:nvSpPr>
+        <p:spPr>
+          <a:xfrm>
+            <a:off x="777240" y="137160"/>
+            <a:ext cx="7772400" cy="548640"/>
           </a:xfrm>
           <a:prstGeom prst="rect">
             <a:avLst/>
@@ -1460,14 +1747,139 @@
           <a:ln/>
         </p:spPr>
         <p:txBody>
-          <a:bodyPr wrap="square" rtlCol="0" anchor="ctr"/>
+          <a:bodyPr wrap="square" lIns="0" tIns="0" rIns="0" bIns="0" rtlCol="0" anchor="ctr"/>
           <a:lstStyle/>
           <a:p>
-            <a:pPr algn="r" indent="0" marL="0">
+            <a:pPr indent="0" marL="0">
               <a:buNone/>
             </a:pPr>
             <a:r>
-              <a:rPr lang="en-US" sz="900" dirty="0">
+              <a:rPr lang="en-US" sz="2000" b="1" dirty="0">
+                <a:solidFill>
+                  <a:srgbClr val="1B2A4A"/>
+                </a:solidFill>
+                <a:latin typeface="Georgia" pitchFamily="34" charset="0"/>
+                <a:ea typeface="Georgia" pitchFamily="34" charset="-122"/>
+                <a:cs typeface="Georgia" pitchFamily="34" charset="-120"/>
+              </a:rPr>
+              <a:t>Key Vocabulary</a:t>
+            </a:r>
+            <a:endParaRPr lang="en-US" sz="2000" dirty="0"/>
+          </a:p>
+        </p:txBody>
+      </p:sp>
+      <p:sp>
+        <p:nvSpPr>
+          <p:cNvPr id="6" name="Shape 4"/>
+          <p:cNvSpPr/>
+          <p:nvPr/>
+        </p:nvSpPr>
+        <p:spPr>
+          <a:xfrm>
+            <a:off x="731520" y="1051560"/>
+            <a:ext cx="3657600" cy="658368"/>
+          </a:xfrm>
+          <a:prstGeom prst="rect">
+            <a:avLst/>
+          </a:prstGeom>
+          <a:solidFill>
+            <a:srgbClr val="FFFFFF"/>
+          </a:solidFill>
+          <a:ln/>
+          <a:effectLst>
+            <a:outerShdw sx="100000" sy="100000" kx="0" ky="0" algn="bl" rotWithShape="0" blurRad="50800" dist="25400" dir="8100000">
+              <a:srgbClr val="000000">
+                <a:alpha val="10000"/>
+              </a:srgbClr>
+            </a:outerShdw>
+          </a:effectLst>
+        </p:spPr>
+      </p:sp>
+      <p:sp>
+        <p:nvSpPr>
+          <p:cNvPr id="7" name="Shape 5"/>
+          <p:cNvSpPr/>
+          <p:nvPr/>
+        </p:nvSpPr>
+        <p:spPr>
+          <a:xfrm>
+            <a:off x="731520" y="1051560"/>
+            <a:ext cx="54864" cy="658368"/>
+          </a:xfrm>
+          <a:prstGeom prst="rect">
+            <a:avLst/>
+          </a:prstGeom>
+          <a:solidFill>
+            <a:srgbClr val="2A9D8F"/>
+          </a:solidFill>
+          <a:ln/>
+        </p:spPr>
+      </p:sp>
+      <p:sp>
+        <p:nvSpPr>
+          <p:cNvPr id="8" name="Text 6"/>
+          <p:cNvSpPr/>
+          <p:nvPr/>
+        </p:nvSpPr>
+        <p:spPr>
+          <a:xfrm>
+            <a:off x="914400" y="1051560"/>
+            <a:ext cx="1463040" cy="658368"/>
+          </a:xfrm>
+          <a:prstGeom prst="rect">
+            <a:avLst/>
+          </a:prstGeom>
+          <a:noFill/>
+          <a:ln/>
+        </p:spPr>
+        <p:txBody>
+          <a:bodyPr wrap="square" lIns="0" tIns="0" rIns="0" bIns="0" rtlCol="0" anchor="ctr"/>
+          <a:lstStyle/>
+          <a:p>
+            <a:pPr indent="0" marL="0">
+              <a:buNone/>
+            </a:pPr>
+            <a:r>
+              <a:rPr lang="en-US" sz="1300" b="1" dirty="0">
+                <a:solidFill>
+                  <a:srgbClr val="1B2A4A"/>
+                </a:solidFill>
+                <a:latin typeface="Georgia" pitchFamily="34" charset="0"/>
+                <a:ea typeface="Georgia" pitchFamily="34" charset="-122"/>
+                <a:cs typeface="Georgia" pitchFamily="34" charset="-120"/>
+              </a:rPr>
+              <a:t>Decimal</a:t>
+            </a:r>
+            <a:endParaRPr lang="en-US" sz="1300" dirty="0"/>
+          </a:p>
+        </p:txBody>
+      </p:sp>
+      <p:sp>
+        <p:nvSpPr>
+          <p:cNvPr id="9" name="Text 7"/>
+          <p:cNvSpPr/>
+          <p:nvPr/>
+        </p:nvSpPr>
+        <p:spPr>
+          <a:xfrm>
+            <a:off x="2377440" y="1051560"/>
+            <a:ext cx="1920240" cy="658368"/>
+          </a:xfrm>
+          <a:prstGeom prst="rect">
+            <a:avLst/>
+          </a:prstGeom>
+          <a:noFill/>
+          <a:ln/>
+        </p:spPr>
+        <p:txBody>
+          <a:bodyPr wrap="square" lIns="0" tIns="0" rIns="0" bIns="0" rtlCol="0" anchor="ctr"/>
+          <a:lstStyle/>
+          <a:p>
+            <a:pPr indent="0" marL="0">
+              <a:buNone/>
+            </a:pPr>
+            <a:r>
+              <a:rPr lang="en-US" sz="1100" dirty="0">
                 <a:solidFill>
                   <a:srgbClr val="6B6660"/>
                 </a:solidFill>
@@ -1475,22 +1887,22 @@
                 <a:ea typeface="Calibri" pitchFamily="34" charset="-122"/>
                 <a:cs typeface="Calibri" pitchFamily="34" charset="-120"/>
               </a:rPr>
-              <a:t>2 / 5</a:t>
-            </a:r>
-            <a:endParaRPr lang="en-US" sz="900" dirty="0"/>
+              <a:t>Number with a decimal point (e.g. 0.75)</a:t>
+            </a:r>
+            <a:endParaRPr lang="en-US" sz="1100" dirty="0"/>
           </a:p>
         </p:txBody>
       </p:sp>
       <p:sp>
         <p:nvSpPr>
-          <p:cNvPr id="4" name="Shape 2"/>
-          <p:cNvSpPr/>
-          <p:nvPr/>
-        </p:nvSpPr>
-        <p:spPr>
-          <a:xfrm>
-            <a:off x="1371600" y="914400"/>
-            <a:ext cx="6400800" cy="3200400"/>
+          <p:cNvPr id="10" name="Shape 8"/>
+          <p:cNvSpPr/>
+          <p:nvPr/>
+        </p:nvSpPr>
+        <p:spPr>
+          <a:xfrm>
+            <a:off x="4754880" y="1051560"/>
+            <a:ext cx="3657600" cy="658368"/>
           </a:xfrm>
           <a:prstGeom prst="rect">
             <a:avLst/>
@@ -1498,12 +1910,7 @@
           <a:solidFill>
             <a:srgbClr val="FFFFFF"/>
           </a:solidFill>
-          <a:ln w="12700">
-            <a:solidFill>
-              <a:srgbClr val="E5E2DC"/>
-            </a:solidFill>
-            <a:prstDash val="solid"/>
-          </a:ln>
+          <a:ln/>
           <a:effectLst>
             <a:outerShdw sx="100000" sy="100000" kx="0" ky="0" algn="bl" rotWithShape="0" blurRad="50800" dist="25400" dir="8100000">
               <a:srgbClr val="000000">
@@ -1515,14 +1922,14 @@
       </p:sp>
       <p:sp>
         <p:nvSpPr>
-          <p:cNvPr id="5" name="Shape 3"/>
-          <p:cNvSpPr/>
-          <p:nvPr/>
-        </p:nvSpPr>
-        <p:spPr>
-          <a:xfrm>
-            <a:off x="1371600" y="914400"/>
-            <a:ext cx="91440" cy="3200400"/>
+          <p:cNvPr id="11" name="Shape 9"/>
+          <p:cNvSpPr/>
+          <p:nvPr/>
+        </p:nvSpPr>
+        <p:spPr>
+          <a:xfrm>
+            <a:off x="4754880" y="1051560"/>
+            <a:ext cx="54864" cy="658368"/>
           </a:xfrm>
           <a:prstGeom prst="rect">
             <a:avLst/>
@@ -1535,14 +1942,14 @@
       </p:sp>
       <p:sp>
         <p:nvSpPr>
-          <p:cNvPr id="6" name="Text 4"/>
-          <p:cNvSpPr/>
-          <p:nvPr/>
-        </p:nvSpPr>
-        <p:spPr>
-          <a:xfrm>
-            <a:off x="1828800" y="1097280"/>
-            <a:ext cx="5669280" cy="640080"/>
+          <p:cNvPr id="12" name="Text 10"/>
+          <p:cNvSpPr/>
+          <p:nvPr/>
+        </p:nvSpPr>
+        <p:spPr>
+          <a:xfrm>
+            <a:off x="4937760" y="1051560"/>
+            <a:ext cx="1463040" cy="658368"/>
           </a:xfrm>
           <a:prstGeom prst="rect">
             <a:avLst/>
@@ -1551,14 +1958,14 @@
           <a:ln/>
         </p:spPr>
         <p:txBody>
-          <a:bodyPr wrap="square" rtlCol="0" anchor="ctr"/>
+          <a:bodyPr wrap="square" lIns="0" tIns="0" rIns="0" bIns="0" rtlCol="0" anchor="ctr"/>
           <a:lstStyle/>
           <a:p>
             <a:pPr indent="0" marL="0">
               <a:buNone/>
             </a:pPr>
             <a:r>
-              <a:rPr lang="en-US" sz="2400" b="1" dirty="0">
+              <a:rPr lang="en-US" sz="1300" b="1" dirty="0">
                 <a:solidFill>
                   <a:srgbClr val="1B2A4A"/>
                 </a:solidFill>
@@ -1566,22 +1973,22 @@
                 <a:ea typeface="Georgia" pitchFamily="34" charset="-122"/>
                 <a:cs typeface="Georgia" pitchFamily="34" charset="-120"/>
               </a:rPr>
-              <a:t>Fractions, Decimals &amp; Percentages</a:t>
-            </a:r>
-            <a:endParaRPr lang="en-US" sz="2400" dirty="0"/>
+              <a:t>Percentage</a:t>
+            </a:r>
+            <a:endParaRPr lang="en-US" sz="1300" dirty="0"/>
           </a:p>
         </p:txBody>
       </p:sp>
       <p:sp>
         <p:nvSpPr>
-          <p:cNvPr id="7" name="Text 5"/>
-          <p:cNvSpPr/>
-          <p:nvPr/>
-        </p:nvSpPr>
-        <p:spPr>
-          <a:xfrm>
-            <a:off x="1828800" y="1828800"/>
-            <a:ext cx="5669280" cy="2011680"/>
+          <p:cNvPr id="13" name="Text 11"/>
+          <p:cNvSpPr/>
+          <p:nvPr/>
+        </p:nvSpPr>
+        <p:spPr>
+          <a:xfrm>
+            <a:off x="6400800" y="1051560"/>
+            <a:ext cx="1920240" cy="658368"/>
           </a:xfrm>
           <a:prstGeom prst="rect">
             <a:avLst/>
@@ -1590,27 +1997,274 @@
           <a:ln/>
         </p:spPr>
         <p:txBody>
-          <a:bodyPr wrap="square" rtlCol="0" anchor="t"/>
+          <a:bodyPr wrap="square" lIns="0" tIns="0" rIns="0" bIns="0" rtlCol="0" anchor="ctr"/>
           <a:lstStyle/>
           <a:p>
             <a:pPr indent="0" marL="0">
-              <a:lnSpc>
-                <a:spcPct val="130000"/>
-              </a:lnSpc>
               <a:buNone/>
             </a:pPr>
             <a:r>
-              <a:rPr lang="en-US" sz="1500" dirty="0">
+              <a:rPr lang="en-US" sz="1100" dirty="0">
                 <a:solidFill>
-                  <a:srgbClr val="3D3A36"/>
+                  <a:srgbClr val="6B6660"/>
                 </a:solidFill>
                 <a:latin typeface="Calibri" pitchFamily="34" charset="0"/>
                 <a:ea typeface="Calibri" pitchFamily="34" charset="-122"/>
                 <a:cs typeface="Calibri" pitchFamily="34" charset="-120"/>
               </a:rPr>
-              <a:t>These are three different ways to write the SAME value. ½ = 0.5 = 50%. Being able to convert between them is essential. Percentages are fractions out of 100. Decimals use place value to show parts less than 1.</a:t>
-            </a:r>
-            <a:endParaRPr lang="en-US" sz="1500" dirty="0"/>
+              <a:t>Out of 100 (e.g. 75%)</a:t>
+            </a:r>
+            <a:endParaRPr lang="en-US" sz="1100" dirty="0"/>
+          </a:p>
+        </p:txBody>
+      </p:sp>
+      <p:sp>
+        <p:nvSpPr>
+          <p:cNvPr id="14" name="Shape 12"/>
+          <p:cNvSpPr/>
+          <p:nvPr/>
+        </p:nvSpPr>
+        <p:spPr>
+          <a:xfrm>
+            <a:off x="731520" y="1819656"/>
+            <a:ext cx="3657600" cy="658368"/>
+          </a:xfrm>
+          <a:prstGeom prst="rect">
+            <a:avLst/>
+          </a:prstGeom>
+          <a:solidFill>
+            <a:srgbClr val="FFFFFF"/>
+          </a:solidFill>
+          <a:ln/>
+          <a:effectLst>
+            <a:outerShdw sx="100000" sy="100000" kx="0" ky="0" algn="bl" rotWithShape="0" blurRad="50800" dist="25400" dir="8100000">
+              <a:srgbClr val="000000">
+                <a:alpha val="10000"/>
+              </a:srgbClr>
+            </a:outerShdw>
+          </a:effectLst>
+        </p:spPr>
+      </p:sp>
+      <p:sp>
+        <p:nvSpPr>
+          <p:cNvPr id="15" name="Shape 13"/>
+          <p:cNvSpPr/>
+          <p:nvPr/>
+        </p:nvSpPr>
+        <p:spPr>
+          <a:xfrm>
+            <a:off x="731520" y="1819656"/>
+            <a:ext cx="54864" cy="658368"/>
+          </a:xfrm>
+          <a:prstGeom prst="rect">
+            <a:avLst/>
+          </a:prstGeom>
+          <a:solidFill>
+            <a:srgbClr val="2A9D8F"/>
+          </a:solidFill>
+          <a:ln/>
+        </p:spPr>
+      </p:sp>
+      <p:sp>
+        <p:nvSpPr>
+          <p:cNvPr id="16" name="Text 14"/>
+          <p:cNvSpPr/>
+          <p:nvPr/>
+        </p:nvSpPr>
+        <p:spPr>
+          <a:xfrm>
+            <a:off x="914400" y="1819656"/>
+            <a:ext cx="1463040" cy="658368"/>
+          </a:xfrm>
+          <a:prstGeom prst="rect">
+            <a:avLst/>
+          </a:prstGeom>
+          <a:noFill/>
+          <a:ln/>
+        </p:spPr>
+        <p:txBody>
+          <a:bodyPr wrap="square" lIns="0" tIns="0" rIns="0" bIns="0" rtlCol="0" anchor="ctr"/>
+          <a:lstStyle/>
+          <a:p>
+            <a:pPr indent="0" marL="0">
+              <a:buNone/>
+            </a:pPr>
+            <a:r>
+              <a:rPr lang="en-US" sz="1300" b="1" dirty="0">
+                <a:solidFill>
+                  <a:srgbClr val="1B2A4A"/>
+                </a:solidFill>
+                <a:latin typeface="Georgia" pitchFamily="34" charset="0"/>
+                <a:ea typeface="Georgia" pitchFamily="34" charset="-122"/>
+                <a:cs typeface="Georgia" pitchFamily="34" charset="-120"/>
+              </a:rPr>
+              <a:t>Convert</a:t>
+            </a:r>
+            <a:endParaRPr lang="en-US" sz="1300" dirty="0"/>
+          </a:p>
+        </p:txBody>
+      </p:sp>
+      <p:sp>
+        <p:nvSpPr>
+          <p:cNvPr id="17" name="Text 15"/>
+          <p:cNvSpPr/>
+          <p:nvPr/>
+        </p:nvSpPr>
+        <p:spPr>
+          <a:xfrm>
+            <a:off x="2377440" y="1819656"/>
+            <a:ext cx="1920240" cy="658368"/>
+          </a:xfrm>
+          <a:prstGeom prst="rect">
+            <a:avLst/>
+          </a:prstGeom>
+          <a:noFill/>
+          <a:ln/>
+        </p:spPr>
+        <p:txBody>
+          <a:bodyPr wrap="square" lIns="0" tIns="0" rIns="0" bIns="0" rtlCol="0" anchor="ctr"/>
+          <a:lstStyle/>
+          <a:p>
+            <a:pPr indent="0" marL="0">
+              <a:buNone/>
+            </a:pPr>
+            <a:r>
+              <a:rPr lang="en-US" sz="1100" dirty="0">
+                <a:solidFill>
+                  <a:srgbClr val="6B6660"/>
+                </a:solidFill>
+                <a:latin typeface="Calibri" pitchFamily="34" charset="0"/>
+                <a:ea typeface="Calibri" pitchFamily="34" charset="-122"/>
+                <a:cs typeface="Calibri" pitchFamily="34" charset="-120"/>
+              </a:rPr>
+              <a:t>Change from one form to another</a:t>
+            </a:r>
+            <a:endParaRPr lang="en-US" sz="1100" dirty="0"/>
+          </a:p>
+        </p:txBody>
+      </p:sp>
+      <p:sp>
+        <p:nvSpPr>
+          <p:cNvPr id="18" name="Shape 16"/>
+          <p:cNvSpPr/>
+          <p:nvPr/>
+        </p:nvSpPr>
+        <p:spPr>
+          <a:xfrm>
+            <a:off x="4754880" y="1819656"/>
+            <a:ext cx="3657600" cy="658368"/>
+          </a:xfrm>
+          <a:prstGeom prst="rect">
+            <a:avLst/>
+          </a:prstGeom>
+          <a:solidFill>
+            <a:srgbClr val="FFFFFF"/>
+          </a:solidFill>
+          <a:ln/>
+          <a:effectLst>
+            <a:outerShdw sx="100000" sy="100000" kx="0" ky="0" algn="bl" rotWithShape="0" blurRad="50800" dist="25400" dir="8100000">
+              <a:srgbClr val="000000">
+                <a:alpha val="10000"/>
+              </a:srgbClr>
+            </a:outerShdw>
+          </a:effectLst>
+        </p:spPr>
+      </p:sp>
+      <p:sp>
+        <p:nvSpPr>
+          <p:cNvPr id="19" name="Shape 17"/>
+          <p:cNvSpPr/>
+          <p:nvPr/>
+        </p:nvSpPr>
+        <p:spPr>
+          <a:xfrm>
+            <a:off x="4754880" y="1819656"/>
+            <a:ext cx="54864" cy="658368"/>
+          </a:xfrm>
+          <a:prstGeom prst="rect">
+            <a:avLst/>
+          </a:prstGeom>
+          <a:solidFill>
+            <a:srgbClr val="2A9D8F"/>
+          </a:solidFill>
+          <a:ln/>
+        </p:spPr>
+      </p:sp>
+      <p:sp>
+        <p:nvSpPr>
+          <p:cNvPr id="20" name="Text 18"/>
+          <p:cNvSpPr/>
+          <p:nvPr/>
+        </p:nvSpPr>
+        <p:spPr>
+          <a:xfrm>
+            <a:off x="4937760" y="1819656"/>
+            <a:ext cx="1463040" cy="658368"/>
+          </a:xfrm>
+          <a:prstGeom prst="rect">
+            <a:avLst/>
+          </a:prstGeom>
+          <a:noFill/>
+          <a:ln/>
+        </p:spPr>
+        <p:txBody>
+          <a:bodyPr wrap="square" lIns="0" tIns="0" rIns="0" bIns="0" rtlCol="0" anchor="ctr"/>
+          <a:lstStyle/>
+          <a:p>
+            <a:pPr indent="0" marL="0">
+              <a:buNone/>
+            </a:pPr>
+            <a:r>
+              <a:rPr lang="en-US" sz="1300" b="1" dirty="0">
+                <a:solidFill>
+                  <a:srgbClr val="1B2A4A"/>
+                </a:solidFill>
+                <a:latin typeface="Georgia" pitchFamily="34" charset="0"/>
+                <a:ea typeface="Georgia" pitchFamily="34" charset="-122"/>
+                <a:cs typeface="Georgia" pitchFamily="34" charset="-120"/>
+              </a:rPr>
+              <a:t>FDP</a:t>
+            </a:r>
+            <a:endParaRPr lang="en-US" sz="1300" dirty="0"/>
+          </a:p>
+        </p:txBody>
+      </p:sp>
+      <p:sp>
+        <p:nvSpPr>
+          <p:cNvPr id="21" name="Text 19"/>
+          <p:cNvSpPr/>
+          <p:nvPr/>
+        </p:nvSpPr>
+        <p:spPr>
+          <a:xfrm>
+            <a:off x="6400800" y="1819656"/>
+            <a:ext cx="1920240" cy="658368"/>
+          </a:xfrm>
+          <a:prstGeom prst="rect">
+            <a:avLst/>
+          </a:prstGeom>
+          <a:noFill/>
+          <a:ln/>
+        </p:spPr>
+        <p:txBody>
+          <a:bodyPr wrap="square" lIns="0" tIns="0" rIns="0" bIns="0" rtlCol="0" anchor="ctr"/>
+          <a:lstStyle/>
+          <a:p>
+            <a:pPr indent="0" marL="0">
+              <a:buNone/>
+            </a:pPr>
+            <a:r>
+              <a:rPr lang="en-US" sz="1100" dirty="0">
+                <a:solidFill>
+                  <a:srgbClr val="6B6660"/>
+                </a:solidFill>
+                <a:latin typeface="Calibri" pitchFamily="34" charset="0"/>
+                <a:ea typeface="Calibri" pitchFamily="34" charset="-122"/>
+                <a:cs typeface="Calibri" pitchFamily="34" charset="-120"/>
+              </a:rPr>
+              <a:t>Fractions, Decimals, Percentages</a:t>
+            </a:r>
+            <a:endParaRPr lang="en-US" sz="1100" dirty="0"/>
           </a:p>
         </p:txBody>
       </p:sp>
@@ -1655,7 +2309,47 @@
         <p:spPr>
           <a:xfrm>
             <a:off x="0" y="0"/>
-            <a:ext cx="9144000" cy="54864"/>
+            <a:ext cx="9144000" cy="822960"/>
+          </a:xfrm>
+          <a:prstGeom prst="rect">
+            <a:avLst/>
+          </a:prstGeom>
+          <a:solidFill>
+            <a:srgbClr val="FFFFFF"/>
+          </a:solidFill>
+          <a:ln/>
+        </p:spPr>
+      </p:sp>
+      <p:sp>
+        <p:nvSpPr>
+          <p:cNvPr id="3" name="Shape 1"/>
+          <p:cNvSpPr/>
+          <p:nvPr/>
+        </p:nvSpPr>
+        <p:spPr>
+          <a:xfrm>
+            <a:off x="0" y="804672"/>
+            <a:ext cx="9144000" cy="27432"/>
+          </a:xfrm>
+          <a:prstGeom prst="rect">
+            <a:avLst/>
+          </a:prstGeom>
+          <a:solidFill>
+            <a:srgbClr val="E5E2DC"/>
+          </a:solidFill>
+          <a:ln/>
+        </p:spPr>
+      </p:sp>
+      <p:sp>
+        <p:nvSpPr>
+          <p:cNvPr id="4" name="Shape 2"/>
+          <p:cNvSpPr/>
+          <p:nvPr/>
+        </p:nvSpPr>
+        <p:spPr>
+          <a:xfrm>
+            <a:off x="548640" y="201168"/>
+            <a:ext cx="54864" cy="420624"/>
           </a:xfrm>
           <a:prstGeom prst="rect">
             <a:avLst/>
@@ -1668,14 +2362,14 @@
       </p:sp>
       <p:sp>
         <p:nvSpPr>
-          <p:cNvPr id="3" name="Text 1"/>
-          <p:cNvSpPr/>
-          <p:nvPr/>
-        </p:nvSpPr>
-        <p:spPr>
-          <a:xfrm>
-            <a:off x="7772400" y="4709160"/>
-            <a:ext cx="1097280" cy="320040"/>
+          <p:cNvPr id="5" name="Text 3"/>
+          <p:cNvSpPr/>
+          <p:nvPr/>
+        </p:nvSpPr>
+        <p:spPr>
+          <a:xfrm>
+            <a:off x="777240" y="137160"/>
+            <a:ext cx="7772400" cy="548640"/>
           </a:xfrm>
           <a:prstGeom prst="rect">
             <a:avLst/>
@@ -1684,53 +2378,14 @@
           <a:ln/>
         </p:spPr>
         <p:txBody>
-          <a:bodyPr wrap="square" rtlCol="0" anchor="ctr"/>
-          <a:lstStyle/>
-          <a:p>
-            <a:pPr algn="r" indent="0" marL="0">
-              <a:buNone/>
-            </a:pPr>
-            <a:r>
-              <a:rPr lang="en-US" sz="900" dirty="0">
-                <a:solidFill>
-                  <a:srgbClr val="6B6660"/>
-                </a:solidFill>
-                <a:latin typeface="Calibri" pitchFamily="34" charset="0"/>
-                <a:ea typeface="Calibri" pitchFamily="34" charset="-122"/>
-                <a:cs typeface="Calibri" pitchFamily="34" charset="-120"/>
-              </a:rPr>
-              <a:t>3 / 5</a:t>
-            </a:r>
-            <a:endParaRPr lang="en-US" sz="900" dirty="0"/>
-          </a:p>
-        </p:txBody>
-      </p:sp>
-      <p:sp>
-        <p:nvSpPr>
-          <p:cNvPr id="4" name="Text 2"/>
-          <p:cNvSpPr/>
-          <p:nvPr/>
-        </p:nvSpPr>
-        <p:spPr>
-          <a:xfrm>
-            <a:off x="457200" y="274320"/>
-            <a:ext cx="8229600" cy="640080"/>
-          </a:xfrm>
-          <a:prstGeom prst="rect">
-            <a:avLst/>
-          </a:prstGeom>
-          <a:noFill/>
-          <a:ln/>
-        </p:spPr>
-        <p:txBody>
-          <a:bodyPr wrap="square" rtlCol="0" anchor="ctr"/>
+          <a:bodyPr wrap="square" lIns="0" tIns="0" rIns="0" bIns="0" rtlCol="0" anchor="ctr"/>
           <a:lstStyle/>
           <a:p>
             <a:pPr indent="0" marL="0">
               <a:buNone/>
             </a:pPr>
             <a:r>
-              <a:rPr lang="en-US" sz="2600" b="1" dirty="0">
+              <a:rPr lang="en-US" sz="2000" b="1" dirty="0">
                 <a:solidFill>
                   <a:srgbClr val="1B2A4A"/>
                 </a:solidFill>
@@ -1738,402 +2393,1485 @@
                 <a:ea typeface="Georgia" pitchFamily="34" charset="-122"/>
                 <a:cs typeface="Georgia" pitchFamily="34" charset="-120"/>
               </a:rPr>
-              <a:t>Converting Between Forms</a:t>
-            </a:r>
-            <a:endParaRPr lang="en-US" sz="2600" dirty="0"/>
+              <a:t>Key FDP Equivalents You Must Know</a:t>
+            </a:r>
+            <a:endParaRPr lang="en-US" sz="2000" dirty="0"/>
           </a:p>
         </p:txBody>
       </p:sp>
-      <p:sp>
-        <p:nvSpPr>
-          <p:cNvPr id="5" name="Shape 3"/>
-          <p:cNvSpPr/>
-          <p:nvPr/>
-        </p:nvSpPr>
-        <p:spPr>
-          <a:xfrm>
-            <a:off x="457200" y="1188720"/>
-            <a:ext cx="2560320" cy="1828800"/>
-          </a:xfrm>
-          <a:prstGeom prst="rect">
-            <a:avLst/>
-          </a:prstGeom>
-          <a:solidFill>
-            <a:srgbClr val="FFFFFF"/>
-          </a:solidFill>
-          <a:ln w="12700">
-            <a:solidFill>
-              <a:srgbClr val="E5E2DC"/>
-            </a:solidFill>
-            <a:prstDash val="solid"/>
-          </a:ln>
-          <a:effectLst>
-            <a:outerShdw sx="100000" sy="100000" kx="0" ky="0" algn="bl" rotWithShape="0" blurRad="50800" dist="25400" dir="8100000">
-              <a:srgbClr val="000000">
-                <a:alpha val="10000"/>
-              </a:srgbClr>
-            </a:outerShdw>
-          </a:effectLst>
-        </p:spPr>
-      </p:sp>
-      <p:sp>
-        <p:nvSpPr>
-          <p:cNvPr id="6" name="Shape 4"/>
-          <p:cNvSpPr/>
-          <p:nvPr/>
-        </p:nvSpPr>
-        <p:spPr>
-          <a:xfrm>
-            <a:off x="457200" y="1188720"/>
-            <a:ext cx="2560320" cy="54864"/>
-          </a:xfrm>
-          <a:prstGeom prst="rect">
-            <a:avLst/>
-          </a:prstGeom>
-          <a:solidFill>
-            <a:srgbClr val="2A9D8F"/>
-          </a:solidFill>
-          <a:ln/>
-        </p:spPr>
-      </p:sp>
-      <p:sp>
-        <p:nvSpPr>
-          <p:cNvPr id="7" name="Text 5"/>
-          <p:cNvSpPr/>
-          <p:nvPr/>
-        </p:nvSpPr>
-        <p:spPr>
-          <a:xfrm>
-            <a:off x="594360" y="1325880"/>
-            <a:ext cx="2286000" cy="365760"/>
-          </a:xfrm>
-          <a:prstGeom prst="rect">
-            <a:avLst/>
-          </a:prstGeom>
-          <a:noFill/>
-          <a:ln/>
-        </p:spPr>
-        <p:txBody>
-          <a:bodyPr wrap="square" rtlCol="0" anchor="ctr"/>
-          <a:lstStyle/>
-          <a:p>
-            <a:pPr indent="0" marL="0">
-              <a:buNone/>
-            </a:pPr>
-            <a:r>
-              <a:rPr lang="en-US" sz="1400" b="1" dirty="0">
-                <a:solidFill>
-                  <a:srgbClr val="1B2A4A"/>
-                </a:solidFill>
-                <a:latin typeface="Calibri" pitchFamily="34" charset="0"/>
-                <a:ea typeface="Calibri" pitchFamily="34" charset="-122"/>
-                <a:cs typeface="Calibri" pitchFamily="34" charset="-120"/>
-              </a:rPr>
-              <a:t>Fraction → Decimal</a:t>
-            </a:r>
-            <a:endParaRPr lang="en-US" sz="1400" dirty="0"/>
-          </a:p>
-        </p:txBody>
-      </p:sp>
-      <p:sp>
-        <p:nvSpPr>
-          <p:cNvPr id="8" name="Text 6"/>
-          <p:cNvSpPr/>
-          <p:nvPr/>
-        </p:nvSpPr>
-        <p:spPr>
-          <a:xfrm>
-            <a:off x="594360" y="1737360"/>
-            <a:ext cx="2286000" cy="1097280"/>
-          </a:xfrm>
-          <a:prstGeom prst="rect">
-            <a:avLst/>
-          </a:prstGeom>
-          <a:noFill/>
-          <a:ln/>
-        </p:spPr>
-        <p:txBody>
-          <a:bodyPr wrap="square" rtlCol="0" anchor="t"/>
-          <a:lstStyle/>
-          <a:p>
-            <a:pPr indent="0" marL="0">
-              <a:buNone/>
-            </a:pPr>
-            <a:r>
-              <a:rPr lang="en-US" sz="1100" dirty="0">
-                <a:solidFill>
-                  <a:srgbClr val="3D3A36"/>
-                </a:solidFill>
-                <a:latin typeface="Calibri" pitchFamily="34" charset="0"/>
-                <a:ea typeface="Calibri" pitchFamily="34" charset="-122"/>
-                <a:cs typeface="Calibri" pitchFamily="34" charset="-120"/>
-              </a:rPr>
-              <a:t>Divide numerator by denominator. ³⁄₄ = 3 ÷ 4 = 0.75. ¹⁄₃ = 1 ÷ 3 = 0.333... (recurring).</a:t>
-            </a:r>
-            <a:endParaRPr lang="en-US" sz="1100" dirty="0"/>
-          </a:p>
-        </p:txBody>
-      </p:sp>
-      <p:sp>
-        <p:nvSpPr>
-          <p:cNvPr id="9" name="Shape 7"/>
-          <p:cNvSpPr/>
-          <p:nvPr/>
-        </p:nvSpPr>
-        <p:spPr>
-          <a:xfrm>
-            <a:off x="3291840" y="1188720"/>
-            <a:ext cx="2560320" cy="1828800"/>
-          </a:xfrm>
-          <a:prstGeom prst="rect">
-            <a:avLst/>
-          </a:prstGeom>
-          <a:solidFill>
-            <a:srgbClr val="FFFFFF"/>
-          </a:solidFill>
-          <a:ln w="12700">
-            <a:solidFill>
-              <a:srgbClr val="E5E2DC"/>
-            </a:solidFill>
-            <a:prstDash val="solid"/>
-          </a:ln>
-          <a:effectLst>
-            <a:outerShdw sx="100000" sy="100000" kx="0" ky="0" algn="bl" rotWithShape="0" blurRad="50800" dist="25400" dir="8100000">
-              <a:srgbClr val="000000">
-                <a:alpha val="10000"/>
-              </a:srgbClr>
-            </a:outerShdw>
-          </a:effectLst>
-        </p:spPr>
-      </p:sp>
-      <p:sp>
-        <p:nvSpPr>
-          <p:cNvPr id="10" name="Shape 8"/>
-          <p:cNvSpPr/>
-          <p:nvPr/>
-        </p:nvSpPr>
-        <p:spPr>
-          <a:xfrm>
-            <a:off x="3291840" y="1188720"/>
-            <a:ext cx="2560320" cy="54864"/>
-          </a:xfrm>
-          <a:prstGeom prst="rect">
-            <a:avLst/>
-          </a:prstGeom>
-          <a:solidFill>
-            <a:srgbClr val="2A9D8F"/>
-          </a:solidFill>
-          <a:ln/>
-        </p:spPr>
-      </p:sp>
-      <p:sp>
-        <p:nvSpPr>
-          <p:cNvPr id="11" name="Text 9"/>
-          <p:cNvSpPr/>
-          <p:nvPr/>
-        </p:nvSpPr>
-        <p:spPr>
-          <a:xfrm>
-            <a:off x="3429000" y="1325880"/>
-            <a:ext cx="2286000" cy="365760"/>
-          </a:xfrm>
-          <a:prstGeom prst="rect">
-            <a:avLst/>
-          </a:prstGeom>
-          <a:noFill/>
-          <a:ln/>
-        </p:spPr>
-        <p:txBody>
-          <a:bodyPr wrap="square" rtlCol="0" anchor="ctr"/>
-          <a:lstStyle/>
-          <a:p>
-            <a:pPr indent="0" marL="0">
-              <a:buNone/>
-            </a:pPr>
-            <a:r>
-              <a:rPr lang="en-US" sz="1400" b="1" dirty="0">
-                <a:solidFill>
-                  <a:srgbClr val="1B2A4A"/>
-                </a:solidFill>
-                <a:latin typeface="Calibri" pitchFamily="34" charset="0"/>
-                <a:ea typeface="Calibri" pitchFamily="34" charset="-122"/>
-                <a:cs typeface="Calibri" pitchFamily="34" charset="-120"/>
-              </a:rPr>
-              <a:t>Decimal → Percentage</a:t>
-            </a:r>
-            <a:endParaRPr lang="en-US" sz="1400" dirty="0"/>
-          </a:p>
-        </p:txBody>
-      </p:sp>
-      <p:sp>
-        <p:nvSpPr>
-          <p:cNvPr id="12" name="Text 10"/>
-          <p:cNvSpPr/>
-          <p:nvPr/>
-        </p:nvSpPr>
-        <p:spPr>
-          <a:xfrm>
-            <a:off x="3429000" y="1737360"/>
-            <a:ext cx="2286000" cy="1097280"/>
-          </a:xfrm>
-          <a:prstGeom prst="rect">
-            <a:avLst/>
-          </a:prstGeom>
-          <a:noFill/>
-          <a:ln/>
-        </p:spPr>
-        <p:txBody>
-          <a:bodyPr wrap="square" rtlCol="0" anchor="t"/>
-          <a:lstStyle/>
-          <a:p>
-            <a:pPr indent="0" marL="0">
-              <a:buNone/>
-            </a:pPr>
-            <a:r>
-              <a:rPr lang="en-US" sz="1100" dirty="0">
-                <a:solidFill>
-                  <a:srgbClr val="3D3A36"/>
-                </a:solidFill>
-                <a:latin typeface="Calibri" pitchFamily="34" charset="0"/>
-                <a:ea typeface="Calibri" pitchFamily="34" charset="-122"/>
-                <a:cs typeface="Calibri" pitchFamily="34" charset="-120"/>
-              </a:rPr>
-              <a:t>Multiply by 100. 0.75 × 100 = 75%. 0.3 × 100 = 30%. Just move the decimal point two places right.</a:t>
-            </a:r>
-            <a:endParaRPr lang="en-US" sz="1100" dirty="0"/>
-          </a:p>
-        </p:txBody>
-      </p:sp>
-      <p:sp>
-        <p:nvSpPr>
-          <p:cNvPr id="13" name="Shape 11"/>
-          <p:cNvSpPr/>
-          <p:nvPr/>
-        </p:nvSpPr>
-        <p:spPr>
-          <a:xfrm>
-            <a:off x="6126480" y="1188720"/>
-            <a:ext cx="2560320" cy="1828800"/>
-          </a:xfrm>
-          <a:prstGeom prst="rect">
-            <a:avLst/>
-          </a:prstGeom>
-          <a:solidFill>
-            <a:srgbClr val="FFFFFF"/>
-          </a:solidFill>
-          <a:ln w="12700">
-            <a:solidFill>
-              <a:srgbClr val="E5E2DC"/>
-            </a:solidFill>
-            <a:prstDash val="solid"/>
-          </a:ln>
-          <a:effectLst>
-            <a:outerShdw sx="100000" sy="100000" kx="0" ky="0" algn="bl" rotWithShape="0" blurRad="50800" dist="25400" dir="8100000">
-              <a:srgbClr val="000000">
-                <a:alpha val="10000"/>
-              </a:srgbClr>
-            </a:outerShdw>
-          </a:effectLst>
-        </p:spPr>
-      </p:sp>
-      <p:sp>
-        <p:nvSpPr>
-          <p:cNvPr id="14" name="Shape 12"/>
-          <p:cNvSpPr/>
-          <p:nvPr/>
-        </p:nvSpPr>
-        <p:spPr>
-          <a:xfrm>
-            <a:off x="6126480" y="1188720"/>
-            <a:ext cx="2560320" cy="54864"/>
-          </a:xfrm>
-          <a:prstGeom prst="rect">
-            <a:avLst/>
-          </a:prstGeom>
-          <a:solidFill>
-            <a:srgbClr val="2A9D8F"/>
-          </a:solidFill>
-          <a:ln/>
-        </p:spPr>
-      </p:sp>
-      <p:sp>
-        <p:nvSpPr>
-          <p:cNvPr id="15" name="Text 13"/>
-          <p:cNvSpPr/>
-          <p:nvPr/>
-        </p:nvSpPr>
-        <p:spPr>
-          <a:xfrm>
-            <a:off x="6263640" y="1325880"/>
-            <a:ext cx="2286000" cy="365760"/>
-          </a:xfrm>
-          <a:prstGeom prst="rect">
-            <a:avLst/>
-          </a:prstGeom>
-          <a:noFill/>
-          <a:ln/>
-        </p:spPr>
-        <p:txBody>
-          <a:bodyPr wrap="square" rtlCol="0" anchor="ctr"/>
-          <a:lstStyle/>
-          <a:p>
-            <a:pPr indent="0" marL="0">
-              <a:buNone/>
-            </a:pPr>
-            <a:r>
-              <a:rPr lang="en-US" sz="1400" b="1" dirty="0">
-                <a:solidFill>
-                  <a:srgbClr val="1B2A4A"/>
-                </a:solidFill>
-                <a:latin typeface="Calibri" pitchFamily="34" charset="0"/>
-                <a:ea typeface="Calibri" pitchFamily="34" charset="-122"/>
-                <a:cs typeface="Calibri" pitchFamily="34" charset="-120"/>
-              </a:rPr>
-              <a:t>Percentage → Fraction</a:t>
-            </a:r>
-            <a:endParaRPr lang="en-US" sz="1400" dirty="0"/>
-          </a:p>
-        </p:txBody>
-      </p:sp>
-      <p:sp>
-        <p:nvSpPr>
-          <p:cNvPr id="16" name="Text 14"/>
-          <p:cNvSpPr/>
-          <p:nvPr/>
-        </p:nvSpPr>
-        <p:spPr>
-          <a:xfrm>
-            <a:off x="6263640" y="1737360"/>
-            <a:ext cx="2286000" cy="1097280"/>
-          </a:xfrm>
-          <a:prstGeom prst="rect">
-            <a:avLst/>
-          </a:prstGeom>
-          <a:noFill/>
-          <a:ln/>
-        </p:spPr>
-        <p:txBody>
-          <a:bodyPr wrap="square" rtlCol="0" anchor="t"/>
-          <a:lstStyle/>
-          <a:p>
-            <a:pPr indent="0" marL="0">
-              <a:buNone/>
-            </a:pPr>
-            <a:r>
-              <a:rPr lang="en-US" sz="1100" dirty="0">
-                <a:solidFill>
-                  <a:srgbClr val="3D3A36"/>
-                </a:solidFill>
-                <a:latin typeface="Calibri" pitchFamily="34" charset="0"/>
-                <a:ea typeface="Calibri" pitchFamily="34" charset="-122"/>
-                <a:cs typeface="Calibri" pitchFamily="34" charset="-120"/>
-              </a:rPr>
-              <a:t>Write over 100 and simplify. 75% = ⁷⁵⁄₁₀₀ = ³⁄₄. 40% = ⁴⁰⁄₁₀₀ = ²⁄₅.</a:t>
-            </a:r>
-            <a:endParaRPr lang="en-US" sz="1100" dirty="0"/>
-          </a:p>
-        </p:txBody>
-      </p:sp>
+      <p:graphicFrame>
+        <p:nvGraphicFramePr>
+          <p:cNvPr id="4" name="Table 0"/>
+          <p:cNvGraphicFramePr>
+            <a:graphicFrameLocks noGrp="1"/>
+          </p:cNvGraphicFramePr>
+          <p:nvPr>
+            <p:extLst>
+              <p:ext uri="{D42A27DB-BD31-4B8C-83A1-F6EECF244321}">
+                <p14:modId xmlns:p14="http://schemas.microsoft.com/office/powerpoint/2010/main" val="1579011935"/>
+              </p:ext>
+            </p:extLst>
+          </p:nvPr>
+        </p:nvGraphicFramePr>
+        <p:xfrm>
+          <a:off x="640080" y="1051560"/>
+          <a:ext cx="7863840" cy="914400"/>
+        </p:xfrm>
+        <a:graphic>
+          <a:graphicData uri="http://schemas.openxmlformats.org/drawingml/2006/table">
+            <a:tbl>
+              <a:tblPr/>
+              <a:tblGrid>
+                <a:gridCol w="2621280"/>
+                <a:gridCol w="2621280"/>
+                <a:gridCol w="2621280"/>
+              </a:tblGrid>
+              <a:tr h="502920">
+                <a:tc>
+                  <a:txBody>
+                    <a:bodyPr/>
+                    <a:lstStyle/>
+                    <a:p>
+                      <a:pPr indent="0" marL="0">
+                        <a:buNone/>
+                      </a:pPr>
+                      <a:r>
+                        <a:rPr lang="en-US" sz="1200" b="1" dirty="0">
+                          <a:solidFill>
+                            <a:srgbClr val="FFFFFF"/>
+                          </a:solidFill>
+                          <a:latin typeface="Calibri" pitchFamily="34" charset="0"/>
+                          <a:ea typeface="Calibri" pitchFamily="34" charset="-122"/>
+                          <a:cs typeface="Calibri" pitchFamily="34" charset="-120"/>
+                        </a:rPr>
+                        <a:t>Fraction</a:t>
+                      </a:r>
+                      <a:endParaRPr lang="en-US" sz="1200" dirty="0">
+                        <a:latin typeface="Calibri" charset="0"/>
+                        <a:ea typeface="Calibri" charset="0"/>
+                        <a:cs typeface="Calibri" charset="0"/>
+                      </a:endParaRPr>
+                    </a:p>
+                  </a:txBody>
+                  <a:tcPr marL="91440" marR="91440" marT="45720" marB="45720">
+                    <a:lnL w="6350" cap="flat" cmpd="sng" algn="ctr">
+                      <a:solidFill>
+                        <a:srgbClr val="E5E2DC"/>
+                      </a:solidFill>
+                      <a:prstDash val="solid"/>
+                      <a:round/>
+                      <a:headEnd type="none" w="med" len="med"/>
+                      <a:tailEnd type="none" w="med" len="med"/>
+                    </a:lnL>
+                    <a:lnR w="6350" cap="flat" cmpd="sng" algn="ctr">
+                      <a:solidFill>
+                        <a:srgbClr val="E5E2DC"/>
+                      </a:solidFill>
+                      <a:prstDash val="solid"/>
+                      <a:round/>
+                      <a:headEnd type="none" w="med" len="med"/>
+                      <a:tailEnd type="none" w="med" len="med"/>
+                    </a:lnR>
+                    <a:lnT w="6350" cap="flat" cmpd="sng" algn="ctr">
+                      <a:solidFill>
+                        <a:srgbClr val="E5E2DC"/>
+                      </a:solidFill>
+                      <a:prstDash val="solid"/>
+                      <a:round/>
+                      <a:headEnd type="none" w="med" len="med"/>
+                      <a:tailEnd type="none" w="med" len="med"/>
+                    </a:lnT>
+                    <a:lnB w="6350" cap="flat" cmpd="sng" algn="ctr">
+                      <a:solidFill>
+                        <a:srgbClr val="E5E2DC"/>
+                      </a:solidFill>
+                      <a:prstDash val="solid"/>
+                      <a:round/>
+                      <a:headEnd type="none" w="med" len="med"/>
+                      <a:tailEnd type="none" w="med" len="med"/>
+                    </a:lnB>
+                    <a:solidFill>
+                      <a:srgbClr val="2A9D8F"/>
+                    </a:solidFill>
+                  </a:tcPr>
+                </a:tc>
+                <a:tc>
+                  <a:txBody>
+                    <a:bodyPr/>
+                    <a:lstStyle/>
+                    <a:p>
+                      <a:pPr indent="0" marL="0">
+                        <a:buNone/>
+                      </a:pPr>
+                      <a:r>
+                        <a:rPr lang="en-US" sz="1200" b="1" dirty="0">
+                          <a:solidFill>
+                            <a:srgbClr val="FFFFFF"/>
+                          </a:solidFill>
+                          <a:latin typeface="Calibri" pitchFamily="34" charset="0"/>
+                          <a:ea typeface="Calibri" pitchFamily="34" charset="-122"/>
+                          <a:cs typeface="Calibri" pitchFamily="34" charset="-120"/>
+                        </a:rPr>
+                        <a:t>Decimal</a:t>
+                      </a:r>
+                      <a:endParaRPr lang="en-US" sz="1200" dirty="0">
+                        <a:latin typeface="Calibri" charset="0"/>
+                        <a:ea typeface="Calibri" charset="0"/>
+                        <a:cs typeface="Calibri" charset="0"/>
+                      </a:endParaRPr>
+                    </a:p>
+                  </a:txBody>
+                  <a:tcPr marL="91440" marR="91440" marT="45720" marB="45720">
+                    <a:lnL w="6350" cap="flat" cmpd="sng" algn="ctr">
+                      <a:solidFill>
+                        <a:srgbClr val="E5E2DC"/>
+                      </a:solidFill>
+                      <a:prstDash val="solid"/>
+                      <a:round/>
+                      <a:headEnd type="none" w="med" len="med"/>
+                      <a:tailEnd type="none" w="med" len="med"/>
+                    </a:lnL>
+                    <a:lnR w="6350" cap="flat" cmpd="sng" algn="ctr">
+                      <a:solidFill>
+                        <a:srgbClr val="E5E2DC"/>
+                      </a:solidFill>
+                      <a:prstDash val="solid"/>
+                      <a:round/>
+                      <a:headEnd type="none" w="med" len="med"/>
+                      <a:tailEnd type="none" w="med" len="med"/>
+                    </a:lnR>
+                    <a:lnT w="6350" cap="flat" cmpd="sng" algn="ctr">
+                      <a:solidFill>
+                        <a:srgbClr val="E5E2DC"/>
+                      </a:solidFill>
+                      <a:prstDash val="solid"/>
+                      <a:round/>
+                      <a:headEnd type="none" w="med" len="med"/>
+                      <a:tailEnd type="none" w="med" len="med"/>
+                    </a:lnT>
+                    <a:lnB w="6350" cap="flat" cmpd="sng" algn="ctr">
+                      <a:solidFill>
+                        <a:srgbClr val="E5E2DC"/>
+                      </a:solidFill>
+                      <a:prstDash val="solid"/>
+                      <a:round/>
+                      <a:headEnd type="none" w="med" len="med"/>
+                      <a:tailEnd type="none" w="med" len="med"/>
+                    </a:lnB>
+                    <a:solidFill>
+                      <a:srgbClr val="2A9D8F"/>
+                    </a:solidFill>
+                  </a:tcPr>
+                </a:tc>
+                <a:tc>
+                  <a:txBody>
+                    <a:bodyPr/>
+                    <a:lstStyle/>
+                    <a:p>
+                      <a:pPr indent="0" marL="0">
+                        <a:buNone/>
+                      </a:pPr>
+                      <a:r>
+                        <a:rPr lang="en-US" sz="1200" b="1" dirty="0">
+                          <a:solidFill>
+                            <a:srgbClr val="FFFFFF"/>
+                          </a:solidFill>
+                          <a:latin typeface="Calibri" pitchFamily="34" charset="0"/>
+                          <a:ea typeface="Calibri" pitchFamily="34" charset="-122"/>
+                          <a:cs typeface="Calibri" pitchFamily="34" charset="-120"/>
+                        </a:rPr>
+                        <a:t>Percentage</a:t>
+                      </a:r>
+                      <a:endParaRPr lang="en-US" sz="1200" dirty="0">
+                        <a:latin typeface="Calibri" charset="0"/>
+                        <a:ea typeface="Calibri" charset="0"/>
+                        <a:cs typeface="Calibri" charset="0"/>
+                      </a:endParaRPr>
+                    </a:p>
+                  </a:txBody>
+                  <a:tcPr marL="91440" marR="91440" marT="45720" marB="45720">
+                    <a:lnL w="6350" cap="flat" cmpd="sng" algn="ctr">
+                      <a:solidFill>
+                        <a:srgbClr val="E5E2DC"/>
+                      </a:solidFill>
+                      <a:prstDash val="solid"/>
+                      <a:round/>
+                      <a:headEnd type="none" w="med" len="med"/>
+                      <a:tailEnd type="none" w="med" len="med"/>
+                    </a:lnL>
+                    <a:lnR w="6350" cap="flat" cmpd="sng" algn="ctr">
+                      <a:solidFill>
+                        <a:srgbClr val="E5E2DC"/>
+                      </a:solidFill>
+                      <a:prstDash val="solid"/>
+                      <a:round/>
+                      <a:headEnd type="none" w="med" len="med"/>
+                      <a:tailEnd type="none" w="med" len="med"/>
+                    </a:lnR>
+                    <a:lnT w="6350" cap="flat" cmpd="sng" algn="ctr">
+                      <a:solidFill>
+                        <a:srgbClr val="E5E2DC"/>
+                      </a:solidFill>
+                      <a:prstDash val="solid"/>
+                      <a:round/>
+                      <a:headEnd type="none" w="med" len="med"/>
+                      <a:tailEnd type="none" w="med" len="med"/>
+                    </a:lnT>
+                    <a:lnB w="6350" cap="flat" cmpd="sng" algn="ctr">
+                      <a:solidFill>
+                        <a:srgbClr val="E5E2DC"/>
+                      </a:solidFill>
+                      <a:prstDash val="solid"/>
+                      <a:round/>
+                      <a:headEnd type="none" w="med" len="med"/>
+                      <a:tailEnd type="none" w="med" len="med"/>
+                    </a:lnB>
+                    <a:solidFill>
+                      <a:srgbClr val="2A9D8F"/>
+                    </a:solidFill>
+                  </a:tcPr>
+                </a:tc>
+              </a:tr>
+              <a:tr h="502920">
+                <a:tc>
+                  <a:txBody>
+                    <a:bodyPr/>
+                    <a:lstStyle/>
+                    <a:p>
+                      <a:pPr indent="0" marL="0">
+                        <a:buNone/>
+                      </a:pPr>
+                      <a:r>
+                        <a:rPr lang="en-US" sz="1200" dirty="0">
+                          <a:solidFill>
+                            <a:srgbClr val="3D3A36"/>
+                          </a:solidFill>
+                          <a:latin typeface="Calibri" pitchFamily="34" charset="0"/>
+                          <a:ea typeface="Calibri" pitchFamily="34" charset="-122"/>
+                          <a:cs typeface="Calibri" pitchFamily="34" charset="-120"/>
+                        </a:rPr>
+                        <a:t>½</a:t>
+                      </a:r>
+                      <a:endParaRPr lang="en-US" sz="1200" dirty="0">
+                        <a:latin typeface="Calibri" charset="0"/>
+                        <a:ea typeface="Calibri" charset="0"/>
+                        <a:cs typeface="Calibri" charset="0"/>
+                      </a:endParaRPr>
+                    </a:p>
+                  </a:txBody>
+                  <a:tcPr marL="91440" marR="91440" marT="45720" marB="45720">
+                    <a:lnL w="6350" cap="flat" cmpd="sng" algn="ctr">
+                      <a:solidFill>
+                        <a:srgbClr val="E5E2DC"/>
+                      </a:solidFill>
+                      <a:prstDash val="solid"/>
+                      <a:round/>
+                      <a:headEnd type="none" w="med" len="med"/>
+                      <a:tailEnd type="none" w="med" len="med"/>
+                    </a:lnL>
+                    <a:lnR w="6350" cap="flat" cmpd="sng" algn="ctr">
+                      <a:solidFill>
+                        <a:srgbClr val="E5E2DC"/>
+                      </a:solidFill>
+                      <a:prstDash val="solid"/>
+                      <a:round/>
+                      <a:headEnd type="none" w="med" len="med"/>
+                      <a:tailEnd type="none" w="med" len="med"/>
+                    </a:lnR>
+                    <a:lnT w="6350" cap="flat" cmpd="sng" algn="ctr">
+                      <a:solidFill>
+                        <a:srgbClr val="E5E2DC"/>
+                      </a:solidFill>
+                      <a:prstDash val="solid"/>
+                      <a:round/>
+                      <a:headEnd type="none" w="med" len="med"/>
+                      <a:tailEnd type="none" w="med" len="med"/>
+                    </a:lnT>
+                    <a:lnB w="6350" cap="flat" cmpd="sng" algn="ctr">
+                      <a:solidFill>
+                        <a:srgbClr val="E5E2DC"/>
+                      </a:solidFill>
+                      <a:prstDash val="solid"/>
+                      <a:round/>
+                      <a:headEnd type="none" w="med" len="med"/>
+                      <a:tailEnd type="none" w="med" len="med"/>
+                    </a:lnB>
+                    <a:solidFill>
+                      <a:srgbClr val="FFFFFF"/>
+                    </a:solidFill>
+                  </a:tcPr>
+                </a:tc>
+                <a:tc>
+                  <a:txBody>
+                    <a:bodyPr/>
+                    <a:lstStyle/>
+                    <a:p>
+                      <a:pPr indent="0" marL="0">
+                        <a:buNone/>
+                      </a:pPr>
+                      <a:r>
+                        <a:rPr lang="en-US" sz="1200" dirty="0">
+                          <a:solidFill>
+                            <a:srgbClr val="3D3A36"/>
+                          </a:solidFill>
+                          <a:latin typeface="Calibri" pitchFamily="34" charset="0"/>
+                          <a:ea typeface="Calibri" pitchFamily="34" charset="-122"/>
+                          <a:cs typeface="Calibri" pitchFamily="34" charset="-120"/>
+                        </a:rPr>
+                        <a:t>0.5</a:t>
+                      </a:r>
+                      <a:endParaRPr lang="en-US" sz="1200" dirty="0">
+                        <a:latin typeface="Calibri" charset="0"/>
+                        <a:ea typeface="Calibri" charset="0"/>
+                        <a:cs typeface="Calibri" charset="0"/>
+                      </a:endParaRPr>
+                    </a:p>
+                  </a:txBody>
+                  <a:tcPr marL="91440" marR="91440" marT="45720" marB="45720">
+                    <a:lnL w="6350" cap="flat" cmpd="sng" algn="ctr">
+                      <a:solidFill>
+                        <a:srgbClr val="E5E2DC"/>
+                      </a:solidFill>
+                      <a:prstDash val="solid"/>
+                      <a:round/>
+                      <a:headEnd type="none" w="med" len="med"/>
+                      <a:tailEnd type="none" w="med" len="med"/>
+                    </a:lnL>
+                    <a:lnR w="6350" cap="flat" cmpd="sng" algn="ctr">
+                      <a:solidFill>
+                        <a:srgbClr val="E5E2DC"/>
+                      </a:solidFill>
+                      <a:prstDash val="solid"/>
+                      <a:round/>
+                      <a:headEnd type="none" w="med" len="med"/>
+                      <a:tailEnd type="none" w="med" len="med"/>
+                    </a:lnR>
+                    <a:lnT w="6350" cap="flat" cmpd="sng" algn="ctr">
+                      <a:solidFill>
+                        <a:srgbClr val="E5E2DC"/>
+                      </a:solidFill>
+                      <a:prstDash val="solid"/>
+                      <a:round/>
+                      <a:headEnd type="none" w="med" len="med"/>
+                      <a:tailEnd type="none" w="med" len="med"/>
+                    </a:lnT>
+                    <a:lnB w="6350" cap="flat" cmpd="sng" algn="ctr">
+                      <a:solidFill>
+                        <a:srgbClr val="E5E2DC"/>
+                      </a:solidFill>
+                      <a:prstDash val="solid"/>
+                      <a:round/>
+                      <a:headEnd type="none" w="med" len="med"/>
+                      <a:tailEnd type="none" w="med" len="med"/>
+                    </a:lnB>
+                    <a:solidFill>
+                      <a:srgbClr val="FFFFFF"/>
+                    </a:solidFill>
+                  </a:tcPr>
+                </a:tc>
+                <a:tc>
+                  <a:txBody>
+                    <a:bodyPr/>
+                    <a:lstStyle/>
+                    <a:p>
+                      <a:pPr indent="0" marL="0">
+                        <a:buNone/>
+                      </a:pPr>
+                      <a:r>
+                        <a:rPr lang="en-US" sz="1200" dirty="0">
+                          <a:solidFill>
+                            <a:srgbClr val="3D3A36"/>
+                          </a:solidFill>
+                          <a:latin typeface="Calibri" pitchFamily="34" charset="0"/>
+                          <a:ea typeface="Calibri" pitchFamily="34" charset="-122"/>
+                          <a:cs typeface="Calibri" pitchFamily="34" charset="-120"/>
+                        </a:rPr>
+                        <a:t>50%</a:t>
+                      </a:r>
+                      <a:endParaRPr lang="en-US" sz="1200" dirty="0">
+                        <a:latin typeface="Calibri" charset="0"/>
+                        <a:ea typeface="Calibri" charset="0"/>
+                        <a:cs typeface="Calibri" charset="0"/>
+                      </a:endParaRPr>
+                    </a:p>
+                  </a:txBody>
+                  <a:tcPr marL="91440" marR="91440" marT="45720" marB="45720">
+                    <a:lnL w="6350" cap="flat" cmpd="sng" algn="ctr">
+                      <a:solidFill>
+                        <a:srgbClr val="E5E2DC"/>
+                      </a:solidFill>
+                      <a:prstDash val="solid"/>
+                      <a:round/>
+                      <a:headEnd type="none" w="med" len="med"/>
+                      <a:tailEnd type="none" w="med" len="med"/>
+                    </a:lnL>
+                    <a:lnR w="6350" cap="flat" cmpd="sng" algn="ctr">
+                      <a:solidFill>
+                        <a:srgbClr val="E5E2DC"/>
+                      </a:solidFill>
+                      <a:prstDash val="solid"/>
+                      <a:round/>
+                      <a:headEnd type="none" w="med" len="med"/>
+                      <a:tailEnd type="none" w="med" len="med"/>
+                    </a:lnR>
+                    <a:lnT w="6350" cap="flat" cmpd="sng" algn="ctr">
+                      <a:solidFill>
+                        <a:srgbClr val="E5E2DC"/>
+                      </a:solidFill>
+                      <a:prstDash val="solid"/>
+                      <a:round/>
+                      <a:headEnd type="none" w="med" len="med"/>
+                      <a:tailEnd type="none" w="med" len="med"/>
+                    </a:lnT>
+                    <a:lnB w="6350" cap="flat" cmpd="sng" algn="ctr">
+                      <a:solidFill>
+                        <a:srgbClr val="E5E2DC"/>
+                      </a:solidFill>
+                      <a:prstDash val="solid"/>
+                      <a:round/>
+                      <a:headEnd type="none" w="med" len="med"/>
+                      <a:tailEnd type="none" w="med" len="med"/>
+                    </a:lnB>
+                    <a:solidFill>
+                      <a:srgbClr val="FFFFFF"/>
+                    </a:solidFill>
+                  </a:tcPr>
+                </a:tc>
+              </a:tr>
+              <a:tr h="502920">
+                <a:tc>
+                  <a:txBody>
+                    <a:bodyPr/>
+                    <a:lstStyle/>
+                    <a:p>
+                      <a:pPr indent="0" marL="0">
+                        <a:buNone/>
+                      </a:pPr>
+                      <a:r>
+                        <a:rPr lang="en-US" sz="1200" dirty="0">
+                          <a:solidFill>
+                            <a:srgbClr val="3D3A36"/>
+                          </a:solidFill>
+                          <a:latin typeface="Calibri" pitchFamily="34" charset="0"/>
+                          <a:ea typeface="Calibri" pitchFamily="34" charset="-122"/>
+                          <a:cs typeface="Calibri" pitchFamily="34" charset="-120"/>
+                        </a:rPr>
+                        <a:t>¼</a:t>
+                      </a:r>
+                      <a:endParaRPr lang="en-US" sz="1200" dirty="0">
+                        <a:latin typeface="Calibri" charset="0"/>
+                        <a:ea typeface="Calibri" charset="0"/>
+                        <a:cs typeface="Calibri" charset="0"/>
+                      </a:endParaRPr>
+                    </a:p>
+                  </a:txBody>
+                  <a:tcPr marL="91440" marR="91440" marT="45720" marB="45720">
+                    <a:lnL w="6350" cap="flat" cmpd="sng" algn="ctr">
+                      <a:solidFill>
+                        <a:srgbClr val="E5E2DC"/>
+                      </a:solidFill>
+                      <a:prstDash val="solid"/>
+                      <a:round/>
+                      <a:headEnd type="none" w="med" len="med"/>
+                      <a:tailEnd type="none" w="med" len="med"/>
+                    </a:lnL>
+                    <a:lnR w="6350" cap="flat" cmpd="sng" algn="ctr">
+                      <a:solidFill>
+                        <a:srgbClr val="E5E2DC"/>
+                      </a:solidFill>
+                      <a:prstDash val="solid"/>
+                      <a:round/>
+                      <a:headEnd type="none" w="med" len="med"/>
+                      <a:tailEnd type="none" w="med" len="med"/>
+                    </a:lnR>
+                    <a:lnT w="6350" cap="flat" cmpd="sng" algn="ctr">
+                      <a:solidFill>
+                        <a:srgbClr val="E5E2DC"/>
+                      </a:solidFill>
+                      <a:prstDash val="solid"/>
+                      <a:round/>
+                      <a:headEnd type="none" w="med" len="med"/>
+                      <a:tailEnd type="none" w="med" len="med"/>
+                    </a:lnT>
+                    <a:lnB w="6350" cap="flat" cmpd="sng" algn="ctr">
+                      <a:solidFill>
+                        <a:srgbClr val="E5E2DC"/>
+                      </a:solidFill>
+                      <a:prstDash val="solid"/>
+                      <a:round/>
+                      <a:headEnd type="none" w="med" len="med"/>
+                      <a:tailEnd type="none" w="med" len="med"/>
+                    </a:lnB>
+                    <a:solidFill>
+                      <a:srgbClr val="F8F6F3"/>
+                    </a:solidFill>
+                  </a:tcPr>
+                </a:tc>
+                <a:tc>
+                  <a:txBody>
+                    <a:bodyPr/>
+                    <a:lstStyle/>
+                    <a:p>
+                      <a:pPr indent="0" marL="0">
+                        <a:buNone/>
+                      </a:pPr>
+                      <a:r>
+                        <a:rPr lang="en-US" sz="1200" dirty="0">
+                          <a:solidFill>
+                            <a:srgbClr val="3D3A36"/>
+                          </a:solidFill>
+                          <a:latin typeface="Calibri" pitchFamily="34" charset="0"/>
+                          <a:ea typeface="Calibri" pitchFamily="34" charset="-122"/>
+                          <a:cs typeface="Calibri" pitchFamily="34" charset="-120"/>
+                        </a:rPr>
+                        <a:t>0.25</a:t>
+                      </a:r>
+                      <a:endParaRPr lang="en-US" sz="1200" dirty="0">
+                        <a:latin typeface="Calibri" charset="0"/>
+                        <a:ea typeface="Calibri" charset="0"/>
+                        <a:cs typeface="Calibri" charset="0"/>
+                      </a:endParaRPr>
+                    </a:p>
+                  </a:txBody>
+                  <a:tcPr marL="91440" marR="91440" marT="45720" marB="45720">
+                    <a:lnL w="6350" cap="flat" cmpd="sng" algn="ctr">
+                      <a:solidFill>
+                        <a:srgbClr val="E5E2DC"/>
+                      </a:solidFill>
+                      <a:prstDash val="solid"/>
+                      <a:round/>
+                      <a:headEnd type="none" w="med" len="med"/>
+                      <a:tailEnd type="none" w="med" len="med"/>
+                    </a:lnL>
+                    <a:lnR w="6350" cap="flat" cmpd="sng" algn="ctr">
+                      <a:solidFill>
+                        <a:srgbClr val="E5E2DC"/>
+                      </a:solidFill>
+                      <a:prstDash val="solid"/>
+                      <a:round/>
+                      <a:headEnd type="none" w="med" len="med"/>
+                      <a:tailEnd type="none" w="med" len="med"/>
+                    </a:lnR>
+                    <a:lnT w="6350" cap="flat" cmpd="sng" algn="ctr">
+                      <a:solidFill>
+                        <a:srgbClr val="E5E2DC"/>
+                      </a:solidFill>
+                      <a:prstDash val="solid"/>
+                      <a:round/>
+                      <a:headEnd type="none" w="med" len="med"/>
+                      <a:tailEnd type="none" w="med" len="med"/>
+                    </a:lnT>
+                    <a:lnB w="6350" cap="flat" cmpd="sng" algn="ctr">
+                      <a:solidFill>
+                        <a:srgbClr val="E5E2DC"/>
+                      </a:solidFill>
+                      <a:prstDash val="solid"/>
+                      <a:round/>
+                      <a:headEnd type="none" w="med" len="med"/>
+                      <a:tailEnd type="none" w="med" len="med"/>
+                    </a:lnB>
+                    <a:solidFill>
+                      <a:srgbClr val="F8F6F3"/>
+                    </a:solidFill>
+                  </a:tcPr>
+                </a:tc>
+                <a:tc>
+                  <a:txBody>
+                    <a:bodyPr/>
+                    <a:lstStyle/>
+                    <a:p>
+                      <a:pPr indent="0" marL="0">
+                        <a:buNone/>
+                      </a:pPr>
+                      <a:r>
+                        <a:rPr lang="en-US" sz="1200" dirty="0">
+                          <a:solidFill>
+                            <a:srgbClr val="3D3A36"/>
+                          </a:solidFill>
+                          <a:latin typeface="Calibri" pitchFamily="34" charset="0"/>
+                          <a:ea typeface="Calibri" pitchFamily="34" charset="-122"/>
+                          <a:cs typeface="Calibri" pitchFamily="34" charset="-120"/>
+                        </a:rPr>
+                        <a:t>25%</a:t>
+                      </a:r>
+                      <a:endParaRPr lang="en-US" sz="1200" dirty="0">
+                        <a:latin typeface="Calibri" charset="0"/>
+                        <a:ea typeface="Calibri" charset="0"/>
+                        <a:cs typeface="Calibri" charset="0"/>
+                      </a:endParaRPr>
+                    </a:p>
+                  </a:txBody>
+                  <a:tcPr marL="91440" marR="91440" marT="45720" marB="45720">
+                    <a:lnL w="6350" cap="flat" cmpd="sng" algn="ctr">
+                      <a:solidFill>
+                        <a:srgbClr val="E5E2DC"/>
+                      </a:solidFill>
+                      <a:prstDash val="solid"/>
+                      <a:round/>
+                      <a:headEnd type="none" w="med" len="med"/>
+                      <a:tailEnd type="none" w="med" len="med"/>
+                    </a:lnL>
+                    <a:lnR w="6350" cap="flat" cmpd="sng" algn="ctr">
+                      <a:solidFill>
+                        <a:srgbClr val="E5E2DC"/>
+                      </a:solidFill>
+                      <a:prstDash val="solid"/>
+                      <a:round/>
+                      <a:headEnd type="none" w="med" len="med"/>
+                      <a:tailEnd type="none" w="med" len="med"/>
+                    </a:lnR>
+                    <a:lnT w="6350" cap="flat" cmpd="sng" algn="ctr">
+                      <a:solidFill>
+                        <a:srgbClr val="E5E2DC"/>
+                      </a:solidFill>
+                      <a:prstDash val="solid"/>
+                      <a:round/>
+                      <a:headEnd type="none" w="med" len="med"/>
+                      <a:tailEnd type="none" w="med" len="med"/>
+                    </a:lnT>
+                    <a:lnB w="6350" cap="flat" cmpd="sng" algn="ctr">
+                      <a:solidFill>
+                        <a:srgbClr val="E5E2DC"/>
+                      </a:solidFill>
+                      <a:prstDash val="solid"/>
+                      <a:round/>
+                      <a:headEnd type="none" w="med" len="med"/>
+                      <a:tailEnd type="none" w="med" len="med"/>
+                    </a:lnB>
+                    <a:solidFill>
+                      <a:srgbClr val="F8F6F3"/>
+                    </a:solidFill>
+                  </a:tcPr>
+                </a:tc>
+              </a:tr>
+              <a:tr h="502920">
+                <a:tc>
+                  <a:txBody>
+                    <a:bodyPr/>
+                    <a:lstStyle/>
+                    <a:p>
+                      <a:pPr indent="0" marL="0">
+                        <a:buNone/>
+                      </a:pPr>
+                      <a:r>
+                        <a:rPr lang="en-US" sz="1200" dirty="0">
+                          <a:solidFill>
+                            <a:srgbClr val="3D3A36"/>
+                          </a:solidFill>
+                          <a:latin typeface="Calibri" pitchFamily="34" charset="0"/>
+                          <a:ea typeface="Calibri" pitchFamily="34" charset="-122"/>
+                          <a:cs typeface="Calibri" pitchFamily="34" charset="-120"/>
+                        </a:rPr>
+                        <a:t>¾</a:t>
+                      </a:r>
+                      <a:endParaRPr lang="en-US" sz="1200" dirty="0">
+                        <a:latin typeface="Calibri" charset="0"/>
+                        <a:ea typeface="Calibri" charset="0"/>
+                        <a:cs typeface="Calibri" charset="0"/>
+                      </a:endParaRPr>
+                    </a:p>
+                  </a:txBody>
+                  <a:tcPr marL="91440" marR="91440" marT="45720" marB="45720">
+                    <a:lnL w="6350" cap="flat" cmpd="sng" algn="ctr">
+                      <a:solidFill>
+                        <a:srgbClr val="E5E2DC"/>
+                      </a:solidFill>
+                      <a:prstDash val="solid"/>
+                      <a:round/>
+                      <a:headEnd type="none" w="med" len="med"/>
+                      <a:tailEnd type="none" w="med" len="med"/>
+                    </a:lnL>
+                    <a:lnR w="6350" cap="flat" cmpd="sng" algn="ctr">
+                      <a:solidFill>
+                        <a:srgbClr val="E5E2DC"/>
+                      </a:solidFill>
+                      <a:prstDash val="solid"/>
+                      <a:round/>
+                      <a:headEnd type="none" w="med" len="med"/>
+                      <a:tailEnd type="none" w="med" len="med"/>
+                    </a:lnR>
+                    <a:lnT w="6350" cap="flat" cmpd="sng" algn="ctr">
+                      <a:solidFill>
+                        <a:srgbClr val="E5E2DC"/>
+                      </a:solidFill>
+                      <a:prstDash val="solid"/>
+                      <a:round/>
+                      <a:headEnd type="none" w="med" len="med"/>
+                      <a:tailEnd type="none" w="med" len="med"/>
+                    </a:lnT>
+                    <a:lnB w="6350" cap="flat" cmpd="sng" algn="ctr">
+                      <a:solidFill>
+                        <a:srgbClr val="E5E2DC"/>
+                      </a:solidFill>
+                      <a:prstDash val="solid"/>
+                      <a:round/>
+                      <a:headEnd type="none" w="med" len="med"/>
+                      <a:tailEnd type="none" w="med" len="med"/>
+                    </a:lnB>
+                    <a:solidFill>
+                      <a:srgbClr val="FFFFFF"/>
+                    </a:solidFill>
+                  </a:tcPr>
+                </a:tc>
+                <a:tc>
+                  <a:txBody>
+                    <a:bodyPr/>
+                    <a:lstStyle/>
+                    <a:p>
+                      <a:pPr indent="0" marL="0">
+                        <a:buNone/>
+                      </a:pPr>
+                      <a:r>
+                        <a:rPr lang="en-US" sz="1200" dirty="0">
+                          <a:solidFill>
+                            <a:srgbClr val="3D3A36"/>
+                          </a:solidFill>
+                          <a:latin typeface="Calibri" pitchFamily="34" charset="0"/>
+                          <a:ea typeface="Calibri" pitchFamily="34" charset="-122"/>
+                          <a:cs typeface="Calibri" pitchFamily="34" charset="-120"/>
+                        </a:rPr>
+                        <a:t>0.75</a:t>
+                      </a:r>
+                      <a:endParaRPr lang="en-US" sz="1200" dirty="0">
+                        <a:latin typeface="Calibri" charset="0"/>
+                        <a:ea typeface="Calibri" charset="0"/>
+                        <a:cs typeface="Calibri" charset="0"/>
+                      </a:endParaRPr>
+                    </a:p>
+                  </a:txBody>
+                  <a:tcPr marL="91440" marR="91440" marT="45720" marB="45720">
+                    <a:lnL w="6350" cap="flat" cmpd="sng" algn="ctr">
+                      <a:solidFill>
+                        <a:srgbClr val="E5E2DC"/>
+                      </a:solidFill>
+                      <a:prstDash val="solid"/>
+                      <a:round/>
+                      <a:headEnd type="none" w="med" len="med"/>
+                      <a:tailEnd type="none" w="med" len="med"/>
+                    </a:lnL>
+                    <a:lnR w="6350" cap="flat" cmpd="sng" algn="ctr">
+                      <a:solidFill>
+                        <a:srgbClr val="E5E2DC"/>
+                      </a:solidFill>
+                      <a:prstDash val="solid"/>
+                      <a:round/>
+                      <a:headEnd type="none" w="med" len="med"/>
+                      <a:tailEnd type="none" w="med" len="med"/>
+                    </a:lnR>
+                    <a:lnT w="6350" cap="flat" cmpd="sng" algn="ctr">
+                      <a:solidFill>
+                        <a:srgbClr val="E5E2DC"/>
+                      </a:solidFill>
+                      <a:prstDash val="solid"/>
+                      <a:round/>
+                      <a:headEnd type="none" w="med" len="med"/>
+                      <a:tailEnd type="none" w="med" len="med"/>
+                    </a:lnT>
+                    <a:lnB w="6350" cap="flat" cmpd="sng" algn="ctr">
+                      <a:solidFill>
+                        <a:srgbClr val="E5E2DC"/>
+                      </a:solidFill>
+                      <a:prstDash val="solid"/>
+                      <a:round/>
+                      <a:headEnd type="none" w="med" len="med"/>
+                      <a:tailEnd type="none" w="med" len="med"/>
+                    </a:lnB>
+                    <a:solidFill>
+                      <a:srgbClr val="FFFFFF"/>
+                    </a:solidFill>
+                  </a:tcPr>
+                </a:tc>
+                <a:tc>
+                  <a:txBody>
+                    <a:bodyPr/>
+                    <a:lstStyle/>
+                    <a:p>
+                      <a:pPr indent="0" marL="0">
+                        <a:buNone/>
+                      </a:pPr>
+                      <a:r>
+                        <a:rPr lang="en-US" sz="1200" dirty="0">
+                          <a:solidFill>
+                            <a:srgbClr val="3D3A36"/>
+                          </a:solidFill>
+                          <a:latin typeface="Calibri" pitchFamily="34" charset="0"/>
+                          <a:ea typeface="Calibri" pitchFamily="34" charset="-122"/>
+                          <a:cs typeface="Calibri" pitchFamily="34" charset="-120"/>
+                        </a:rPr>
+                        <a:t>75%</a:t>
+                      </a:r>
+                      <a:endParaRPr lang="en-US" sz="1200" dirty="0">
+                        <a:latin typeface="Calibri" charset="0"/>
+                        <a:ea typeface="Calibri" charset="0"/>
+                        <a:cs typeface="Calibri" charset="0"/>
+                      </a:endParaRPr>
+                    </a:p>
+                  </a:txBody>
+                  <a:tcPr marL="91440" marR="91440" marT="45720" marB="45720">
+                    <a:lnL w="6350" cap="flat" cmpd="sng" algn="ctr">
+                      <a:solidFill>
+                        <a:srgbClr val="E5E2DC"/>
+                      </a:solidFill>
+                      <a:prstDash val="solid"/>
+                      <a:round/>
+                      <a:headEnd type="none" w="med" len="med"/>
+                      <a:tailEnd type="none" w="med" len="med"/>
+                    </a:lnL>
+                    <a:lnR w="6350" cap="flat" cmpd="sng" algn="ctr">
+                      <a:solidFill>
+                        <a:srgbClr val="E5E2DC"/>
+                      </a:solidFill>
+                      <a:prstDash val="solid"/>
+                      <a:round/>
+                      <a:headEnd type="none" w="med" len="med"/>
+                      <a:tailEnd type="none" w="med" len="med"/>
+                    </a:lnR>
+                    <a:lnT w="6350" cap="flat" cmpd="sng" algn="ctr">
+                      <a:solidFill>
+                        <a:srgbClr val="E5E2DC"/>
+                      </a:solidFill>
+                      <a:prstDash val="solid"/>
+                      <a:round/>
+                      <a:headEnd type="none" w="med" len="med"/>
+                      <a:tailEnd type="none" w="med" len="med"/>
+                    </a:lnT>
+                    <a:lnB w="6350" cap="flat" cmpd="sng" algn="ctr">
+                      <a:solidFill>
+                        <a:srgbClr val="E5E2DC"/>
+                      </a:solidFill>
+                      <a:prstDash val="solid"/>
+                      <a:round/>
+                      <a:headEnd type="none" w="med" len="med"/>
+                      <a:tailEnd type="none" w="med" len="med"/>
+                    </a:lnB>
+                    <a:solidFill>
+                      <a:srgbClr val="FFFFFF"/>
+                    </a:solidFill>
+                  </a:tcPr>
+                </a:tc>
+              </a:tr>
+              <a:tr h="502920">
+                <a:tc>
+                  <a:txBody>
+                    <a:bodyPr/>
+                    <a:lstStyle/>
+                    <a:p>
+                      <a:pPr indent="0" marL="0">
+                        <a:buNone/>
+                      </a:pPr>
+                      <a:r>
+                        <a:rPr lang="en-US" sz="1200" dirty="0">
+                          <a:solidFill>
+                            <a:srgbClr val="3D3A36"/>
+                          </a:solidFill>
+                          <a:latin typeface="Calibri" pitchFamily="34" charset="0"/>
+                          <a:ea typeface="Calibri" pitchFamily="34" charset="-122"/>
+                          <a:cs typeface="Calibri" pitchFamily="34" charset="-120"/>
+                        </a:rPr>
+                        <a:t>⅕</a:t>
+                      </a:r>
+                      <a:endParaRPr lang="en-US" sz="1200" dirty="0">
+                        <a:latin typeface="Calibri" charset="0"/>
+                        <a:ea typeface="Calibri" charset="0"/>
+                        <a:cs typeface="Calibri" charset="0"/>
+                      </a:endParaRPr>
+                    </a:p>
+                  </a:txBody>
+                  <a:tcPr marL="91440" marR="91440" marT="45720" marB="45720">
+                    <a:lnL w="6350" cap="flat" cmpd="sng" algn="ctr">
+                      <a:solidFill>
+                        <a:srgbClr val="E5E2DC"/>
+                      </a:solidFill>
+                      <a:prstDash val="solid"/>
+                      <a:round/>
+                      <a:headEnd type="none" w="med" len="med"/>
+                      <a:tailEnd type="none" w="med" len="med"/>
+                    </a:lnL>
+                    <a:lnR w="6350" cap="flat" cmpd="sng" algn="ctr">
+                      <a:solidFill>
+                        <a:srgbClr val="E5E2DC"/>
+                      </a:solidFill>
+                      <a:prstDash val="solid"/>
+                      <a:round/>
+                      <a:headEnd type="none" w="med" len="med"/>
+                      <a:tailEnd type="none" w="med" len="med"/>
+                    </a:lnR>
+                    <a:lnT w="6350" cap="flat" cmpd="sng" algn="ctr">
+                      <a:solidFill>
+                        <a:srgbClr val="E5E2DC"/>
+                      </a:solidFill>
+                      <a:prstDash val="solid"/>
+                      <a:round/>
+                      <a:headEnd type="none" w="med" len="med"/>
+                      <a:tailEnd type="none" w="med" len="med"/>
+                    </a:lnT>
+                    <a:lnB w="6350" cap="flat" cmpd="sng" algn="ctr">
+                      <a:solidFill>
+                        <a:srgbClr val="E5E2DC"/>
+                      </a:solidFill>
+                      <a:prstDash val="solid"/>
+                      <a:round/>
+                      <a:headEnd type="none" w="med" len="med"/>
+                      <a:tailEnd type="none" w="med" len="med"/>
+                    </a:lnB>
+                    <a:solidFill>
+                      <a:srgbClr val="F8F6F3"/>
+                    </a:solidFill>
+                  </a:tcPr>
+                </a:tc>
+                <a:tc>
+                  <a:txBody>
+                    <a:bodyPr/>
+                    <a:lstStyle/>
+                    <a:p>
+                      <a:pPr indent="0" marL="0">
+                        <a:buNone/>
+                      </a:pPr>
+                      <a:r>
+                        <a:rPr lang="en-US" sz="1200" dirty="0">
+                          <a:solidFill>
+                            <a:srgbClr val="3D3A36"/>
+                          </a:solidFill>
+                          <a:latin typeface="Calibri" pitchFamily="34" charset="0"/>
+                          <a:ea typeface="Calibri" pitchFamily="34" charset="-122"/>
+                          <a:cs typeface="Calibri" pitchFamily="34" charset="-120"/>
+                        </a:rPr>
+                        <a:t>0.2</a:t>
+                      </a:r>
+                      <a:endParaRPr lang="en-US" sz="1200" dirty="0">
+                        <a:latin typeface="Calibri" charset="0"/>
+                        <a:ea typeface="Calibri" charset="0"/>
+                        <a:cs typeface="Calibri" charset="0"/>
+                      </a:endParaRPr>
+                    </a:p>
+                  </a:txBody>
+                  <a:tcPr marL="91440" marR="91440" marT="45720" marB="45720">
+                    <a:lnL w="6350" cap="flat" cmpd="sng" algn="ctr">
+                      <a:solidFill>
+                        <a:srgbClr val="E5E2DC"/>
+                      </a:solidFill>
+                      <a:prstDash val="solid"/>
+                      <a:round/>
+                      <a:headEnd type="none" w="med" len="med"/>
+                      <a:tailEnd type="none" w="med" len="med"/>
+                    </a:lnL>
+                    <a:lnR w="6350" cap="flat" cmpd="sng" algn="ctr">
+                      <a:solidFill>
+                        <a:srgbClr val="E5E2DC"/>
+                      </a:solidFill>
+                      <a:prstDash val="solid"/>
+                      <a:round/>
+                      <a:headEnd type="none" w="med" len="med"/>
+                      <a:tailEnd type="none" w="med" len="med"/>
+                    </a:lnR>
+                    <a:lnT w="6350" cap="flat" cmpd="sng" algn="ctr">
+                      <a:solidFill>
+                        <a:srgbClr val="E5E2DC"/>
+                      </a:solidFill>
+                      <a:prstDash val="solid"/>
+                      <a:round/>
+                      <a:headEnd type="none" w="med" len="med"/>
+                      <a:tailEnd type="none" w="med" len="med"/>
+                    </a:lnT>
+                    <a:lnB w="6350" cap="flat" cmpd="sng" algn="ctr">
+                      <a:solidFill>
+                        <a:srgbClr val="E5E2DC"/>
+                      </a:solidFill>
+                      <a:prstDash val="solid"/>
+                      <a:round/>
+                      <a:headEnd type="none" w="med" len="med"/>
+                      <a:tailEnd type="none" w="med" len="med"/>
+                    </a:lnB>
+                    <a:solidFill>
+                      <a:srgbClr val="F8F6F3"/>
+                    </a:solidFill>
+                  </a:tcPr>
+                </a:tc>
+                <a:tc>
+                  <a:txBody>
+                    <a:bodyPr/>
+                    <a:lstStyle/>
+                    <a:p>
+                      <a:pPr indent="0" marL="0">
+                        <a:buNone/>
+                      </a:pPr>
+                      <a:r>
+                        <a:rPr lang="en-US" sz="1200" dirty="0">
+                          <a:solidFill>
+                            <a:srgbClr val="3D3A36"/>
+                          </a:solidFill>
+                          <a:latin typeface="Calibri" pitchFamily="34" charset="0"/>
+                          <a:ea typeface="Calibri" pitchFamily="34" charset="-122"/>
+                          <a:cs typeface="Calibri" pitchFamily="34" charset="-120"/>
+                        </a:rPr>
+                        <a:t>20%</a:t>
+                      </a:r>
+                      <a:endParaRPr lang="en-US" sz="1200" dirty="0">
+                        <a:latin typeface="Calibri" charset="0"/>
+                        <a:ea typeface="Calibri" charset="0"/>
+                        <a:cs typeface="Calibri" charset="0"/>
+                      </a:endParaRPr>
+                    </a:p>
+                  </a:txBody>
+                  <a:tcPr marL="91440" marR="91440" marT="45720" marB="45720">
+                    <a:lnL w="6350" cap="flat" cmpd="sng" algn="ctr">
+                      <a:solidFill>
+                        <a:srgbClr val="E5E2DC"/>
+                      </a:solidFill>
+                      <a:prstDash val="solid"/>
+                      <a:round/>
+                      <a:headEnd type="none" w="med" len="med"/>
+                      <a:tailEnd type="none" w="med" len="med"/>
+                    </a:lnL>
+                    <a:lnR w="6350" cap="flat" cmpd="sng" algn="ctr">
+                      <a:solidFill>
+                        <a:srgbClr val="E5E2DC"/>
+                      </a:solidFill>
+                      <a:prstDash val="solid"/>
+                      <a:round/>
+                      <a:headEnd type="none" w="med" len="med"/>
+                      <a:tailEnd type="none" w="med" len="med"/>
+                    </a:lnR>
+                    <a:lnT w="6350" cap="flat" cmpd="sng" algn="ctr">
+                      <a:solidFill>
+                        <a:srgbClr val="E5E2DC"/>
+                      </a:solidFill>
+                      <a:prstDash val="solid"/>
+                      <a:round/>
+                      <a:headEnd type="none" w="med" len="med"/>
+                      <a:tailEnd type="none" w="med" len="med"/>
+                    </a:lnT>
+                    <a:lnB w="6350" cap="flat" cmpd="sng" algn="ctr">
+                      <a:solidFill>
+                        <a:srgbClr val="E5E2DC"/>
+                      </a:solidFill>
+                      <a:prstDash val="solid"/>
+                      <a:round/>
+                      <a:headEnd type="none" w="med" len="med"/>
+                      <a:tailEnd type="none" w="med" len="med"/>
+                    </a:lnB>
+                    <a:solidFill>
+                      <a:srgbClr val="F8F6F3"/>
+                    </a:solidFill>
+                  </a:tcPr>
+                </a:tc>
+              </a:tr>
+              <a:tr h="502920">
+                <a:tc>
+                  <a:txBody>
+                    <a:bodyPr/>
+                    <a:lstStyle/>
+                    <a:p>
+                      <a:pPr indent="0" marL="0">
+                        <a:buNone/>
+                      </a:pPr>
+                      <a:r>
+                        <a:rPr lang="en-US" sz="1200" dirty="0">
+                          <a:solidFill>
+                            <a:srgbClr val="3D3A36"/>
+                          </a:solidFill>
+                          <a:latin typeface="Calibri" pitchFamily="34" charset="0"/>
+                          <a:ea typeface="Calibri" pitchFamily="34" charset="-122"/>
+                          <a:cs typeface="Calibri" pitchFamily="34" charset="-120"/>
+                        </a:rPr>
+                        <a:t>⅓</a:t>
+                      </a:r>
+                      <a:endParaRPr lang="en-US" sz="1200" dirty="0">
+                        <a:latin typeface="Calibri" charset="0"/>
+                        <a:ea typeface="Calibri" charset="0"/>
+                        <a:cs typeface="Calibri" charset="0"/>
+                      </a:endParaRPr>
+                    </a:p>
+                  </a:txBody>
+                  <a:tcPr marL="91440" marR="91440" marT="45720" marB="45720">
+                    <a:lnL w="6350" cap="flat" cmpd="sng" algn="ctr">
+                      <a:solidFill>
+                        <a:srgbClr val="E5E2DC"/>
+                      </a:solidFill>
+                      <a:prstDash val="solid"/>
+                      <a:round/>
+                      <a:headEnd type="none" w="med" len="med"/>
+                      <a:tailEnd type="none" w="med" len="med"/>
+                    </a:lnL>
+                    <a:lnR w="6350" cap="flat" cmpd="sng" algn="ctr">
+                      <a:solidFill>
+                        <a:srgbClr val="E5E2DC"/>
+                      </a:solidFill>
+                      <a:prstDash val="solid"/>
+                      <a:round/>
+                      <a:headEnd type="none" w="med" len="med"/>
+                      <a:tailEnd type="none" w="med" len="med"/>
+                    </a:lnR>
+                    <a:lnT w="6350" cap="flat" cmpd="sng" algn="ctr">
+                      <a:solidFill>
+                        <a:srgbClr val="E5E2DC"/>
+                      </a:solidFill>
+                      <a:prstDash val="solid"/>
+                      <a:round/>
+                      <a:headEnd type="none" w="med" len="med"/>
+                      <a:tailEnd type="none" w="med" len="med"/>
+                    </a:lnT>
+                    <a:lnB w="6350" cap="flat" cmpd="sng" algn="ctr">
+                      <a:solidFill>
+                        <a:srgbClr val="E5E2DC"/>
+                      </a:solidFill>
+                      <a:prstDash val="solid"/>
+                      <a:round/>
+                      <a:headEnd type="none" w="med" len="med"/>
+                      <a:tailEnd type="none" w="med" len="med"/>
+                    </a:lnB>
+                    <a:solidFill>
+                      <a:srgbClr val="FFFFFF"/>
+                    </a:solidFill>
+                  </a:tcPr>
+                </a:tc>
+                <a:tc>
+                  <a:txBody>
+                    <a:bodyPr/>
+                    <a:lstStyle/>
+                    <a:p>
+                      <a:pPr indent="0" marL="0">
+                        <a:buNone/>
+                      </a:pPr>
+                      <a:r>
+                        <a:rPr lang="en-US" sz="1200" dirty="0">
+                          <a:solidFill>
+                            <a:srgbClr val="3D3A36"/>
+                          </a:solidFill>
+                          <a:latin typeface="Calibri" pitchFamily="34" charset="0"/>
+                          <a:ea typeface="Calibri" pitchFamily="34" charset="-122"/>
+                          <a:cs typeface="Calibri" pitchFamily="34" charset="-120"/>
+                        </a:rPr>
+                        <a:t>0.333...</a:t>
+                      </a:r>
+                      <a:endParaRPr lang="en-US" sz="1200" dirty="0">
+                        <a:latin typeface="Calibri" charset="0"/>
+                        <a:ea typeface="Calibri" charset="0"/>
+                        <a:cs typeface="Calibri" charset="0"/>
+                      </a:endParaRPr>
+                    </a:p>
+                  </a:txBody>
+                  <a:tcPr marL="91440" marR="91440" marT="45720" marB="45720">
+                    <a:lnL w="6350" cap="flat" cmpd="sng" algn="ctr">
+                      <a:solidFill>
+                        <a:srgbClr val="E5E2DC"/>
+                      </a:solidFill>
+                      <a:prstDash val="solid"/>
+                      <a:round/>
+                      <a:headEnd type="none" w="med" len="med"/>
+                      <a:tailEnd type="none" w="med" len="med"/>
+                    </a:lnL>
+                    <a:lnR w="6350" cap="flat" cmpd="sng" algn="ctr">
+                      <a:solidFill>
+                        <a:srgbClr val="E5E2DC"/>
+                      </a:solidFill>
+                      <a:prstDash val="solid"/>
+                      <a:round/>
+                      <a:headEnd type="none" w="med" len="med"/>
+                      <a:tailEnd type="none" w="med" len="med"/>
+                    </a:lnR>
+                    <a:lnT w="6350" cap="flat" cmpd="sng" algn="ctr">
+                      <a:solidFill>
+                        <a:srgbClr val="E5E2DC"/>
+                      </a:solidFill>
+                      <a:prstDash val="solid"/>
+                      <a:round/>
+                      <a:headEnd type="none" w="med" len="med"/>
+                      <a:tailEnd type="none" w="med" len="med"/>
+                    </a:lnT>
+                    <a:lnB w="6350" cap="flat" cmpd="sng" algn="ctr">
+                      <a:solidFill>
+                        <a:srgbClr val="E5E2DC"/>
+                      </a:solidFill>
+                      <a:prstDash val="solid"/>
+                      <a:round/>
+                      <a:headEnd type="none" w="med" len="med"/>
+                      <a:tailEnd type="none" w="med" len="med"/>
+                    </a:lnB>
+                    <a:solidFill>
+                      <a:srgbClr val="FFFFFF"/>
+                    </a:solidFill>
+                  </a:tcPr>
+                </a:tc>
+                <a:tc>
+                  <a:txBody>
+                    <a:bodyPr/>
+                    <a:lstStyle/>
+                    <a:p>
+                      <a:pPr indent="0" marL="0">
+                        <a:buNone/>
+                      </a:pPr>
+                      <a:r>
+                        <a:rPr lang="en-US" sz="1200" dirty="0">
+                          <a:solidFill>
+                            <a:srgbClr val="3D3A36"/>
+                          </a:solidFill>
+                          <a:latin typeface="Calibri" pitchFamily="34" charset="0"/>
+                          <a:ea typeface="Calibri" pitchFamily="34" charset="-122"/>
+                          <a:cs typeface="Calibri" pitchFamily="34" charset="-120"/>
+                        </a:rPr>
+                        <a:t>33.3%</a:t>
+                      </a:r>
+                      <a:endParaRPr lang="en-US" sz="1200" dirty="0">
+                        <a:latin typeface="Calibri" charset="0"/>
+                        <a:ea typeface="Calibri" charset="0"/>
+                        <a:cs typeface="Calibri" charset="0"/>
+                      </a:endParaRPr>
+                    </a:p>
+                  </a:txBody>
+                  <a:tcPr marL="91440" marR="91440" marT="45720" marB="45720">
+                    <a:lnL w="6350" cap="flat" cmpd="sng" algn="ctr">
+                      <a:solidFill>
+                        <a:srgbClr val="E5E2DC"/>
+                      </a:solidFill>
+                      <a:prstDash val="solid"/>
+                      <a:round/>
+                      <a:headEnd type="none" w="med" len="med"/>
+                      <a:tailEnd type="none" w="med" len="med"/>
+                    </a:lnL>
+                    <a:lnR w="6350" cap="flat" cmpd="sng" algn="ctr">
+                      <a:solidFill>
+                        <a:srgbClr val="E5E2DC"/>
+                      </a:solidFill>
+                      <a:prstDash val="solid"/>
+                      <a:round/>
+                      <a:headEnd type="none" w="med" len="med"/>
+                      <a:tailEnd type="none" w="med" len="med"/>
+                    </a:lnR>
+                    <a:lnT w="6350" cap="flat" cmpd="sng" algn="ctr">
+                      <a:solidFill>
+                        <a:srgbClr val="E5E2DC"/>
+                      </a:solidFill>
+                      <a:prstDash val="solid"/>
+                      <a:round/>
+                      <a:headEnd type="none" w="med" len="med"/>
+                      <a:tailEnd type="none" w="med" len="med"/>
+                    </a:lnT>
+                    <a:lnB w="6350" cap="flat" cmpd="sng" algn="ctr">
+                      <a:solidFill>
+                        <a:srgbClr val="E5E2DC"/>
+                      </a:solidFill>
+                      <a:prstDash val="solid"/>
+                      <a:round/>
+                      <a:headEnd type="none" w="med" len="med"/>
+                      <a:tailEnd type="none" w="med" len="med"/>
+                    </a:lnB>
+                    <a:solidFill>
+                      <a:srgbClr val="FFFFFF"/>
+                    </a:solidFill>
+                  </a:tcPr>
+                </a:tc>
+              </a:tr>
+              <a:tr h="502920">
+                <a:tc>
+                  <a:txBody>
+                    <a:bodyPr/>
+                    <a:lstStyle/>
+                    <a:p>
+                      <a:pPr indent="0" marL="0">
+                        <a:buNone/>
+                      </a:pPr>
+                      <a:r>
+                        <a:rPr lang="en-US" sz="1200" dirty="0">
+                          <a:solidFill>
+                            <a:srgbClr val="3D3A36"/>
+                          </a:solidFill>
+                          <a:latin typeface="Calibri" pitchFamily="34" charset="0"/>
+                          <a:ea typeface="Calibri" pitchFamily="34" charset="-122"/>
+                          <a:cs typeface="Calibri" pitchFamily="34" charset="-120"/>
+                        </a:rPr>
+                        <a:t>1/10</a:t>
+                      </a:r>
+                      <a:endParaRPr lang="en-US" sz="1200" dirty="0">
+                        <a:latin typeface="Calibri" charset="0"/>
+                        <a:ea typeface="Calibri" charset="0"/>
+                        <a:cs typeface="Calibri" charset="0"/>
+                      </a:endParaRPr>
+                    </a:p>
+                  </a:txBody>
+                  <a:tcPr marL="91440" marR="91440" marT="45720" marB="45720">
+                    <a:lnL w="6350" cap="flat" cmpd="sng" algn="ctr">
+                      <a:solidFill>
+                        <a:srgbClr val="E5E2DC"/>
+                      </a:solidFill>
+                      <a:prstDash val="solid"/>
+                      <a:round/>
+                      <a:headEnd type="none" w="med" len="med"/>
+                      <a:tailEnd type="none" w="med" len="med"/>
+                    </a:lnL>
+                    <a:lnR w="6350" cap="flat" cmpd="sng" algn="ctr">
+                      <a:solidFill>
+                        <a:srgbClr val="E5E2DC"/>
+                      </a:solidFill>
+                      <a:prstDash val="solid"/>
+                      <a:round/>
+                      <a:headEnd type="none" w="med" len="med"/>
+                      <a:tailEnd type="none" w="med" len="med"/>
+                    </a:lnR>
+                    <a:lnT w="6350" cap="flat" cmpd="sng" algn="ctr">
+                      <a:solidFill>
+                        <a:srgbClr val="E5E2DC"/>
+                      </a:solidFill>
+                      <a:prstDash val="solid"/>
+                      <a:round/>
+                      <a:headEnd type="none" w="med" len="med"/>
+                      <a:tailEnd type="none" w="med" len="med"/>
+                    </a:lnT>
+                    <a:lnB w="6350" cap="flat" cmpd="sng" algn="ctr">
+                      <a:solidFill>
+                        <a:srgbClr val="E5E2DC"/>
+                      </a:solidFill>
+                      <a:prstDash val="solid"/>
+                      <a:round/>
+                      <a:headEnd type="none" w="med" len="med"/>
+                      <a:tailEnd type="none" w="med" len="med"/>
+                    </a:lnB>
+                    <a:solidFill>
+                      <a:srgbClr val="F8F6F3"/>
+                    </a:solidFill>
+                  </a:tcPr>
+                </a:tc>
+                <a:tc>
+                  <a:txBody>
+                    <a:bodyPr/>
+                    <a:lstStyle/>
+                    <a:p>
+                      <a:pPr indent="0" marL="0">
+                        <a:buNone/>
+                      </a:pPr>
+                      <a:r>
+                        <a:rPr lang="en-US" sz="1200" dirty="0">
+                          <a:solidFill>
+                            <a:srgbClr val="3D3A36"/>
+                          </a:solidFill>
+                          <a:latin typeface="Calibri" pitchFamily="34" charset="0"/>
+                          <a:ea typeface="Calibri" pitchFamily="34" charset="-122"/>
+                          <a:cs typeface="Calibri" pitchFamily="34" charset="-120"/>
+                        </a:rPr>
+                        <a:t>0.1</a:t>
+                      </a:r>
+                      <a:endParaRPr lang="en-US" sz="1200" dirty="0">
+                        <a:latin typeface="Calibri" charset="0"/>
+                        <a:ea typeface="Calibri" charset="0"/>
+                        <a:cs typeface="Calibri" charset="0"/>
+                      </a:endParaRPr>
+                    </a:p>
+                  </a:txBody>
+                  <a:tcPr marL="91440" marR="91440" marT="45720" marB="45720">
+                    <a:lnL w="6350" cap="flat" cmpd="sng" algn="ctr">
+                      <a:solidFill>
+                        <a:srgbClr val="E5E2DC"/>
+                      </a:solidFill>
+                      <a:prstDash val="solid"/>
+                      <a:round/>
+                      <a:headEnd type="none" w="med" len="med"/>
+                      <a:tailEnd type="none" w="med" len="med"/>
+                    </a:lnL>
+                    <a:lnR w="6350" cap="flat" cmpd="sng" algn="ctr">
+                      <a:solidFill>
+                        <a:srgbClr val="E5E2DC"/>
+                      </a:solidFill>
+                      <a:prstDash val="solid"/>
+                      <a:round/>
+                      <a:headEnd type="none" w="med" len="med"/>
+                      <a:tailEnd type="none" w="med" len="med"/>
+                    </a:lnR>
+                    <a:lnT w="6350" cap="flat" cmpd="sng" algn="ctr">
+                      <a:solidFill>
+                        <a:srgbClr val="E5E2DC"/>
+                      </a:solidFill>
+                      <a:prstDash val="solid"/>
+                      <a:round/>
+                      <a:headEnd type="none" w="med" len="med"/>
+                      <a:tailEnd type="none" w="med" len="med"/>
+                    </a:lnT>
+                    <a:lnB w="6350" cap="flat" cmpd="sng" algn="ctr">
+                      <a:solidFill>
+                        <a:srgbClr val="E5E2DC"/>
+                      </a:solidFill>
+                      <a:prstDash val="solid"/>
+                      <a:round/>
+                      <a:headEnd type="none" w="med" len="med"/>
+                      <a:tailEnd type="none" w="med" len="med"/>
+                    </a:lnB>
+                    <a:solidFill>
+                      <a:srgbClr val="F8F6F3"/>
+                    </a:solidFill>
+                  </a:tcPr>
+                </a:tc>
+                <a:tc>
+                  <a:txBody>
+                    <a:bodyPr/>
+                    <a:lstStyle/>
+                    <a:p>
+                      <a:pPr indent="0" marL="0">
+                        <a:buNone/>
+                      </a:pPr>
+                      <a:r>
+                        <a:rPr lang="en-US" sz="1200" dirty="0">
+                          <a:solidFill>
+                            <a:srgbClr val="3D3A36"/>
+                          </a:solidFill>
+                          <a:latin typeface="Calibri" pitchFamily="34" charset="0"/>
+                          <a:ea typeface="Calibri" pitchFamily="34" charset="-122"/>
+                          <a:cs typeface="Calibri" pitchFamily="34" charset="-120"/>
+                        </a:rPr>
+                        <a:t>10%</a:t>
+                      </a:r>
+                      <a:endParaRPr lang="en-US" sz="1200" dirty="0">
+                        <a:latin typeface="Calibri" charset="0"/>
+                        <a:ea typeface="Calibri" charset="0"/>
+                        <a:cs typeface="Calibri" charset="0"/>
+                      </a:endParaRPr>
+                    </a:p>
+                  </a:txBody>
+                  <a:tcPr marL="91440" marR="91440" marT="45720" marB="45720">
+                    <a:lnL w="6350" cap="flat" cmpd="sng" algn="ctr">
+                      <a:solidFill>
+                        <a:srgbClr val="E5E2DC"/>
+                      </a:solidFill>
+                      <a:prstDash val="solid"/>
+                      <a:round/>
+                      <a:headEnd type="none" w="med" len="med"/>
+                      <a:tailEnd type="none" w="med" len="med"/>
+                    </a:lnL>
+                    <a:lnR w="6350" cap="flat" cmpd="sng" algn="ctr">
+                      <a:solidFill>
+                        <a:srgbClr val="E5E2DC"/>
+                      </a:solidFill>
+                      <a:prstDash val="solid"/>
+                      <a:round/>
+                      <a:headEnd type="none" w="med" len="med"/>
+                      <a:tailEnd type="none" w="med" len="med"/>
+                    </a:lnR>
+                    <a:lnT w="6350" cap="flat" cmpd="sng" algn="ctr">
+                      <a:solidFill>
+                        <a:srgbClr val="E5E2DC"/>
+                      </a:solidFill>
+                      <a:prstDash val="solid"/>
+                      <a:round/>
+                      <a:headEnd type="none" w="med" len="med"/>
+                      <a:tailEnd type="none" w="med" len="med"/>
+                    </a:lnT>
+                    <a:lnB w="6350" cap="flat" cmpd="sng" algn="ctr">
+                      <a:solidFill>
+                        <a:srgbClr val="E5E2DC"/>
+                      </a:solidFill>
+                      <a:prstDash val="solid"/>
+                      <a:round/>
+                      <a:headEnd type="none" w="med" len="med"/>
+                      <a:tailEnd type="none" w="med" len="med"/>
+                    </a:lnB>
+                    <a:solidFill>
+                      <a:srgbClr val="F8F6F3"/>
+                    </a:solidFill>
+                  </a:tcPr>
+                </a:tc>
+              </a:tr>
+            </a:tbl>
+          </a:graphicData>
+        </a:graphic>
+      </p:graphicFrame>
     </p:spTree>
   </p:cSld>
   <p:clrMapOvr>
@@ -2175,7 +3913,47 @@
         <p:spPr>
           <a:xfrm>
             <a:off x="0" y="0"/>
-            <a:ext cx="9144000" cy="54864"/>
+            <a:ext cx="9144000" cy="822960"/>
+          </a:xfrm>
+          <a:prstGeom prst="rect">
+            <a:avLst/>
+          </a:prstGeom>
+          <a:solidFill>
+            <a:srgbClr val="FFFFFF"/>
+          </a:solidFill>
+          <a:ln/>
+        </p:spPr>
+      </p:sp>
+      <p:sp>
+        <p:nvSpPr>
+          <p:cNvPr id="3" name="Shape 1"/>
+          <p:cNvSpPr/>
+          <p:nvPr/>
+        </p:nvSpPr>
+        <p:spPr>
+          <a:xfrm>
+            <a:off x="0" y="804672"/>
+            <a:ext cx="9144000" cy="27432"/>
+          </a:xfrm>
+          <a:prstGeom prst="rect">
+            <a:avLst/>
+          </a:prstGeom>
+          <a:solidFill>
+            <a:srgbClr val="E5E2DC"/>
+          </a:solidFill>
+          <a:ln/>
+        </p:spPr>
+      </p:sp>
+      <p:sp>
+        <p:nvSpPr>
+          <p:cNvPr id="4" name="Shape 2"/>
+          <p:cNvSpPr/>
+          <p:nvPr/>
+        </p:nvSpPr>
+        <p:spPr>
+          <a:xfrm>
+            <a:off x="548640" y="201168"/>
+            <a:ext cx="54864" cy="420624"/>
           </a:xfrm>
           <a:prstGeom prst="rect">
             <a:avLst/>
@@ -2188,14 +3966,100 @@
       </p:sp>
       <p:sp>
         <p:nvSpPr>
-          <p:cNvPr id="3" name="Text 1"/>
-          <p:cNvSpPr/>
-          <p:nvPr/>
-        </p:nvSpPr>
-        <p:spPr>
-          <a:xfrm>
-            <a:off x="7772400" y="4709160"/>
-            <a:ext cx="1097280" cy="320040"/>
+          <p:cNvPr id="5" name="Text 3"/>
+          <p:cNvSpPr/>
+          <p:nvPr/>
+        </p:nvSpPr>
+        <p:spPr>
+          <a:xfrm>
+            <a:off x="777240" y="137160"/>
+            <a:ext cx="7772400" cy="548640"/>
+          </a:xfrm>
+          <a:prstGeom prst="rect">
+            <a:avLst/>
+          </a:prstGeom>
+          <a:noFill/>
+          <a:ln/>
+        </p:spPr>
+        <p:txBody>
+          <a:bodyPr wrap="square" lIns="0" tIns="0" rIns="0" bIns="0" rtlCol="0" anchor="ctr"/>
+          <a:lstStyle/>
+          <a:p>
+            <a:pPr indent="0" marL="0">
+              <a:buNone/>
+            </a:pPr>
+            <a:r>
+              <a:rPr lang="en-US" sz="2000" b="1" dirty="0">
+                <a:solidFill>
+                  <a:srgbClr val="1B2A4A"/>
+                </a:solidFill>
+                <a:latin typeface="Georgia" pitchFamily="34" charset="0"/>
+                <a:ea typeface="Georgia" pitchFamily="34" charset="-122"/>
+                <a:cs typeface="Georgia" pitchFamily="34" charset="-120"/>
+              </a:rPr>
+              <a:t>How to Convert</a:t>
+            </a:r>
+            <a:endParaRPr lang="en-US" sz="2000" dirty="0"/>
+          </a:p>
+        </p:txBody>
+      </p:sp>
+      <p:sp>
+        <p:nvSpPr>
+          <p:cNvPr id="6" name="Shape 4"/>
+          <p:cNvSpPr/>
+          <p:nvPr/>
+        </p:nvSpPr>
+        <p:spPr>
+          <a:xfrm>
+            <a:off x="640080" y="1051560"/>
+            <a:ext cx="2468880" cy="3657600"/>
+          </a:xfrm>
+          <a:prstGeom prst="rect">
+            <a:avLst/>
+          </a:prstGeom>
+          <a:solidFill>
+            <a:srgbClr val="FFFFFF"/>
+          </a:solidFill>
+          <a:ln/>
+          <a:effectLst>
+            <a:outerShdw sx="100000" sy="100000" kx="0" ky="0" algn="bl" rotWithShape="0" blurRad="50800" dist="25400" dir="8100000">
+              <a:srgbClr val="000000">
+                <a:alpha val="10000"/>
+              </a:srgbClr>
+            </a:outerShdw>
+          </a:effectLst>
+        </p:spPr>
+      </p:sp>
+      <p:sp>
+        <p:nvSpPr>
+          <p:cNvPr id="7" name="Shape 5"/>
+          <p:cNvSpPr/>
+          <p:nvPr/>
+        </p:nvSpPr>
+        <p:spPr>
+          <a:xfrm>
+            <a:off x="640080" y="1051560"/>
+            <a:ext cx="2468880" cy="54864"/>
+          </a:xfrm>
+          <a:prstGeom prst="rect">
+            <a:avLst/>
+          </a:prstGeom>
+          <a:solidFill>
+            <a:srgbClr val="2A9D8F"/>
+          </a:solidFill>
+          <a:ln/>
+        </p:spPr>
+      </p:sp>
+      <p:sp>
+        <p:nvSpPr>
+          <p:cNvPr id="8" name="Text 6"/>
+          <p:cNvSpPr/>
+          <p:nvPr/>
+        </p:nvSpPr>
+        <p:spPr>
+          <a:xfrm>
+            <a:off x="777240" y="1234440"/>
+            <a:ext cx="2194560" cy="457200"/>
           </a:xfrm>
           <a:prstGeom prst="rect">
             <a:avLst/>
@@ -2207,11 +4071,54 @@
           <a:bodyPr wrap="square" rtlCol="0" anchor="ctr"/>
           <a:lstStyle/>
           <a:p>
-            <a:pPr algn="r" indent="0" marL="0">
+            <a:pPr algn="ctr" indent="0" marL="0">
               <a:buNone/>
             </a:pPr>
             <a:r>
-              <a:rPr lang="en-US" sz="900" dirty="0">
+              <a:rPr lang="en-US" sz="1400" b="1" dirty="0">
+                <a:solidFill>
+                  <a:srgbClr val="1B2A4A"/>
+                </a:solidFill>
+                <a:latin typeface="Georgia" pitchFamily="34" charset="0"/>
+                <a:ea typeface="Georgia" pitchFamily="34" charset="-122"/>
+                <a:cs typeface="Georgia" pitchFamily="34" charset="-120"/>
+              </a:rPr>
+              <a:t>Fraction → Decimal</a:t>
+            </a:r>
+            <a:endParaRPr lang="en-US" sz="1400" dirty="0"/>
+          </a:p>
+        </p:txBody>
+      </p:sp>
+      <p:sp>
+        <p:nvSpPr>
+          <p:cNvPr id="9" name="Text 7"/>
+          <p:cNvSpPr/>
+          <p:nvPr/>
+        </p:nvSpPr>
+        <p:spPr>
+          <a:xfrm>
+            <a:off x="777240" y="1737360"/>
+            <a:ext cx="2194560" cy="2834640"/>
+          </a:xfrm>
+          <a:prstGeom prst="rect">
+            <a:avLst/>
+          </a:prstGeom>
+          <a:noFill/>
+          <a:ln/>
+        </p:spPr>
+        <p:txBody>
+          <a:bodyPr wrap="square" rtlCol="0" anchor="t"/>
+          <a:lstStyle/>
+          <a:p>
+            <a:pPr marL="342900" indent="-342900">
+              <a:spcAft>
+                <a:spcPts val="400"/>
+              </a:spcAft>
+              <a:buSzPct val="100000"/>
+              <a:buChar char="•"/>
+            </a:pPr>
+            <a:r>
+              <a:rPr lang="en-US" sz="1100" dirty="0">
                 <a:solidFill>
                   <a:srgbClr val="6B6660"/>
                 </a:solidFill>
@@ -2219,22 +4126,132 @@
                 <a:ea typeface="Calibri" pitchFamily="34" charset="-122"/>
                 <a:cs typeface="Calibri" pitchFamily="34" charset="-120"/>
               </a:rPr>
-              <a:t>4 / 5</a:t>
-            </a:r>
-            <a:endParaRPr lang="en-US" sz="900" dirty="0"/>
+              <a:t>Divide numerator by denominator</a:t>
+            </a:r>
+            <a:endParaRPr lang="en-US" sz="1100" dirty="0"/>
+          </a:p>
+          <a:p>
+            <a:pPr marL="342900" indent="-342900">
+              <a:spcAft>
+                <a:spcPts val="400"/>
+              </a:spcAft>
+              <a:buSzPct val="100000"/>
+              <a:buChar char="•"/>
+            </a:pPr>
+            <a:r>
+              <a:rPr lang="en-US" sz="1100" dirty="0">
+                <a:solidFill>
+                  <a:srgbClr val="6B6660"/>
+                </a:solidFill>
+                <a:latin typeface="Calibri" pitchFamily="34" charset="0"/>
+                <a:ea typeface="Calibri" pitchFamily="34" charset="-122"/>
+                <a:cs typeface="Calibri" pitchFamily="34" charset="-120"/>
+              </a:rPr>
+              <a:t>¾ = 3 ÷ 4 = 0.75</a:t>
+            </a:r>
+            <a:endParaRPr lang="en-US" sz="1100" dirty="0"/>
+          </a:p>
+          <a:p>
+            <a:pPr marL="342900" indent="-342900">
+              <a:spcAft>
+                <a:spcPts val="400"/>
+              </a:spcAft>
+              <a:buSzPct val="100000"/>
+              <a:buChar char="•"/>
+            </a:pPr>
+            <a:r>
+              <a:rPr lang="en-US" sz="1100" dirty="0">
+                <a:solidFill>
+                  <a:srgbClr val="6B6660"/>
+                </a:solidFill>
+                <a:latin typeface="Calibri" pitchFamily="34" charset="0"/>
+                <a:ea typeface="Calibri" pitchFamily="34" charset="-122"/>
+                <a:cs typeface="Calibri" pitchFamily="34" charset="-120"/>
+              </a:rPr>
+              <a:t>Some give recurring decimals</a:t>
+            </a:r>
+            <a:endParaRPr lang="en-US" sz="1100" dirty="0"/>
+          </a:p>
+          <a:p>
+            <a:pPr marL="342900" indent="-342900">
+              <a:spcAft>
+                <a:spcPts val="400"/>
+              </a:spcAft>
+              <a:buSzPct val="100000"/>
+              <a:buChar char="•"/>
+            </a:pPr>
+            <a:r>
+              <a:rPr lang="en-US" sz="1100" dirty="0">
+                <a:solidFill>
+                  <a:srgbClr val="6B6660"/>
+                </a:solidFill>
+                <a:latin typeface="Calibri" pitchFamily="34" charset="0"/>
+                <a:ea typeface="Calibri" pitchFamily="34" charset="-122"/>
+                <a:cs typeface="Calibri" pitchFamily="34" charset="-120"/>
+              </a:rPr>
+              <a:t>⅓ = 0.333...</a:t>
+            </a:r>
+            <a:endParaRPr lang="en-US" sz="1100" dirty="0"/>
           </a:p>
         </p:txBody>
       </p:sp>
       <p:sp>
         <p:nvSpPr>
-          <p:cNvPr id="4" name="Text 2"/>
-          <p:cNvSpPr/>
-          <p:nvPr/>
-        </p:nvSpPr>
-        <p:spPr>
-          <a:xfrm>
-            <a:off x="457200" y="274320"/>
-            <a:ext cx="8229600" cy="640080"/>
+          <p:cNvPr id="10" name="Shape 8"/>
+          <p:cNvSpPr/>
+          <p:nvPr/>
+        </p:nvSpPr>
+        <p:spPr>
+          <a:xfrm>
+            <a:off x="3246120" y="1051560"/>
+            <a:ext cx="2468880" cy="3657600"/>
+          </a:xfrm>
+          <a:prstGeom prst="rect">
+            <a:avLst/>
+          </a:prstGeom>
+          <a:solidFill>
+            <a:srgbClr val="FFFFFF"/>
+          </a:solidFill>
+          <a:ln/>
+          <a:effectLst>
+            <a:outerShdw sx="100000" sy="100000" kx="0" ky="0" algn="bl" rotWithShape="0" blurRad="50800" dist="25400" dir="8100000">
+              <a:srgbClr val="000000">
+                <a:alpha val="10000"/>
+              </a:srgbClr>
+            </a:outerShdw>
+          </a:effectLst>
+        </p:spPr>
+      </p:sp>
+      <p:sp>
+        <p:nvSpPr>
+          <p:cNvPr id="11" name="Shape 9"/>
+          <p:cNvSpPr/>
+          <p:nvPr/>
+        </p:nvSpPr>
+        <p:spPr>
+          <a:xfrm>
+            <a:off x="3246120" y="1051560"/>
+            <a:ext cx="2468880" cy="54864"/>
+          </a:xfrm>
+          <a:prstGeom prst="rect">
+            <a:avLst/>
+          </a:prstGeom>
+          <a:solidFill>
+            <a:srgbClr val="E9C46A"/>
+          </a:solidFill>
+          <a:ln/>
+        </p:spPr>
+      </p:sp>
+      <p:sp>
+        <p:nvSpPr>
+          <p:cNvPr id="12" name="Text 10"/>
+          <p:cNvSpPr/>
+          <p:nvPr/>
+        </p:nvSpPr>
+        <p:spPr>
+          <a:xfrm>
+            <a:off x="3383280" y="1234440"/>
+            <a:ext cx="2194560" cy="457200"/>
           </a:xfrm>
           <a:prstGeom prst="rect">
             <a:avLst/>
@@ -2246,11 +4263,11 @@
           <a:bodyPr wrap="square" rtlCol="0" anchor="ctr"/>
           <a:lstStyle/>
           <a:p>
-            <a:pPr indent="0" marL="0">
+            <a:pPr algn="ctr" indent="0" marL="0">
               <a:buNone/>
             </a:pPr>
             <a:r>
-              <a:rPr lang="en-US" sz="2600" b="1" dirty="0">
+              <a:rPr lang="en-US" sz="1400" b="1" dirty="0">
                 <a:solidFill>
                   <a:srgbClr val="1B2A4A"/>
                 </a:solidFill>
@@ -2258,22 +4275,22 @@
                 <a:ea typeface="Georgia" pitchFamily="34" charset="-122"/>
                 <a:cs typeface="Georgia" pitchFamily="34" charset="-120"/>
               </a:rPr>
-              <a:t>Percentage of an Amount</a:t>
-            </a:r>
-            <a:endParaRPr lang="en-US" sz="2600" dirty="0"/>
+              <a:t>Decimal → Percentage</a:t>
+            </a:r>
+            <a:endParaRPr lang="en-US" sz="1400" dirty="0"/>
           </a:p>
         </p:txBody>
       </p:sp>
       <p:sp>
         <p:nvSpPr>
-          <p:cNvPr id="5" name="Text 3"/>
-          <p:cNvSpPr/>
-          <p:nvPr/>
-        </p:nvSpPr>
-        <p:spPr>
-          <a:xfrm>
-            <a:off x="457200" y="1188720"/>
-            <a:ext cx="3840480" cy="3474720"/>
+          <p:cNvPr id="13" name="Text 11"/>
+          <p:cNvSpPr/>
+          <p:nvPr/>
+        </p:nvSpPr>
+        <p:spPr>
+          <a:xfrm>
+            <a:off x="3383280" y="1737360"/>
+            <a:ext cx="2194560" cy="2834640"/>
           </a:xfrm>
           <a:prstGeom prst="rect">
             <a:avLst/>
@@ -2287,141 +4304,99 @@
           <a:p>
             <a:pPr marL="342900" indent="-342900">
               <a:spcAft>
-                <a:spcPts val="600"/>
+                <a:spcPts val="400"/>
               </a:spcAft>
               <a:buSzPct val="100000"/>
               <a:buChar char="•"/>
             </a:pPr>
             <a:r>
-              <a:rPr lang="en-US" sz="1400" dirty="0">
+              <a:rPr lang="en-US" sz="1100" dirty="0">
                 <a:solidFill>
-                  <a:srgbClr val="3D3A36"/>
+                  <a:srgbClr val="6B6660"/>
                 </a:solidFill>
                 <a:latin typeface="Calibri" pitchFamily="34" charset="0"/>
                 <a:ea typeface="Calibri" pitchFamily="34" charset="-122"/>
                 <a:cs typeface="Calibri" pitchFamily="34" charset="-120"/>
               </a:rPr>
-              <a:t>Find 10% by dividing by 10</a:t>
-            </a:r>
-            <a:endParaRPr lang="en-US" sz="1400" dirty="0"/>
+              <a:t>Multiply by 100</a:t>
+            </a:r>
+            <a:endParaRPr lang="en-US" sz="1100" dirty="0"/>
           </a:p>
           <a:p>
             <a:pPr marL="342900" indent="-342900">
               <a:spcAft>
-                <a:spcPts val="600"/>
+                <a:spcPts val="400"/>
               </a:spcAft>
               <a:buSzPct val="100000"/>
               <a:buChar char="•"/>
             </a:pPr>
             <a:r>
-              <a:rPr lang="en-US" sz="1400" dirty="0">
+              <a:rPr lang="en-US" sz="1100" dirty="0">
                 <a:solidFill>
-                  <a:srgbClr val="3D3A36"/>
+                  <a:srgbClr val="6B6660"/>
                 </a:solidFill>
                 <a:latin typeface="Calibri" pitchFamily="34" charset="0"/>
                 <a:ea typeface="Calibri" pitchFamily="34" charset="-122"/>
                 <a:cs typeface="Calibri" pitchFamily="34" charset="-120"/>
               </a:rPr>
-              <a:t>Find 1% by dividing by 100</a:t>
-            </a:r>
-            <a:endParaRPr lang="en-US" sz="1400" dirty="0"/>
+              <a:t>0.75 × 100 = 75%</a:t>
+            </a:r>
+            <a:endParaRPr lang="en-US" sz="1100" dirty="0"/>
           </a:p>
           <a:p>
             <a:pPr marL="342900" indent="-342900">
               <a:spcAft>
-                <a:spcPts val="600"/>
+                <a:spcPts val="400"/>
               </a:spcAft>
               <a:buSzPct val="100000"/>
               <a:buChar char="•"/>
             </a:pPr>
             <a:r>
-              <a:rPr lang="en-US" sz="1400" dirty="0">
+              <a:rPr lang="en-US" sz="1100" dirty="0">
                 <a:solidFill>
-                  <a:srgbClr val="3D3A36"/>
+                  <a:srgbClr val="6B6660"/>
                 </a:solidFill>
                 <a:latin typeface="Calibri" pitchFamily="34" charset="0"/>
                 <a:ea typeface="Calibri" pitchFamily="34" charset="-122"/>
                 <a:cs typeface="Calibri" pitchFamily="34" charset="-120"/>
               </a:rPr>
-              <a:t>Build up from there: 35% = 3×10% + ½×10%</a:t>
-            </a:r>
-            <a:endParaRPr lang="en-US" sz="1400" dirty="0"/>
+              <a:t>Just move decimal point 2 places right</a:t>
+            </a:r>
+            <a:endParaRPr lang="en-US" sz="1100" dirty="0"/>
           </a:p>
           <a:p>
             <a:pPr marL="342900" indent="-342900">
               <a:spcAft>
-                <a:spcPts val="600"/>
+                <a:spcPts val="400"/>
               </a:spcAft>
               <a:buSzPct val="100000"/>
               <a:buChar char="•"/>
             </a:pPr>
             <a:r>
-              <a:rPr lang="en-US" sz="1400" dirty="0">
+              <a:rPr lang="en-US" sz="1100" dirty="0">
                 <a:solidFill>
-                  <a:srgbClr val="3D3A36"/>
+                  <a:srgbClr val="6B6660"/>
                 </a:solidFill>
                 <a:latin typeface="Calibri" pitchFamily="34" charset="0"/>
                 <a:ea typeface="Calibri" pitchFamily="34" charset="-122"/>
                 <a:cs typeface="Calibri" pitchFamily="34" charset="-120"/>
               </a:rPr>
-              <a:t>Example: 35% of 240</a:t>
-            </a:r>
-            <a:endParaRPr lang="en-US" sz="1400" dirty="0"/>
-          </a:p>
-          <a:p>
-            <a:pPr marL="342900" indent="-342900">
-              <a:spcAft>
-                <a:spcPts val="600"/>
-              </a:spcAft>
-              <a:buSzPct val="100000"/>
-              <a:buChar char="•"/>
-            </a:pPr>
-            <a:r>
-              <a:rPr lang="en-US" sz="1400" dirty="0">
-                <a:solidFill>
-                  <a:srgbClr val="3D3A36"/>
-                </a:solidFill>
-                <a:latin typeface="Calibri" pitchFamily="34" charset="0"/>
-                <a:ea typeface="Calibri" pitchFamily="34" charset="-122"/>
-                <a:cs typeface="Calibri" pitchFamily="34" charset="-120"/>
-              </a:rPr>
-              <a:t>10% = 24, 30% = 72, 5% = 12, 35% = 84</a:t>
-            </a:r>
-            <a:endParaRPr lang="en-US" sz="1400" dirty="0"/>
-          </a:p>
-          <a:p>
-            <a:pPr marL="342900" indent="-342900">
-              <a:spcAft>
-                <a:spcPts val="600"/>
-              </a:spcAft>
-              <a:buSzPct val="100000"/>
-              <a:buChar char="•"/>
-            </a:pPr>
-            <a:r>
-              <a:rPr lang="en-US" sz="1400" dirty="0">
-                <a:solidFill>
-                  <a:srgbClr val="3D3A36"/>
-                </a:solidFill>
-                <a:latin typeface="Calibri" pitchFamily="34" charset="0"/>
-                <a:ea typeface="Calibri" pitchFamily="34" charset="-122"/>
-                <a:cs typeface="Calibri" pitchFamily="34" charset="-120"/>
-              </a:rPr>
-              <a:t>Or use decimal: 0.35 × 240 = 84</a:t>
-            </a:r>
-            <a:endParaRPr lang="en-US" sz="1400" dirty="0"/>
+              <a:t>0.05 = 5%</a:t>
+            </a:r>
+            <a:endParaRPr lang="en-US" sz="1100" dirty="0"/>
           </a:p>
         </p:txBody>
       </p:sp>
       <p:sp>
         <p:nvSpPr>
-          <p:cNvPr id="6" name="Shape 4"/>
-          <p:cNvSpPr/>
-          <p:nvPr/>
-        </p:nvSpPr>
-        <p:spPr>
-          <a:xfrm>
-            <a:off x="4846320" y="1188720"/>
-            <a:ext cx="3840480" cy="3474720"/>
+          <p:cNvPr id="14" name="Shape 12"/>
+          <p:cNvSpPr/>
+          <p:nvPr/>
+        </p:nvSpPr>
+        <p:spPr>
+          <a:xfrm>
+            <a:off x="5852160" y="1051560"/>
+            <a:ext cx="2468880" cy="3657600"/>
           </a:xfrm>
           <a:prstGeom prst="rect">
             <a:avLst/>
@@ -2429,12 +4404,7 @@
           <a:solidFill>
             <a:srgbClr val="FFFFFF"/>
           </a:solidFill>
-          <a:ln w="12700">
-            <a:solidFill>
-              <a:srgbClr val="E5E2DC"/>
-            </a:solidFill>
-            <a:prstDash val="solid"/>
-          </a:ln>
+          <a:ln/>
           <a:effectLst>
             <a:outerShdw sx="100000" sy="100000" kx="0" ky="0" algn="bl" rotWithShape="0" blurRad="50800" dist="25400" dir="8100000">
               <a:srgbClr val="000000">
@@ -2446,34 +4416,73 @@
       </p:sp>
       <p:sp>
         <p:nvSpPr>
-          <p:cNvPr id="7" name="Shape 5"/>
-          <p:cNvSpPr/>
-          <p:nvPr/>
-        </p:nvSpPr>
-        <p:spPr>
-          <a:xfrm>
-            <a:off x="4846320" y="1188720"/>
-            <a:ext cx="3840480" cy="54864"/>
-          </a:xfrm>
-          <a:prstGeom prst="rect">
-            <a:avLst/>
-          </a:prstGeom>
-          <a:solidFill>
-            <a:srgbClr val="2A9D8F"/>
-          </a:solidFill>
-          <a:ln/>
-        </p:spPr>
-      </p:sp>
-      <p:sp>
-        <p:nvSpPr>
-          <p:cNvPr id="8" name="Text 6"/>
-          <p:cNvSpPr/>
-          <p:nvPr/>
-        </p:nvSpPr>
-        <p:spPr>
-          <a:xfrm>
-            <a:off x="5120640" y="1371600"/>
-            <a:ext cx="3291840" cy="3108960"/>
+          <p:cNvPr id="15" name="Shape 13"/>
+          <p:cNvSpPr/>
+          <p:nvPr/>
+        </p:nvSpPr>
+        <p:spPr>
+          <a:xfrm>
+            <a:off x="5852160" y="1051560"/>
+            <a:ext cx="2468880" cy="54864"/>
+          </a:xfrm>
+          <a:prstGeom prst="rect">
+            <a:avLst/>
+          </a:prstGeom>
+          <a:solidFill>
+            <a:srgbClr val="9B9690"/>
+          </a:solidFill>
+          <a:ln/>
+        </p:spPr>
+      </p:sp>
+      <p:sp>
+        <p:nvSpPr>
+          <p:cNvPr id="16" name="Text 14"/>
+          <p:cNvSpPr/>
+          <p:nvPr/>
+        </p:nvSpPr>
+        <p:spPr>
+          <a:xfrm>
+            <a:off x="5989320" y="1234440"/>
+            <a:ext cx="2194560" cy="457200"/>
+          </a:xfrm>
+          <a:prstGeom prst="rect">
+            <a:avLst/>
+          </a:prstGeom>
+          <a:noFill/>
+          <a:ln/>
+        </p:spPr>
+        <p:txBody>
+          <a:bodyPr wrap="square" rtlCol="0" anchor="ctr"/>
+          <a:lstStyle/>
+          <a:p>
+            <a:pPr algn="ctr" indent="0" marL="0">
+              <a:buNone/>
+            </a:pPr>
+            <a:r>
+              <a:rPr lang="en-US" sz="1400" b="1" dirty="0">
+                <a:solidFill>
+                  <a:srgbClr val="1B2A4A"/>
+                </a:solidFill>
+                <a:latin typeface="Georgia" pitchFamily="34" charset="0"/>
+                <a:ea typeface="Georgia" pitchFamily="34" charset="-122"/>
+                <a:cs typeface="Georgia" pitchFamily="34" charset="-120"/>
+              </a:rPr>
+              <a:t>Percentage → Fraction</a:t>
+            </a:r>
+            <a:endParaRPr lang="en-US" sz="1400" dirty="0"/>
+          </a:p>
+        </p:txBody>
+      </p:sp>
+      <p:sp>
+        <p:nvSpPr>
+          <p:cNvPr id="17" name="Text 15"/>
+          <p:cNvSpPr/>
+          <p:nvPr/>
+        </p:nvSpPr>
+        <p:spPr>
+          <a:xfrm>
+            <a:off x="5989320" y="1737360"/>
+            <a:ext cx="2194560" cy="2834640"/>
           </a:xfrm>
           <a:prstGeom prst="rect">
             <a:avLst/>
@@ -2485,153 +4494,88 @@
           <a:bodyPr wrap="square" rtlCol="0" anchor="t"/>
           <a:lstStyle/>
           <a:p>
-            <a:pPr indent="0" marL="0">
+            <a:pPr marL="342900" indent="-342900">
               <a:spcAft>
                 <a:spcPts val="400"/>
               </a:spcAft>
-              <a:buNone/>
+              <a:buSzPct val="100000"/>
+              <a:buChar char="•"/>
             </a:pPr>
             <a:r>
-              <a:rPr lang="en-US" sz="1600" b="1" dirty="0">
+              <a:rPr lang="en-US" sz="1100" dirty="0">
                 <a:solidFill>
-                  <a:srgbClr val="1B2A4A"/>
+                  <a:srgbClr val="6B6660"/>
                 </a:solidFill>
                 <a:latin typeface="Calibri" pitchFamily="34" charset="0"/>
                 <a:ea typeface="Calibri" pitchFamily="34" charset="-122"/>
                 <a:cs typeface="Calibri" pitchFamily="34" charset="-120"/>
               </a:rPr>
-              <a:t>Key Equivalences</a:t>
-            </a:r>
-            <a:endParaRPr lang="en-US" sz="1600" dirty="0"/>
-          </a:p>
-          <a:p>
-            <a:pPr indent="0" marL="0">
+              <a:t>Write over 100</a:t>
+            </a:r>
+            <a:endParaRPr lang="en-US" sz="1100" dirty="0"/>
+          </a:p>
+          <a:p>
+            <a:pPr marL="342900" indent="-342900">
               <a:spcAft>
                 <a:spcPts val="400"/>
               </a:spcAft>
-              <a:buNone/>
+              <a:buSzPct val="100000"/>
+              <a:buChar char="•"/>
             </a:pPr>
-            <a:endParaRPr lang="en-US" sz="1600" dirty="0"/>
-          </a:p>
-          <a:p>
-            <a:pPr indent="0" marL="0">
-              <a:spcAft>
-                <a:spcPts val="400"/>
-              </a:spcAft>
-              <a:buNone/>
-            </a:pPr>
-            <a:r>
-              <a:rPr lang="en-US" sz="1300" dirty="0">
+            <a:r>
+              <a:rPr lang="en-US" sz="1100" dirty="0">
                 <a:solidFill>
-                  <a:srgbClr val="3D3A36"/>
+                  <a:srgbClr val="6B6660"/>
                 </a:solidFill>
                 <a:latin typeface="Calibri" pitchFamily="34" charset="0"/>
                 <a:ea typeface="Calibri" pitchFamily="34" charset="-122"/>
                 <a:cs typeface="Calibri" pitchFamily="34" charset="-120"/>
               </a:rPr>
-              <a:t>½ = 0.5 = 50%</a:t>
-            </a:r>
-            <a:endParaRPr lang="en-US" sz="1600" dirty="0"/>
-          </a:p>
-          <a:p>
-            <a:pPr indent="0" marL="0">
+              <a:t>75% = 75/100</a:t>
+            </a:r>
+            <a:endParaRPr lang="en-US" sz="1100" dirty="0"/>
+          </a:p>
+          <a:p>
+            <a:pPr marL="342900" indent="-342900">
               <a:spcAft>
                 <a:spcPts val="400"/>
               </a:spcAft>
-              <a:buNone/>
+              <a:buSzPct val="100000"/>
+              <a:buChar char="•"/>
             </a:pPr>
             <a:r>
-              <a:rPr lang="en-US" sz="1300" dirty="0">
+              <a:rPr lang="en-US" sz="1100" dirty="0">
                 <a:solidFill>
-                  <a:srgbClr val="3D3A36"/>
+                  <a:srgbClr val="6B6660"/>
                 </a:solidFill>
                 <a:latin typeface="Calibri" pitchFamily="34" charset="0"/>
                 <a:ea typeface="Calibri" pitchFamily="34" charset="-122"/>
                 <a:cs typeface="Calibri" pitchFamily="34" charset="-120"/>
               </a:rPr>
-              <a:t>¼ = 0.25 = 25%</a:t>
-            </a:r>
-            <a:endParaRPr lang="en-US" sz="1600" dirty="0"/>
-          </a:p>
-          <a:p>
-            <a:pPr indent="0" marL="0">
+              <a:t>Simplify: 75/100 = ¾</a:t>
+            </a:r>
+            <a:endParaRPr lang="en-US" sz="1100" dirty="0"/>
+          </a:p>
+          <a:p>
+            <a:pPr marL="342900" indent="-342900">
               <a:spcAft>
                 <a:spcPts val="400"/>
               </a:spcAft>
-              <a:buNone/>
+              <a:buSzPct val="100000"/>
+              <a:buChar char="•"/>
             </a:pPr>
             <a:r>
-              <a:rPr lang="en-US" sz="1300" dirty="0">
+              <a:rPr lang="en-US" sz="1100" dirty="0">
                 <a:solidFill>
-                  <a:srgbClr val="3D3A36"/>
+                  <a:srgbClr val="6B6660"/>
                 </a:solidFill>
                 <a:latin typeface="Calibri" pitchFamily="34" charset="0"/>
                 <a:ea typeface="Calibri" pitchFamily="34" charset="-122"/>
                 <a:cs typeface="Calibri" pitchFamily="34" charset="-120"/>
               </a:rPr>
-              <a:t>¾ = 0.75 = 75%</a:t>
-            </a:r>
-            <a:endParaRPr lang="en-US" sz="1600" dirty="0"/>
-          </a:p>
-          <a:p>
-            <a:pPr indent="0" marL="0">
-              <a:spcAft>
-                <a:spcPts val="400"/>
-              </a:spcAft>
-              <a:buNone/>
-            </a:pPr>
-            <a:r>
-              <a:rPr lang="en-US" sz="1300" dirty="0">
-                <a:solidFill>
-                  <a:srgbClr val="3D3A36"/>
-                </a:solidFill>
-                <a:latin typeface="Calibri" pitchFamily="34" charset="0"/>
-                <a:ea typeface="Calibri" pitchFamily="34" charset="-122"/>
-                <a:cs typeface="Calibri" pitchFamily="34" charset="-120"/>
-              </a:rPr>
-              <a:t>¹⁄₅ = 0.2 = 20%</a:t>
-            </a:r>
-            <a:endParaRPr lang="en-US" sz="1600" dirty="0"/>
-          </a:p>
-          <a:p>
-            <a:pPr indent="0" marL="0">
-              <a:spcAft>
-                <a:spcPts val="400"/>
-              </a:spcAft>
-              <a:buNone/>
-            </a:pPr>
-            <a:r>
-              <a:rPr lang="en-US" sz="1300" dirty="0">
-                <a:solidFill>
-                  <a:srgbClr val="3D3A36"/>
-                </a:solidFill>
-                <a:latin typeface="Calibri" pitchFamily="34" charset="0"/>
-                <a:ea typeface="Calibri" pitchFamily="34" charset="-122"/>
-                <a:cs typeface="Calibri" pitchFamily="34" charset="-120"/>
-              </a:rPr>
-              <a:t>¹⁄₃ ≈ 0.333 ≈ 33.3%</a:t>
-            </a:r>
-            <a:endParaRPr lang="en-US" sz="1600" dirty="0"/>
-          </a:p>
-          <a:p>
-            <a:pPr indent="0" marL="0">
-              <a:spcAft>
-                <a:spcPts val="400"/>
-              </a:spcAft>
-              <a:buNone/>
-            </a:pPr>
-            <a:r>
-              <a:rPr lang="en-US" sz="1300" dirty="0">
-                <a:solidFill>
-                  <a:srgbClr val="3D3A36"/>
-                </a:solidFill>
-                <a:latin typeface="Calibri" pitchFamily="34" charset="0"/>
-                <a:ea typeface="Calibri" pitchFamily="34" charset="-122"/>
-                <a:cs typeface="Calibri" pitchFamily="34" charset="-120"/>
-              </a:rPr>
-              <a:t>¹⁄₁₀ = 0.1 = 10%</a:t>
-            </a:r>
-            <a:endParaRPr lang="en-US" sz="1600" dirty="0"/>
+              <a:t>Always simplify!</a:t>
+            </a:r>
+            <a:endParaRPr lang="en-US" sz="1100" dirty="0"/>
           </a:p>
         </p:txBody>
       </p:sp>
@@ -2649,7 +4593,7 @@
     <p:bg>
       <p:bgPr>
         <a:solidFill>
-          <a:srgbClr val="1B2A4A"/>
+          <a:srgbClr val="FAF8F5"/>
         </a:solidFill>
       </p:bgPr>
     </p:bg>
@@ -2676,27 +4620,260 @@
         <p:spPr>
           <a:xfrm>
             <a:off x="0" y="0"/>
-            <a:ext cx="109728" cy="5143500"/>
-          </a:xfrm>
-          <a:prstGeom prst="rect">
-            <a:avLst/>
-          </a:prstGeom>
-          <a:solidFill>
-            <a:srgbClr val="E9C46A"/>
-          </a:solidFill>
-          <a:ln/>
-        </p:spPr>
-      </p:sp>
-      <p:sp>
-        <p:nvSpPr>
-          <p:cNvPr id="3" name="Text 1"/>
-          <p:cNvSpPr/>
-          <p:nvPr/>
-        </p:nvSpPr>
-        <p:spPr>
-          <a:xfrm>
-            <a:off x="731520" y="457200"/>
-            <a:ext cx="7772400" cy="731520"/>
+            <a:ext cx="9144000" cy="822960"/>
+          </a:xfrm>
+          <a:prstGeom prst="rect">
+            <a:avLst/>
+          </a:prstGeom>
+          <a:solidFill>
+            <a:srgbClr val="FFFFFF"/>
+          </a:solidFill>
+          <a:ln/>
+        </p:spPr>
+      </p:sp>
+      <p:sp>
+        <p:nvSpPr>
+          <p:cNvPr id="3" name="Shape 1"/>
+          <p:cNvSpPr/>
+          <p:nvPr/>
+        </p:nvSpPr>
+        <p:spPr>
+          <a:xfrm>
+            <a:off x="0" y="804672"/>
+            <a:ext cx="9144000" cy="27432"/>
+          </a:xfrm>
+          <a:prstGeom prst="rect">
+            <a:avLst/>
+          </a:prstGeom>
+          <a:solidFill>
+            <a:srgbClr val="E5E2DC"/>
+          </a:solidFill>
+          <a:ln/>
+        </p:spPr>
+      </p:sp>
+      <p:sp>
+        <p:nvSpPr>
+          <p:cNvPr id="4" name="Shape 2"/>
+          <p:cNvSpPr/>
+          <p:nvPr/>
+        </p:nvSpPr>
+        <p:spPr>
+          <a:xfrm>
+            <a:off x="548640" y="201168"/>
+            <a:ext cx="54864" cy="420624"/>
+          </a:xfrm>
+          <a:prstGeom prst="rect">
+            <a:avLst/>
+          </a:prstGeom>
+          <a:solidFill>
+            <a:srgbClr val="2A9D8F"/>
+          </a:solidFill>
+          <a:ln/>
+        </p:spPr>
+      </p:sp>
+      <p:sp>
+        <p:nvSpPr>
+          <p:cNvPr id="5" name="Text 3"/>
+          <p:cNvSpPr/>
+          <p:nvPr/>
+        </p:nvSpPr>
+        <p:spPr>
+          <a:xfrm>
+            <a:off x="777240" y="137160"/>
+            <a:ext cx="7772400" cy="548640"/>
+          </a:xfrm>
+          <a:prstGeom prst="rect">
+            <a:avLst/>
+          </a:prstGeom>
+          <a:noFill/>
+          <a:ln/>
+        </p:spPr>
+        <p:txBody>
+          <a:bodyPr wrap="square" lIns="0" tIns="0" rIns="0" bIns="0" rtlCol="0" anchor="ctr"/>
+          <a:lstStyle/>
+          <a:p>
+            <a:pPr indent="0" marL="0">
+              <a:buNone/>
+            </a:pPr>
+            <a:r>
+              <a:rPr lang="en-US" sz="2000" b="1" dirty="0">
+                <a:solidFill>
+                  <a:srgbClr val="1B2A4A"/>
+                </a:solidFill>
+                <a:latin typeface="Georgia" pitchFamily="34" charset="0"/>
+                <a:ea typeface="Georgia" pitchFamily="34" charset="-122"/>
+                <a:cs typeface="Georgia" pitchFamily="34" charset="-120"/>
+              </a:rPr>
+              <a:t>Finding Percentages of Amounts</a:t>
+            </a:r>
+            <a:endParaRPr lang="en-US" sz="2000" dirty="0"/>
+          </a:p>
+        </p:txBody>
+      </p:sp>
+      <p:sp>
+        <p:nvSpPr>
+          <p:cNvPr id="6" name="Text 4"/>
+          <p:cNvSpPr/>
+          <p:nvPr/>
+        </p:nvSpPr>
+        <p:spPr>
+          <a:xfrm>
+            <a:off x="731520" y="1051560"/>
+            <a:ext cx="7680960" cy="3108960"/>
+          </a:xfrm>
+          <a:prstGeom prst="rect">
+            <a:avLst/>
+          </a:prstGeom>
+          <a:noFill/>
+          <a:ln/>
+        </p:spPr>
+        <p:txBody>
+          <a:bodyPr wrap="square" rtlCol="0" anchor="t"/>
+          <a:lstStyle/>
+          <a:p>
+            <a:pPr marL="342900" indent="-342900">
+              <a:spcAft>
+                <a:spcPts val="800"/>
+              </a:spcAft>
+              <a:buSzPct val="100000"/>
+              <a:buChar char="•"/>
+            </a:pPr>
+            <a:r>
+              <a:rPr lang="en-US" sz="1500" dirty="0">
+                <a:solidFill>
+                  <a:srgbClr val="3D3A36"/>
+                </a:solidFill>
+                <a:latin typeface="Calibri" pitchFamily="34" charset="0"/>
+                <a:ea typeface="Calibri" pitchFamily="34" charset="-122"/>
+                <a:cs typeface="Calibri" pitchFamily="34" charset="-120"/>
+              </a:rPr>
+              <a:t>10% = divide by 10. Example: 10% of 80 = 8.</a:t>
+            </a:r>
+            <a:endParaRPr lang="en-US" sz="1500" dirty="0"/>
+          </a:p>
+          <a:p>
+            <a:pPr marL="342900" indent="-342900">
+              <a:spcAft>
+                <a:spcPts val="800"/>
+              </a:spcAft>
+              <a:buSzPct val="100000"/>
+              <a:buChar char="•"/>
+            </a:pPr>
+            <a:r>
+              <a:rPr lang="en-US" sz="1500" dirty="0">
+                <a:solidFill>
+                  <a:srgbClr val="3D3A36"/>
+                </a:solidFill>
+                <a:latin typeface="Calibri" pitchFamily="34" charset="0"/>
+                <a:ea typeface="Calibri" pitchFamily="34" charset="-122"/>
+                <a:cs typeface="Calibri" pitchFamily="34" charset="-120"/>
+              </a:rPr>
+              <a:t>5% = half of 10%. Example: 5% of 80 = 4.</a:t>
+            </a:r>
+            <a:endParaRPr lang="en-US" sz="1500" dirty="0"/>
+          </a:p>
+          <a:p>
+            <a:pPr marL="342900" indent="-342900">
+              <a:spcAft>
+                <a:spcPts val="800"/>
+              </a:spcAft>
+              <a:buSzPct val="100000"/>
+              <a:buChar char="•"/>
+            </a:pPr>
+            <a:r>
+              <a:rPr lang="en-US" sz="1500" dirty="0">
+                <a:solidFill>
+                  <a:srgbClr val="3D3A36"/>
+                </a:solidFill>
+                <a:latin typeface="Calibri" pitchFamily="34" charset="0"/>
+                <a:ea typeface="Calibri" pitchFamily="34" charset="-122"/>
+                <a:cs typeface="Calibri" pitchFamily="34" charset="-120"/>
+              </a:rPr>
+              <a:t>1% = divide by 100. Example: 1% of 80 = 0.8.</a:t>
+            </a:r>
+            <a:endParaRPr lang="en-US" sz="1500" dirty="0"/>
+          </a:p>
+          <a:p>
+            <a:pPr marL="342900" indent="-342900">
+              <a:spcAft>
+                <a:spcPts val="800"/>
+              </a:spcAft>
+              <a:buSzPct val="100000"/>
+              <a:buChar char="•"/>
+            </a:pPr>
+            <a:r>
+              <a:rPr lang="en-US" sz="1500" dirty="0">
+                <a:solidFill>
+                  <a:srgbClr val="3D3A36"/>
+                </a:solidFill>
+                <a:latin typeface="Calibri" pitchFamily="34" charset="0"/>
+                <a:ea typeface="Calibri" pitchFamily="34" charset="-122"/>
+                <a:cs typeface="Calibri" pitchFamily="34" charset="-120"/>
+              </a:rPr>
+              <a:t>Build up from these: 35% = 3 × 10% + 5% = 24 + 4 = 28.</a:t>
+            </a:r>
+            <a:endParaRPr lang="en-US" sz="1500" dirty="0"/>
+          </a:p>
+          <a:p>
+            <a:pPr marL="342900" indent="-342900">
+              <a:spcAft>
+                <a:spcPts val="800"/>
+              </a:spcAft>
+              <a:buSzPct val="100000"/>
+              <a:buChar char="•"/>
+            </a:pPr>
+            <a:r>
+              <a:rPr lang="en-US" sz="1500" dirty="0">
+                <a:solidFill>
+                  <a:srgbClr val="3D3A36"/>
+                </a:solidFill>
+                <a:latin typeface="Calibri" pitchFamily="34" charset="0"/>
+                <a:ea typeface="Calibri" pitchFamily="34" charset="-122"/>
+                <a:cs typeface="Calibri" pitchFamily="34" charset="-120"/>
+              </a:rPr>
+              <a:t>Or use: percentage ÷ 100 × amount. Example: 35% of 80 = 0.35 × 80 = 28.</a:t>
+            </a:r>
+            <a:endParaRPr lang="en-US" sz="1500" dirty="0"/>
+          </a:p>
+        </p:txBody>
+      </p:sp>
+      <p:sp>
+        <p:nvSpPr>
+          <p:cNvPr id="7" name="Shape 5"/>
+          <p:cNvSpPr/>
+          <p:nvPr/>
+        </p:nvSpPr>
+        <p:spPr>
+          <a:xfrm>
+            <a:off x="731520" y="4206240"/>
+            <a:ext cx="7680960" cy="640080"/>
+          </a:xfrm>
+          <a:prstGeom prst="rect">
+            <a:avLst/>
+          </a:prstGeom>
+          <a:solidFill>
+            <a:srgbClr val="E8F5F3"/>
+          </a:solidFill>
+          <a:ln/>
+          <a:effectLst>
+            <a:outerShdw sx="100000" sy="100000" kx="0" ky="0" algn="bl" rotWithShape="0" blurRad="50800" dist="25400" dir="8100000">
+              <a:srgbClr val="000000">
+                <a:alpha val="10000"/>
+              </a:srgbClr>
+            </a:outerShdw>
+          </a:effectLst>
+        </p:spPr>
+      </p:sp>
+      <p:sp>
+        <p:nvSpPr>
+          <p:cNvPr id="8" name="Text 6"/>
+          <p:cNvSpPr/>
+          <p:nvPr/>
+        </p:nvSpPr>
+        <p:spPr>
+          <a:xfrm>
+            <a:off x="914400" y="4251960"/>
+            <a:ext cx="7315200" cy="548640"/>
           </a:xfrm>
           <a:prstGeom prst="rect">
             <a:avLst/>
@@ -2712,7 +4889,833 @@
               <a:buNone/>
             </a:pPr>
             <a:r>
-              <a:rPr lang="en-US" sz="3200" b="1" dirty="0">
+              <a:rPr lang="en-US" sz="1200" b="1" dirty="0">
+                <a:solidFill>
+                  <a:srgbClr val="2A9D8F"/>
+                </a:solidFill>
+                <a:latin typeface="Calibri" pitchFamily="34" charset="0"/>
+                <a:ea typeface="Calibri" pitchFamily="34" charset="-122"/>
+                <a:cs typeface="Calibri" pitchFamily="34" charset="-120"/>
+              </a:rPr>
+              <a:t>Key Idea: </a:t>
+            </a:r>
+            <a:pPr indent="0" marL="0">
+              <a:buNone/>
+            </a:pPr>
+            <a:r>
+              <a:rPr lang="en-US" sz="1200" i="1" dirty="0">
+                <a:solidFill>
+                  <a:srgbClr val="3D3A36"/>
+                </a:solidFill>
+                <a:latin typeface="Calibri" pitchFamily="34" charset="0"/>
+                <a:ea typeface="Calibri" pitchFamily="34" charset="-122"/>
+                <a:cs typeface="Calibri" pitchFamily="34" charset="-120"/>
+              </a:rPr>
+              <a:t>The 10% method is great for mental maths — find 10%, then build up.</a:t>
+            </a:r>
+            <a:endParaRPr lang="en-US" sz="1200" dirty="0"/>
+          </a:p>
+        </p:txBody>
+      </p:sp>
+    </p:spTree>
+  </p:cSld>
+  <p:clrMapOvr>
+    <a:masterClrMapping/>
+  </p:clrMapOvr>
+</p:sld>
+</file>
+
+<file path=ppt/slides/slide6.xml><?xml version="1.0" encoding="utf-8"?>
+<p:sld xmlns:a="http://schemas.openxmlformats.org/drawingml/2006/main" xmlns:r="http://schemas.openxmlformats.org/officeDocument/2006/relationships" xmlns:p="http://schemas.openxmlformats.org/presentationml/2006/main">
+  <p:cSld name="Slide 6">
+    <p:bg>
+      <p:bgPr>
+        <a:solidFill>
+          <a:srgbClr val="FAF8F5"/>
+        </a:solidFill>
+      </p:bgPr>
+    </p:bg>
+    <p:spTree>
+      <p:nvGrpSpPr>
+        <p:cNvPr id="1" name=""/>
+        <p:cNvGrpSpPr/>
+        <p:nvPr/>
+      </p:nvGrpSpPr>
+      <p:grpSpPr>
+        <a:xfrm>
+          <a:off x="0" y="0"/>
+          <a:ext cx="0" cy="0"/>
+          <a:chOff x="0" y="0"/>
+          <a:chExt cx="0" cy="0"/>
+        </a:xfrm>
+      </p:grpSpPr>
+      <p:sp>
+        <p:nvSpPr>
+          <p:cNvPr id="2" name="Shape 0"/>
+          <p:cNvSpPr/>
+          <p:nvPr/>
+        </p:nvSpPr>
+        <p:spPr>
+          <a:xfrm>
+            <a:off x="0" y="0"/>
+            <a:ext cx="9144000" cy="822960"/>
+          </a:xfrm>
+          <a:prstGeom prst="rect">
+            <a:avLst/>
+          </a:prstGeom>
+          <a:solidFill>
+            <a:srgbClr val="FFFFFF"/>
+          </a:solidFill>
+          <a:ln/>
+        </p:spPr>
+      </p:sp>
+      <p:sp>
+        <p:nvSpPr>
+          <p:cNvPr id="3" name="Shape 1"/>
+          <p:cNvSpPr/>
+          <p:nvPr/>
+        </p:nvSpPr>
+        <p:spPr>
+          <a:xfrm>
+            <a:off x="0" y="804672"/>
+            <a:ext cx="9144000" cy="27432"/>
+          </a:xfrm>
+          <a:prstGeom prst="rect">
+            <a:avLst/>
+          </a:prstGeom>
+          <a:solidFill>
+            <a:srgbClr val="E5E2DC"/>
+          </a:solidFill>
+          <a:ln/>
+        </p:spPr>
+      </p:sp>
+      <p:sp>
+        <p:nvSpPr>
+          <p:cNvPr id="4" name="Shape 2"/>
+          <p:cNvSpPr/>
+          <p:nvPr/>
+        </p:nvSpPr>
+        <p:spPr>
+          <a:xfrm>
+            <a:off x="548640" y="201168"/>
+            <a:ext cx="54864" cy="420624"/>
+          </a:xfrm>
+          <a:prstGeom prst="rect">
+            <a:avLst/>
+          </a:prstGeom>
+          <a:solidFill>
+            <a:srgbClr val="2A9D8F"/>
+          </a:solidFill>
+          <a:ln/>
+        </p:spPr>
+      </p:sp>
+      <p:sp>
+        <p:nvSpPr>
+          <p:cNvPr id="5" name="Text 3"/>
+          <p:cNvSpPr/>
+          <p:nvPr/>
+        </p:nvSpPr>
+        <p:spPr>
+          <a:xfrm>
+            <a:off x="777240" y="137160"/>
+            <a:ext cx="7772400" cy="548640"/>
+          </a:xfrm>
+          <a:prstGeom prst="rect">
+            <a:avLst/>
+          </a:prstGeom>
+          <a:noFill/>
+          <a:ln/>
+        </p:spPr>
+        <p:txBody>
+          <a:bodyPr wrap="square" lIns="0" tIns="0" rIns="0" bIns="0" rtlCol="0" anchor="ctr"/>
+          <a:lstStyle/>
+          <a:p>
+            <a:pPr indent="0" marL="0">
+              <a:buNone/>
+            </a:pPr>
+            <a:r>
+              <a:rPr lang="en-US" sz="2000" b="1" dirty="0">
+                <a:solidFill>
+                  <a:srgbClr val="1B2A4A"/>
+                </a:solidFill>
+                <a:latin typeface="Georgia" pitchFamily="34" charset="0"/>
+                <a:ea typeface="Georgia" pitchFamily="34" charset="-122"/>
+                <a:cs typeface="Georgia" pitchFamily="34" charset="-120"/>
+              </a:rPr>
+              <a:t>Check Your Understanding</a:t>
+            </a:r>
+            <a:endParaRPr lang="en-US" sz="2000" dirty="0"/>
+          </a:p>
+        </p:txBody>
+      </p:sp>
+      <p:sp>
+        <p:nvSpPr>
+          <p:cNvPr id="6" name="Shape 4"/>
+          <p:cNvSpPr/>
+          <p:nvPr/>
+        </p:nvSpPr>
+        <p:spPr>
+          <a:xfrm>
+            <a:off x="731520" y="1051560"/>
+            <a:ext cx="7680960" cy="438912"/>
+          </a:xfrm>
+          <a:prstGeom prst="rect">
+            <a:avLst/>
+          </a:prstGeom>
+          <a:solidFill>
+            <a:srgbClr val="FFFFFF"/>
+          </a:solidFill>
+          <a:ln/>
+        </p:spPr>
+      </p:sp>
+      <p:sp>
+        <p:nvSpPr>
+          <p:cNvPr id="7" name="Text 5"/>
+          <p:cNvSpPr/>
+          <p:nvPr/>
+        </p:nvSpPr>
+        <p:spPr>
+          <a:xfrm>
+            <a:off x="868680" y="1051560"/>
+            <a:ext cx="320040" cy="438912"/>
+          </a:xfrm>
+          <a:prstGeom prst="rect">
+            <a:avLst/>
+          </a:prstGeom>
+          <a:noFill/>
+          <a:ln/>
+        </p:spPr>
+        <p:txBody>
+          <a:bodyPr wrap="square" rtlCol="0" anchor="ctr"/>
+          <a:lstStyle/>
+          <a:p>
+            <a:pPr indent="0" marL="0">
+              <a:buNone/>
+            </a:pPr>
+            <a:r>
+              <a:rPr lang="en-US" sz="1400" dirty="0">
+                <a:solidFill>
+                  <a:srgbClr val="2A9D8F"/>
+                </a:solidFill>
+              </a:rPr>
+              <a:t>☐</a:t>
+            </a:r>
+            <a:endParaRPr lang="en-US" sz="1400" dirty="0"/>
+          </a:p>
+        </p:txBody>
+      </p:sp>
+      <p:sp>
+        <p:nvSpPr>
+          <p:cNvPr id="8" name="Text 6"/>
+          <p:cNvSpPr/>
+          <p:nvPr/>
+        </p:nvSpPr>
+        <p:spPr>
+          <a:xfrm>
+            <a:off x="1234440" y="1051560"/>
+            <a:ext cx="6949440" cy="438912"/>
+          </a:xfrm>
+          <a:prstGeom prst="rect">
+            <a:avLst/>
+          </a:prstGeom>
+          <a:noFill/>
+          <a:ln/>
+        </p:spPr>
+        <p:txBody>
+          <a:bodyPr wrap="square" rtlCol="0" anchor="ctr"/>
+          <a:lstStyle/>
+          <a:p>
+            <a:pPr indent="0" marL="0">
+              <a:buNone/>
+            </a:pPr>
+            <a:r>
+              <a:rPr lang="en-US" sz="1300" dirty="0">
+                <a:solidFill>
+                  <a:srgbClr val="3D3A36"/>
+                </a:solidFill>
+                <a:latin typeface="Calibri" pitchFamily="34" charset="0"/>
+                <a:ea typeface="Calibri" pitchFamily="34" charset="-122"/>
+                <a:cs typeface="Calibri" pitchFamily="34" charset="-120"/>
+              </a:rPr>
+              <a:t>I can convert between fractions, decimals, and percentages</a:t>
+            </a:r>
+            <a:endParaRPr lang="en-US" sz="1300" dirty="0"/>
+          </a:p>
+        </p:txBody>
+      </p:sp>
+      <p:sp>
+        <p:nvSpPr>
+          <p:cNvPr id="9" name="Shape 7"/>
+          <p:cNvSpPr/>
+          <p:nvPr/>
+        </p:nvSpPr>
+        <p:spPr>
+          <a:xfrm>
+            <a:off x="731520" y="1554480"/>
+            <a:ext cx="7680960" cy="438912"/>
+          </a:xfrm>
+          <a:prstGeom prst="rect">
+            <a:avLst/>
+          </a:prstGeom>
+          <a:solidFill>
+            <a:srgbClr val="F8F6F3"/>
+          </a:solidFill>
+          <a:ln/>
+        </p:spPr>
+      </p:sp>
+      <p:sp>
+        <p:nvSpPr>
+          <p:cNvPr id="10" name="Text 8"/>
+          <p:cNvSpPr/>
+          <p:nvPr/>
+        </p:nvSpPr>
+        <p:spPr>
+          <a:xfrm>
+            <a:off x="868680" y="1554480"/>
+            <a:ext cx="320040" cy="438912"/>
+          </a:xfrm>
+          <a:prstGeom prst="rect">
+            <a:avLst/>
+          </a:prstGeom>
+          <a:noFill/>
+          <a:ln/>
+        </p:spPr>
+        <p:txBody>
+          <a:bodyPr wrap="square" rtlCol="0" anchor="ctr"/>
+          <a:lstStyle/>
+          <a:p>
+            <a:pPr indent="0" marL="0">
+              <a:buNone/>
+            </a:pPr>
+            <a:r>
+              <a:rPr lang="en-US" sz="1400" dirty="0">
+                <a:solidFill>
+                  <a:srgbClr val="2A9D8F"/>
+                </a:solidFill>
+              </a:rPr>
+              <a:t>☐</a:t>
+            </a:r>
+            <a:endParaRPr lang="en-US" sz="1400" dirty="0"/>
+          </a:p>
+        </p:txBody>
+      </p:sp>
+      <p:sp>
+        <p:nvSpPr>
+          <p:cNvPr id="11" name="Text 9"/>
+          <p:cNvSpPr/>
+          <p:nvPr/>
+        </p:nvSpPr>
+        <p:spPr>
+          <a:xfrm>
+            <a:off x="1234440" y="1554480"/>
+            <a:ext cx="6949440" cy="438912"/>
+          </a:xfrm>
+          <a:prstGeom prst="rect">
+            <a:avLst/>
+          </a:prstGeom>
+          <a:noFill/>
+          <a:ln/>
+        </p:spPr>
+        <p:txBody>
+          <a:bodyPr wrap="square" rtlCol="0" anchor="ctr"/>
+          <a:lstStyle/>
+          <a:p>
+            <a:pPr indent="0" marL="0">
+              <a:buNone/>
+            </a:pPr>
+            <a:r>
+              <a:rPr lang="en-US" sz="1300" dirty="0">
+                <a:solidFill>
+                  <a:srgbClr val="3D3A36"/>
+                </a:solidFill>
+                <a:latin typeface="Calibri" pitchFamily="34" charset="0"/>
+                <a:ea typeface="Calibri" pitchFamily="34" charset="-122"/>
+                <a:cs typeface="Calibri" pitchFamily="34" charset="-120"/>
+              </a:rPr>
+              <a:t>I know the key FDP equivalents by heart</a:t>
+            </a:r>
+            <a:endParaRPr lang="en-US" sz="1300" dirty="0"/>
+          </a:p>
+        </p:txBody>
+      </p:sp>
+      <p:sp>
+        <p:nvSpPr>
+          <p:cNvPr id="12" name="Shape 10"/>
+          <p:cNvSpPr/>
+          <p:nvPr/>
+        </p:nvSpPr>
+        <p:spPr>
+          <a:xfrm>
+            <a:off x="731520" y="2057400"/>
+            <a:ext cx="7680960" cy="438912"/>
+          </a:xfrm>
+          <a:prstGeom prst="rect">
+            <a:avLst/>
+          </a:prstGeom>
+          <a:solidFill>
+            <a:srgbClr val="FFFFFF"/>
+          </a:solidFill>
+          <a:ln/>
+        </p:spPr>
+      </p:sp>
+      <p:sp>
+        <p:nvSpPr>
+          <p:cNvPr id="13" name="Text 11"/>
+          <p:cNvSpPr/>
+          <p:nvPr/>
+        </p:nvSpPr>
+        <p:spPr>
+          <a:xfrm>
+            <a:off x="868680" y="2057400"/>
+            <a:ext cx="320040" cy="438912"/>
+          </a:xfrm>
+          <a:prstGeom prst="rect">
+            <a:avLst/>
+          </a:prstGeom>
+          <a:noFill/>
+          <a:ln/>
+        </p:spPr>
+        <p:txBody>
+          <a:bodyPr wrap="square" rtlCol="0" anchor="ctr"/>
+          <a:lstStyle/>
+          <a:p>
+            <a:pPr indent="0" marL="0">
+              <a:buNone/>
+            </a:pPr>
+            <a:r>
+              <a:rPr lang="en-US" sz="1400" dirty="0">
+                <a:solidFill>
+                  <a:srgbClr val="2A9D8F"/>
+                </a:solidFill>
+              </a:rPr>
+              <a:t>☐</a:t>
+            </a:r>
+            <a:endParaRPr lang="en-US" sz="1400" dirty="0"/>
+          </a:p>
+        </p:txBody>
+      </p:sp>
+      <p:sp>
+        <p:nvSpPr>
+          <p:cNvPr id="14" name="Text 12"/>
+          <p:cNvSpPr/>
+          <p:nvPr/>
+        </p:nvSpPr>
+        <p:spPr>
+          <a:xfrm>
+            <a:off x="1234440" y="2057400"/>
+            <a:ext cx="6949440" cy="438912"/>
+          </a:xfrm>
+          <a:prstGeom prst="rect">
+            <a:avLst/>
+          </a:prstGeom>
+          <a:noFill/>
+          <a:ln/>
+        </p:spPr>
+        <p:txBody>
+          <a:bodyPr wrap="square" rtlCol="0" anchor="ctr"/>
+          <a:lstStyle/>
+          <a:p>
+            <a:pPr indent="0" marL="0">
+              <a:buNone/>
+            </a:pPr>
+            <a:r>
+              <a:rPr lang="en-US" sz="1300" dirty="0">
+                <a:solidFill>
+                  <a:srgbClr val="3D3A36"/>
+                </a:solidFill>
+                <a:latin typeface="Calibri" pitchFamily="34" charset="0"/>
+                <a:ea typeface="Calibri" pitchFamily="34" charset="-122"/>
+                <a:cs typeface="Calibri" pitchFamily="34" charset="-120"/>
+              </a:rPr>
+              <a:t>I can find percentages of amounts (10% method)</a:t>
+            </a:r>
+            <a:endParaRPr lang="en-US" sz="1300" dirty="0"/>
+          </a:p>
+        </p:txBody>
+      </p:sp>
+      <p:sp>
+        <p:nvSpPr>
+          <p:cNvPr id="15" name="Shape 13"/>
+          <p:cNvSpPr/>
+          <p:nvPr/>
+        </p:nvSpPr>
+        <p:spPr>
+          <a:xfrm>
+            <a:off x="731520" y="2560320"/>
+            <a:ext cx="7680960" cy="438912"/>
+          </a:xfrm>
+          <a:prstGeom prst="rect">
+            <a:avLst/>
+          </a:prstGeom>
+          <a:solidFill>
+            <a:srgbClr val="F8F6F3"/>
+          </a:solidFill>
+          <a:ln/>
+        </p:spPr>
+      </p:sp>
+      <p:sp>
+        <p:nvSpPr>
+          <p:cNvPr id="16" name="Text 14"/>
+          <p:cNvSpPr/>
+          <p:nvPr/>
+        </p:nvSpPr>
+        <p:spPr>
+          <a:xfrm>
+            <a:off x="868680" y="2560320"/>
+            <a:ext cx="320040" cy="438912"/>
+          </a:xfrm>
+          <a:prstGeom prst="rect">
+            <a:avLst/>
+          </a:prstGeom>
+          <a:noFill/>
+          <a:ln/>
+        </p:spPr>
+        <p:txBody>
+          <a:bodyPr wrap="square" rtlCol="0" anchor="ctr"/>
+          <a:lstStyle/>
+          <a:p>
+            <a:pPr indent="0" marL="0">
+              <a:buNone/>
+            </a:pPr>
+            <a:r>
+              <a:rPr lang="en-US" sz="1400" dirty="0">
+                <a:solidFill>
+                  <a:srgbClr val="2A9D8F"/>
+                </a:solidFill>
+              </a:rPr>
+              <a:t>☐</a:t>
+            </a:r>
+            <a:endParaRPr lang="en-US" sz="1400" dirty="0"/>
+          </a:p>
+        </p:txBody>
+      </p:sp>
+      <p:sp>
+        <p:nvSpPr>
+          <p:cNvPr id="17" name="Text 15"/>
+          <p:cNvSpPr/>
+          <p:nvPr/>
+        </p:nvSpPr>
+        <p:spPr>
+          <a:xfrm>
+            <a:off x="1234440" y="2560320"/>
+            <a:ext cx="6949440" cy="438912"/>
+          </a:xfrm>
+          <a:prstGeom prst="rect">
+            <a:avLst/>
+          </a:prstGeom>
+          <a:noFill/>
+          <a:ln/>
+        </p:spPr>
+        <p:txBody>
+          <a:bodyPr wrap="square" rtlCol="0" anchor="ctr"/>
+          <a:lstStyle/>
+          <a:p>
+            <a:pPr indent="0" marL="0">
+              <a:buNone/>
+            </a:pPr>
+            <a:r>
+              <a:rPr lang="en-US" sz="1300" dirty="0">
+                <a:solidFill>
+                  <a:srgbClr val="3D3A36"/>
+                </a:solidFill>
+                <a:latin typeface="Calibri" pitchFamily="34" charset="0"/>
+                <a:ea typeface="Calibri" pitchFamily="34" charset="-122"/>
+                <a:cs typeface="Calibri" pitchFamily="34" charset="-120"/>
+              </a:rPr>
+              <a:t>I can order fractions, decimals, and percentages on a number line</a:t>
+            </a:r>
+            <a:endParaRPr lang="en-US" sz="1300" dirty="0"/>
+          </a:p>
+        </p:txBody>
+      </p:sp>
+      <p:sp>
+        <p:nvSpPr>
+          <p:cNvPr id="18" name="Shape 16"/>
+          <p:cNvSpPr/>
+          <p:nvPr/>
+        </p:nvSpPr>
+        <p:spPr>
+          <a:xfrm>
+            <a:off x="731520" y="3063240"/>
+            <a:ext cx="7680960" cy="438912"/>
+          </a:xfrm>
+          <a:prstGeom prst="rect">
+            <a:avLst/>
+          </a:prstGeom>
+          <a:solidFill>
+            <a:srgbClr val="FFFFFF"/>
+          </a:solidFill>
+          <a:ln/>
+        </p:spPr>
+      </p:sp>
+      <p:sp>
+        <p:nvSpPr>
+          <p:cNvPr id="19" name="Text 17"/>
+          <p:cNvSpPr/>
+          <p:nvPr/>
+        </p:nvSpPr>
+        <p:spPr>
+          <a:xfrm>
+            <a:off x="868680" y="3063240"/>
+            <a:ext cx="320040" cy="438912"/>
+          </a:xfrm>
+          <a:prstGeom prst="rect">
+            <a:avLst/>
+          </a:prstGeom>
+          <a:noFill/>
+          <a:ln/>
+        </p:spPr>
+        <p:txBody>
+          <a:bodyPr wrap="square" rtlCol="0" anchor="ctr"/>
+          <a:lstStyle/>
+          <a:p>
+            <a:pPr indent="0" marL="0">
+              <a:buNone/>
+            </a:pPr>
+            <a:r>
+              <a:rPr lang="en-US" sz="1400" dirty="0">
+                <a:solidFill>
+                  <a:srgbClr val="2A9D8F"/>
+                </a:solidFill>
+              </a:rPr>
+              <a:t>☐</a:t>
+            </a:r>
+            <a:endParaRPr lang="en-US" sz="1400" dirty="0"/>
+          </a:p>
+        </p:txBody>
+      </p:sp>
+      <p:sp>
+        <p:nvSpPr>
+          <p:cNvPr id="20" name="Text 18"/>
+          <p:cNvSpPr/>
+          <p:nvPr/>
+        </p:nvSpPr>
+        <p:spPr>
+          <a:xfrm>
+            <a:off x="1234440" y="3063240"/>
+            <a:ext cx="6949440" cy="438912"/>
+          </a:xfrm>
+          <a:prstGeom prst="rect">
+            <a:avLst/>
+          </a:prstGeom>
+          <a:noFill/>
+          <a:ln/>
+        </p:spPr>
+        <p:txBody>
+          <a:bodyPr wrap="square" rtlCol="0" anchor="ctr"/>
+          <a:lstStyle/>
+          <a:p>
+            <a:pPr indent="0" marL="0">
+              <a:buNone/>
+            </a:pPr>
+            <a:r>
+              <a:rPr lang="en-US" sz="1300" dirty="0">
+                <a:solidFill>
+                  <a:srgbClr val="3D3A36"/>
+                </a:solidFill>
+                <a:latin typeface="Calibri" pitchFamily="34" charset="0"/>
+                <a:ea typeface="Calibri" pitchFamily="34" charset="-122"/>
+                <a:cs typeface="Calibri" pitchFamily="34" charset="-120"/>
+              </a:rPr>
+              <a:t>I understand that FDP are just different ways of showing the same value</a:t>
+            </a:r>
+            <a:endParaRPr lang="en-US" sz="1300" dirty="0"/>
+          </a:p>
+        </p:txBody>
+      </p:sp>
+      <p:sp>
+        <p:nvSpPr>
+          <p:cNvPr id="21" name="Shape 19"/>
+          <p:cNvSpPr/>
+          <p:nvPr/>
+        </p:nvSpPr>
+        <p:spPr>
+          <a:xfrm>
+            <a:off x="731520" y="3749040"/>
+            <a:ext cx="7680960" cy="594360"/>
+          </a:xfrm>
+          <a:prstGeom prst="rect">
+            <a:avLst/>
+          </a:prstGeom>
+          <a:solidFill>
+            <a:srgbClr val="E8F5F3"/>
+          </a:solidFill>
+          <a:ln/>
+          <a:effectLst>
+            <a:outerShdw sx="100000" sy="100000" kx="0" ky="0" algn="bl" rotWithShape="0" blurRad="50800" dist="25400" dir="8100000">
+              <a:srgbClr val="000000">
+                <a:alpha val="10000"/>
+              </a:srgbClr>
+            </a:outerShdw>
+          </a:effectLst>
+        </p:spPr>
+      </p:sp>
+      <p:sp>
+        <p:nvSpPr>
+          <p:cNvPr id="22" name="Text 20"/>
+          <p:cNvSpPr/>
+          <p:nvPr/>
+        </p:nvSpPr>
+        <p:spPr>
+          <a:xfrm>
+            <a:off x="914400" y="3749040"/>
+            <a:ext cx="7315200" cy="594360"/>
+          </a:xfrm>
+          <a:prstGeom prst="rect">
+            <a:avLst/>
+          </a:prstGeom>
+          <a:noFill/>
+          <a:ln/>
+        </p:spPr>
+        <p:txBody>
+          <a:bodyPr wrap="square" rtlCol="0" anchor="ctr"/>
+          <a:lstStyle/>
+          <a:p>
+            <a:pPr indent="0" marL="0">
+              <a:buNone/>
+            </a:pPr>
+            <a:r>
+              <a:rPr lang="en-US" sz="1200" b="1" dirty="0">
+                <a:solidFill>
+                  <a:srgbClr val="2A9D8F"/>
+                </a:solidFill>
+                <a:latin typeface="Calibri" pitchFamily="34" charset="0"/>
+                <a:ea typeface="Calibri" pitchFamily="34" charset="-122"/>
+                <a:cs typeface="Calibri" pitchFamily="34" charset="-120"/>
+              </a:rPr>
+              <a:t>Key Idea: </a:t>
+            </a:r>
+            <a:pPr indent="0" marL="0">
+              <a:buNone/>
+            </a:pPr>
+            <a:r>
+              <a:rPr lang="en-US" sz="1200" i="1" dirty="0">
+                <a:solidFill>
+                  <a:srgbClr val="3D3A36"/>
+                </a:solidFill>
+                <a:latin typeface="Calibri" pitchFamily="34" charset="0"/>
+                <a:ea typeface="Calibri" pitchFamily="34" charset="-122"/>
+                <a:cs typeface="Calibri" pitchFamily="34" charset="-120"/>
+              </a:rPr>
+              <a:t>½ = 0.5 = 50% — three ways of writing the same thing.</a:t>
+            </a:r>
+            <a:endParaRPr lang="en-US" sz="1200" dirty="0"/>
+          </a:p>
+        </p:txBody>
+      </p:sp>
+    </p:spTree>
+  </p:cSld>
+  <p:clrMapOvr>
+    <a:masterClrMapping/>
+  </p:clrMapOvr>
+</p:sld>
+</file>
+
+<file path=ppt/slides/slide7.xml><?xml version="1.0" encoding="utf-8"?>
+<p:sld xmlns:a="http://schemas.openxmlformats.org/drawingml/2006/main" xmlns:r="http://schemas.openxmlformats.org/officeDocument/2006/relationships" xmlns:p="http://schemas.openxmlformats.org/presentationml/2006/main">
+  <p:cSld name="Slide 7">
+    <p:spTree>
+      <p:nvGrpSpPr>
+        <p:cNvPr id="1" name=""/>
+        <p:cNvGrpSpPr/>
+        <p:nvPr/>
+      </p:nvGrpSpPr>
+      <p:grpSpPr>
+        <a:xfrm>
+          <a:off x="0" y="0"/>
+          <a:ext cx="0" cy="0"/>
+          <a:chOff x="0" y="0"/>
+          <a:chExt cx="0" cy="0"/>
+        </a:xfrm>
+      </p:grpSpPr>
+      <p:sp>
+        <p:nvSpPr>
+          <p:cNvPr id="2" name="Shape 0"/>
+          <p:cNvSpPr/>
+          <p:nvPr/>
+        </p:nvSpPr>
+        <p:spPr>
+          <a:xfrm>
+            <a:off x="0" y="0"/>
+            <a:ext cx="9144000" cy="5143500"/>
+          </a:xfrm>
+          <a:prstGeom prst="rect">
+            <a:avLst/>
+          </a:prstGeom>
+          <a:solidFill>
+            <a:srgbClr val="1B2A4A"/>
+          </a:solidFill>
+          <a:ln/>
+        </p:spPr>
+      </p:sp>
+      <p:sp>
+        <p:nvSpPr>
+          <p:cNvPr id="3" name="Shape 1"/>
+          <p:cNvSpPr/>
+          <p:nvPr/>
+        </p:nvSpPr>
+        <p:spPr>
+          <a:xfrm>
+            <a:off x="0" y="4777740"/>
+            <a:ext cx="9144000" cy="365760"/>
+          </a:xfrm>
+          <a:prstGeom prst="rect">
+            <a:avLst/>
+          </a:prstGeom>
+          <a:solidFill>
+            <a:srgbClr val="2A9D8F"/>
+          </a:solidFill>
+          <a:ln/>
+        </p:spPr>
+      </p:sp>
+      <p:sp>
+        <p:nvSpPr>
+          <p:cNvPr id="4" name="Shape 2"/>
+          <p:cNvSpPr/>
+          <p:nvPr/>
+        </p:nvSpPr>
+        <p:spPr>
+          <a:xfrm>
+            <a:off x="-914400" y="-914400"/>
+            <a:ext cx="3657600" cy="3657600"/>
+          </a:xfrm>
+          <a:prstGeom prst="ellipse">
+            <a:avLst/>
+          </a:prstGeom>
+          <a:solidFill>
+            <a:srgbClr val="2A9D8F">
+              <a:alpha val="10000"/>
+            </a:srgbClr>
+          </a:solidFill>
+          <a:ln/>
+        </p:spPr>
+      </p:sp>
+      <p:sp>
+        <p:nvSpPr>
+          <p:cNvPr id="5" name="Text 3"/>
+          <p:cNvSpPr/>
+          <p:nvPr/>
+        </p:nvSpPr>
+        <p:spPr>
+          <a:xfrm>
+            <a:off x="731520" y="1463040"/>
+            <a:ext cx="7680960" cy="822960"/>
+          </a:xfrm>
+          <a:prstGeom prst="rect">
+            <a:avLst/>
+          </a:prstGeom>
+          <a:noFill/>
+          <a:ln/>
+        </p:spPr>
+        <p:txBody>
+          <a:bodyPr wrap="square" rtlCol="0" anchor="ctr"/>
+          <a:lstStyle/>
+          <a:p>
+            <a:pPr algn="ctr" indent="0" marL="0">
+              <a:buNone/>
+            </a:pPr>
+            <a:r>
+              <a:rPr lang="en-US" sz="3400" b="1" dirty="0">
                 <a:solidFill>
                   <a:srgbClr val="FFFFFF"/>
                 </a:solidFill>
@@ -2720,149 +5723,22 @@
                 <a:ea typeface="Georgia" pitchFamily="34" charset="-122"/>
                 <a:cs typeface="Georgia" pitchFamily="34" charset="-120"/>
               </a:rPr>
-              <a:t>Key Takeaways</a:t>
-            </a:r>
-            <a:endParaRPr lang="en-US" sz="3200" dirty="0"/>
+              <a:t>Review &amp; Practise</a:t>
+            </a:r>
+            <a:endParaRPr lang="en-US" sz="3400" dirty="0"/>
           </a:p>
         </p:txBody>
       </p:sp>
       <p:sp>
         <p:nvSpPr>
-          <p:cNvPr id="4" name="Text 2"/>
-          <p:cNvSpPr/>
-          <p:nvPr/>
-        </p:nvSpPr>
-        <p:spPr>
-          <a:xfrm>
-            <a:off x="731520" y="1463040"/>
-            <a:ext cx="7772400" cy="3200400"/>
-          </a:xfrm>
-          <a:prstGeom prst="rect">
-            <a:avLst/>
-          </a:prstGeom>
-          <a:noFill/>
-          <a:ln/>
-        </p:spPr>
-        <p:txBody>
-          <a:bodyPr wrap="square" rtlCol="0" anchor="t"/>
-          <a:lstStyle/>
-          <a:p>
-            <a:pPr marL="342900" indent="-342900">
-              <a:spcAft>
-                <a:spcPts val="1000"/>
-              </a:spcAft>
-              <a:buSzPct val="100000"/>
-              <a:buChar char="•"/>
-            </a:pPr>
-            <a:r>
-              <a:rPr lang="en-US" sz="1500" dirty="0">
-                <a:solidFill>
-                  <a:srgbClr val="CADCFC"/>
-                </a:solidFill>
-                <a:latin typeface="Calibri" pitchFamily="34" charset="0"/>
-                <a:ea typeface="Calibri" pitchFamily="34" charset="-122"/>
-                <a:cs typeface="Calibri" pitchFamily="34" charset="-120"/>
-              </a:rPr>
-              <a:t>Fraction, decimal, percentage = three forms of the same value</a:t>
-            </a:r>
-            <a:endParaRPr lang="en-US" sz="1500" dirty="0"/>
-          </a:p>
-          <a:p>
-            <a:pPr marL="342900" indent="-342900">
-              <a:spcAft>
-                <a:spcPts val="1000"/>
-              </a:spcAft>
-              <a:buSzPct val="100000"/>
-              <a:buChar char="•"/>
-            </a:pPr>
-            <a:r>
-              <a:rPr lang="en-US" sz="1500" dirty="0">
-                <a:solidFill>
-                  <a:srgbClr val="CADCFC"/>
-                </a:solidFill>
-                <a:latin typeface="Calibri" pitchFamily="34" charset="0"/>
-                <a:ea typeface="Calibri" pitchFamily="34" charset="-122"/>
-                <a:cs typeface="Calibri" pitchFamily="34" charset="-120"/>
-              </a:rPr>
-              <a:t>Fraction → decimal: divide top by bottom</a:t>
-            </a:r>
-            <a:endParaRPr lang="en-US" sz="1500" dirty="0"/>
-          </a:p>
-          <a:p>
-            <a:pPr marL="342900" indent="-342900">
-              <a:spcAft>
-                <a:spcPts val="1000"/>
-              </a:spcAft>
-              <a:buSzPct val="100000"/>
-              <a:buChar char="•"/>
-            </a:pPr>
-            <a:r>
-              <a:rPr lang="en-US" sz="1500" dirty="0">
-                <a:solidFill>
-                  <a:srgbClr val="CADCFC"/>
-                </a:solidFill>
-                <a:latin typeface="Calibri" pitchFamily="34" charset="0"/>
-                <a:ea typeface="Calibri" pitchFamily="34" charset="-122"/>
-                <a:cs typeface="Calibri" pitchFamily="34" charset="-120"/>
-              </a:rPr>
-              <a:t>Decimal → %: multiply by 100</a:t>
-            </a:r>
-            <a:endParaRPr lang="en-US" sz="1500" dirty="0"/>
-          </a:p>
-          <a:p>
-            <a:pPr marL="342900" indent="-342900">
-              <a:spcAft>
-                <a:spcPts val="1000"/>
-              </a:spcAft>
-              <a:buSzPct val="100000"/>
-              <a:buChar char="•"/>
-            </a:pPr>
-            <a:r>
-              <a:rPr lang="en-US" sz="1500" dirty="0">
-                <a:solidFill>
-                  <a:srgbClr val="CADCFC"/>
-                </a:solidFill>
-                <a:latin typeface="Calibri" pitchFamily="34" charset="0"/>
-                <a:ea typeface="Calibri" pitchFamily="34" charset="-122"/>
-                <a:cs typeface="Calibri" pitchFamily="34" charset="-120"/>
-              </a:rPr>
-              <a:t>% → fraction: write over 100 and simplify</a:t>
-            </a:r>
-            <a:endParaRPr lang="en-US" sz="1500" dirty="0"/>
-          </a:p>
-          <a:p>
-            <a:pPr marL="342900" indent="-342900">
-              <a:spcAft>
-                <a:spcPts val="1000"/>
-              </a:spcAft>
-              <a:buSzPct val="100000"/>
-              <a:buChar char="•"/>
-            </a:pPr>
-            <a:r>
-              <a:rPr lang="en-US" sz="1500" dirty="0">
-                <a:solidFill>
-                  <a:srgbClr val="CADCFC"/>
-                </a:solidFill>
-                <a:latin typeface="Calibri" pitchFamily="34" charset="0"/>
-                <a:ea typeface="Calibri" pitchFamily="34" charset="-122"/>
-                <a:cs typeface="Calibri" pitchFamily="34" charset="-120"/>
-              </a:rPr>
-              <a:t>Key: ½=50%, ¼=25%, ¾=75%, ¹⁄₅=20%, ¹⁄₁₀=10%</a:t>
-            </a:r>
-            <a:endParaRPr lang="en-US" sz="1500" dirty="0"/>
-          </a:p>
-        </p:txBody>
-      </p:sp>
-      <p:sp>
-        <p:nvSpPr>
-          <p:cNvPr id="5" name="Text 3"/>
-          <p:cNvSpPr/>
-          <p:nvPr/>
-        </p:nvSpPr>
-        <p:spPr>
-          <a:xfrm>
-            <a:off x="731520" y="4572000"/>
-            <a:ext cx="7772400" cy="365760"/>
+          <p:cNvPr id="6" name="Text 4"/>
+          <p:cNvSpPr/>
+          <p:nvPr/>
+        </p:nvSpPr>
+        <p:spPr>
+          <a:xfrm>
+            <a:off x="731520" y="2468880"/>
+            <a:ext cx="7680960" cy="457200"/>
           </a:xfrm>
           <a:prstGeom prst="rect">
             <a:avLst/>
@@ -2874,13 +5750,13 @@
           <a:bodyPr wrap="square" rtlCol="0" anchor="ctr"/>
           <a:lstStyle/>
           <a:p>
-            <a:pPr indent="0" marL="0">
+            <a:pPr algn="ctr" indent="0" marL="0">
               <a:buNone/>
             </a:pPr>
             <a:r>
-              <a:rPr lang="en-US" sz="1100" dirty="0">
+              <a:rPr lang="en-US" sz="1800" dirty="0">
                 <a:solidFill>
-                  <a:srgbClr val="E9C46A"/>
+                  <a:srgbClr val="2A9D8F"/>
                 </a:solidFill>
                 <a:latin typeface="Calibri" pitchFamily="34" charset="0"/>
                 <a:ea typeface="Calibri" pitchFamily="34" charset="-122"/>
@@ -2888,7 +5764,46 @@
               </a:rPr>
               <a:t>mrzocchi.com</a:t>
             </a:r>
-            <a:endParaRPr lang="en-US" sz="1100" dirty="0"/>
+            <a:endParaRPr lang="en-US" sz="1800" dirty="0"/>
+          </a:p>
+        </p:txBody>
+      </p:sp>
+      <p:sp>
+        <p:nvSpPr>
+          <p:cNvPr id="7" name="Text 5"/>
+          <p:cNvSpPr/>
+          <p:nvPr/>
+        </p:nvSpPr>
+        <p:spPr>
+          <a:xfrm>
+            <a:off x="731520" y="3108960"/>
+            <a:ext cx="7680960" cy="457200"/>
+          </a:xfrm>
+          <a:prstGeom prst="rect">
+            <a:avLst/>
+          </a:prstGeom>
+          <a:noFill/>
+          <a:ln/>
+        </p:spPr>
+        <p:txBody>
+          <a:bodyPr wrap="square" rtlCol="0" anchor="ctr"/>
+          <a:lstStyle/>
+          <a:p>
+            <a:pPr algn="ctr" indent="0" marL="0">
+              <a:buNone/>
+            </a:pPr>
+            <a:r>
+              <a:rPr lang="en-US" sz="1300" dirty="0">
+                <a:solidFill>
+                  <a:srgbClr val="9B9690"/>
+                </a:solidFill>
+                <a:latin typeface="Calibri" pitchFamily="34" charset="0"/>
+                <a:ea typeface="Calibri" pitchFamily="34" charset="-122"/>
+                <a:cs typeface="Calibri" pitchFamily="34" charset="-120"/>
+              </a:rPr>
+              <a:t>Use the Self-Quiz, Review Games, and Practice Builder to test yourself.</a:t>
+            </a:r>
+            <a:endParaRPr lang="en-US" sz="1300" dirty="0"/>
           </a:p>
         </p:txBody>
       </p:sp>

--- a/static/ppts/G6_Math_T2_Decimals_Percentages.pptx
+++ b/static/ppts/G6_Math_T2_Decimals_Percentages.pptx
@@ -16,8 +16,8 @@
   <p:notesMasterIdLst>
     <p:notesMasterId r:id="rId9"/>
   </p:notesMasterIdLst>
-  <p:sldSz cx="9144000" cy="5143500"/>
-  <p:notesSz cx="5143500" cy="9144000"/>
+  <p:sldSz cx="12192000" cy="6858000"/>
+  <p:notesSz cx="6858000" cy="12192000"/>
   <p:defaultTextStyle>
     <a:lvl1pPr marL="0" algn="l" defTabSz="914400" rtl="0" eaLnBrk="1" latinLnBrk="0" hangingPunct="1">
       <a:defRPr sz="1800" kern="1200">
@@ -1388,6 +1388,13 @@
 <file path=ppt/slides/slide1.xml><?xml version="1.0" encoding="utf-8"?>
 <p:sld xmlns:a="http://schemas.openxmlformats.org/drawingml/2006/main" xmlns:r="http://schemas.openxmlformats.org/officeDocument/2006/relationships" xmlns:p="http://schemas.openxmlformats.org/presentationml/2006/main">
   <p:cSld name="Slide 1">
+    <p:bg>
+      <p:bgPr>
+        <a:solidFill>
+          <a:srgbClr val="2A9D8F"/>
+        </a:solidFill>
+      </p:bgPr>
+    </p:bg>
     <p:spTree>
       <p:nvGrpSpPr>
         <p:cNvPr id="1" name=""/>
@@ -1410,55 +1417,15 @@
         </p:nvSpPr>
         <p:spPr>
           <a:xfrm>
-            <a:off x="0" y="0"/>
-            <a:ext cx="9144000" cy="5143500"/>
-          </a:xfrm>
-          <a:prstGeom prst="rect">
-            <a:avLst/>
-          </a:prstGeom>
-          <a:solidFill>
-            <a:srgbClr val="1B2A4A"/>
-          </a:solidFill>
-          <a:ln/>
-        </p:spPr>
-      </p:sp>
-      <p:sp>
-        <p:nvSpPr>
-          <p:cNvPr id="3" name="Shape 1"/>
-          <p:cNvSpPr/>
-          <p:nvPr/>
-        </p:nvSpPr>
-        <p:spPr>
-          <a:xfrm>
-            <a:off x="0" y="4777740"/>
-            <a:ext cx="9144000" cy="365760"/>
-          </a:xfrm>
-          <a:prstGeom prst="rect">
-            <a:avLst/>
-          </a:prstGeom>
-          <a:solidFill>
-            <a:srgbClr val="2A9D8F"/>
-          </a:solidFill>
-          <a:ln/>
-        </p:spPr>
-      </p:sp>
-      <p:sp>
-        <p:nvSpPr>
-          <p:cNvPr id="4" name="Shape 2"/>
-          <p:cNvSpPr/>
-          <p:nvPr/>
-        </p:nvSpPr>
-        <p:spPr>
-          <a:xfrm>
-            <a:off x="6858000" y="-1371600"/>
-            <a:ext cx="4572000" cy="4572000"/>
+            <a:off x="7772400" y="-914400"/>
+            <a:ext cx="3657600" cy="3657600"/>
           </a:xfrm>
           <a:prstGeom prst="ellipse">
             <a:avLst/>
           </a:prstGeom>
           <a:solidFill>
-            <a:srgbClr val="2A9D8F">
-              <a:alpha val="12000"/>
+            <a:srgbClr val="FFFFFF">
+              <a:alpha val="8000"/>
             </a:srgbClr>
           </a:solidFill>
           <a:ln/>
@@ -1466,14 +1433,14 @@
       </p:sp>
       <p:sp>
         <p:nvSpPr>
-          <p:cNvPr id="5" name="Text 3"/>
+          <p:cNvPr id="3" name="Text 1"/>
           <p:cNvSpPr/>
           <p:nvPr/>
         </p:nvSpPr>
         <p:spPr>
           <a:xfrm>
-            <a:off x="731520" y="914400"/>
-            <a:ext cx="7680960" cy="457200"/>
+            <a:off x="731520" y="548640"/>
+            <a:ext cx="7315200" cy="365760"/>
           </a:xfrm>
           <a:prstGeom prst="rect">
             <a:avLst/>
@@ -1489,86 +1456,30 @@
               <a:buNone/>
             </a:pPr>
             <a:r>
-              <a:rPr lang="en-US" sz="1300" b="1" spc="500" kern="0" dirty="0">
+              <a:rPr lang="en-US" sz="1100" b="1" dirty="0">
                 <a:solidFill>
-                  <a:srgbClr val="2A9D8F"/>
+                  <a:srgbClr val="F2D68A"/>
                 </a:solidFill>
-                <a:latin typeface="Calibri" pitchFamily="34" charset="0"/>
-                <a:ea typeface="Calibri" pitchFamily="34" charset="-122"/>
-                <a:cs typeface="Calibri" pitchFamily="34" charset="-120"/>
+                <a:latin typeface="Arial" pitchFamily="34" charset="0"/>
+                <a:ea typeface="Arial" pitchFamily="34" charset="-122"/>
+                <a:cs typeface="Arial" pitchFamily="34" charset="-120"/>
               </a:rPr>
               <a:t>GRADE 6 MATHEMATICS</a:t>
             </a:r>
-            <a:endParaRPr lang="en-US" sz="1300" dirty="0"/>
+            <a:endParaRPr lang="en-US" sz="1100" dirty="0"/>
           </a:p>
         </p:txBody>
       </p:sp>
       <p:sp>
         <p:nvSpPr>
-          <p:cNvPr id="6" name="Text 4"/>
+          <p:cNvPr id="4" name="Text 2"/>
           <p:cNvSpPr/>
           <p:nvPr/>
         </p:nvSpPr>
         <p:spPr>
           <a:xfrm>
-            <a:off x="731520" y="1463040"/>
-            <a:ext cx="6858000" cy="1645920"/>
-          </a:xfrm>
-          <a:prstGeom prst="rect">
-            <a:avLst/>
-          </a:prstGeom>
-          <a:noFill/>
-          <a:ln/>
-        </p:spPr>
-        <p:txBody>
-          <a:bodyPr wrap="square" rtlCol="0" anchor="t"/>
-          <a:lstStyle/>
-          <a:p>
-            <a:pPr indent="0" marL="0">
-              <a:buNone/>
-            </a:pPr>
-            <a:r>
-              <a:rPr lang="en-US" sz="3800" b="1" dirty="0">
-                <a:solidFill>
-                  <a:srgbClr val="FFFFFF"/>
-                </a:solidFill>
-                <a:latin typeface="Georgia" pitchFamily="34" charset="0"/>
-                <a:ea typeface="Georgia" pitchFamily="34" charset="-122"/>
-                <a:cs typeface="Georgia" pitchFamily="34" charset="-120"/>
-              </a:rPr>
-              <a:t>Decimals &amp;</a:t>
-            </a:r>
-            <a:endParaRPr lang="en-US" sz="3800" dirty="0"/>
-          </a:p>
-          <a:p>
-            <a:pPr indent="0" marL="0">
-              <a:buNone/>
-            </a:pPr>
-            <a:r>
-              <a:rPr lang="en-US" sz="3800" b="1" dirty="0">
-                <a:solidFill>
-                  <a:srgbClr val="FFFFFF"/>
-                </a:solidFill>
-                <a:latin typeface="Georgia" pitchFamily="34" charset="0"/>
-                <a:ea typeface="Georgia" pitchFamily="34" charset="-122"/>
-                <a:cs typeface="Georgia" pitchFamily="34" charset="-120"/>
-              </a:rPr>
-              <a:t>Percentages</a:t>
-            </a:r>
-            <a:endParaRPr lang="en-US" sz="3800" dirty="0"/>
-          </a:p>
-        </p:txBody>
-      </p:sp>
-      <p:sp>
-        <p:nvSpPr>
-          <p:cNvPr id="7" name="Text 5"/>
-          <p:cNvSpPr/>
-          <p:nvPr/>
-        </p:nvSpPr>
-        <p:spPr>
-          <a:xfrm>
-            <a:off x="731520" y="3200400"/>
-            <a:ext cx="6400800" cy="548640"/>
+            <a:off x="731520" y="1371600"/>
+            <a:ext cx="9144000" cy="1645920"/>
           </a:xfrm>
           <a:prstGeom prst="rect">
             <a:avLst/>
@@ -1581,33 +1492,36 @@
           <a:lstStyle/>
           <a:p>
             <a:pPr indent="0" marL="0">
+              <a:lnSpc>
+                <a:spcPct val="110000"/>
+              </a:lnSpc>
               <a:buNone/>
             </a:pPr>
             <a:r>
-              <a:rPr lang="en-US" sz="1600" i="1" dirty="0">
+              <a:rPr lang="en-US" sz="3600" b="1" dirty="0">
                 <a:solidFill>
-                  <a:srgbClr val="9B9690"/>
+                  <a:srgbClr val="FFFFFF"/>
                 </a:solidFill>
-                <a:latin typeface="Calibri" pitchFamily="34" charset="0"/>
-                <a:ea typeface="Calibri" pitchFamily="34" charset="-122"/>
-                <a:cs typeface="Calibri" pitchFamily="34" charset="-120"/>
+                <a:latin typeface="Georgia" pitchFamily="34" charset="0"/>
+                <a:ea typeface="Georgia" pitchFamily="34" charset="-122"/>
+                <a:cs typeface="Georgia" pitchFamily="34" charset="-120"/>
               </a:rPr>
-              <a:t>Converting between fractions, decimals, and percentages</a:t>
+              <a:t>Decimals &amp; Percentages</a:t>
             </a:r>
-            <a:endParaRPr lang="en-US" sz="1600" dirty="0"/>
+            <a:endParaRPr lang="en-US" sz="3600" dirty="0"/>
           </a:p>
         </p:txBody>
       </p:sp>
       <p:sp>
         <p:nvSpPr>
-          <p:cNvPr id="8" name="Text 6"/>
+          <p:cNvPr id="5" name="Text 3"/>
           <p:cNvSpPr/>
           <p:nvPr/>
         </p:nvSpPr>
         <p:spPr>
           <a:xfrm>
-            <a:off x="731520" y="4297680"/>
-            <a:ext cx="2743200" cy="365760"/>
+            <a:off x="731520" y="3200400"/>
+            <a:ext cx="7315200" cy="548640"/>
           </a:xfrm>
           <a:prstGeom prst="rect">
             <a:avLst/>
@@ -1623,17 +1537,60 @@
               <a:buNone/>
             </a:pPr>
             <a:r>
-              <a:rPr lang="en-US" sz="1100" dirty="0">
+              <a:rPr lang="en-US" sz="1600" dirty="0">
                 <a:solidFill>
-                  <a:srgbClr val="9B9690"/>
+                  <a:srgbClr val="FFFFFF">
+                    <a:alpha val="65000"/>
+                  </a:srgbClr>
                 </a:solidFill>
-                <a:latin typeface="Calibri" pitchFamily="34" charset="0"/>
-                <a:ea typeface="Calibri" pitchFamily="34" charset="-122"/>
-                <a:cs typeface="Calibri" pitchFamily="34" charset="-120"/>
+                <a:latin typeface="Arial" pitchFamily="34" charset="0"/>
+                <a:ea typeface="Arial" pitchFamily="34" charset="-122"/>
+                <a:cs typeface="Arial" pitchFamily="34" charset="-120"/>
+              </a:rPr>
+              <a:t>Different ways to write parts of a whole</a:t>
+            </a:r>
+            <a:endParaRPr lang="en-US" sz="1600" dirty="0"/>
+          </a:p>
+        </p:txBody>
+      </p:sp>
+      <p:sp>
+        <p:nvSpPr>
+          <p:cNvPr id="6" name="Text 4"/>
+          <p:cNvSpPr/>
+          <p:nvPr/>
+        </p:nvSpPr>
+        <p:spPr>
+          <a:xfrm>
+            <a:off x="731520" y="4389120"/>
+            <a:ext cx="2743200" cy="320040"/>
+          </a:xfrm>
+          <a:prstGeom prst="rect">
+            <a:avLst/>
+          </a:prstGeom>
+          <a:noFill/>
+          <a:ln/>
+        </p:spPr>
+        <p:txBody>
+          <a:bodyPr wrap="square" rtlCol="0" anchor="ctr"/>
+          <a:lstStyle/>
+          <a:p>
+            <a:pPr indent="0" marL="0">
+              <a:buNone/>
+            </a:pPr>
+            <a:r>
+              <a:rPr lang="en-US" sz="1000" dirty="0">
+                <a:solidFill>
+                  <a:srgbClr val="FFFFFF">
+                    <a:alpha val="40000"/>
+                  </a:srgbClr>
+                </a:solidFill>
+                <a:latin typeface="Arial" pitchFamily="34" charset="0"/>
+                <a:ea typeface="Arial" pitchFamily="34" charset="-122"/>
+                <a:cs typeface="Arial" pitchFamily="34" charset="-120"/>
               </a:rPr>
               <a:t>mrzocchi.com</a:t>
             </a:r>
-            <a:endParaRPr lang="en-US" sz="1100" dirty="0"/>
+            <a:endParaRPr lang="en-US" sz="1000" dirty="0"/>
           </a:p>
         </p:txBody>
       </p:sp>
@@ -1678,47 +1635,7 @@
         <p:spPr>
           <a:xfrm>
             <a:off x="0" y="0"/>
-            <a:ext cx="9144000" cy="822960"/>
-          </a:xfrm>
-          <a:prstGeom prst="rect">
-            <a:avLst/>
-          </a:prstGeom>
-          <a:solidFill>
-            <a:srgbClr val="FFFFFF"/>
-          </a:solidFill>
-          <a:ln/>
-        </p:spPr>
-      </p:sp>
-      <p:sp>
-        <p:nvSpPr>
-          <p:cNvPr id="3" name="Shape 1"/>
-          <p:cNvSpPr/>
-          <p:nvPr/>
-        </p:nvSpPr>
-        <p:spPr>
-          <a:xfrm>
-            <a:off x="0" y="804672"/>
-            <a:ext cx="9144000" cy="27432"/>
-          </a:xfrm>
-          <a:prstGeom prst="rect">
-            <a:avLst/>
-          </a:prstGeom>
-          <a:solidFill>
-            <a:srgbClr val="E5E2DC"/>
-          </a:solidFill>
-          <a:ln/>
-        </p:spPr>
-      </p:sp>
-      <p:sp>
-        <p:nvSpPr>
-          <p:cNvPr id="4" name="Shape 2"/>
-          <p:cNvSpPr/>
-          <p:nvPr/>
-        </p:nvSpPr>
-        <p:spPr>
-          <a:xfrm>
-            <a:off x="548640" y="201168"/>
-            <a:ext cx="54864" cy="420624"/>
+            <a:ext cx="73152" cy="5148072"/>
           </a:xfrm>
           <a:prstGeom prst="rect">
             <a:avLst/>
@@ -1731,14 +1648,14 @@
       </p:sp>
       <p:sp>
         <p:nvSpPr>
-          <p:cNvPr id="5" name="Text 3"/>
+          <p:cNvPr id="3" name="Text 1"/>
           <p:cNvSpPr/>
           <p:nvPr/>
         </p:nvSpPr>
         <p:spPr>
           <a:xfrm>
-            <a:off x="777240" y="137160"/>
-            <a:ext cx="7772400" cy="548640"/>
+            <a:off x="548640" y="274320"/>
+            <a:ext cx="9144000" cy="640080"/>
           </a:xfrm>
           <a:prstGeom prst="rect">
             <a:avLst/>
@@ -1747,14 +1664,14 @@
           <a:ln/>
         </p:spPr>
         <p:txBody>
-          <a:bodyPr wrap="square" lIns="0" tIns="0" rIns="0" bIns="0" rtlCol="0" anchor="ctr"/>
+          <a:bodyPr wrap="square" rtlCol="0" anchor="ctr"/>
           <a:lstStyle/>
           <a:p>
             <a:pPr indent="0" marL="0">
               <a:buNone/>
             </a:pPr>
             <a:r>
-              <a:rPr lang="en-US" sz="2000" b="1" dirty="0">
+              <a:rPr lang="en-US" sz="2400" b="1" dirty="0">
                 <a:solidFill>
                   <a:srgbClr val="1B2A4A"/>
                 </a:solidFill>
@@ -1762,49 +1679,22 @@
                 <a:ea typeface="Georgia" pitchFamily="34" charset="-122"/>
                 <a:cs typeface="Georgia" pitchFamily="34" charset="-120"/>
               </a:rPr>
-              <a:t>Key Vocabulary</a:t>
+              <a:t>Decimals — Place Value After the Point</a:t>
             </a:r>
-            <a:endParaRPr lang="en-US" sz="2000" dirty="0"/>
+            <a:endParaRPr lang="en-US" sz="2400" dirty="0"/>
           </a:p>
         </p:txBody>
       </p:sp>
       <p:sp>
         <p:nvSpPr>
-          <p:cNvPr id="6" name="Shape 4"/>
+          <p:cNvPr id="4" name="Shape 2"/>
           <p:cNvSpPr/>
           <p:nvPr/>
         </p:nvSpPr>
         <p:spPr>
           <a:xfrm>
-            <a:off x="731520" y="1051560"/>
-            <a:ext cx="3657600" cy="658368"/>
-          </a:xfrm>
-          <a:prstGeom prst="rect">
-            <a:avLst/>
-          </a:prstGeom>
-          <a:solidFill>
-            <a:srgbClr val="FFFFFF"/>
-          </a:solidFill>
-          <a:ln/>
-          <a:effectLst>
-            <a:outerShdw sx="100000" sy="100000" kx="0" ky="0" algn="bl" rotWithShape="0" blurRad="50800" dist="25400" dir="8100000">
-              <a:srgbClr val="000000">
-                <a:alpha val="10000"/>
-              </a:srgbClr>
-            </a:outerShdw>
-          </a:effectLst>
-        </p:spPr>
-      </p:sp>
-      <p:sp>
-        <p:nvSpPr>
-          <p:cNvPr id="7" name="Shape 5"/>
-          <p:cNvSpPr/>
-          <p:nvPr/>
-        </p:nvSpPr>
-        <p:spPr>
-          <a:xfrm>
-            <a:off x="731520" y="1051560"/>
-            <a:ext cx="54864" cy="658368"/>
+            <a:off x="548640" y="960120"/>
+            <a:ext cx="2286000" cy="36576"/>
           </a:xfrm>
           <a:prstGeom prst="rect">
             <a:avLst/>
@@ -1817,14 +1707,14 @@
       </p:sp>
       <p:sp>
         <p:nvSpPr>
-          <p:cNvPr id="8" name="Text 6"/>
+          <p:cNvPr id="5" name="Text 3"/>
           <p:cNvSpPr/>
           <p:nvPr/>
         </p:nvSpPr>
         <p:spPr>
           <a:xfrm>
-            <a:off x="914400" y="1051560"/>
-            <a:ext cx="1463040" cy="658368"/>
+            <a:off x="548640" y="1188720"/>
+            <a:ext cx="10058400" cy="3474720"/>
           </a:xfrm>
           <a:prstGeom prst="rect">
             <a:avLst/>
@@ -1833,438 +1723,95 @@
           <a:ln/>
         </p:spPr>
         <p:txBody>
-          <a:bodyPr wrap="square" lIns="0" tIns="0" rIns="0" bIns="0" rtlCol="0" anchor="ctr"/>
+          <a:bodyPr wrap="square" rtlCol="0" anchor="t"/>
           <a:lstStyle/>
           <a:p>
-            <a:pPr indent="0" marL="0">
-              <a:buNone/>
+            <a:pPr>
+              <a:lnSpc>
+                <a:spcPct val="150000"/>
+              </a:lnSpc>
+              <a:spcAft>
+                <a:spcPts val="600"/>
+              </a:spcAft>
             </a:pPr>
             <a:r>
-              <a:rPr lang="en-US" sz="1300" b="1" dirty="0">
+              <a:rPr lang="en-US" sz="1500" dirty="0">
                 <a:solidFill>
-                  <a:srgbClr val="1B2A4A"/>
+                  <a:srgbClr val="3D3A36"/>
                 </a:solidFill>
-                <a:latin typeface="Georgia" pitchFamily="34" charset="0"/>
-                <a:ea typeface="Georgia" pitchFamily="34" charset="-122"/>
-                <a:cs typeface="Georgia" pitchFamily="34" charset="-120"/>
+                <a:latin typeface="Arial" pitchFamily="34" charset="0"/>
+                <a:ea typeface="Arial" pitchFamily="34" charset="-122"/>
+                <a:cs typeface="Arial" pitchFamily="34" charset="-120"/>
               </a:rPr>
-              <a:t>Decimal</a:t>
+              <a:t>0.1 = one tenth (1/10). 0.01 = one hundredth (1/100).</a:t>
             </a:r>
-            <a:endParaRPr lang="en-US" sz="1300" dirty="0"/>
-          </a:p>
-        </p:txBody>
-      </p:sp>
-      <p:sp>
-        <p:nvSpPr>
-          <p:cNvPr id="9" name="Text 7"/>
-          <p:cNvSpPr/>
-          <p:nvPr/>
-        </p:nvSpPr>
-        <p:spPr>
-          <a:xfrm>
-            <a:off x="2377440" y="1051560"/>
-            <a:ext cx="1920240" cy="658368"/>
-          </a:xfrm>
-          <a:prstGeom prst="rect">
-            <a:avLst/>
-          </a:prstGeom>
-          <a:noFill/>
-          <a:ln/>
-        </p:spPr>
-        <p:txBody>
-          <a:bodyPr wrap="square" lIns="0" tIns="0" rIns="0" bIns="0" rtlCol="0" anchor="ctr"/>
-          <a:lstStyle/>
-          <a:p>
-            <a:pPr indent="0" marL="0">
-              <a:buNone/>
+            <a:endParaRPr lang="en-US" sz="1500" dirty="0"/>
+          </a:p>
+          <a:p>
+            <a:pPr>
+              <a:lnSpc>
+                <a:spcPct val="150000"/>
+              </a:lnSpc>
+              <a:spcAft>
+                <a:spcPts val="600"/>
+              </a:spcAft>
             </a:pPr>
             <a:r>
-              <a:rPr lang="en-US" sz="1100" dirty="0">
+              <a:rPr lang="en-US" sz="1500" dirty="0">
                 <a:solidFill>
-                  <a:srgbClr val="6B6660"/>
+                  <a:srgbClr val="3D3A36"/>
                 </a:solidFill>
-                <a:latin typeface="Calibri" pitchFamily="34" charset="0"/>
-                <a:ea typeface="Calibri" pitchFamily="34" charset="-122"/>
-                <a:cs typeface="Calibri" pitchFamily="34" charset="-120"/>
+                <a:latin typeface="Arial" pitchFamily="34" charset="0"/>
+                <a:ea typeface="Arial" pitchFamily="34" charset="-122"/>
+                <a:cs typeface="Arial" pitchFamily="34" charset="-120"/>
               </a:rPr>
-              <a:t>Number with a decimal point (e.g. 0.75)</a:t>
+              <a:t>0.375 = 3 tenths + 7 hundredths + 5 thousandths.</a:t>
             </a:r>
-            <a:endParaRPr lang="en-US" sz="1100" dirty="0"/>
-          </a:p>
-        </p:txBody>
-      </p:sp>
-      <p:sp>
-        <p:nvSpPr>
-          <p:cNvPr id="10" name="Shape 8"/>
-          <p:cNvSpPr/>
-          <p:nvPr/>
-        </p:nvSpPr>
-        <p:spPr>
-          <a:xfrm>
-            <a:off x="4754880" y="1051560"/>
-            <a:ext cx="3657600" cy="658368"/>
-          </a:xfrm>
-          <a:prstGeom prst="rect">
-            <a:avLst/>
-          </a:prstGeom>
-          <a:solidFill>
-            <a:srgbClr val="FFFFFF"/>
-          </a:solidFill>
-          <a:ln/>
-          <a:effectLst>
-            <a:outerShdw sx="100000" sy="100000" kx="0" ky="0" algn="bl" rotWithShape="0" blurRad="50800" dist="25400" dir="8100000">
-              <a:srgbClr val="000000">
-                <a:alpha val="10000"/>
-              </a:srgbClr>
-            </a:outerShdw>
-          </a:effectLst>
-        </p:spPr>
-      </p:sp>
-      <p:sp>
-        <p:nvSpPr>
-          <p:cNvPr id="11" name="Shape 9"/>
-          <p:cNvSpPr/>
-          <p:nvPr/>
-        </p:nvSpPr>
-        <p:spPr>
-          <a:xfrm>
-            <a:off x="4754880" y="1051560"/>
-            <a:ext cx="54864" cy="658368"/>
-          </a:xfrm>
-          <a:prstGeom prst="rect">
-            <a:avLst/>
-          </a:prstGeom>
-          <a:solidFill>
-            <a:srgbClr val="2A9D8F"/>
-          </a:solidFill>
-          <a:ln/>
-        </p:spPr>
-      </p:sp>
-      <p:sp>
-        <p:nvSpPr>
-          <p:cNvPr id="12" name="Text 10"/>
-          <p:cNvSpPr/>
-          <p:nvPr/>
-        </p:nvSpPr>
-        <p:spPr>
-          <a:xfrm>
-            <a:off x="4937760" y="1051560"/>
-            <a:ext cx="1463040" cy="658368"/>
-          </a:xfrm>
-          <a:prstGeom prst="rect">
-            <a:avLst/>
-          </a:prstGeom>
-          <a:noFill/>
-          <a:ln/>
-        </p:spPr>
-        <p:txBody>
-          <a:bodyPr wrap="square" lIns="0" tIns="0" rIns="0" bIns="0" rtlCol="0" anchor="ctr"/>
-          <a:lstStyle/>
-          <a:p>
-            <a:pPr indent="0" marL="0">
-              <a:buNone/>
+            <a:endParaRPr lang="en-US" sz="1500" dirty="0"/>
+          </a:p>
+          <a:p>
+            <a:pPr>
+              <a:lnSpc>
+                <a:spcPct val="150000"/>
+              </a:lnSpc>
+              <a:spcAft>
+                <a:spcPts val="600"/>
+              </a:spcAft>
             </a:pPr>
             <a:r>
-              <a:rPr lang="en-US" sz="1300" b="1" dirty="0">
+              <a:rPr lang="en-US" sz="1500" dirty="0">
                 <a:solidFill>
-                  <a:srgbClr val="1B2A4A"/>
+                  <a:srgbClr val="3D3A36"/>
                 </a:solidFill>
-                <a:latin typeface="Georgia" pitchFamily="34" charset="0"/>
-                <a:ea typeface="Georgia" pitchFamily="34" charset="-122"/>
-                <a:cs typeface="Georgia" pitchFamily="34" charset="-120"/>
+                <a:latin typeface="Arial" pitchFamily="34" charset="0"/>
+                <a:ea typeface="Arial" pitchFamily="34" charset="-122"/>
+                <a:cs typeface="Arial" pitchFamily="34" charset="-120"/>
               </a:rPr>
-              <a:t>Percentage</a:t>
+              <a:t>Decimals are just fractions with denominators of 10, 100, 1000.</a:t>
             </a:r>
-            <a:endParaRPr lang="en-US" sz="1300" dirty="0"/>
-          </a:p>
-        </p:txBody>
-      </p:sp>
-      <p:sp>
-        <p:nvSpPr>
-          <p:cNvPr id="13" name="Text 11"/>
-          <p:cNvSpPr/>
-          <p:nvPr/>
-        </p:nvSpPr>
-        <p:spPr>
-          <a:xfrm>
-            <a:off x="6400800" y="1051560"/>
-            <a:ext cx="1920240" cy="658368"/>
-          </a:xfrm>
-          <a:prstGeom prst="rect">
-            <a:avLst/>
-          </a:prstGeom>
-          <a:noFill/>
-          <a:ln/>
-        </p:spPr>
-        <p:txBody>
-          <a:bodyPr wrap="square" lIns="0" tIns="0" rIns="0" bIns="0" rtlCol="0" anchor="ctr"/>
-          <a:lstStyle/>
-          <a:p>
-            <a:pPr indent="0" marL="0">
-              <a:buNone/>
+            <a:endParaRPr lang="en-US" sz="1500" dirty="0"/>
+          </a:p>
+          <a:p>
+            <a:pPr>
+              <a:lnSpc>
+                <a:spcPct val="150000"/>
+              </a:lnSpc>
+              <a:spcAft>
+                <a:spcPts val="600"/>
+              </a:spcAft>
             </a:pPr>
             <a:r>
-              <a:rPr lang="en-US" sz="1100" dirty="0">
+              <a:rPr lang="en-US" sz="1500" dirty="0">
                 <a:solidFill>
-                  <a:srgbClr val="6B6660"/>
+                  <a:srgbClr val="3D3A36"/>
                 </a:solidFill>
-                <a:latin typeface="Calibri" pitchFamily="34" charset="0"/>
-                <a:ea typeface="Calibri" pitchFamily="34" charset="-122"/>
-                <a:cs typeface="Calibri" pitchFamily="34" charset="-120"/>
+                <a:latin typeface="Arial" pitchFamily="34" charset="0"/>
+                <a:ea typeface="Arial" pitchFamily="34" charset="-122"/>
+                <a:cs typeface="Arial" pitchFamily="34" charset="-120"/>
               </a:rPr>
-              <a:t>Out of 100 (e.g. 75%)</a:t>
+              <a:t>0.5 = ½,  0.25 = ¼,  0.75 = ¾,  0.1 = ¹⁄₁₀</a:t>
             </a:r>
-            <a:endParaRPr lang="en-US" sz="1100" dirty="0"/>
-          </a:p>
-        </p:txBody>
-      </p:sp>
-      <p:sp>
-        <p:nvSpPr>
-          <p:cNvPr id="14" name="Shape 12"/>
-          <p:cNvSpPr/>
-          <p:nvPr/>
-        </p:nvSpPr>
-        <p:spPr>
-          <a:xfrm>
-            <a:off x="731520" y="1819656"/>
-            <a:ext cx="3657600" cy="658368"/>
-          </a:xfrm>
-          <a:prstGeom prst="rect">
-            <a:avLst/>
-          </a:prstGeom>
-          <a:solidFill>
-            <a:srgbClr val="FFFFFF"/>
-          </a:solidFill>
-          <a:ln/>
-          <a:effectLst>
-            <a:outerShdw sx="100000" sy="100000" kx="0" ky="0" algn="bl" rotWithShape="0" blurRad="50800" dist="25400" dir="8100000">
-              <a:srgbClr val="000000">
-                <a:alpha val="10000"/>
-              </a:srgbClr>
-            </a:outerShdw>
-          </a:effectLst>
-        </p:spPr>
-      </p:sp>
-      <p:sp>
-        <p:nvSpPr>
-          <p:cNvPr id="15" name="Shape 13"/>
-          <p:cNvSpPr/>
-          <p:nvPr/>
-        </p:nvSpPr>
-        <p:spPr>
-          <a:xfrm>
-            <a:off x="731520" y="1819656"/>
-            <a:ext cx="54864" cy="658368"/>
-          </a:xfrm>
-          <a:prstGeom prst="rect">
-            <a:avLst/>
-          </a:prstGeom>
-          <a:solidFill>
-            <a:srgbClr val="2A9D8F"/>
-          </a:solidFill>
-          <a:ln/>
-        </p:spPr>
-      </p:sp>
-      <p:sp>
-        <p:nvSpPr>
-          <p:cNvPr id="16" name="Text 14"/>
-          <p:cNvSpPr/>
-          <p:nvPr/>
-        </p:nvSpPr>
-        <p:spPr>
-          <a:xfrm>
-            <a:off x="914400" y="1819656"/>
-            <a:ext cx="1463040" cy="658368"/>
-          </a:xfrm>
-          <a:prstGeom prst="rect">
-            <a:avLst/>
-          </a:prstGeom>
-          <a:noFill/>
-          <a:ln/>
-        </p:spPr>
-        <p:txBody>
-          <a:bodyPr wrap="square" lIns="0" tIns="0" rIns="0" bIns="0" rtlCol="0" anchor="ctr"/>
-          <a:lstStyle/>
-          <a:p>
-            <a:pPr indent="0" marL="0">
-              <a:buNone/>
-            </a:pPr>
-            <a:r>
-              <a:rPr lang="en-US" sz="1300" b="1" dirty="0">
-                <a:solidFill>
-                  <a:srgbClr val="1B2A4A"/>
-                </a:solidFill>
-                <a:latin typeface="Georgia" pitchFamily="34" charset="0"/>
-                <a:ea typeface="Georgia" pitchFamily="34" charset="-122"/>
-                <a:cs typeface="Georgia" pitchFamily="34" charset="-120"/>
-              </a:rPr>
-              <a:t>Convert</a:t>
-            </a:r>
-            <a:endParaRPr lang="en-US" sz="1300" dirty="0"/>
-          </a:p>
-        </p:txBody>
-      </p:sp>
-      <p:sp>
-        <p:nvSpPr>
-          <p:cNvPr id="17" name="Text 15"/>
-          <p:cNvSpPr/>
-          <p:nvPr/>
-        </p:nvSpPr>
-        <p:spPr>
-          <a:xfrm>
-            <a:off x="2377440" y="1819656"/>
-            <a:ext cx="1920240" cy="658368"/>
-          </a:xfrm>
-          <a:prstGeom prst="rect">
-            <a:avLst/>
-          </a:prstGeom>
-          <a:noFill/>
-          <a:ln/>
-        </p:spPr>
-        <p:txBody>
-          <a:bodyPr wrap="square" lIns="0" tIns="0" rIns="0" bIns="0" rtlCol="0" anchor="ctr"/>
-          <a:lstStyle/>
-          <a:p>
-            <a:pPr indent="0" marL="0">
-              <a:buNone/>
-            </a:pPr>
-            <a:r>
-              <a:rPr lang="en-US" sz="1100" dirty="0">
-                <a:solidFill>
-                  <a:srgbClr val="6B6660"/>
-                </a:solidFill>
-                <a:latin typeface="Calibri" pitchFamily="34" charset="0"/>
-                <a:ea typeface="Calibri" pitchFamily="34" charset="-122"/>
-                <a:cs typeface="Calibri" pitchFamily="34" charset="-120"/>
-              </a:rPr>
-              <a:t>Change from one form to another</a:t>
-            </a:r>
-            <a:endParaRPr lang="en-US" sz="1100" dirty="0"/>
-          </a:p>
-        </p:txBody>
-      </p:sp>
-      <p:sp>
-        <p:nvSpPr>
-          <p:cNvPr id="18" name="Shape 16"/>
-          <p:cNvSpPr/>
-          <p:nvPr/>
-        </p:nvSpPr>
-        <p:spPr>
-          <a:xfrm>
-            <a:off x="4754880" y="1819656"/>
-            <a:ext cx="3657600" cy="658368"/>
-          </a:xfrm>
-          <a:prstGeom prst="rect">
-            <a:avLst/>
-          </a:prstGeom>
-          <a:solidFill>
-            <a:srgbClr val="FFFFFF"/>
-          </a:solidFill>
-          <a:ln/>
-          <a:effectLst>
-            <a:outerShdw sx="100000" sy="100000" kx="0" ky="0" algn="bl" rotWithShape="0" blurRad="50800" dist="25400" dir="8100000">
-              <a:srgbClr val="000000">
-                <a:alpha val="10000"/>
-              </a:srgbClr>
-            </a:outerShdw>
-          </a:effectLst>
-        </p:spPr>
-      </p:sp>
-      <p:sp>
-        <p:nvSpPr>
-          <p:cNvPr id="19" name="Shape 17"/>
-          <p:cNvSpPr/>
-          <p:nvPr/>
-        </p:nvSpPr>
-        <p:spPr>
-          <a:xfrm>
-            <a:off x="4754880" y="1819656"/>
-            <a:ext cx="54864" cy="658368"/>
-          </a:xfrm>
-          <a:prstGeom prst="rect">
-            <a:avLst/>
-          </a:prstGeom>
-          <a:solidFill>
-            <a:srgbClr val="2A9D8F"/>
-          </a:solidFill>
-          <a:ln/>
-        </p:spPr>
-      </p:sp>
-      <p:sp>
-        <p:nvSpPr>
-          <p:cNvPr id="20" name="Text 18"/>
-          <p:cNvSpPr/>
-          <p:nvPr/>
-        </p:nvSpPr>
-        <p:spPr>
-          <a:xfrm>
-            <a:off x="4937760" y="1819656"/>
-            <a:ext cx="1463040" cy="658368"/>
-          </a:xfrm>
-          <a:prstGeom prst="rect">
-            <a:avLst/>
-          </a:prstGeom>
-          <a:noFill/>
-          <a:ln/>
-        </p:spPr>
-        <p:txBody>
-          <a:bodyPr wrap="square" lIns="0" tIns="0" rIns="0" bIns="0" rtlCol="0" anchor="ctr"/>
-          <a:lstStyle/>
-          <a:p>
-            <a:pPr indent="0" marL="0">
-              <a:buNone/>
-            </a:pPr>
-            <a:r>
-              <a:rPr lang="en-US" sz="1300" b="1" dirty="0">
-                <a:solidFill>
-                  <a:srgbClr val="1B2A4A"/>
-                </a:solidFill>
-                <a:latin typeface="Georgia" pitchFamily="34" charset="0"/>
-                <a:ea typeface="Georgia" pitchFamily="34" charset="-122"/>
-                <a:cs typeface="Georgia" pitchFamily="34" charset="-120"/>
-              </a:rPr>
-              <a:t>FDP</a:t>
-            </a:r>
-            <a:endParaRPr lang="en-US" sz="1300" dirty="0"/>
-          </a:p>
-        </p:txBody>
-      </p:sp>
-      <p:sp>
-        <p:nvSpPr>
-          <p:cNvPr id="21" name="Text 19"/>
-          <p:cNvSpPr/>
-          <p:nvPr/>
-        </p:nvSpPr>
-        <p:spPr>
-          <a:xfrm>
-            <a:off x="6400800" y="1819656"/>
-            <a:ext cx="1920240" cy="658368"/>
-          </a:xfrm>
-          <a:prstGeom prst="rect">
-            <a:avLst/>
-          </a:prstGeom>
-          <a:noFill/>
-          <a:ln/>
-        </p:spPr>
-        <p:txBody>
-          <a:bodyPr wrap="square" lIns="0" tIns="0" rIns="0" bIns="0" rtlCol="0" anchor="ctr"/>
-          <a:lstStyle/>
-          <a:p>
-            <a:pPr indent="0" marL="0">
-              <a:buNone/>
-            </a:pPr>
-            <a:r>
-              <a:rPr lang="en-US" sz="1100" dirty="0">
-                <a:solidFill>
-                  <a:srgbClr val="6B6660"/>
-                </a:solidFill>
-                <a:latin typeface="Calibri" pitchFamily="34" charset="0"/>
-                <a:ea typeface="Calibri" pitchFamily="34" charset="-122"/>
-                <a:cs typeface="Calibri" pitchFamily="34" charset="-120"/>
-              </a:rPr>
-              <a:t>Fractions, Decimals, Percentages</a:t>
-            </a:r>
-            <a:endParaRPr lang="en-US" sz="1100" dirty="0"/>
+            <a:endParaRPr lang="en-US" sz="1500" dirty="0"/>
           </a:p>
         </p:txBody>
       </p:sp>
@@ -2309,47 +1856,7 @@
         <p:spPr>
           <a:xfrm>
             <a:off x="0" y="0"/>
-            <a:ext cx="9144000" cy="822960"/>
-          </a:xfrm>
-          <a:prstGeom prst="rect">
-            <a:avLst/>
-          </a:prstGeom>
-          <a:solidFill>
-            <a:srgbClr val="FFFFFF"/>
-          </a:solidFill>
-          <a:ln/>
-        </p:spPr>
-      </p:sp>
-      <p:sp>
-        <p:nvSpPr>
-          <p:cNvPr id="3" name="Shape 1"/>
-          <p:cNvSpPr/>
-          <p:nvPr/>
-        </p:nvSpPr>
-        <p:spPr>
-          <a:xfrm>
-            <a:off x="0" y="804672"/>
-            <a:ext cx="9144000" cy="27432"/>
-          </a:xfrm>
-          <a:prstGeom prst="rect">
-            <a:avLst/>
-          </a:prstGeom>
-          <a:solidFill>
-            <a:srgbClr val="E5E2DC"/>
-          </a:solidFill>
-          <a:ln/>
-        </p:spPr>
-      </p:sp>
-      <p:sp>
-        <p:nvSpPr>
-          <p:cNvPr id="4" name="Shape 2"/>
-          <p:cNvSpPr/>
-          <p:nvPr/>
-        </p:nvSpPr>
-        <p:spPr>
-          <a:xfrm>
-            <a:off x="548640" y="201168"/>
-            <a:ext cx="54864" cy="420624"/>
+            <a:ext cx="73152" cy="5148072"/>
           </a:xfrm>
           <a:prstGeom prst="rect">
             <a:avLst/>
@@ -2362,14 +1869,14 @@
       </p:sp>
       <p:sp>
         <p:nvSpPr>
-          <p:cNvPr id="5" name="Text 3"/>
+          <p:cNvPr id="3" name="Text 1"/>
           <p:cNvSpPr/>
           <p:nvPr/>
         </p:nvSpPr>
         <p:spPr>
           <a:xfrm>
-            <a:off x="777240" y="137160"/>
-            <a:ext cx="7772400" cy="548640"/>
+            <a:off x="548640" y="274320"/>
+            <a:ext cx="9144000" cy="640080"/>
           </a:xfrm>
           <a:prstGeom prst="rect">
             <a:avLst/>
@@ -2378,14 +1885,14 @@
           <a:ln/>
         </p:spPr>
         <p:txBody>
-          <a:bodyPr wrap="square" lIns="0" tIns="0" rIns="0" bIns="0" rtlCol="0" anchor="ctr"/>
+          <a:bodyPr wrap="square" rtlCol="0" anchor="ctr"/>
           <a:lstStyle/>
           <a:p>
             <a:pPr indent="0" marL="0">
               <a:buNone/>
             </a:pPr>
             <a:r>
-              <a:rPr lang="en-US" sz="2000" b="1" dirty="0">
+              <a:rPr lang="en-US" sz="2400" b="1" dirty="0">
                 <a:solidFill>
                   <a:srgbClr val="1B2A4A"/>
                 </a:solidFill>
@@ -2393,9 +1900,9 @@
                 <a:ea typeface="Georgia" pitchFamily="34" charset="-122"/>
                 <a:cs typeface="Georgia" pitchFamily="34" charset="-120"/>
               </a:rPr>
-              <a:t>Key FDP Equivalents You Must Know</a:t>
+              <a:t>Converting Between Forms</a:t>
             </a:r>
-            <a:endParaRPr lang="en-US" sz="2000" dirty="0"/>
+            <a:endParaRPr lang="en-US" sz="2400" dirty="0"/>
           </a:p>
         </p:txBody>
       </p:sp>
@@ -2414,25 +1921,25 @@
           </p:nvPr>
         </p:nvGraphicFramePr>
         <p:xfrm>
-          <a:off x="640080" y="1051560"/>
-          <a:ext cx="7863840" cy="914400"/>
+          <a:off x="548640" y="1097280"/>
+          <a:ext cx="6858000" cy="914400"/>
         </p:xfrm>
         <a:graphic>
           <a:graphicData uri="http://schemas.openxmlformats.org/drawingml/2006/table">
             <a:tbl>
               <a:tblPr/>
               <a:tblGrid>
-                <a:gridCol w="2621280"/>
-                <a:gridCol w="2621280"/>
-                <a:gridCol w="2621280"/>
+                <a:gridCol w="2286000"/>
+                <a:gridCol w="2286000"/>
+                <a:gridCol w="2286000"/>
               </a:tblGrid>
-              <a:tr h="502920">
+              <a:tr h="411480">
                 <a:tc>
                   <a:txBody>
                     <a:bodyPr/>
                     <a:lstStyle/>
                     <a:p>
-                      <a:pPr indent="0" marL="0">
+                      <a:pPr algn="ctr" indent="0" marL="0">
                         <a:buNone/>
                       </a:pPr>
                       <a:r>
@@ -2440,20 +1947,20 @@
                           <a:solidFill>
                             <a:srgbClr val="FFFFFF"/>
                           </a:solidFill>
-                          <a:latin typeface="Calibri" pitchFamily="34" charset="0"/>
-                          <a:ea typeface="Calibri" pitchFamily="34" charset="-122"/>
-                          <a:cs typeface="Calibri" pitchFamily="34" charset="-120"/>
+                          <a:latin typeface="Arial" pitchFamily="34" charset="0"/>
+                          <a:ea typeface="Arial" pitchFamily="34" charset="-122"/>
+                          <a:cs typeface="Arial" pitchFamily="34" charset="-120"/>
                         </a:rPr>
                         <a:t>Fraction</a:t>
                       </a:r>
                       <a:endParaRPr lang="en-US" sz="1200" dirty="0">
-                        <a:latin typeface="Calibri" charset="0"/>
-                        <a:ea typeface="Calibri" charset="0"/>
-                        <a:cs typeface="Calibri" charset="0"/>
+                        <a:latin typeface="Arial" charset="0"/>
+                        <a:ea typeface="Arial" charset="0"/>
+                        <a:cs typeface="Arial" charset="0"/>
                       </a:endParaRPr>
                     </a:p>
                   </a:txBody>
-                  <a:tcPr marL="91440" marR="91440" marT="45720" marB="45720">
+                  <a:tcPr marL="101600" marR="101600" marT="50800" marB="50800" anchor="ctr">
                     <a:lnL w="6350" cap="flat" cmpd="sng" algn="ctr">
                       <a:solidFill>
                         <a:srgbClr val="E5E2DC"/>
@@ -2500,7 +2007,7 @@
                     <a:bodyPr/>
                     <a:lstStyle/>
                     <a:p>
-                      <a:pPr indent="0" marL="0">
+                      <a:pPr algn="ctr" indent="0" marL="0">
                         <a:buNone/>
                       </a:pPr>
                       <a:r>
@@ -2508,20 +2015,20 @@
                           <a:solidFill>
                             <a:srgbClr val="FFFFFF"/>
                           </a:solidFill>
-                          <a:latin typeface="Calibri" pitchFamily="34" charset="0"/>
-                          <a:ea typeface="Calibri" pitchFamily="34" charset="-122"/>
-                          <a:cs typeface="Calibri" pitchFamily="34" charset="-120"/>
+                          <a:latin typeface="Arial" pitchFamily="34" charset="0"/>
+                          <a:ea typeface="Arial" pitchFamily="34" charset="-122"/>
+                          <a:cs typeface="Arial" pitchFamily="34" charset="-120"/>
                         </a:rPr>
                         <a:t>Decimal</a:t>
                       </a:r>
                       <a:endParaRPr lang="en-US" sz="1200" dirty="0">
-                        <a:latin typeface="Calibri" charset="0"/>
-                        <a:ea typeface="Calibri" charset="0"/>
-                        <a:cs typeface="Calibri" charset="0"/>
+                        <a:latin typeface="Arial" charset="0"/>
+                        <a:ea typeface="Arial" charset="0"/>
+                        <a:cs typeface="Arial" charset="0"/>
                       </a:endParaRPr>
                     </a:p>
                   </a:txBody>
-                  <a:tcPr marL="91440" marR="91440" marT="45720" marB="45720">
+                  <a:tcPr marL="101600" marR="101600" marT="50800" marB="50800" anchor="ctr">
                     <a:lnL w="6350" cap="flat" cmpd="sng" algn="ctr">
                       <a:solidFill>
                         <a:srgbClr val="E5E2DC"/>
@@ -2568,7 +2075,7 @@
                     <a:bodyPr/>
                     <a:lstStyle/>
                     <a:p>
-                      <a:pPr indent="0" marL="0">
+                      <a:pPr algn="ctr" indent="0" marL="0">
                         <a:buNone/>
                       </a:pPr>
                       <a:r>
@@ -2576,20 +2083,20 @@
                           <a:solidFill>
                             <a:srgbClr val="FFFFFF"/>
                           </a:solidFill>
-                          <a:latin typeface="Calibri" pitchFamily="34" charset="0"/>
-                          <a:ea typeface="Calibri" pitchFamily="34" charset="-122"/>
-                          <a:cs typeface="Calibri" pitchFamily="34" charset="-120"/>
+                          <a:latin typeface="Arial" pitchFamily="34" charset="0"/>
+                          <a:ea typeface="Arial" pitchFamily="34" charset="-122"/>
+                          <a:cs typeface="Arial" pitchFamily="34" charset="-120"/>
                         </a:rPr>
                         <a:t>Percentage</a:t>
                       </a:r>
                       <a:endParaRPr lang="en-US" sz="1200" dirty="0">
-                        <a:latin typeface="Calibri" charset="0"/>
-                        <a:ea typeface="Calibri" charset="0"/>
-                        <a:cs typeface="Calibri" charset="0"/>
+                        <a:latin typeface="Arial" charset="0"/>
+                        <a:ea typeface="Arial" charset="0"/>
+                        <a:cs typeface="Arial" charset="0"/>
                       </a:endParaRPr>
                     </a:p>
                   </a:txBody>
-                  <a:tcPr marL="91440" marR="91440" marT="45720" marB="45720">
+                  <a:tcPr marL="101600" marR="101600" marT="50800" marB="50800" anchor="ctr">
                     <a:lnL w="6350" cap="flat" cmpd="sng" algn="ctr">
                       <a:solidFill>
                         <a:srgbClr val="E5E2DC"/>
@@ -2632,7 +2139,7 @@
                   </a:tcPr>
                 </a:tc>
               </a:tr>
-              <a:tr h="502920">
+              <a:tr h="365760">
                 <a:tc>
                   <a:txBody>
                     <a:bodyPr/>
@@ -2646,20 +2153,20 @@
                           <a:solidFill>
                             <a:srgbClr val="3D3A36"/>
                           </a:solidFill>
-                          <a:latin typeface="Calibri" pitchFamily="34" charset="0"/>
-                          <a:ea typeface="Calibri" pitchFamily="34" charset="-122"/>
-                          <a:cs typeface="Calibri" pitchFamily="34" charset="-120"/>
+                          <a:latin typeface="Arial" pitchFamily="34" charset="0"/>
+                          <a:ea typeface="Arial" pitchFamily="34" charset="-122"/>
+                          <a:cs typeface="Arial" pitchFamily="34" charset="-120"/>
                         </a:rPr>
                         <a:t>½</a:t>
                       </a:r>
                       <a:endParaRPr lang="en-US" sz="1200" dirty="0">
-                        <a:latin typeface="Calibri" charset="0"/>
-                        <a:ea typeface="Calibri" charset="0"/>
-                        <a:cs typeface="Calibri" charset="0"/>
+                        <a:latin typeface="Arial" charset="0"/>
+                        <a:ea typeface="Arial" charset="0"/>
+                        <a:cs typeface="Arial" charset="0"/>
                       </a:endParaRPr>
                     </a:p>
                   </a:txBody>
-                  <a:tcPr marL="91440" marR="91440" marT="45720" marB="45720">
+                  <a:tcPr marL="101600" marR="101600" marT="50800" marB="50800" anchor="ctr">
                     <a:lnL w="6350" cap="flat" cmpd="sng" algn="ctr">
                       <a:solidFill>
                         <a:srgbClr val="E5E2DC"/>
@@ -2714,20 +2221,20 @@
                           <a:solidFill>
                             <a:srgbClr val="3D3A36"/>
                           </a:solidFill>
-                          <a:latin typeface="Calibri" pitchFamily="34" charset="0"/>
-                          <a:ea typeface="Calibri" pitchFamily="34" charset="-122"/>
-                          <a:cs typeface="Calibri" pitchFamily="34" charset="-120"/>
+                          <a:latin typeface="Arial" pitchFamily="34" charset="0"/>
+                          <a:ea typeface="Arial" pitchFamily="34" charset="-122"/>
+                          <a:cs typeface="Arial" pitchFamily="34" charset="-120"/>
                         </a:rPr>
                         <a:t>0.5</a:t>
                       </a:r>
                       <a:endParaRPr lang="en-US" sz="1200" dirty="0">
-                        <a:latin typeface="Calibri" charset="0"/>
-                        <a:ea typeface="Calibri" charset="0"/>
-                        <a:cs typeface="Calibri" charset="0"/>
+                        <a:latin typeface="Arial" charset="0"/>
+                        <a:ea typeface="Arial" charset="0"/>
+                        <a:cs typeface="Arial" charset="0"/>
                       </a:endParaRPr>
                     </a:p>
                   </a:txBody>
-                  <a:tcPr marL="91440" marR="91440" marT="45720" marB="45720">
+                  <a:tcPr marL="101600" marR="101600" marT="50800" marB="50800" anchor="ctr">
                     <a:lnL w="6350" cap="flat" cmpd="sng" algn="ctr">
                       <a:solidFill>
                         <a:srgbClr val="E5E2DC"/>
@@ -2782,20 +2289,20 @@
                           <a:solidFill>
                             <a:srgbClr val="3D3A36"/>
                           </a:solidFill>
-                          <a:latin typeface="Calibri" pitchFamily="34" charset="0"/>
-                          <a:ea typeface="Calibri" pitchFamily="34" charset="-122"/>
-                          <a:cs typeface="Calibri" pitchFamily="34" charset="-120"/>
+                          <a:latin typeface="Arial" pitchFamily="34" charset="0"/>
+                          <a:ea typeface="Arial" pitchFamily="34" charset="-122"/>
+                          <a:cs typeface="Arial" pitchFamily="34" charset="-120"/>
                         </a:rPr>
                         <a:t>50%</a:t>
                       </a:r>
                       <a:endParaRPr lang="en-US" sz="1200" dirty="0">
-                        <a:latin typeface="Calibri" charset="0"/>
-                        <a:ea typeface="Calibri" charset="0"/>
-                        <a:cs typeface="Calibri" charset="0"/>
+                        <a:latin typeface="Arial" charset="0"/>
+                        <a:ea typeface="Arial" charset="0"/>
+                        <a:cs typeface="Arial" charset="0"/>
                       </a:endParaRPr>
                     </a:p>
                   </a:txBody>
-                  <a:tcPr marL="91440" marR="91440" marT="45720" marB="45720">
+                  <a:tcPr marL="101600" marR="101600" marT="50800" marB="50800" anchor="ctr">
                     <a:lnL w="6350" cap="flat" cmpd="sng" algn="ctr">
                       <a:solidFill>
                         <a:srgbClr val="E5E2DC"/>
@@ -2838,7 +2345,7 @@
                   </a:tcPr>
                 </a:tc>
               </a:tr>
-              <a:tr h="502920">
+              <a:tr h="365760">
                 <a:tc>
                   <a:txBody>
                     <a:bodyPr/>
@@ -2852,20 +2359,20 @@
                           <a:solidFill>
                             <a:srgbClr val="3D3A36"/>
                           </a:solidFill>
-                          <a:latin typeface="Calibri" pitchFamily="34" charset="0"/>
-                          <a:ea typeface="Calibri" pitchFamily="34" charset="-122"/>
-                          <a:cs typeface="Calibri" pitchFamily="34" charset="-120"/>
+                          <a:latin typeface="Arial" pitchFamily="34" charset="0"/>
+                          <a:ea typeface="Arial" pitchFamily="34" charset="-122"/>
+                          <a:cs typeface="Arial" pitchFamily="34" charset="-120"/>
                         </a:rPr>
                         <a:t>¼</a:t>
                       </a:r>
                       <a:endParaRPr lang="en-US" sz="1200" dirty="0">
-                        <a:latin typeface="Calibri" charset="0"/>
-                        <a:ea typeface="Calibri" charset="0"/>
-                        <a:cs typeface="Calibri" charset="0"/>
+                        <a:latin typeface="Arial" charset="0"/>
+                        <a:ea typeface="Arial" charset="0"/>
+                        <a:cs typeface="Arial" charset="0"/>
                       </a:endParaRPr>
                     </a:p>
                   </a:txBody>
-                  <a:tcPr marL="91440" marR="91440" marT="45720" marB="45720">
+                  <a:tcPr marL="101600" marR="101600" marT="50800" marB="50800" anchor="ctr">
                     <a:lnL w="6350" cap="flat" cmpd="sng" algn="ctr">
                       <a:solidFill>
                         <a:srgbClr val="E5E2DC"/>
@@ -2920,20 +2427,20 @@
                           <a:solidFill>
                             <a:srgbClr val="3D3A36"/>
                           </a:solidFill>
-                          <a:latin typeface="Calibri" pitchFamily="34" charset="0"/>
-                          <a:ea typeface="Calibri" pitchFamily="34" charset="-122"/>
-                          <a:cs typeface="Calibri" pitchFamily="34" charset="-120"/>
+                          <a:latin typeface="Arial" pitchFamily="34" charset="0"/>
+                          <a:ea typeface="Arial" pitchFamily="34" charset="-122"/>
+                          <a:cs typeface="Arial" pitchFamily="34" charset="-120"/>
                         </a:rPr>
                         <a:t>0.25</a:t>
                       </a:r>
                       <a:endParaRPr lang="en-US" sz="1200" dirty="0">
-                        <a:latin typeface="Calibri" charset="0"/>
-                        <a:ea typeface="Calibri" charset="0"/>
-                        <a:cs typeface="Calibri" charset="0"/>
+                        <a:latin typeface="Arial" charset="0"/>
+                        <a:ea typeface="Arial" charset="0"/>
+                        <a:cs typeface="Arial" charset="0"/>
                       </a:endParaRPr>
                     </a:p>
                   </a:txBody>
-                  <a:tcPr marL="91440" marR="91440" marT="45720" marB="45720">
+                  <a:tcPr marL="101600" marR="101600" marT="50800" marB="50800" anchor="ctr">
                     <a:lnL w="6350" cap="flat" cmpd="sng" algn="ctr">
                       <a:solidFill>
                         <a:srgbClr val="E5E2DC"/>
@@ -2988,20 +2495,20 @@
                           <a:solidFill>
                             <a:srgbClr val="3D3A36"/>
                           </a:solidFill>
-                          <a:latin typeface="Calibri" pitchFamily="34" charset="0"/>
-                          <a:ea typeface="Calibri" pitchFamily="34" charset="-122"/>
-                          <a:cs typeface="Calibri" pitchFamily="34" charset="-120"/>
+                          <a:latin typeface="Arial" pitchFamily="34" charset="0"/>
+                          <a:ea typeface="Arial" pitchFamily="34" charset="-122"/>
+                          <a:cs typeface="Arial" pitchFamily="34" charset="-120"/>
                         </a:rPr>
                         <a:t>25%</a:t>
                       </a:r>
                       <a:endParaRPr lang="en-US" sz="1200" dirty="0">
-                        <a:latin typeface="Calibri" charset="0"/>
-                        <a:ea typeface="Calibri" charset="0"/>
-                        <a:cs typeface="Calibri" charset="0"/>
+                        <a:latin typeface="Arial" charset="0"/>
+                        <a:ea typeface="Arial" charset="0"/>
+                        <a:cs typeface="Arial" charset="0"/>
                       </a:endParaRPr>
                     </a:p>
                   </a:txBody>
-                  <a:tcPr marL="91440" marR="91440" marT="45720" marB="45720">
+                  <a:tcPr marL="101600" marR="101600" marT="50800" marB="50800" anchor="ctr">
                     <a:lnL w="6350" cap="flat" cmpd="sng" algn="ctr">
                       <a:solidFill>
                         <a:srgbClr val="E5E2DC"/>
@@ -3044,7 +2551,7 @@
                   </a:tcPr>
                 </a:tc>
               </a:tr>
-              <a:tr h="502920">
+              <a:tr h="365760">
                 <a:tc>
                   <a:txBody>
                     <a:bodyPr/>
@@ -3058,20 +2565,20 @@
                           <a:solidFill>
                             <a:srgbClr val="3D3A36"/>
                           </a:solidFill>
-                          <a:latin typeface="Calibri" pitchFamily="34" charset="0"/>
-                          <a:ea typeface="Calibri" pitchFamily="34" charset="-122"/>
-                          <a:cs typeface="Calibri" pitchFamily="34" charset="-120"/>
+                          <a:latin typeface="Arial" pitchFamily="34" charset="0"/>
+                          <a:ea typeface="Arial" pitchFamily="34" charset="-122"/>
+                          <a:cs typeface="Arial" pitchFamily="34" charset="-120"/>
                         </a:rPr>
                         <a:t>¾</a:t>
                       </a:r>
                       <a:endParaRPr lang="en-US" sz="1200" dirty="0">
-                        <a:latin typeface="Calibri" charset="0"/>
-                        <a:ea typeface="Calibri" charset="0"/>
-                        <a:cs typeface="Calibri" charset="0"/>
+                        <a:latin typeface="Arial" charset="0"/>
+                        <a:ea typeface="Arial" charset="0"/>
+                        <a:cs typeface="Arial" charset="0"/>
                       </a:endParaRPr>
                     </a:p>
                   </a:txBody>
-                  <a:tcPr marL="91440" marR="91440" marT="45720" marB="45720">
+                  <a:tcPr marL="101600" marR="101600" marT="50800" marB="50800" anchor="ctr">
                     <a:lnL w="6350" cap="flat" cmpd="sng" algn="ctr">
                       <a:solidFill>
                         <a:srgbClr val="E5E2DC"/>
@@ -3126,20 +2633,20 @@
                           <a:solidFill>
                             <a:srgbClr val="3D3A36"/>
                           </a:solidFill>
-                          <a:latin typeface="Calibri" pitchFamily="34" charset="0"/>
-                          <a:ea typeface="Calibri" pitchFamily="34" charset="-122"/>
-                          <a:cs typeface="Calibri" pitchFamily="34" charset="-120"/>
+                          <a:latin typeface="Arial" pitchFamily="34" charset="0"/>
+                          <a:ea typeface="Arial" pitchFamily="34" charset="-122"/>
+                          <a:cs typeface="Arial" pitchFamily="34" charset="-120"/>
                         </a:rPr>
                         <a:t>0.75</a:t>
                       </a:r>
                       <a:endParaRPr lang="en-US" sz="1200" dirty="0">
-                        <a:latin typeface="Calibri" charset="0"/>
-                        <a:ea typeface="Calibri" charset="0"/>
-                        <a:cs typeface="Calibri" charset="0"/>
+                        <a:latin typeface="Arial" charset="0"/>
+                        <a:ea typeface="Arial" charset="0"/>
+                        <a:cs typeface="Arial" charset="0"/>
                       </a:endParaRPr>
                     </a:p>
                   </a:txBody>
-                  <a:tcPr marL="91440" marR="91440" marT="45720" marB="45720">
+                  <a:tcPr marL="101600" marR="101600" marT="50800" marB="50800" anchor="ctr">
                     <a:lnL w="6350" cap="flat" cmpd="sng" algn="ctr">
                       <a:solidFill>
                         <a:srgbClr val="E5E2DC"/>
@@ -3194,20 +2701,20 @@
                           <a:solidFill>
                             <a:srgbClr val="3D3A36"/>
                           </a:solidFill>
-                          <a:latin typeface="Calibri" pitchFamily="34" charset="0"/>
-                          <a:ea typeface="Calibri" pitchFamily="34" charset="-122"/>
-                          <a:cs typeface="Calibri" pitchFamily="34" charset="-120"/>
+                          <a:latin typeface="Arial" pitchFamily="34" charset="0"/>
+                          <a:ea typeface="Arial" pitchFamily="34" charset="-122"/>
+                          <a:cs typeface="Arial" pitchFamily="34" charset="-120"/>
                         </a:rPr>
                         <a:t>75%</a:t>
                       </a:r>
                       <a:endParaRPr lang="en-US" sz="1200" dirty="0">
-                        <a:latin typeface="Calibri" charset="0"/>
-                        <a:ea typeface="Calibri" charset="0"/>
-                        <a:cs typeface="Calibri" charset="0"/>
+                        <a:latin typeface="Arial" charset="0"/>
+                        <a:ea typeface="Arial" charset="0"/>
+                        <a:cs typeface="Arial" charset="0"/>
                       </a:endParaRPr>
                     </a:p>
                   </a:txBody>
-                  <a:tcPr marL="91440" marR="91440" marT="45720" marB="45720">
+                  <a:tcPr marL="101600" marR="101600" marT="50800" marB="50800" anchor="ctr">
                     <a:lnL w="6350" cap="flat" cmpd="sng" algn="ctr">
                       <a:solidFill>
                         <a:srgbClr val="E5E2DC"/>
@@ -3250,7 +2757,7 @@
                   </a:tcPr>
                 </a:tc>
               </a:tr>
-              <a:tr h="502920">
+              <a:tr h="365760">
                 <a:tc>
                   <a:txBody>
                     <a:bodyPr/>
@@ -3264,20 +2771,20 @@
                           <a:solidFill>
                             <a:srgbClr val="3D3A36"/>
                           </a:solidFill>
-                          <a:latin typeface="Calibri" pitchFamily="34" charset="0"/>
-                          <a:ea typeface="Calibri" pitchFamily="34" charset="-122"/>
-                          <a:cs typeface="Calibri" pitchFamily="34" charset="-120"/>
+                          <a:latin typeface="Arial" pitchFamily="34" charset="0"/>
+                          <a:ea typeface="Arial" pitchFamily="34" charset="-122"/>
+                          <a:cs typeface="Arial" pitchFamily="34" charset="-120"/>
                         </a:rPr>
-                        <a:t>⅕</a:t>
+                        <a:t>¹⁄₅</a:t>
                       </a:r>
                       <a:endParaRPr lang="en-US" sz="1200" dirty="0">
-                        <a:latin typeface="Calibri" charset="0"/>
-                        <a:ea typeface="Calibri" charset="0"/>
-                        <a:cs typeface="Calibri" charset="0"/>
+                        <a:latin typeface="Arial" charset="0"/>
+                        <a:ea typeface="Arial" charset="0"/>
+                        <a:cs typeface="Arial" charset="0"/>
                       </a:endParaRPr>
                     </a:p>
                   </a:txBody>
-                  <a:tcPr marL="91440" marR="91440" marT="45720" marB="45720">
+                  <a:tcPr marL="101600" marR="101600" marT="50800" marB="50800" anchor="ctr">
                     <a:lnL w="6350" cap="flat" cmpd="sng" algn="ctr">
                       <a:solidFill>
                         <a:srgbClr val="E5E2DC"/>
@@ -3332,20 +2839,20 @@
                           <a:solidFill>
                             <a:srgbClr val="3D3A36"/>
                           </a:solidFill>
-                          <a:latin typeface="Calibri" pitchFamily="34" charset="0"/>
-                          <a:ea typeface="Calibri" pitchFamily="34" charset="-122"/>
-                          <a:cs typeface="Calibri" pitchFamily="34" charset="-120"/>
+                          <a:latin typeface="Arial" pitchFamily="34" charset="0"/>
+                          <a:ea typeface="Arial" pitchFamily="34" charset="-122"/>
+                          <a:cs typeface="Arial" pitchFamily="34" charset="-120"/>
                         </a:rPr>
                         <a:t>0.2</a:t>
                       </a:r>
                       <a:endParaRPr lang="en-US" sz="1200" dirty="0">
-                        <a:latin typeface="Calibri" charset="0"/>
-                        <a:ea typeface="Calibri" charset="0"/>
-                        <a:cs typeface="Calibri" charset="0"/>
+                        <a:latin typeface="Arial" charset="0"/>
+                        <a:ea typeface="Arial" charset="0"/>
+                        <a:cs typeface="Arial" charset="0"/>
                       </a:endParaRPr>
                     </a:p>
                   </a:txBody>
-                  <a:tcPr marL="91440" marR="91440" marT="45720" marB="45720">
+                  <a:tcPr marL="101600" marR="101600" marT="50800" marB="50800" anchor="ctr">
                     <a:lnL w="6350" cap="flat" cmpd="sng" algn="ctr">
                       <a:solidFill>
                         <a:srgbClr val="E5E2DC"/>
@@ -3400,20 +2907,20 @@
                           <a:solidFill>
                             <a:srgbClr val="3D3A36"/>
                           </a:solidFill>
-                          <a:latin typeface="Calibri" pitchFamily="34" charset="0"/>
-                          <a:ea typeface="Calibri" pitchFamily="34" charset="-122"/>
-                          <a:cs typeface="Calibri" pitchFamily="34" charset="-120"/>
+                          <a:latin typeface="Arial" pitchFamily="34" charset="0"/>
+                          <a:ea typeface="Arial" pitchFamily="34" charset="-122"/>
+                          <a:cs typeface="Arial" pitchFamily="34" charset="-120"/>
                         </a:rPr>
                         <a:t>20%</a:t>
                       </a:r>
                       <a:endParaRPr lang="en-US" sz="1200" dirty="0">
-                        <a:latin typeface="Calibri" charset="0"/>
-                        <a:ea typeface="Calibri" charset="0"/>
-                        <a:cs typeface="Calibri" charset="0"/>
+                        <a:latin typeface="Arial" charset="0"/>
+                        <a:ea typeface="Arial" charset="0"/>
+                        <a:cs typeface="Arial" charset="0"/>
                       </a:endParaRPr>
                     </a:p>
                   </a:txBody>
-                  <a:tcPr marL="91440" marR="91440" marT="45720" marB="45720">
+                  <a:tcPr marL="101600" marR="101600" marT="50800" marB="50800" anchor="ctr">
                     <a:lnL w="6350" cap="flat" cmpd="sng" algn="ctr">
                       <a:solidFill>
                         <a:srgbClr val="E5E2DC"/>
@@ -3456,7 +2963,7 @@
                   </a:tcPr>
                 </a:tc>
               </a:tr>
-              <a:tr h="502920">
+              <a:tr h="365760">
                 <a:tc>
                   <a:txBody>
                     <a:bodyPr/>
@@ -3470,20 +2977,20 @@
                           <a:solidFill>
                             <a:srgbClr val="3D3A36"/>
                           </a:solidFill>
-                          <a:latin typeface="Calibri" pitchFamily="34" charset="0"/>
-                          <a:ea typeface="Calibri" pitchFamily="34" charset="-122"/>
-                          <a:cs typeface="Calibri" pitchFamily="34" charset="-120"/>
+                          <a:latin typeface="Arial" pitchFamily="34" charset="0"/>
+                          <a:ea typeface="Arial" pitchFamily="34" charset="-122"/>
+                          <a:cs typeface="Arial" pitchFamily="34" charset="-120"/>
                         </a:rPr>
-                        <a:t>⅓</a:t>
+                        <a:t>¹⁄₁₀</a:t>
                       </a:r>
                       <a:endParaRPr lang="en-US" sz="1200" dirty="0">
-                        <a:latin typeface="Calibri" charset="0"/>
-                        <a:ea typeface="Calibri" charset="0"/>
-                        <a:cs typeface="Calibri" charset="0"/>
+                        <a:latin typeface="Arial" charset="0"/>
+                        <a:ea typeface="Arial" charset="0"/>
+                        <a:cs typeface="Arial" charset="0"/>
                       </a:endParaRPr>
                     </a:p>
                   </a:txBody>
-                  <a:tcPr marL="91440" marR="91440" marT="45720" marB="45720">
+                  <a:tcPr marL="101600" marR="101600" marT="50800" marB="50800" anchor="ctr">
                     <a:lnL w="6350" cap="flat" cmpd="sng" algn="ctr">
                       <a:solidFill>
                         <a:srgbClr val="E5E2DC"/>
@@ -3538,20 +3045,20 @@
                           <a:solidFill>
                             <a:srgbClr val="3D3A36"/>
                           </a:solidFill>
-                          <a:latin typeface="Calibri" pitchFamily="34" charset="0"/>
-                          <a:ea typeface="Calibri" pitchFamily="34" charset="-122"/>
-                          <a:cs typeface="Calibri" pitchFamily="34" charset="-120"/>
+                          <a:latin typeface="Arial" pitchFamily="34" charset="0"/>
+                          <a:ea typeface="Arial" pitchFamily="34" charset="-122"/>
+                          <a:cs typeface="Arial" pitchFamily="34" charset="-120"/>
                         </a:rPr>
-                        <a:t>0.333...</a:t>
+                        <a:t>0.1</a:t>
                       </a:r>
                       <a:endParaRPr lang="en-US" sz="1200" dirty="0">
-                        <a:latin typeface="Calibri" charset="0"/>
-                        <a:ea typeface="Calibri" charset="0"/>
-                        <a:cs typeface="Calibri" charset="0"/>
+                        <a:latin typeface="Arial" charset="0"/>
+                        <a:ea typeface="Arial" charset="0"/>
+                        <a:cs typeface="Arial" charset="0"/>
                       </a:endParaRPr>
                     </a:p>
                   </a:txBody>
-                  <a:tcPr marL="91440" marR="91440" marT="45720" marB="45720">
+                  <a:tcPr marL="101600" marR="101600" marT="50800" marB="50800" anchor="ctr">
                     <a:lnL w="6350" cap="flat" cmpd="sng" algn="ctr">
                       <a:solidFill>
                         <a:srgbClr val="E5E2DC"/>
@@ -3606,20 +3113,20 @@
                           <a:solidFill>
                             <a:srgbClr val="3D3A36"/>
                           </a:solidFill>
-                          <a:latin typeface="Calibri" pitchFamily="34" charset="0"/>
-                          <a:ea typeface="Calibri" pitchFamily="34" charset="-122"/>
-                          <a:cs typeface="Calibri" pitchFamily="34" charset="-120"/>
+                          <a:latin typeface="Arial" pitchFamily="34" charset="0"/>
+                          <a:ea typeface="Arial" pitchFamily="34" charset="-122"/>
+                          <a:cs typeface="Arial" pitchFamily="34" charset="-120"/>
                         </a:rPr>
-                        <a:t>33.3%</a:t>
+                        <a:t>10%</a:t>
                       </a:r>
                       <a:endParaRPr lang="en-US" sz="1200" dirty="0">
-                        <a:latin typeface="Calibri" charset="0"/>
-                        <a:ea typeface="Calibri" charset="0"/>
-                        <a:cs typeface="Calibri" charset="0"/>
+                        <a:latin typeface="Arial" charset="0"/>
+                        <a:ea typeface="Arial" charset="0"/>
+                        <a:cs typeface="Arial" charset="0"/>
                       </a:endParaRPr>
                     </a:p>
                   </a:txBody>
-                  <a:tcPr marL="91440" marR="91440" marT="45720" marB="45720">
+                  <a:tcPr marL="101600" marR="101600" marT="50800" marB="50800" anchor="ctr">
                     <a:lnL w="6350" cap="flat" cmpd="sng" algn="ctr">
                       <a:solidFill>
                         <a:srgbClr val="E5E2DC"/>
@@ -3662,7 +3169,7 @@
                   </a:tcPr>
                 </a:tc>
               </a:tr>
-              <a:tr h="502920">
+              <a:tr h="365760">
                 <a:tc>
                   <a:txBody>
                     <a:bodyPr/>
@@ -3676,20 +3183,20 @@
                           <a:solidFill>
                             <a:srgbClr val="3D3A36"/>
                           </a:solidFill>
-                          <a:latin typeface="Calibri" pitchFamily="34" charset="0"/>
-                          <a:ea typeface="Calibri" pitchFamily="34" charset="-122"/>
-                          <a:cs typeface="Calibri" pitchFamily="34" charset="-120"/>
+                          <a:latin typeface="Arial" pitchFamily="34" charset="0"/>
+                          <a:ea typeface="Arial" pitchFamily="34" charset="-122"/>
+                          <a:cs typeface="Arial" pitchFamily="34" charset="-120"/>
                         </a:rPr>
-                        <a:t>1/10</a:t>
+                        <a:t>¹⁄₃</a:t>
                       </a:r>
                       <a:endParaRPr lang="en-US" sz="1200" dirty="0">
-                        <a:latin typeface="Calibri" charset="0"/>
-                        <a:ea typeface="Calibri" charset="0"/>
-                        <a:cs typeface="Calibri" charset="0"/>
+                        <a:latin typeface="Arial" charset="0"/>
+                        <a:ea typeface="Arial" charset="0"/>
+                        <a:cs typeface="Arial" charset="0"/>
                       </a:endParaRPr>
                     </a:p>
                   </a:txBody>
-                  <a:tcPr marL="91440" marR="91440" marT="45720" marB="45720">
+                  <a:tcPr marL="101600" marR="101600" marT="50800" marB="50800" anchor="ctr">
                     <a:lnL w="6350" cap="flat" cmpd="sng" algn="ctr">
                       <a:solidFill>
                         <a:srgbClr val="E5E2DC"/>
@@ -3744,20 +3251,20 @@
                           <a:solidFill>
                             <a:srgbClr val="3D3A36"/>
                           </a:solidFill>
-                          <a:latin typeface="Calibri" pitchFamily="34" charset="0"/>
-                          <a:ea typeface="Calibri" pitchFamily="34" charset="-122"/>
-                          <a:cs typeface="Calibri" pitchFamily="34" charset="-120"/>
+                          <a:latin typeface="Arial" pitchFamily="34" charset="0"/>
+                          <a:ea typeface="Arial" pitchFamily="34" charset="-122"/>
+                          <a:cs typeface="Arial" pitchFamily="34" charset="-120"/>
                         </a:rPr>
-                        <a:t>0.1</a:t>
+                        <a:t>0.333...</a:t>
                       </a:r>
                       <a:endParaRPr lang="en-US" sz="1200" dirty="0">
-                        <a:latin typeface="Calibri" charset="0"/>
-                        <a:ea typeface="Calibri" charset="0"/>
-                        <a:cs typeface="Calibri" charset="0"/>
+                        <a:latin typeface="Arial" charset="0"/>
+                        <a:ea typeface="Arial" charset="0"/>
+                        <a:cs typeface="Arial" charset="0"/>
                       </a:endParaRPr>
                     </a:p>
                   </a:txBody>
-                  <a:tcPr marL="91440" marR="91440" marT="45720" marB="45720">
+                  <a:tcPr marL="101600" marR="101600" marT="50800" marB="50800" anchor="ctr">
                     <a:lnL w="6350" cap="flat" cmpd="sng" algn="ctr">
                       <a:solidFill>
                         <a:srgbClr val="E5E2DC"/>
@@ -3812,20 +3319,20 @@
                           <a:solidFill>
                             <a:srgbClr val="3D3A36"/>
                           </a:solidFill>
-                          <a:latin typeface="Calibri" pitchFamily="34" charset="0"/>
-                          <a:ea typeface="Calibri" pitchFamily="34" charset="-122"/>
-                          <a:cs typeface="Calibri" pitchFamily="34" charset="-120"/>
+                          <a:latin typeface="Arial" pitchFamily="34" charset="0"/>
+                          <a:ea typeface="Arial" pitchFamily="34" charset="-122"/>
+                          <a:cs typeface="Arial" pitchFamily="34" charset="-120"/>
                         </a:rPr>
-                        <a:t>10%</a:t>
+                        <a:t>33.3%</a:t>
                       </a:r>
                       <a:endParaRPr lang="en-US" sz="1200" dirty="0">
-                        <a:latin typeface="Calibri" charset="0"/>
-                        <a:ea typeface="Calibri" charset="0"/>
-                        <a:cs typeface="Calibri" charset="0"/>
+                        <a:latin typeface="Arial" charset="0"/>
+                        <a:ea typeface="Arial" charset="0"/>
+                        <a:cs typeface="Arial" charset="0"/>
                       </a:endParaRPr>
                     </a:p>
                   </a:txBody>
-                  <a:tcPr marL="91440" marR="91440" marT="45720" marB="45720">
+                  <a:tcPr marL="101600" marR="101600" marT="50800" marB="50800" anchor="ctr">
                     <a:lnL w="6350" cap="flat" cmpd="sng" algn="ctr">
                       <a:solidFill>
                         <a:srgbClr val="E5E2DC"/>
@@ -3913,47 +3420,7 @@
         <p:spPr>
           <a:xfrm>
             <a:off x="0" y="0"/>
-            <a:ext cx="9144000" cy="822960"/>
-          </a:xfrm>
-          <a:prstGeom prst="rect">
-            <a:avLst/>
-          </a:prstGeom>
-          <a:solidFill>
-            <a:srgbClr val="FFFFFF"/>
-          </a:solidFill>
-          <a:ln/>
-        </p:spPr>
-      </p:sp>
-      <p:sp>
-        <p:nvSpPr>
-          <p:cNvPr id="3" name="Shape 1"/>
-          <p:cNvSpPr/>
-          <p:nvPr/>
-        </p:nvSpPr>
-        <p:spPr>
-          <a:xfrm>
-            <a:off x="0" y="804672"/>
-            <a:ext cx="9144000" cy="27432"/>
-          </a:xfrm>
-          <a:prstGeom prst="rect">
-            <a:avLst/>
-          </a:prstGeom>
-          <a:solidFill>
-            <a:srgbClr val="E5E2DC"/>
-          </a:solidFill>
-          <a:ln/>
-        </p:spPr>
-      </p:sp>
-      <p:sp>
-        <p:nvSpPr>
-          <p:cNvPr id="4" name="Shape 2"/>
-          <p:cNvSpPr/>
-          <p:nvPr/>
-        </p:nvSpPr>
-        <p:spPr>
-          <a:xfrm>
-            <a:off x="548640" y="201168"/>
-            <a:ext cx="54864" cy="420624"/>
+            <a:ext cx="73152" cy="5148072"/>
           </a:xfrm>
           <a:prstGeom prst="rect">
             <a:avLst/>
@@ -3966,100 +3433,14 @@
       </p:sp>
       <p:sp>
         <p:nvSpPr>
-          <p:cNvPr id="5" name="Text 3"/>
+          <p:cNvPr id="3" name="Text 1"/>
           <p:cNvSpPr/>
           <p:nvPr/>
         </p:nvSpPr>
         <p:spPr>
           <a:xfrm>
-            <a:off x="777240" y="137160"/>
-            <a:ext cx="7772400" cy="548640"/>
-          </a:xfrm>
-          <a:prstGeom prst="rect">
-            <a:avLst/>
-          </a:prstGeom>
-          <a:noFill/>
-          <a:ln/>
-        </p:spPr>
-        <p:txBody>
-          <a:bodyPr wrap="square" lIns="0" tIns="0" rIns="0" bIns="0" rtlCol="0" anchor="ctr"/>
-          <a:lstStyle/>
-          <a:p>
-            <a:pPr indent="0" marL="0">
-              <a:buNone/>
-            </a:pPr>
-            <a:r>
-              <a:rPr lang="en-US" sz="2000" b="1" dirty="0">
-                <a:solidFill>
-                  <a:srgbClr val="1B2A4A"/>
-                </a:solidFill>
-                <a:latin typeface="Georgia" pitchFamily="34" charset="0"/>
-                <a:ea typeface="Georgia" pitchFamily="34" charset="-122"/>
-                <a:cs typeface="Georgia" pitchFamily="34" charset="-120"/>
-              </a:rPr>
-              <a:t>How to Convert</a:t>
-            </a:r>
-            <a:endParaRPr lang="en-US" sz="2000" dirty="0"/>
-          </a:p>
-        </p:txBody>
-      </p:sp>
-      <p:sp>
-        <p:nvSpPr>
-          <p:cNvPr id="6" name="Shape 4"/>
-          <p:cNvSpPr/>
-          <p:nvPr/>
-        </p:nvSpPr>
-        <p:spPr>
-          <a:xfrm>
-            <a:off x="640080" y="1051560"/>
-            <a:ext cx="2468880" cy="3657600"/>
-          </a:xfrm>
-          <a:prstGeom prst="rect">
-            <a:avLst/>
-          </a:prstGeom>
-          <a:solidFill>
-            <a:srgbClr val="FFFFFF"/>
-          </a:solidFill>
-          <a:ln/>
-          <a:effectLst>
-            <a:outerShdw sx="100000" sy="100000" kx="0" ky="0" algn="bl" rotWithShape="0" blurRad="50800" dist="25400" dir="8100000">
-              <a:srgbClr val="000000">
-                <a:alpha val="10000"/>
-              </a:srgbClr>
-            </a:outerShdw>
-          </a:effectLst>
-        </p:spPr>
-      </p:sp>
-      <p:sp>
-        <p:nvSpPr>
-          <p:cNvPr id="7" name="Shape 5"/>
-          <p:cNvSpPr/>
-          <p:nvPr/>
-        </p:nvSpPr>
-        <p:spPr>
-          <a:xfrm>
-            <a:off x="640080" y="1051560"/>
-            <a:ext cx="2468880" cy="54864"/>
-          </a:xfrm>
-          <a:prstGeom prst="rect">
-            <a:avLst/>
-          </a:prstGeom>
-          <a:solidFill>
-            <a:srgbClr val="2A9D8F"/>
-          </a:solidFill>
-          <a:ln/>
-        </p:spPr>
-      </p:sp>
-      <p:sp>
-        <p:nvSpPr>
-          <p:cNvPr id="8" name="Text 6"/>
-          <p:cNvSpPr/>
-          <p:nvPr/>
-        </p:nvSpPr>
-        <p:spPr>
-          <a:xfrm>
-            <a:off x="777240" y="1234440"/>
-            <a:ext cx="2194560" cy="457200"/>
+            <a:off x="548640" y="274320"/>
+            <a:ext cx="9144000" cy="640080"/>
           </a:xfrm>
           <a:prstGeom prst="rect">
             <a:avLst/>
@@ -4071,11 +3452,11 @@
           <a:bodyPr wrap="square" rtlCol="0" anchor="ctr"/>
           <a:lstStyle/>
           <a:p>
-            <a:pPr algn="ctr" indent="0" marL="0">
+            <a:pPr indent="0" marL="0">
               <a:buNone/>
             </a:pPr>
             <a:r>
-              <a:rPr lang="en-US" sz="1400" b="1" dirty="0">
+              <a:rPr lang="en-US" sz="2400" b="1" dirty="0">
                 <a:solidFill>
                   <a:srgbClr val="1B2A4A"/>
                 </a:solidFill>
@@ -4083,22 +3464,42 @@
                 <a:ea typeface="Georgia" pitchFamily="34" charset="-122"/>
                 <a:cs typeface="Georgia" pitchFamily="34" charset="-120"/>
               </a:rPr>
-              <a:t>Fraction → Decimal</a:t>
+              <a:t>Converting — How To</a:t>
             </a:r>
-            <a:endParaRPr lang="en-US" sz="1400" dirty="0"/>
+            <a:endParaRPr lang="en-US" sz="2400" dirty="0"/>
           </a:p>
         </p:txBody>
       </p:sp>
       <p:sp>
         <p:nvSpPr>
-          <p:cNvPr id="9" name="Text 7"/>
+          <p:cNvPr id="4" name="Shape 2"/>
           <p:cNvSpPr/>
           <p:nvPr/>
         </p:nvSpPr>
         <p:spPr>
           <a:xfrm>
-            <a:off x="777240" y="1737360"/>
-            <a:ext cx="2194560" cy="2834640"/>
+            <a:off x="548640" y="960120"/>
+            <a:ext cx="2286000" cy="36576"/>
+          </a:xfrm>
+          <a:prstGeom prst="rect">
+            <a:avLst/>
+          </a:prstGeom>
+          <a:solidFill>
+            <a:srgbClr val="2A9D8F"/>
+          </a:solidFill>
+          <a:ln/>
+        </p:spPr>
+      </p:sp>
+      <p:sp>
+        <p:nvSpPr>
+          <p:cNvPr id="5" name="Text 3"/>
+          <p:cNvSpPr/>
+          <p:nvPr/>
+        </p:nvSpPr>
+        <p:spPr>
+          <a:xfrm>
+            <a:off x="548640" y="1188720"/>
+            <a:ext cx="10058400" cy="3474720"/>
           </a:xfrm>
           <a:prstGeom prst="rect">
             <a:avLst/>
@@ -4110,472 +3511,92 @@
           <a:bodyPr wrap="square" rtlCol="0" anchor="t"/>
           <a:lstStyle/>
           <a:p>
-            <a:pPr marL="342900" indent="-342900">
+            <a:pPr>
+              <a:lnSpc>
+                <a:spcPct val="150000"/>
+              </a:lnSpc>
               <a:spcAft>
-                <a:spcPts val="400"/>
+                <a:spcPts val="600"/>
               </a:spcAft>
-              <a:buSzPct val="100000"/>
-              <a:buChar char="•"/>
             </a:pPr>
             <a:r>
-              <a:rPr lang="en-US" sz="1100" dirty="0">
+              <a:rPr lang="en-US" sz="1500" dirty="0">
                 <a:solidFill>
-                  <a:srgbClr val="6B6660"/>
+                  <a:srgbClr val="3D3A36"/>
                 </a:solidFill>
-                <a:latin typeface="Calibri" pitchFamily="34" charset="0"/>
-                <a:ea typeface="Calibri" pitchFamily="34" charset="-122"/>
-                <a:cs typeface="Calibri" pitchFamily="34" charset="-120"/>
+                <a:latin typeface="Arial" pitchFamily="34" charset="0"/>
+                <a:ea typeface="Arial" pitchFamily="34" charset="-122"/>
+                <a:cs typeface="Arial" pitchFamily="34" charset="-120"/>
               </a:rPr>
-              <a:t>Divide numerator by denominator</a:t>
+              <a:t>Fraction → Decimal: divide top by bottom. ³⁄₈ = 3 ÷ 8 = 0.375.</a:t>
             </a:r>
-            <a:endParaRPr lang="en-US" sz="1100" dirty="0"/>
-          </a:p>
-          <a:p>
-            <a:pPr marL="342900" indent="-342900">
+            <a:endParaRPr lang="en-US" sz="1500" dirty="0"/>
+          </a:p>
+          <a:p>
+            <a:pPr>
+              <a:lnSpc>
+                <a:spcPct val="150000"/>
+              </a:lnSpc>
               <a:spcAft>
-                <a:spcPts val="400"/>
+                <a:spcPts val="600"/>
               </a:spcAft>
-              <a:buSzPct val="100000"/>
-              <a:buChar char="•"/>
             </a:pPr>
             <a:r>
-              <a:rPr lang="en-US" sz="1100" dirty="0">
+              <a:rPr lang="en-US" sz="1500" dirty="0">
                 <a:solidFill>
-                  <a:srgbClr val="6B6660"/>
+                  <a:srgbClr val="3D3A36"/>
                 </a:solidFill>
-                <a:latin typeface="Calibri" pitchFamily="34" charset="0"/>
-                <a:ea typeface="Calibri" pitchFamily="34" charset="-122"/>
-                <a:cs typeface="Calibri" pitchFamily="34" charset="-120"/>
+                <a:latin typeface="Arial" pitchFamily="34" charset="0"/>
+                <a:ea typeface="Arial" pitchFamily="34" charset="-122"/>
+                <a:cs typeface="Arial" pitchFamily="34" charset="-120"/>
               </a:rPr>
-              <a:t>¾ = 3 ÷ 4 = 0.75</a:t>
+              <a:t>Decimal → Percentage: multiply by 100. 0.375 × 100 = 37.5%.</a:t>
             </a:r>
-            <a:endParaRPr lang="en-US" sz="1100" dirty="0"/>
-          </a:p>
-          <a:p>
-            <a:pPr marL="342900" indent="-342900">
+            <a:endParaRPr lang="en-US" sz="1500" dirty="0"/>
+          </a:p>
+          <a:p>
+            <a:pPr>
+              <a:lnSpc>
+                <a:spcPct val="150000"/>
+              </a:lnSpc>
               <a:spcAft>
-                <a:spcPts val="400"/>
+                <a:spcPts val="600"/>
               </a:spcAft>
-              <a:buSzPct val="100000"/>
-              <a:buChar char="•"/>
             </a:pPr>
             <a:r>
-              <a:rPr lang="en-US" sz="1100" dirty="0">
+              <a:rPr lang="en-US" sz="1500" dirty="0">
                 <a:solidFill>
-                  <a:srgbClr val="6B6660"/>
+                  <a:srgbClr val="3D3A36"/>
                 </a:solidFill>
-                <a:latin typeface="Calibri" pitchFamily="34" charset="0"/>
-                <a:ea typeface="Calibri" pitchFamily="34" charset="-122"/>
-                <a:cs typeface="Calibri" pitchFamily="34" charset="-120"/>
+                <a:latin typeface="Arial" pitchFamily="34" charset="0"/>
+                <a:ea typeface="Arial" pitchFamily="34" charset="-122"/>
+                <a:cs typeface="Arial" pitchFamily="34" charset="-120"/>
               </a:rPr>
-              <a:t>Some give recurring decimals</a:t>
+              <a:t>Percentage → Decimal: divide by 100. 37.5% ÷ 100 = 0.375.</a:t>
             </a:r>
-            <a:endParaRPr lang="en-US" sz="1100" dirty="0"/>
-          </a:p>
-          <a:p>
-            <a:pPr marL="342900" indent="-342900">
+            <a:endParaRPr lang="en-US" sz="1500" dirty="0"/>
+          </a:p>
+          <a:p>
+            <a:pPr>
+              <a:lnSpc>
+                <a:spcPct val="150000"/>
+              </a:lnSpc>
               <a:spcAft>
-                <a:spcPts val="400"/>
+                <a:spcPts val="600"/>
               </a:spcAft>
-              <a:buSzPct val="100000"/>
-              <a:buChar char="•"/>
             </a:pPr>
             <a:r>
-              <a:rPr lang="en-US" sz="1100" dirty="0">
+              <a:rPr lang="en-US" sz="1500" dirty="0">
                 <a:solidFill>
-                  <a:srgbClr val="6B6660"/>
+                  <a:srgbClr val="3D3A36"/>
                 </a:solidFill>
-                <a:latin typeface="Calibri" pitchFamily="34" charset="0"/>
-                <a:ea typeface="Calibri" pitchFamily="34" charset="-122"/>
-                <a:cs typeface="Calibri" pitchFamily="34" charset="-120"/>
+                <a:latin typeface="Arial" pitchFamily="34" charset="0"/>
+                <a:ea typeface="Arial" pitchFamily="34" charset="-122"/>
+                <a:cs typeface="Arial" pitchFamily="34" charset="-120"/>
               </a:rPr>
-              <a:t>⅓ = 0.333...</a:t>
+              <a:t>Percentage → Fraction: put over 100, then simplify. 75% = ⁷⁵⁄₁₀₀ = ³⁄₄.</a:t>
             </a:r>
-            <a:endParaRPr lang="en-US" sz="1100" dirty="0"/>
-          </a:p>
-        </p:txBody>
-      </p:sp>
-      <p:sp>
-        <p:nvSpPr>
-          <p:cNvPr id="10" name="Shape 8"/>
-          <p:cNvSpPr/>
-          <p:nvPr/>
-        </p:nvSpPr>
-        <p:spPr>
-          <a:xfrm>
-            <a:off x="3246120" y="1051560"/>
-            <a:ext cx="2468880" cy="3657600"/>
-          </a:xfrm>
-          <a:prstGeom prst="rect">
-            <a:avLst/>
-          </a:prstGeom>
-          <a:solidFill>
-            <a:srgbClr val="FFFFFF"/>
-          </a:solidFill>
-          <a:ln/>
-          <a:effectLst>
-            <a:outerShdw sx="100000" sy="100000" kx="0" ky="0" algn="bl" rotWithShape="0" blurRad="50800" dist="25400" dir="8100000">
-              <a:srgbClr val="000000">
-                <a:alpha val="10000"/>
-              </a:srgbClr>
-            </a:outerShdw>
-          </a:effectLst>
-        </p:spPr>
-      </p:sp>
-      <p:sp>
-        <p:nvSpPr>
-          <p:cNvPr id="11" name="Shape 9"/>
-          <p:cNvSpPr/>
-          <p:nvPr/>
-        </p:nvSpPr>
-        <p:spPr>
-          <a:xfrm>
-            <a:off x="3246120" y="1051560"/>
-            <a:ext cx="2468880" cy="54864"/>
-          </a:xfrm>
-          <a:prstGeom prst="rect">
-            <a:avLst/>
-          </a:prstGeom>
-          <a:solidFill>
-            <a:srgbClr val="E9C46A"/>
-          </a:solidFill>
-          <a:ln/>
-        </p:spPr>
-      </p:sp>
-      <p:sp>
-        <p:nvSpPr>
-          <p:cNvPr id="12" name="Text 10"/>
-          <p:cNvSpPr/>
-          <p:nvPr/>
-        </p:nvSpPr>
-        <p:spPr>
-          <a:xfrm>
-            <a:off x="3383280" y="1234440"/>
-            <a:ext cx="2194560" cy="457200"/>
-          </a:xfrm>
-          <a:prstGeom prst="rect">
-            <a:avLst/>
-          </a:prstGeom>
-          <a:noFill/>
-          <a:ln/>
-        </p:spPr>
-        <p:txBody>
-          <a:bodyPr wrap="square" rtlCol="0" anchor="ctr"/>
-          <a:lstStyle/>
-          <a:p>
-            <a:pPr algn="ctr" indent="0" marL="0">
-              <a:buNone/>
-            </a:pPr>
-            <a:r>
-              <a:rPr lang="en-US" sz="1400" b="1" dirty="0">
-                <a:solidFill>
-                  <a:srgbClr val="1B2A4A"/>
-                </a:solidFill>
-                <a:latin typeface="Georgia" pitchFamily="34" charset="0"/>
-                <a:ea typeface="Georgia" pitchFamily="34" charset="-122"/>
-                <a:cs typeface="Georgia" pitchFamily="34" charset="-120"/>
-              </a:rPr>
-              <a:t>Decimal → Percentage</a:t>
-            </a:r>
-            <a:endParaRPr lang="en-US" sz="1400" dirty="0"/>
-          </a:p>
-        </p:txBody>
-      </p:sp>
-      <p:sp>
-        <p:nvSpPr>
-          <p:cNvPr id="13" name="Text 11"/>
-          <p:cNvSpPr/>
-          <p:nvPr/>
-        </p:nvSpPr>
-        <p:spPr>
-          <a:xfrm>
-            <a:off x="3383280" y="1737360"/>
-            <a:ext cx="2194560" cy="2834640"/>
-          </a:xfrm>
-          <a:prstGeom prst="rect">
-            <a:avLst/>
-          </a:prstGeom>
-          <a:noFill/>
-          <a:ln/>
-        </p:spPr>
-        <p:txBody>
-          <a:bodyPr wrap="square" rtlCol="0" anchor="t"/>
-          <a:lstStyle/>
-          <a:p>
-            <a:pPr marL="342900" indent="-342900">
-              <a:spcAft>
-                <a:spcPts val="400"/>
-              </a:spcAft>
-              <a:buSzPct val="100000"/>
-              <a:buChar char="•"/>
-            </a:pPr>
-            <a:r>
-              <a:rPr lang="en-US" sz="1100" dirty="0">
-                <a:solidFill>
-                  <a:srgbClr val="6B6660"/>
-                </a:solidFill>
-                <a:latin typeface="Calibri" pitchFamily="34" charset="0"/>
-                <a:ea typeface="Calibri" pitchFamily="34" charset="-122"/>
-                <a:cs typeface="Calibri" pitchFamily="34" charset="-120"/>
-              </a:rPr>
-              <a:t>Multiply by 100</a:t>
-            </a:r>
-            <a:endParaRPr lang="en-US" sz="1100" dirty="0"/>
-          </a:p>
-          <a:p>
-            <a:pPr marL="342900" indent="-342900">
-              <a:spcAft>
-                <a:spcPts val="400"/>
-              </a:spcAft>
-              <a:buSzPct val="100000"/>
-              <a:buChar char="•"/>
-            </a:pPr>
-            <a:r>
-              <a:rPr lang="en-US" sz="1100" dirty="0">
-                <a:solidFill>
-                  <a:srgbClr val="6B6660"/>
-                </a:solidFill>
-                <a:latin typeface="Calibri" pitchFamily="34" charset="0"/>
-                <a:ea typeface="Calibri" pitchFamily="34" charset="-122"/>
-                <a:cs typeface="Calibri" pitchFamily="34" charset="-120"/>
-              </a:rPr>
-              <a:t>0.75 × 100 = 75%</a:t>
-            </a:r>
-            <a:endParaRPr lang="en-US" sz="1100" dirty="0"/>
-          </a:p>
-          <a:p>
-            <a:pPr marL="342900" indent="-342900">
-              <a:spcAft>
-                <a:spcPts val="400"/>
-              </a:spcAft>
-              <a:buSzPct val="100000"/>
-              <a:buChar char="•"/>
-            </a:pPr>
-            <a:r>
-              <a:rPr lang="en-US" sz="1100" dirty="0">
-                <a:solidFill>
-                  <a:srgbClr val="6B6660"/>
-                </a:solidFill>
-                <a:latin typeface="Calibri" pitchFamily="34" charset="0"/>
-                <a:ea typeface="Calibri" pitchFamily="34" charset="-122"/>
-                <a:cs typeface="Calibri" pitchFamily="34" charset="-120"/>
-              </a:rPr>
-              <a:t>Just move decimal point 2 places right</a:t>
-            </a:r>
-            <a:endParaRPr lang="en-US" sz="1100" dirty="0"/>
-          </a:p>
-          <a:p>
-            <a:pPr marL="342900" indent="-342900">
-              <a:spcAft>
-                <a:spcPts val="400"/>
-              </a:spcAft>
-              <a:buSzPct val="100000"/>
-              <a:buChar char="•"/>
-            </a:pPr>
-            <a:r>
-              <a:rPr lang="en-US" sz="1100" dirty="0">
-                <a:solidFill>
-                  <a:srgbClr val="6B6660"/>
-                </a:solidFill>
-                <a:latin typeface="Calibri" pitchFamily="34" charset="0"/>
-                <a:ea typeface="Calibri" pitchFamily="34" charset="-122"/>
-                <a:cs typeface="Calibri" pitchFamily="34" charset="-120"/>
-              </a:rPr>
-              <a:t>0.05 = 5%</a:t>
-            </a:r>
-            <a:endParaRPr lang="en-US" sz="1100" dirty="0"/>
-          </a:p>
-        </p:txBody>
-      </p:sp>
-      <p:sp>
-        <p:nvSpPr>
-          <p:cNvPr id="14" name="Shape 12"/>
-          <p:cNvSpPr/>
-          <p:nvPr/>
-        </p:nvSpPr>
-        <p:spPr>
-          <a:xfrm>
-            <a:off x="5852160" y="1051560"/>
-            <a:ext cx="2468880" cy="3657600"/>
-          </a:xfrm>
-          <a:prstGeom prst="rect">
-            <a:avLst/>
-          </a:prstGeom>
-          <a:solidFill>
-            <a:srgbClr val="FFFFFF"/>
-          </a:solidFill>
-          <a:ln/>
-          <a:effectLst>
-            <a:outerShdw sx="100000" sy="100000" kx="0" ky="0" algn="bl" rotWithShape="0" blurRad="50800" dist="25400" dir="8100000">
-              <a:srgbClr val="000000">
-                <a:alpha val="10000"/>
-              </a:srgbClr>
-            </a:outerShdw>
-          </a:effectLst>
-        </p:spPr>
-      </p:sp>
-      <p:sp>
-        <p:nvSpPr>
-          <p:cNvPr id="15" name="Shape 13"/>
-          <p:cNvSpPr/>
-          <p:nvPr/>
-        </p:nvSpPr>
-        <p:spPr>
-          <a:xfrm>
-            <a:off x="5852160" y="1051560"/>
-            <a:ext cx="2468880" cy="54864"/>
-          </a:xfrm>
-          <a:prstGeom prst="rect">
-            <a:avLst/>
-          </a:prstGeom>
-          <a:solidFill>
-            <a:srgbClr val="9B9690"/>
-          </a:solidFill>
-          <a:ln/>
-        </p:spPr>
-      </p:sp>
-      <p:sp>
-        <p:nvSpPr>
-          <p:cNvPr id="16" name="Text 14"/>
-          <p:cNvSpPr/>
-          <p:nvPr/>
-        </p:nvSpPr>
-        <p:spPr>
-          <a:xfrm>
-            <a:off x="5989320" y="1234440"/>
-            <a:ext cx="2194560" cy="457200"/>
-          </a:xfrm>
-          <a:prstGeom prst="rect">
-            <a:avLst/>
-          </a:prstGeom>
-          <a:noFill/>
-          <a:ln/>
-        </p:spPr>
-        <p:txBody>
-          <a:bodyPr wrap="square" rtlCol="0" anchor="ctr"/>
-          <a:lstStyle/>
-          <a:p>
-            <a:pPr algn="ctr" indent="0" marL="0">
-              <a:buNone/>
-            </a:pPr>
-            <a:r>
-              <a:rPr lang="en-US" sz="1400" b="1" dirty="0">
-                <a:solidFill>
-                  <a:srgbClr val="1B2A4A"/>
-                </a:solidFill>
-                <a:latin typeface="Georgia" pitchFamily="34" charset="0"/>
-                <a:ea typeface="Georgia" pitchFamily="34" charset="-122"/>
-                <a:cs typeface="Georgia" pitchFamily="34" charset="-120"/>
-              </a:rPr>
-              <a:t>Percentage → Fraction</a:t>
-            </a:r>
-            <a:endParaRPr lang="en-US" sz="1400" dirty="0"/>
-          </a:p>
-        </p:txBody>
-      </p:sp>
-      <p:sp>
-        <p:nvSpPr>
-          <p:cNvPr id="17" name="Text 15"/>
-          <p:cNvSpPr/>
-          <p:nvPr/>
-        </p:nvSpPr>
-        <p:spPr>
-          <a:xfrm>
-            <a:off x="5989320" y="1737360"/>
-            <a:ext cx="2194560" cy="2834640"/>
-          </a:xfrm>
-          <a:prstGeom prst="rect">
-            <a:avLst/>
-          </a:prstGeom>
-          <a:noFill/>
-          <a:ln/>
-        </p:spPr>
-        <p:txBody>
-          <a:bodyPr wrap="square" rtlCol="0" anchor="t"/>
-          <a:lstStyle/>
-          <a:p>
-            <a:pPr marL="342900" indent="-342900">
-              <a:spcAft>
-                <a:spcPts val="400"/>
-              </a:spcAft>
-              <a:buSzPct val="100000"/>
-              <a:buChar char="•"/>
-            </a:pPr>
-            <a:r>
-              <a:rPr lang="en-US" sz="1100" dirty="0">
-                <a:solidFill>
-                  <a:srgbClr val="6B6660"/>
-                </a:solidFill>
-                <a:latin typeface="Calibri" pitchFamily="34" charset="0"/>
-                <a:ea typeface="Calibri" pitchFamily="34" charset="-122"/>
-                <a:cs typeface="Calibri" pitchFamily="34" charset="-120"/>
-              </a:rPr>
-              <a:t>Write over 100</a:t>
-            </a:r>
-            <a:endParaRPr lang="en-US" sz="1100" dirty="0"/>
-          </a:p>
-          <a:p>
-            <a:pPr marL="342900" indent="-342900">
-              <a:spcAft>
-                <a:spcPts val="400"/>
-              </a:spcAft>
-              <a:buSzPct val="100000"/>
-              <a:buChar char="•"/>
-            </a:pPr>
-            <a:r>
-              <a:rPr lang="en-US" sz="1100" dirty="0">
-                <a:solidFill>
-                  <a:srgbClr val="6B6660"/>
-                </a:solidFill>
-                <a:latin typeface="Calibri" pitchFamily="34" charset="0"/>
-                <a:ea typeface="Calibri" pitchFamily="34" charset="-122"/>
-                <a:cs typeface="Calibri" pitchFamily="34" charset="-120"/>
-              </a:rPr>
-              <a:t>75% = 75/100</a:t>
-            </a:r>
-            <a:endParaRPr lang="en-US" sz="1100" dirty="0"/>
-          </a:p>
-          <a:p>
-            <a:pPr marL="342900" indent="-342900">
-              <a:spcAft>
-                <a:spcPts val="400"/>
-              </a:spcAft>
-              <a:buSzPct val="100000"/>
-              <a:buChar char="•"/>
-            </a:pPr>
-            <a:r>
-              <a:rPr lang="en-US" sz="1100" dirty="0">
-                <a:solidFill>
-                  <a:srgbClr val="6B6660"/>
-                </a:solidFill>
-                <a:latin typeface="Calibri" pitchFamily="34" charset="0"/>
-                <a:ea typeface="Calibri" pitchFamily="34" charset="-122"/>
-                <a:cs typeface="Calibri" pitchFamily="34" charset="-120"/>
-              </a:rPr>
-              <a:t>Simplify: 75/100 = ¾</a:t>
-            </a:r>
-            <a:endParaRPr lang="en-US" sz="1100" dirty="0"/>
-          </a:p>
-          <a:p>
-            <a:pPr marL="342900" indent="-342900">
-              <a:spcAft>
-                <a:spcPts val="400"/>
-              </a:spcAft>
-              <a:buSzPct val="100000"/>
-              <a:buChar char="•"/>
-            </a:pPr>
-            <a:r>
-              <a:rPr lang="en-US" sz="1100" dirty="0">
-                <a:solidFill>
-                  <a:srgbClr val="6B6660"/>
-                </a:solidFill>
-                <a:latin typeface="Calibri" pitchFamily="34" charset="0"/>
-                <a:ea typeface="Calibri" pitchFamily="34" charset="-122"/>
-                <a:cs typeface="Calibri" pitchFamily="34" charset="-120"/>
-              </a:rPr>
-              <a:t>Always simplify!</a:t>
-            </a:r>
-            <a:endParaRPr lang="en-US" sz="1100" dirty="0"/>
+            <a:endParaRPr lang="en-US" sz="1500" dirty="0"/>
           </a:p>
         </p:txBody>
       </p:sp>
@@ -4620,47 +3641,7 @@
         <p:spPr>
           <a:xfrm>
             <a:off x="0" y="0"/>
-            <a:ext cx="9144000" cy="822960"/>
-          </a:xfrm>
-          <a:prstGeom prst="rect">
-            <a:avLst/>
-          </a:prstGeom>
-          <a:solidFill>
-            <a:srgbClr val="FFFFFF"/>
-          </a:solidFill>
-          <a:ln/>
-        </p:spPr>
-      </p:sp>
-      <p:sp>
-        <p:nvSpPr>
-          <p:cNvPr id="3" name="Shape 1"/>
-          <p:cNvSpPr/>
-          <p:nvPr/>
-        </p:nvSpPr>
-        <p:spPr>
-          <a:xfrm>
-            <a:off x="0" y="804672"/>
-            <a:ext cx="9144000" cy="27432"/>
-          </a:xfrm>
-          <a:prstGeom prst="rect">
-            <a:avLst/>
-          </a:prstGeom>
-          <a:solidFill>
-            <a:srgbClr val="E5E2DC"/>
-          </a:solidFill>
-          <a:ln/>
-        </p:spPr>
-      </p:sp>
-      <p:sp>
-        <p:nvSpPr>
-          <p:cNvPr id="4" name="Shape 2"/>
-          <p:cNvSpPr/>
-          <p:nvPr/>
-        </p:nvSpPr>
-        <p:spPr>
-          <a:xfrm>
-            <a:off x="548640" y="201168"/>
-            <a:ext cx="54864" cy="420624"/>
+            <a:ext cx="73152" cy="5148072"/>
           </a:xfrm>
           <a:prstGeom prst="rect">
             <a:avLst/>
@@ -4673,14 +3654,14 @@
       </p:sp>
       <p:sp>
         <p:nvSpPr>
-          <p:cNvPr id="5" name="Text 3"/>
+          <p:cNvPr id="3" name="Text 1"/>
           <p:cNvSpPr/>
           <p:nvPr/>
         </p:nvSpPr>
         <p:spPr>
           <a:xfrm>
-            <a:off x="777240" y="137160"/>
-            <a:ext cx="7772400" cy="548640"/>
+            <a:off x="548640" y="274320"/>
+            <a:ext cx="9144000" cy="640080"/>
           </a:xfrm>
           <a:prstGeom prst="rect">
             <a:avLst/>
@@ -4689,14 +3670,14 @@
           <a:ln/>
         </p:spPr>
         <p:txBody>
-          <a:bodyPr wrap="square" lIns="0" tIns="0" rIns="0" bIns="0" rtlCol="0" anchor="ctr"/>
+          <a:bodyPr wrap="square" rtlCol="0" anchor="ctr"/>
           <a:lstStyle/>
           <a:p>
             <a:pPr indent="0" marL="0">
               <a:buNone/>
             </a:pPr>
             <a:r>
-              <a:rPr lang="en-US" sz="2000" b="1" dirty="0">
+              <a:rPr lang="en-US" sz="2400" b="1" dirty="0">
                 <a:solidFill>
                   <a:srgbClr val="1B2A4A"/>
                 </a:solidFill>
@@ -4706,20 +3687,40 @@
               </a:rPr>
               <a:t>Finding Percentages of Amounts</a:t>
             </a:r>
-            <a:endParaRPr lang="en-US" sz="2000" dirty="0"/>
+            <a:endParaRPr lang="en-US" sz="2400" dirty="0"/>
           </a:p>
         </p:txBody>
       </p:sp>
       <p:sp>
         <p:nvSpPr>
-          <p:cNvPr id="6" name="Text 4"/>
+          <p:cNvPr id="4" name="Shape 2"/>
           <p:cNvSpPr/>
           <p:nvPr/>
         </p:nvSpPr>
         <p:spPr>
           <a:xfrm>
-            <a:off x="731520" y="1051560"/>
-            <a:ext cx="7680960" cy="3108960"/>
+            <a:off x="548640" y="960120"/>
+            <a:ext cx="2286000" cy="36576"/>
+          </a:xfrm>
+          <a:prstGeom prst="rect">
+            <a:avLst/>
+          </a:prstGeom>
+          <a:solidFill>
+            <a:srgbClr val="2A9D8F"/>
+          </a:solidFill>
+          <a:ln/>
+        </p:spPr>
+      </p:sp>
+      <p:sp>
+        <p:nvSpPr>
+          <p:cNvPr id="5" name="Text 3"/>
+          <p:cNvSpPr/>
+          <p:nvPr/>
+        </p:nvSpPr>
+        <p:spPr>
+          <a:xfrm>
+            <a:off x="548640" y="1188720"/>
+            <a:ext cx="10058400" cy="3474720"/>
           </a:xfrm>
           <a:prstGeom prst="rect">
             <a:avLst/>
@@ -4731,189 +3732,114 @@
           <a:bodyPr wrap="square" rtlCol="0" anchor="t"/>
           <a:lstStyle/>
           <a:p>
-            <a:pPr marL="342900" indent="-342900">
+            <a:pPr>
+              <a:lnSpc>
+                <a:spcPct val="150000"/>
+              </a:lnSpc>
               <a:spcAft>
-                <a:spcPts val="800"/>
+                <a:spcPts val="600"/>
               </a:spcAft>
-              <a:buSzPct val="100000"/>
-              <a:buChar char="•"/>
             </a:pPr>
             <a:r>
               <a:rPr lang="en-US" sz="1500" dirty="0">
                 <a:solidFill>
                   <a:srgbClr val="3D3A36"/>
                 </a:solidFill>
-                <a:latin typeface="Calibri" pitchFamily="34" charset="0"/>
-                <a:ea typeface="Calibri" pitchFamily="34" charset="-122"/>
-                <a:cs typeface="Calibri" pitchFamily="34" charset="-120"/>
+                <a:latin typeface="Arial" pitchFamily="34" charset="0"/>
+                <a:ea typeface="Arial" pitchFamily="34" charset="-122"/>
+                <a:cs typeface="Arial" pitchFamily="34" charset="-120"/>
               </a:rPr>
-              <a:t>10% = divide by 10. Example: 10% of 80 = 8.</a:t>
+              <a:t>10% = divide by 10. 10% of 60 = 6.</a:t>
             </a:r>
             <a:endParaRPr lang="en-US" sz="1500" dirty="0"/>
           </a:p>
           <a:p>
-            <a:pPr marL="342900" indent="-342900">
+            <a:pPr>
+              <a:lnSpc>
+                <a:spcPct val="150000"/>
+              </a:lnSpc>
               <a:spcAft>
-                <a:spcPts val="800"/>
+                <a:spcPts val="600"/>
               </a:spcAft>
-              <a:buSzPct val="100000"/>
-              <a:buChar char="•"/>
             </a:pPr>
             <a:r>
               <a:rPr lang="en-US" sz="1500" dirty="0">
                 <a:solidFill>
                   <a:srgbClr val="3D3A36"/>
                 </a:solidFill>
-                <a:latin typeface="Calibri" pitchFamily="34" charset="0"/>
-                <a:ea typeface="Calibri" pitchFamily="34" charset="-122"/>
-                <a:cs typeface="Calibri" pitchFamily="34" charset="-120"/>
+                <a:latin typeface="Arial" pitchFamily="34" charset="0"/>
+                <a:ea typeface="Arial" pitchFamily="34" charset="-122"/>
+                <a:cs typeface="Arial" pitchFamily="34" charset="-120"/>
               </a:rPr>
-              <a:t>5% = half of 10%. Example: 5% of 80 = 4.</a:t>
+              <a:t>5% = half of 10%. 5% of 60 = 3.</a:t>
             </a:r>
             <a:endParaRPr lang="en-US" sz="1500" dirty="0"/>
           </a:p>
           <a:p>
-            <a:pPr marL="342900" indent="-342900">
+            <a:pPr>
+              <a:lnSpc>
+                <a:spcPct val="150000"/>
+              </a:lnSpc>
               <a:spcAft>
-                <a:spcPts val="800"/>
+                <a:spcPts val="600"/>
               </a:spcAft>
-              <a:buSzPct val="100000"/>
-              <a:buChar char="•"/>
             </a:pPr>
             <a:r>
               <a:rPr lang="en-US" sz="1500" dirty="0">
                 <a:solidFill>
                   <a:srgbClr val="3D3A36"/>
                 </a:solidFill>
-                <a:latin typeface="Calibri" pitchFamily="34" charset="0"/>
-                <a:ea typeface="Calibri" pitchFamily="34" charset="-122"/>
-                <a:cs typeface="Calibri" pitchFamily="34" charset="-120"/>
+                <a:latin typeface="Arial" pitchFamily="34" charset="0"/>
+                <a:ea typeface="Arial" pitchFamily="34" charset="-122"/>
+                <a:cs typeface="Arial" pitchFamily="34" charset="-120"/>
               </a:rPr>
-              <a:t>1% = divide by 100. Example: 1% of 80 = 0.8.</a:t>
+              <a:t>1% = divide by 100. 1% of 60 = 0.6.</a:t>
             </a:r>
             <a:endParaRPr lang="en-US" sz="1500" dirty="0"/>
           </a:p>
           <a:p>
-            <a:pPr marL="342900" indent="-342900">
+            <a:pPr>
+              <a:lnSpc>
+                <a:spcPct val="150000"/>
+              </a:lnSpc>
               <a:spcAft>
-                <a:spcPts val="800"/>
+                <a:spcPts val="600"/>
               </a:spcAft>
-              <a:buSzPct val="100000"/>
-              <a:buChar char="•"/>
             </a:pPr>
             <a:r>
               <a:rPr lang="en-US" sz="1500" dirty="0">
                 <a:solidFill>
                   <a:srgbClr val="3D3A36"/>
                 </a:solidFill>
-                <a:latin typeface="Calibri" pitchFamily="34" charset="0"/>
-                <a:ea typeface="Calibri" pitchFamily="34" charset="-122"/>
-                <a:cs typeface="Calibri" pitchFamily="34" charset="-120"/>
+                <a:latin typeface="Arial" pitchFamily="34" charset="0"/>
+                <a:ea typeface="Arial" pitchFamily="34" charset="-122"/>
+                <a:cs typeface="Arial" pitchFamily="34" charset="-120"/>
               </a:rPr>
-              <a:t>Build up from these: 35% = 3 × 10% + 5% = 24 + 4 = 28.</a:t>
+              <a:t>Build up from these: 35% = 3 × 10% + 5% = 18 + 3 = 21.</a:t>
             </a:r>
             <a:endParaRPr lang="en-US" sz="1500" dirty="0"/>
           </a:p>
           <a:p>
-            <a:pPr marL="342900" indent="-342900">
+            <a:pPr>
+              <a:lnSpc>
+                <a:spcPct val="150000"/>
+              </a:lnSpc>
               <a:spcAft>
-                <a:spcPts val="800"/>
+                <a:spcPts val="600"/>
               </a:spcAft>
-              <a:buSzPct val="100000"/>
-              <a:buChar char="•"/>
             </a:pPr>
             <a:r>
               <a:rPr lang="en-US" sz="1500" dirty="0">
                 <a:solidFill>
                   <a:srgbClr val="3D3A36"/>
                 </a:solidFill>
-                <a:latin typeface="Calibri" pitchFamily="34" charset="0"/>
-                <a:ea typeface="Calibri" pitchFamily="34" charset="-122"/>
-                <a:cs typeface="Calibri" pitchFamily="34" charset="-120"/>
+                <a:latin typeface="Arial" pitchFamily="34" charset="0"/>
+                <a:ea typeface="Arial" pitchFamily="34" charset="-122"/>
+                <a:cs typeface="Arial" pitchFamily="34" charset="-120"/>
               </a:rPr>
-              <a:t>Or use: percentage ÷ 100 × amount. Example: 35% of 80 = 0.35 × 80 = 28.</a:t>
+              <a:t>Calculator method: 35% of 60 = 0.35 × 60 = 21.</a:t>
             </a:r>
             <a:endParaRPr lang="en-US" sz="1500" dirty="0"/>
-          </a:p>
-        </p:txBody>
-      </p:sp>
-      <p:sp>
-        <p:nvSpPr>
-          <p:cNvPr id="7" name="Shape 5"/>
-          <p:cNvSpPr/>
-          <p:nvPr/>
-        </p:nvSpPr>
-        <p:spPr>
-          <a:xfrm>
-            <a:off x="731520" y="4206240"/>
-            <a:ext cx="7680960" cy="640080"/>
-          </a:xfrm>
-          <a:prstGeom prst="rect">
-            <a:avLst/>
-          </a:prstGeom>
-          <a:solidFill>
-            <a:srgbClr val="E8F5F3"/>
-          </a:solidFill>
-          <a:ln/>
-          <a:effectLst>
-            <a:outerShdw sx="100000" sy="100000" kx="0" ky="0" algn="bl" rotWithShape="0" blurRad="50800" dist="25400" dir="8100000">
-              <a:srgbClr val="000000">
-                <a:alpha val="10000"/>
-              </a:srgbClr>
-            </a:outerShdw>
-          </a:effectLst>
-        </p:spPr>
-      </p:sp>
-      <p:sp>
-        <p:nvSpPr>
-          <p:cNvPr id="8" name="Text 6"/>
-          <p:cNvSpPr/>
-          <p:nvPr/>
-        </p:nvSpPr>
-        <p:spPr>
-          <a:xfrm>
-            <a:off x="914400" y="4251960"/>
-            <a:ext cx="7315200" cy="548640"/>
-          </a:xfrm>
-          <a:prstGeom prst="rect">
-            <a:avLst/>
-          </a:prstGeom>
-          <a:noFill/>
-          <a:ln/>
-        </p:spPr>
-        <p:txBody>
-          <a:bodyPr wrap="square" rtlCol="0" anchor="ctr"/>
-          <a:lstStyle/>
-          <a:p>
-            <a:pPr indent="0" marL="0">
-              <a:buNone/>
-            </a:pPr>
-            <a:r>
-              <a:rPr lang="en-US" sz="1200" b="1" dirty="0">
-                <a:solidFill>
-                  <a:srgbClr val="2A9D8F"/>
-                </a:solidFill>
-                <a:latin typeface="Calibri" pitchFamily="34" charset="0"/>
-                <a:ea typeface="Calibri" pitchFamily="34" charset="-122"/>
-                <a:cs typeface="Calibri" pitchFamily="34" charset="-120"/>
-              </a:rPr>
-              <a:t>Key Idea: </a:t>
-            </a:r>
-            <a:pPr indent="0" marL="0">
-              <a:buNone/>
-            </a:pPr>
-            <a:r>
-              <a:rPr lang="en-US" sz="1200" i="1" dirty="0">
-                <a:solidFill>
-                  <a:srgbClr val="3D3A36"/>
-                </a:solidFill>
-                <a:latin typeface="Calibri" pitchFamily="34" charset="0"/>
-                <a:ea typeface="Calibri" pitchFamily="34" charset="-122"/>
-                <a:cs typeface="Calibri" pitchFamily="34" charset="-120"/>
-              </a:rPr>
-              <a:t>The 10% method is great for mental maths — find 10%, then build up.</a:t>
-            </a:r>
-            <a:endParaRPr lang="en-US" sz="1200" dirty="0"/>
           </a:p>
         </p:txBody>
       </p:sp>
@@ -4958,47 +3884,7 @@
         <p:spPr>
           <a:xfrm>
             <a:off x="0" y="0"/>
-            <a:ext cx="9144000" cy="822960"/>
-          </a:xfrm>
-          <a:prstGeom prst="rect">
-            <a:avLst/>
-          </a:prstGeom>
-          <a:solidFill>
-            <a:srgbClr val="FFFFFF"/>
-          </a:solidFill>
-          <a:ln/>
-        </p:spPr>
-      </p:sp>
-      <p:sp>
-        <p:nvSpPr>
-          <p:cNvPr id="3" name="Shape 1"/>
-          <p:cNvSpPr/>
-          <p:nvPr/>
-        </p:nvSpPr>
-        <p:spPr>
-          <a:xfrm>
-            <a:off x="0" y="804672"/>
-            <a:ext cx="9144000" cy="27432"/>
-          </a:xfrm>
-          <a:prstGeom prst="rect">
-            <a:avLst/>
-          </a:prstGeom>
-          <a:solidFill>
-            <a:srgbClr val="E5E2DC"/>
-          </a:solidFill>
-          <a:ln/>
-        </p:spPr>
-      </p:sp>
-      <p:sp>
-        <p:nvSpPr>
-          <p:cNvPr id="4" name="Shape 2"/>
-          <p:cNvSpPr/>
-          <p:nvPr/>
-        </p:nvSpPr>
-        <p:spPr>
-          <a:xfrm>
-            <a:off x="548640" y="201168"/>
-            <a:ext cx="54864" cy="420624"/>
+            <a:ext cx="73152" cy="5148072"/>
           </a:xfrm>
           <a:prstGeom prst="rect">
             <a:avLst/>
@@ -5011,73 +3897,14 @@
       </p:sp>
       <p:sp>
         <p:nvSpPr>
-          <p:cNvPr id="5" name="Text 3"/>
+          <p:cNvPr id="3" name="Text 1"/>
           <p:cNvSpPr/>
           <p:nvPr/>
         </p:nvSpPr>
         <p:spPr>
           <a:xfrm>
-            <a:off x="777240" y="137160"/>
-            <a:ext cx="7772400" cy="548640"/>
-          </a:xfrm>
-          <a:prstGeom prst="rect">
-            <a:avLst/>
-          </a:prstGeom>
-          <a:noFill/>
-          <a:ln/>
-        </p:spPr>
-        <p:txBody>
-          <a:bodyPr wrap="square" lIns="0" tIns="0" rIns="0" bIns="0" rtlCol="0" anchor="ctr"/>
-          <a:lstStyle/>
-          <a:p>
-            <a:pPr indent="0" marL="0">
-              <a:buNone/>
-            </a:pPr>
-            <a:r>
-              <a:rPr lang="en-US" sz="2000" b="1" dirty="0">
-                <a:solidFill>
-                  <a:srgbClr val="1B2A4A"/>
-                </a:solidFill>
-                <a:latin typeface="Georgia" pitchFamily="34" charset="0"/>
-                <a:ea typeface="Georgia" pitchFamily="34" charset="-122"/>
-                <a:cs typeface="Georgia" pitchFamily="34" charset="-120"/>
-              </a:rPr>
-              <a:t>Check Your Understanding</a:t>
-            </a:r>
-            <a:endParaRPr lang="en-US" sz="2000" dirty="0"/>
-          </a:p>
-        </p:txBody>
-      </p:sp>
-      <p:sp>
-        <p:nvSpPr>
-          <p:cNvPr id="6" name="Shape 4"/>
-          <p:cNvSpPr/>
-          <p:nvPr/>
-        </p:nvSpPr>
-        <p:spPr>
-          <a:xfrm>
-            <a:off x="731520" y="1051560"/>
-            <a:ext cx="7680960" cy="438912"/>
-          </a:xfrm>
-          <a:prstGeom prst="rect">
-            <a:avLst/>
-          </a:prstGeom>
-          <a:solidFill>
-            <a:srgbClr val="FFFFFF"/>
-          </a:solidFill>
-          <a:ln/>
-        </p:spPr>
-      </p:sp>
-      <p:sp>
-        <p:nvSpPr>
-          <p:cNvPr id="7" name="Text 5"/>
-          <p:cNvSpPr/>
-          <p:nvPr/>
-        </p:nvSpPr>
-        <p:spPr>
-          <a:xfrm>
-            <a:off x="868680" y="1051560"/>
-            <a:ext cx="320040" cy="438912"/>
+            <a:off x="548640" y="274320"/>
+            <a:ext cx="9144000" cy="640080"/>
           </a:xfrm>
           <a:prstGeom prst="rect">
             <a:avLst/>
@@ -5093,27 +3920,50 @@
               <a:buNone/>
             </a:pPr>
             <a:r>
-              <a:rPr lang="en-US" sz="1400" dirty="0">
+              <a:rPr lang="en-US" sz="2400" b="1" dirty="0">
                 <a:solidFill>
-                  <a:srgbClr val="2A9D8F"/>
+                  <a:srgbClr val="1B2A4A"/>
                 </a:solidFill>
+                <a:latin typeface="Georgia" pitchFamily="34" charset="0"/>
+                <a:ea typeface="Georgia" pitchFamily="34" charset="-122"/>
+                <a:cs typeface="Georgia" pitchFamily="34" charset="-120"/>
               </a:rPr>
-              <a:t>☐</a:t>
+              <a:t>Check Your Understanding</a:t>
             </a:r>
-            <a:endParaRPr lang="en-US" sz="1400" dirty="0"/>
+            <a:endParaRPr lang="en-US" sz="2400" dirty="0"/>
           </a:p>
         </p:txBody>
       </p:sp>
       <p:sp>
         <p:nvSpPr>
-          <p:cNvPr id="8" name="Text 6"/>
+          <p:cNvPr id="4" name="Shape 2"/>
           <p:cNvSpPr/>
           <p:nvPr/>
         </p:nvSpPr>
         <p:spPr>
           <a:xfrm>
-            <a:off x="1234440" y="1051560"/>
-            <a:ext cx="6949440" cy="438912"/>
+            <a:off x="548640" y="960120"/>
+            <a:ext cx="2286000" cy="36576"/>
+          </a:xfrm>
+          <a:prstGeom prst="rect">
+            <a:avLst/>
+          </a:prstGeom>
+          <a:solidFill>
+            <a:srgbClr val="2A9D8F"/>
+          </a:solidFill>
+          <a:ln/>
+        </p:spPr>
+      </p:sp>
+      <p:sp>
+        <p:nvSpPr>
+          <p:cNvPr id="5" name="Text 3"/>
+          <p:cNvSpPr/>
+          <p:nvPr/>
+        </p:nvSpPr>
+        <p:spPr>
+          <a:xfrm>
+            <a:off x="548640" y="1188720"/>
+            <a:ext cx="365760" cy="457200"/>
           </a:xfrm>
           <a:prstGeom prst="rect">
             <a:avLst/>
@@ -5129,50 +3979,30 @@
               <a:buNone/>
             </a:pPr>
             <a:r>
-              <a:rPr lang="en-US" sz="1300" dirty="0">
+              <a:rPr lang="en-US" sz="1600" dirty="0">
                 <a:solidFill>
-                  <a:srgbClr val="3D3A36"/>
+                  <a:srgbClr val="2A9D8F"/>
                 </a:solidFill>
-                <a:latin typeface="Calibri" pitchFamily="34" charset="0"/>
-                <a:ea typeface="Calibri" pitchFamily="34" charset="-122"/>
-                <a:cs typeface="Calibri" pitchFamily="34" charset="-120"/>
+                <a:latin typeface="Arial" pitchFamily="34" charset="0"/>
+                <a:ea typeface="Arial" pitchFamily="34" charset="-122"/>
+                <a:cs typeface="Arial" pitchFamily="34" charset="-120"/>
               </a:rPr>
-              <a:t>I can convert between fractions, decimals, and percentages</a:t>
+              <a:t>☐</a:t>
             </a:r>
-            <a:endParaRPr lang="en-US" sz="1300" dirty="0"/>
+            <a:endParaRPr lang="en-US" sz="1600" dirty="0"/>
           </a:p>
         </p:txBody>
       </p:sp>
       <p:sp>
         <p:nvSpPr>
-          <p:cNvPr id="9" name="Shape 7"/>
+          <p:cNvPr id="6" name="Text 4"/>
           <p:cNvSpPr/>
           <p:nvPr/>
         </p:nvSpPr>
         <p:spPr>
           <a:xfrm>
-            <a:off x="731520" y="1554480"/>
-            <a:ext cx="7680960" cy="438912"/>
-          </a:xfrm>
-          <a:prstGeom prst="rect">
-            <a:avLst/>
-          </a:prstGeom>
-          <a:solidFill>
-            <a:srgbClr val="F8F6F3"/>
-          </a:solidFill>
-          <a:ln/>
-        </p:spPr>
-      </p:sp>
-      <p:sp>
-        <p:nvSpPr>
-          <p:cNvPr id="10" name="Text 8"/>
-          <p:cNvSpPr/>
-          <p:nvPr/>
-        </p:nvSpPr>
-        <p:spPr>
-          <a:xfrm>
-            <a:off x="868680" y="1554480"/>
-            <a:ext cx="320040" cy="438912"/>
+            <a:off x="1005840" y="1188720"/>
+            <a:ext cx="9601200" cy="457200"/>
           </a:xfrm>
           <a:prstGeom prst="rect">
             <a:avLst/>
@@ -5185,15 +4015,21 @@
           <a:lstStyle/>
           <a:p>
             <a:pPr indent="0" marL="0">
+              <a:lnSpc>
+                <a:spcPct val="130000"/>
+              </a:lnSpc>
               <a:buNone/>
             </a:pPr>
             <a:r>
               <a:rPr lang="en-US" sz="1400" dirty="0">
                 <a:solidFill>
-                  <a:srgbClr val="2A9D8F"/>
+                  <a:srgbClr val="3D3A36"/>
                 </a:solidFill>
+                <a:latin typeface="Arial" pitchFamily="34" charset="0"/>
+                <a:ea typeface="Arial" pitchFamily="34" charset="-122"/>
+                <a:cs typeface="Arial" pitchFamily="34" charset="-120"/>
               </a:rPr>
-              <a:t>☐</a:t>
+              <a:t>I can convert between fractions, decimals, and percentages.</a:t>
             </a:r>
             <a:endParaRPr lang="en-US" sz="1400" dirty="0"/>
           </a:p>
@@ -5201,14 +4037,14 @@
       </p:sp>
       <p:sp>
         <p:nvSpPr>
-          <p:cNvPr id="11" name="Text 9"/>
+          <p:cNvPr id="7" name="Text 5"/>
           <p:cNvSpPr/>
           <p:nvPr/>
         </p:nvSpPr>
         <p:spPr>
           <a:xfrm>
-            <a:off x="1234440" y="1554480"/>
-            <a:ext cx="6949440" cy="438912"/>
+            <a:off x="548640" y="1783080"/>
+            <a:ext cx="365760" cy="457200"/>
           </a:xfrm>
           <a:prstGeom prst="rect">
             <a:avLst/>
@@ -5224,50 +4060,30 @@
               <a:buNone/>
             </a:pPr>
             <a:r>
-              <a:rPr lang="en-US" sz="1300" dirty="0">
+              <a:rPr lang="en-US" sz="1600" dirty="0">
                 <a:solidFill>
-                  <a:srgbClr val="3D3A36"/>
+                  <a:srgbClr val="2A9D8F"/>
                 </a:solidFill>
-                <a:latin typeface="Calibri" pitchFamily="34" charset="0"/>
-                <a:ea typeface="Calibri" pitchFamily="34" charset="-122"/>
-                <a:cs typeface="Calibri" pitchFamily="34" charset="-120"/>
+                <a:latin typeface="Arial" pitchFamily="34" charset="0"/>
+                <a:ea typeface="Arial" pitchFamily="34" charset="-122"/>
+                <a:cs typeface="Arial" pitchFamily="34" charset="-120"/>
               </a:rPr>
-              <a:t>I know the key FDP equivalents by heart</a:t>
+              <a:t>☐</a:t>
             </a:r>
-            <a:endParaRPr lang="en-US" sz="1300" dirty="0"/>
+            <a:endParaRPr lang="en-US" sz="1600" dirty="0"/>
           </a:p>
         </p:txBody>
       </p:sp>
       <p:sp>
         <p:nvSpPr>
-          <p:cNvPr id="12" name="Shape 10"/>
+          <p:cNvPr id="8" name="Text 6"/>
           <p:cNvSpPr/>
           <p:nvPr/>
         </p:nvSpPr>
         <p:spPr>
           <a:xfrm>
-            <a:off x="731520" y="2057400"/>
-            <a:ext cx="7680960" cy="438912"/>
-          </a:xfrm>
-          <a:prstGeom prst="rect">
-            <a:avLst/>
-          </a:prstGeom>
-          <a:solidFill>
-            <a:srgbClr val="FFFFFF"/>
-          </a:solidFill>
-          <a:ln/>
-        </p:spPr>
-      </p:sp>
-      <p:sp>
-        <p:nvSpPr>
-          <p:cNvPr id="13" name="Text 11"/>
-          <p:cNvSpPr/>
-          <p:nvPr/>
-        </p:nvSpPr>
-        <p:spPr>
-          <a:xfrm>
-            <a:off x="868680" y="2057400"/>
-            <a:ext cx="320040" cy="438912"/>
+            <a:off x="1005840" y="1783080"/>
+            <a:ext cx="9601200" cy="457200"/>
           </a:xfrm>
           <a:prstGeom prst="rect">
             <a:avLst/>
@@ -5280,15 +4096,21 @@
           <a:lstStyle/>
           <a:p>
             <a:pPr indent="0" marL="0">
+              <a:lnSpc>
+                <a:spcPct val="130000"/>
+              </a:lnSpc>
               <a:buNone/>
             </a:pPr>
             <a:r>
               <a:rPr lang="en-US" sz="1400" dirty="0">
                 <a:solidFill>
-                  <a:srgbClr val="2A9D8F"/>
+                  <a:srgbClr val="3D3A36"/>
                 </a:solidFill>
+                <a:latin typeface="Arial" pitchFamily="34" charset="0"/>
+                <a:ea typeface="Arial" pitchFamily="34" charset="-122"/>
+                <a:cs typeface="Arial" pitchFamily="34" charset="-120"/>
               </a:rPr>
-              <a:t>☐</a:t>
+              <a:t>I can calculate percentages of amounts using mental methods.</a:t>
             </a:r>
             <a:endParaRPr lang="en-US" sz="1400" dirty="0"/>
           </a:p>
@@ -5296,14 +4118,14 @@
       </p:sp>
       <p:sp>
         <p:nvSpPr>
-          <p:cNvPr id="14" name="Text 12"/>
+          <p:cNvPr id="9" name="Text 7"/>
           <p:cNvSpPr/>
           <p:nvPr/>
         </p:nvSpPr>
         <p:spPr>
           <a:xfrm>
-            <a:off x="1234440" y="2057400"/>
-            <a:ext cx="6949440" cy="438912"/>
+            <a:off x="548640" y="2377440"/>
+            <a:ext cx="365760" cy="457200"/>
           </a:xfrm>
           <a:prstGeom prst="rect">
             <a:avLst/>
@@ -5319,50 +4141,30 @@
               <a:buNone/>
             </a:pPr>
             <a:r>
-              <a:rPr lang="en-US" sz="1300" dirty="0">
+              <a:rPr lang="en-US" sz="1600" dirty="0">
                 <a:solidFill>
-                  <a:srgbClr val="3D3A36"/>
+                  <a:srgbClr val="2A9D8F"/>
                 </a:solidFill>
-                <a:latin typeface="Calibri" pitchFamily="34" charset="0"/>
-                <a:ea typeface="Calibri" pitchFamily="34" charset="-122"/>
-                <a:cs typeface="Calibri" pitchFamily="34" charset="-120"/>
+                <a:latin typeface="Arial" pitchFamily="34" charset="0"/>
+                <a:ea typeface="Arial" pitchFamily="34" charset="-122"/>
+                <a:cs typeface="Arial" pitchFamily="34" charset="-120"/>
               </a:rPr>
-              <a:t>I can find percentages of amounts (10% method)</a:t>
+              <a:t>☐</a:t>
             </a:r>
-            <a:endParaRPr lang="en-US" sz="1300" dirty="0"/>
+            <a:endParaRPr lang="en-US" sz="1600" dirty="0"/>
           </a:p>
         </p:txBody>
       </p:sp>
       <p:sp>
         <p:nvSpPr>
-          <p:cNvPr id="15" name="Shape 13"/>
+          <p:cNvPr id="10" name="Text 8"/>
           <p:cNvSpPr/>
           <p:nvPr/>
         </p:nvSpPr>
         <p:spPr>
           <a:xfrm>
-            <a:off x="731520" y="2560320"/>
-            <a:ext cx="7680960" cy="438912"/>
-          </a:xfrm>
-          <a:prstGeom prst="rect">
-            <a:avLst/>
-          </a:prstGeom>
-          <a:solidFill>
-            <a:srgbClr val="F8F6F3"/>
-          </a:solidFill>
-          <a:ln/>
-        </p:spPr>
-      </p:sp>
-      <p:sp>
-        <p:nvSpPr>
-          <p:cNvPr id="16" name="Text 14"/>
-          <p:cNvSpPr/>
-          <p:nvPr/>
-        </p:nvSpPr>
-        <p:spPr>
-          <a:xfrm>
-            <a:off x="868680" y="2560320"/>
-            <a:ext cx="320040" cy="438912"/>
+            <a:off x="1005840" y="2377440"/>
+            <a:ext cx="9601200" cy="457200"/>
           </a:xfrm>
           <a:prstGeom prst="rect">
             <a:avLst/>
@@ -5375,15 +4177,21 @@
           <a:lstStyle/>
           <a:p>
             <a:pPr indent="0" marL="0">
+              <a:lnSpc>
+                <a:spcPct val="130000"/>
+              </a:lnSpc>
               <a:buNone/>
             </a:pPr>
             <a:r>
               <a:rPr lang="en-US" sz="1400" dirty="0">
                 <a:solidFill>
-                  <a:srgbClr val="2A9D8F"/>
+                  <a:srgbClr val="3D3A36"/>
                 </a:solidFill>
+                <a:latin typeface="Arial" pitchFamily="34" charset="0"/>
+                <a:ea typeface="Arial" pitchFamily="34" charset="-122"/>
+                <a:cs typeface="Arial" pitchFamily="34" charset="-120"/>
               </a:rPr>
-              <a:t>☐</a:t>
+              <a:t>I can order fractions, decimals, and percentages on a number line.</a:t>
             </a:r>
             <a:endParaRPr lang="en-US" sz="1400" dirty="0"/>
           </a:p>
@@ -5391,14 +4199,14 @@
       </p:sp>
       <p:sp>
         <p:nvSpPr>
-          <p:cNvPr id="17" name="Text 15"/>
+          <p:cNvPr id="11" name="Text 9"/>
           <p:cNvSpPr/>
           <p:nvPr/>
         </p:nvSpPr>
         <p:spPr>
           <a:xfrm>
-            <a:off x="1234440" y="2560320"/>
-            <a:ext cx="6949440" cy="438912"/>
+            <a:off x="548640" y="2971800"/>
+            <a:ext cx="365760" cy="457200"/>
           </a:xfrm>
           <a:prstGeom prst="rect">
             <a:avLst/>
@@ -5414,50 +4222,30 @@
               <a:buNone/>
             </a:pPr>
             <a:r>
-              <a:rPr lang="en-US" sz="1300" dirty="0">
+              <a:rPr lang="en-US" sz="1600" dirty="0">
                 <a:solidFill>
-                  <a:srgbClr val="3D3A36"/>
+                  <a:srgbClr val="2A9D8F"/>
                 </a:solidFill>
-                <a:latin typeface="Calibri" pitchFamily="34" charset="0"/>
-                <a:ea typeface="Calibri" pitchFamily="34" charset="-122"/>
-                <a:cs typeface="Calibri" pitchFamily="34" charset="-120"/>
+                <a:latin typeface="Arial" pitchFamily="34" charset="0"/>
+                <a:ea typeface="Arial" pitchFamily="34" charset="-122"/>
+                <a:cs typeface="Arial" pitchFamily="34" charset="-120"/>
               </a:rPr>
-              <a:t>I can order fractions, decimals, and percentages on a number line</a:t>
+              <a:t>☐</a:t>
             </a:r>
-            <a:endParaRPr lang="en-US" sz="1300" dirty="0"/>
+            <a:endParaRPr lang="en-US" sz="1600" dirty="0"/>
           </a:p>
         </p:txBody>
       </p:sp>
       <p:sp>
         <p:nvSpPr>
-          <p:cNvPr id="18" name="Shape 16"/>
+          <p:cNvPr id="12" name="Text 10"/>
           <p:cNvSpPr/>
           <p:nvPr/>
         </p:nvSpPr>
         <p:spPr>
           <a:xfrm>
-            <a:off x="731520" y="3063240"/>
-            <a:ext cx="7680960" cy="438912"/>
-          </a:xfrm>
-          <a:prstGeom prst="rect">
-            <a:avLst/>
-          </a:prstGeom>
-          <a:solidFill>
-            <a:srgbClr val="FFFFFF"/>
-          </a:solidFill>
-          <a:ln/>
-        </p:spPr>
-      </p:sp>
-      <p:sp>
-        <p:nvSpPr>
-          <p:cNvPr id="19" name="Text 17"/>
-          <p:cNvSpPr/>
-          <p:nvPr/>
-        </p:nvSpPr>
-        <p:spPr>
-          <a:xfrm>
-            <a:off x="868680" y="3063240"/>
-            <a:ext cx="320040" cy="438912"/>
+            <a:off x="1005840" y="2971800"/>
+            <a:ext cx="9601200" cy="457200"/>
           </a:xfrm>
           <a:prstGeom prst="rect">
             <a:avLst/>
@@ -5470,136 +4258,23 @@
           <a:lstStyle/>
           <a:p>
             <a:pPr indent="0" marL="0">
+              <a:lnSpc>
+                <a:spcPct val="130000"/>
+              </a:lnSpc>
               <a:buNone/>
             </a:pPr>
             <a:r>
               <a:rPr lang="en-US" sz="1400" dirty="0">
                 <a:solidFill>
-                  <a:srgbClr val="2A9D8F"/>
+                  <a:srgbClr val="3D3A36"/>
                 </a:solidFill>
+                <a:latin typeface="Arial" pitchFamily="34" charset="0"/>
+                <a:ea typeface="Arial" pitchFamily="34" charset="-122"/>
+                <a:cs typeface="Arial" pitchFamily="34" charset="-120"/>
               </a:rPr>
-              <a:t>☐</a:t>
+              <a:t>I know the common fraction-decimal-percentage equivalents.</a:t>
             </a:r>
             <a:endParaRPr lang="en-US" sz="1400" dirty="0"/>
-          </a:p>
-        </p:txBody>
-      </p:sp>
-      <p:sp>
-        <p:nvSpPr>
-          <p:cNvPr id="20" name="Text 18"/>
-          <p:cNvSpPr/>
-          <p:nvPr/>
-        </p:nvSpPr>
-        <p:spPr>
-          <a:xfrm>
-            <a:off x="1234440" y="3063240"/>
-            <a:ext cx="6949440" cy="438912"/>
-          </a:xfrm>
-          <a:prstGeom prst="rect">
-            <a:avLst/>
-          </a:prstGeom>
-          <a:noFill/>
-          <a:ln/>
-        </p:spPr>
-        <p:txBody>
-          <a:bodyPr wrap="square" rtlCol="0" anchor="ctr"/>
-          <a:lstStyle/>
-          <a:p>
-            <a:pPr indent="0" marL="0">
-              <a:buNone/>
-            </a:pPr>
-            <a:r>
-              <a:rPr lang="en-US" sz="1300" dirty="0">
-                <a:solidFill>
-                  <a:srgbClr val="3D3A36"/>
-                </a:solidFill>
-                <a:latin typeface="Calibri" pitchFamily="34" charset="0"/>
-                <a:ea typeface="Calibri" pitchFamily="34" charset="-122"/>
-                <a:cs typeface="Calibri" pitchFamily="34" charset="-120"/>
-              </a:rPr>
-              <a:t>I understand that FDP are just different ways of showing the same value</a:t>
-            </a:r>
-            <a:endParaRPr lang="en-US" sz="1300" dirty="0"/>
-          </a:p>
-        </p:txBody>
-      </p:sp>
-      <p:sp>
-        <p:nvSpPr>
-          <p:cNvPr id="21" name="Shape 19"/>
-          <p:cNvSpPr/>
-          <p:nvPr/>
-        </p:nvSpPr>
-        <p:spPr>
-          <a:xfrm>
-            <a:off x="731520" y="3749040"/>
-            <a:ext cx="7680960" cy="594360"/>
-          </a:xfrm>
-          <a:prstGeom prst="rect">
-            <a:avLst/>
-          </a:prstGeom>
-          <a:solidFill>
-            <a:srgbClr val="E8F5F3"/>
-          </a:solidFill>
-          <a:ln/>
-          <a:effectLst>
-            <a:outerShdw sx="100000" sy="100000" kx="0" ky="0" algn="bl" rotWithShape="0" blurRad="50800" dist="25400" dir="8100000">
-              <a:srgbClr val="000000">
-                <a:alpha val="10000"/>
-              </a:srgbClr>
-            </a:outerShdw>
-          </a:effectLst>
-        </p:spPr>
-      </p:sp>
-      <p:sp>
-        <p:nvSpPr>
-          <p:cNvPr id="22" name="Text 20"/>
-          <p:cNvSpPr/>
-          <p:nvPr/>
-        </p:nvSpPr>
-        <p:spPr>
-          <a:xfrm>
-            <a:off x="914400" y="3749040"/>
-            <a:ext cx="7315200" cy="594360"/>
-          </a:xfrm>
-          <a:prstGeom prst="rect">
-            <a:avLst/>
-          </a:prstGeom>
-          <a:noFill/>
-          <a:ln/>
-        </p:spPr>
-        <p:txBody>
-          <a:bodyPr wrap="square" rtlCol="0" anchor="ctr"/>
-          <a:lstStyle/>
-          <a:p>
-            <a:pPr indent="0" marL="0">
-              <a:buNone/>
-            </a:pPr>
-            <a:r>
-              <a:rPr lang="en-US" sz="1200" b="1" dirty="0">
-                <a:solidFill>
-                  <a:srgbClr val="2A9D8F"/>
-                </a:solidFill>
-                <a:latin typeface="Calibri" pitchFamily="34" charset="0"/>
-                <a:ea typeface="Calibri" pitchFamily="34" charset="-122"/>
-                <a:cs typeface="Calibri" pitchFamily="34" charset="-120"/>
-              </a:rPr>
-              <a:t>Key Idea: </a:t>
-            </a:r>
-            <a:pPr indent="0" marL="0">
-              <a:buNone/>
-            </a:pPr>
-            <a:r>
-              <a:rPr lang="en-US" sz="1200" i="1" dirty="0">
-                <a:solidFill>
-                  <a:srgbClr val="3D3A36"/>
-                </a:solidFill>
-                <a:latin typeface="Calibri" pitchFamily="34" charset="0"/>
-                <a:ea typeface="Calibri" pitchFamily="34" charset="-122"/>
-                <a:cs typeface="Calibri" pitchFamily="34" charset="-120"/>
-              </a:rPr>
-              <a:t>½ = 0.5 = 50% — three ways of writing the same thing.</a:t>
-            </a:r>
-            <a:endParaRPr lang="en-US" sz="1200" dirty="0"/>
           </a:p>
         </p:txBody>
       </p:sp>
@@ -5614,6 +4289,13 @@
 <file path=ppt/slides/slide7.xml><?xml version="1.0" encoding="utf-8"?>
 <p:sld xmlns:a="http://schemas.openxmlformats.org/drawingml/2006/main" xmlns:r="http://schemas.openxmlformats.org/officeDocument/2006/relationships" xmlns:p="http://schemas.openxmlformats.org/presentationml/2006/main">
   <p:cSld name="Slide 7">
+    <p:bg>
+      <p:bgPr>
+        <a:solidFill>
+          <a:srgbClr val="111D35"/>
+        </a:solidFill>
+      </p:bgPr>
+    </p:bg>
     <p:spTree>
       <p:nvGrpSpPr>
         <p:cNvPr id="1" name=""/>
@@ -5630,76 +4312,14 @@
       </p:grpSpPr>
       <p:sp>
         <p:nvSpPr>
-          <p:cNvPr id="2" name="Shape 0"/>
+          <p:cNvPr id="2" name="Text 0"/>
           <p:cNvSpPr/>
           <p:nvPr/>
         </p:nvSpPr>
         <p:spPr>
           <a:xfrm>
-            <a:off x="0" y="0"/>
-            <a:ext cx="9144000" cy="5143500"/>
-          </a:xfrm>
-          <a:prstGeom prst="rect">
-            <a:avLst/>
-          </a:prstGeom>
-          <a:solidFill>
-            <a:srgbClr val="1B2A4A"/>
-          </a:solidFill>
-          <a:ln/>
-        </p:spPr>
-      </p:sp>
-      <p:sp>
-        <p:nvSpPr>
-          <p:cNvPr id="3" name="Shape 1"/>
-          <p:cNvSpPr/>
-          <p:nvPr/>
-        </p:nvSpPr>
-        <p:spPr>
-          <a:xfrm>
-            <a:off x="0" y="4777740"/>
-            <a:ext cx="9144000" cy="365760"/>
-          </a:xfrm>
-          <a:prstGeom prst="rect">
-            <a:avLst/>
-          </a:prstGeom>
-          <a:solidFill>
-            <a:srgbClr val="2A9D8F"/>
-          </a:solidFill>
-          <a:ln/>
-        </p:spPr>
-      </p:sp>
-      <p:sp>
-        <p:nvSpPr>
-          <p:cNvPr id="4" name="Shape 2"/>
-          <p:cNvSpPr/>
-          <p:nvPr/>
-        </p:nvSpPr>
-        <p:spPr>
-          <a:xfrm>
-            <a:off x="-914400" y="-914400"/>
-            <a:ext cx="3657600" cy="3657600"/>
-          </a:xfrm>
-          <a:prstGeom prst="ellipse">
-            <a:avLst/>
-          </a:prstGeom>
-          <a:solidFill>
-            <a:srgbClr val="2A9D8F">
-              <a:alpha val="10000"/>
-            </a:srgbClr>
-          </a:solidFill>
-          <a:ln/>
-        </p:spPr>
-      </p:sp>
-      <p:sp>
-        <p:nvSpPr>
-          <p:cNvPr id="5" name="Text 3"/>
-          <p:cNvSpPr/>
-          <p:nvPr/>
-        </p:nvSpPr>
-        <p:spPr>
-          <a:xfrm>
-            <a:off x="731520" y="1463040"/>
-            <a:ext cx="7680960" cy="822960"/>
+            <a:off x="731520" y="1371600"/>
+            <a:ext cx="9144000" cy="914400"/>
           </a:xfrm>
           <a:prstGeom prst="rect">
             <a:avLst/>
@@ -5711,11 +4331,11 @@
           <a:bodyPr wrap="square" rtlCol="0" anchor="ctr"/>
           <a:lstStyle/>
           <a:p>
-            <a:pPr algn="ctr" indent="0" marL="0">
+            <a:pPr indent="0" marL="0">
               <a:buNone/>
             </a:pPr>
             <a:r>
-              <a:rPr lang="en-US" sz="3400" b="1" dirty="0">
+              <a:rPr lang="en-US" sz="3200" b="1" dirty="0">
                 <a:solidFill>
                   <a:srgbClr val="FFFFFF"/>
                 </a:solidFill>
@@ -5725,20 +4345,20 @@
               </a:rPr>
               <a:t>Review &amp; Practise</a:t>
             </a:r>
-            <a:endParaRPr lang="en-US" sz="3400" dirty="0"/>
+            <a:endParaRPr lang="en-US" sz="3200" dirty="0"/>
           </a:p>
         </p:txBody>
       </p:sp>
       <p:sp>
         <p:nvSpPr>
-          <p:cNvPr id="6" name="Text 4"/>
+          <p:cNvPr id="3" name="Text 1"/>
           <p:cNvSpPr/>
           <p:nvPr/>
         </p:nvSpPr>
         <p:spPr>
           <a:xfrm>
-            <a:off x="731520" y="2468880"/>
-            <a:ext cx="7680960" cy="457200"/>
+            <a:off x="731520" y="2377440"/>
+            <a:ext cx="7315200" cy="548640"/>
           </a:xfrm>
           <a:prstGeom prst="rect">
             <a:avLst/>
@@ -5750,34 +4370,36 @@
           <a:bodyPr wrap="square" rtlCol="0" anchor="ctr"/>
           <a:lstStyle/>
           <a:p>
-            <a:pPr algn="ctr" indent="0" marL="0">
+            <a:pPr indent="0" marL="0">
               <a:buNone/>
             </a:pPr>
             <a:r>
-              <a:rPr lang="en-US" sz="1800" dirty="0">
+              <a:rPr lang="en-US" sz="1500" dirty="0">
                 <a:solidFill>
-                  <a:srgbClr val="2A9D8F"/>
+                  <a:srgbClr val="FFFFFF">
+                    <a:alpha val="60000"/>
+                  </a:srgbClr>
                 </a:solidFill>
-                <a:latin typeface="Calibri" pitchFamily="34" charset="0"/>
-                <a:ea typeface="Calibri" pitchFamily="34" charset="-122"/>
-                <a:cs typeface="Calibri" pitchFamily="34" charset="-120"/>
+                <a:latin typeface="Arial" pitchFamily="34" charset="0"/>
+                <a:ea typeface="Arial" pitchFamily="34" charset="-122"/>
+                <a:cs typeface="Arial" pitchFamily="34" charset="-120"/>
               </a:rPr>
-              <a:t>mrzocchi.com</a:t>
+              <a:t>Use the Self-Quiz, Review Games, and Practice Builder to test yourself.</a:t>
             </a:r>
-            <a:endParaRPr lang="en-US" sz="1800" dirty="0"/>
+            <a:endParaRPr lang="en-US" sz="1500" dirty="0"/>
           </a:p>
         </p:txBody>
       </p:sp>
       <p:sp>
         <p:nvSpPr>
-          <p:cNvPr id="7" name="Text 5"/>
+          <p:cNvPr id="4" name="Text 2"/>
           <p:cNvSpPr/>
           <p:nvPr/>
         </p:nvSpPr>
         <p:spPr>
           <a:xfrm>
-            <a:off x="731520" y="3108960"/>
-            <a:ext cx="7680960" cy="457200"/>
+            <a:off x="731520" y="3291840"/>
+            <a:ext cx="3657600" cy="457200"/>
           </a:xfrm>
           <a:prstGeom prst="rect">
             <a:avLst/>
@@ -5789,21 +4411,21 @@
           <a:bodyPr wrap="square" rtlCol="0" anchor="ctr"/>
           <a:lstStyle/>
           <a:p>
-            <a:pPr algn="ctr" indent="0" marL="0">
+            <a:pPr indent="0" marL="0">
               <a:buNone/>
             </a:pPr>
             <a:r>
-              <a:rPr lang="en-US" sz="1300" dirty="0">
+              <a:rPr lang="en-US" sz="1800" b="1" dirty="0">
                 <a:solidFill>
-                  <a:srgbClr val="9B9690"/>
+                  <a:srgbClr val="E9C46A"/>
                 </a:solidFill>
-                <a:latin typeface="Calibri" pitchFamily="34" charset="0"/>
-                <a:ea typeface="Calibri" pitchFamily="34" charset="-122"/>
-                <a:cs typeface="Calibri" pitchFamily="34" charset="-120"/>
+                <a:latin typeface="Georgia" pitchFamily="34" charset="0"/>
+                <a:ea typeface="Georgia" pitchFamily="34" charset="-122"/>
+                <a:cs typeface="Georgia" pitchFamily="34" charset="-120"/>
               </a:rPr>
-              <a:t>Use the Self-Quiz, Review Games, and Practice Builder to test yourself.</a:t>
+              <a:t>mrzocchi.com</a:t>
             </a:r>
-            <a:endParaRPr lang="en-US" sz="1300" dirty="0"/>
+            <a:endParaRPr lang="en-US" sz="1800" dirty="0"/>
           </a:p>
         </p:txBody>
       </p:sp>
